--- a/Introduccion a la Ingenieria/Clases/Clase 16 - Socializacion y evaluacion final del curso/Presentacion.pptx
+++ b/Introduccion a la Ingenieria/Clases/Clase 16 - Socializacion y evaluacion final del curso/Presentacion.pptx
@@ -19,6 +19,15 @@
     <p:sldId id="267" r:id="rId18"/>
     <p:sldId id="268" r:id="rId19"/>
     <p:sldId id="269" r:id="rId20"/>
+    <p:sldId id="270" r:id="rId21"/>
+    <p:sldId id="271" r:id="rId22"/>
+    <p:sldId id="272" r:id="rId23"/>
+    <p:sldId id="273" r:id="rId24"/>
+    <p:sldId id="274" r:id="rId25"/>
+    <p:sldId id="275" r:id="rId26"/>
+    <p:sldId id="276" r:id="rId27"/>
+    <p:sldId id="277" r:id="rId28"/>
+    <p:sldId id="278" r:id="rId29"/>
   </p:sldIdLst>
   <p:sldSz cx="12191695" cy="6858000" type="screen4x3"/>
   <p:notesSz cx="6858000" cy="9144000"/>
@@ -4266,7 +4275,7 @@
         <p:spPr>
           <a:xfrm>
             <a:off x="0" y="0"/>
-            <a:ext cx="12191695" cy="1170432"/>
+            <a:ext cx="12191695" cy="960120"/>
           </a:xfrm>
           <a:prstGeom prst="rect">
             <a:avLst/>
@@ -4308,7 +4317,7 @@
         </p:nvSpPr>
         <p:spPr>
           <a:xfrm>
-            <a:off x="0" y="1170432"/>
+            <a:off x="0" y="960120"/>
             <a:ext cx="12191695" cy="41148"/>
           </a:xfrm>
           <a:prstGeom prst="rect">
@@ -4352,7 +4361,7 @@
         <p:spPr>
           <a:xfrm>
             <a:off x="457200" y="164592"/>
-            <a:ext cx="11277295" cy="384048"/>
+            <a:ext cx="11277295" cy="502920"/>
           </a:xfrm>
           <a:prstGeom prst="rect">
             <a:avLst/>
@@ -4372,7 +4381,7 @@
                 </a:solidFill>
                 <a:latin typeface="Calibri"/>
               </a:rPr>
-              <a:t>Taller de hoy: Informe final y autoevaluación</a:t>
+              <a:t>La pregunta de entrada: el pago de haber escrito en cada sesión</a:t>
             </a:r>
           </a:p>
         </p:txBody>
@@ -4385,8 +4394,8 @@
         </p:nvSpPr>
         <p:spPr>
           <a:xfrm>
-            <a:off x="457200" y="566928"/>
-            <a:ext cx="11277295" cy="411480"/>
+            <a:off x="457200" y="1170432"/>
+            <a:ext cx="11277295" cy="5230368"/>
           </a:xfrm>
           <a:prstGeom prst="rect">
             <a:avLst/>
@@ -4399,1013 +4408,31 @@
           </a:bodyPr>
           <a:lstStyle/>
           <a:p>
-            <a:r>
-              <a:rPr sz="1400" b="0" i="0">
-                <a:solidFill>
-                  <a:srgbClr val="B8D8EE"/>
-                </a:solidFill>
-                <a:latin typeface="Calibri"/>
-              </a:rPr>
-              <a:t>24 min en equipos · 24 min: pegar, verificar, repartir huecos, resumen y entregar · informe final en PDF + galería en el muro + autoevaluación y coevaluación</a:t>
-            </a:r>
-          </a:p>
-        </p:txBody>
-      </p:sp>
-      <p:sp>
-        <p:nvSpPr>
-          <p:cNvPr id="6" name="Rounded Rectangle 5"/>
-          <p:cNvSpPr/>
-          <p:nvPr/>
-        </p:nvSpPr>
-        <p:spPr>
-          <a:xfrm>
-            <a:off x="457200" y="1472184"/>
-            <a:ext cx="11277295" cy="566928"/>
-          </a:xfrm>
-          <a:prstGeom prst="roundRect">
-            <a:avLst>
-              <a:gd name="adj" fmla="val 12000"/>
-            </a:avLst>
-          </a:prstGeom>
-          <a:solidFill>
-            <a:srgbClr val="F2F2F2"/>
-          </a:solidFill>
-          <a:ln>
-            <a:noFill/>
-          </a:ln>
-        </p:spPr>
-        <p:style>
-          <a:lnRef idx="1">
-            <a:schemeClr val="accent1"/>
-          </a:lnRef>
-          <a:fillRef idx="3">
-            <a:schemeClr val="accent1"/>
-          </a:fillRef>
-          <a:effectRef idx="2">
-            <a:schemeClr val="accent1"/>
-          </a:effectRef>
-          <a:fontRef idx="minor">
-            <a:schemeClr val="lt1"/>
-          </a:fontRef>
-        </p:style>
-        <p:txBody>
-          <a:bodyPr rtlCol="0" anchor="ctr"/>
-          <a:lstStyle/>
-          <a:p>
-            <a:pPr algn="ctr"/>
-          </a:p>
-        </p:txBody>
-      </p:sp>
-      <p:sp>
-        <p:nvSpPr>
-          <p:cNvPr id="7" name="Rectangle 6"/>
-          <p:cNvSpPr/>
-          <p:nvPr/>
-        </p:nvSpPr>
-        <p:spPr>
-          <a:xfrm>
-            <a:off x="640080" y="1618487"/>
-            <a:ext cx="274320" cy="274320"/>
-          </a:xfrm>
-          <a:prstGeom prst="rect">
-            <a:avLst/>
-          </a:prstGeom>
-          <a:solidFill>
-            <a:srgbClr val="FFFFFF"/>
-          </a:solidFill>
-          <a:ln>
-            <a:solidFill>
-              <a:srgbClr val="333333"/>
-            </a:solidFill>
-          </a:ln>
-        </p:spPr>
-        <p:style>
-          <a:lnRef idx="1">
-            <a:schemeClr val="accent1"/>
-          </a:lnRef>
-          <a:fillRef idx="3">
-            <a:schemeClr val="accent1"/>
-          </a:fillRef>
-          <a:effectRef idx="2">
-            <a:schemeClr val="accent1"/>
-          </a:effectRef>
-          <a:fontRef idx="minor">
-            <a:schemeClr val="lt1"/>
-          </a:fontRef>
-        </p:style>
-        <p:txBody>
-          <a:bodyPr rtlCol="0" anchor="ctr"/>
-          <a:lstStyle/>
-          <a:p>
-            <a:pPr algn="ctr"/>
-          </a:p>
-        </p:txBody>
-      </p:sp>
-      <p:sp>
-        <p:nvSpPr>
-          <p:cNvPr id="8" name="Rectangle 7"/>
-          <p:cNvSpPr/>
-          <p:nvPr/>
-        </p:nvSpPr>
-        <p:spPr>
-          <a:xfrm>
-            <a:off x="640080" y="1618487"/>
-            <a:ext cx="73152" cy="274320"/>
-          </a:xfrm>
-          <a:prstGeom prst="rect">
-            <a:avLst/>
-          </a:prstGeom>
-          <a:solidFill>
-            <a:srgbClr val="269CCB"/>
-          </a:solidFill>
-          <a:ln>
-            <a:noFill/>
-          </a:ln>
-        </p:spPr>
-        <p:style>
-          <a:lnRef idx="1">
-            <a:schemeClr val="accent1"/>
-          </a:lnRef>
-          <a:fillRef idx="3">
-            <a:schemeClr val="accent1"/>
-          </a:fillRef>
-          <a:effectRef idx="2">
-            <a:schemeClr val="accent1"/>
-          </a:effectRef>
-          <a:fontRef idx="minor">
-            <a:schemeClr val="lt1"/>
-          </a:fontRef>
-        </p:style>
-        <p:txBody>
-          <a:bodyPr rtlCol="0" anchor="ctr"/>
-          <a:lstStyle/>
-          <a:p>
-            <a:pPr algn="ctr"/>
-          </a:p>
-        </p:txBody>
-      </p:sp>
-      <p:sp>
-        <p:nvSpPr>
-          <p:cNvPr id="9" name="TextBox 8"/>
-          <p:cNvSpPr txBox="1"/>
-          <p:nvPr/>
-        </p:nvSpPr>
-        <p:spPr>
-          <a:xfrm>
-            <a:off x="1097280" y="1563624"/>
-            <a:ext cx="10362895" cy="402336"/>
-          </a:xfrm>
-          <a:prstGeom prst="rect">
-            <a:avLst/>
-          </a:prstGeom>
-          <a:noFill/>
-        </p:spPr>
-        <p:txBody>
-          <a:bodyPr wrap="square" anchor="ctr"/>
-          <a:lstStyle/>
-          <a:p>
-            <a:r>
-              <a:rPr sz="1500" b="1" i="0">
-                <a:solidFill>
-                  <a:srgbClr val="333333"/>
-                </a:solidFill>
-                <a:latin typeface="Calibri"/>
-              </a:rPr>
-              <a:t>LA LISTA DE VERIFICACIÓN DEL INFORME</a:t>
-            </a:r>
-            <a:r>
-              <a:rPr sz="1500" b="0" i="0">
-                <a:solidFill>
-                  <a:srgbClr val="333333"/>
-                </a:solidFill>
-                <a:latin typeface="Calibri"/>
-              </a:rPr>
-              <a:t> — Las </a:t>
-            </a:r>
-            <a:r>
-              <a:rPr sz="1500" b="1" i="0">
-                <a:solidFill>
-                  <a:srgbClr val="333333"/>
-                </a:solidFill>
-                <a:latin typeface="Calibri"/>
-              </a:rPr>
-              <a:t>doce secciones</a:t>
-            </a:r>
-            <a:r>
-              <a:rPr sz="1500" b="0" i="0">
-                <a:solidFill>
-                  <a:srgbClr val="333333"/>
-                </a:solidFill>
-                <a:latin typeface="Calibri"/>
-              </a:rPr>
-              <a:t> en un solo documento, cada una con lo que ya estaba escrito desde su sesión, y con el largo de la tabla.</a:t>
-            </a:r>
-          </a:p>
-        </p:txBody>
-      </p:sp>
-      <p:sp>
-        <p:nvSpPr>
-          <p:cNvPr id="10" name="Rounded Rectangle 9"/>
-          <p:cNvSpPr/>
-          <p:nvPr/>
-        </p:nvSpPr>
-        <p:spPr>
-          <a:xfrm>
-            <a:off x="457200" y="2148839"/>
-            <a:ext cx="11277295" cy="566928"/>
-          </a:xfrm>
-          <a:prstGeom prst="roundRect">
-            <a:avLst>
-              <a:gd name="adj" fmla="val 12000"/>
-            </a:avLst>
-          </a:prstGeom>
-          <a:solidFill>
-            <a:srgbClr val="F2F2F2"/>
-          </a:solidFill>
-          <a:ln>
-            <a:noFill/>
-          </a:ln>
-        </p:spPr>
-        <p:style>
-          <a:lnRef idx="1">
-            <a:schemeClr val="accent1"/>
-          </a:lnRef>
-          <a:fillRef idx="3">
-            <a:schemeClr val="accent1"/>
-          </a:fillRef>
-          <a:effectRef idx="2">
-            <a:schemeClr val="accent1"/>
-          </a:effectRef>
-          <a:fontRef idx="minor">
-            <a:schemeClr val="lt1"/>
-          </a:fontRef>
-        </p:style>
-        <p:txBody>
-          <a:bodyPr rtlCol="0" anchor="ctr"/>
-          <a:lstStyle/>
-          <a:p>
-            <a:pPr algn="ctr"/>
-          </a:p>
-        </p:txBody>
-      </p:sp>
-      <p:sp>
-        <p:nvSpPr>
-          <p:cNvPr id="11" name="Rectangle 10"/>
-          <p:cNvSpPr/>
-          <p:nvPr/>
-        </p:nvSpPr>
-        <p:spPr>
-          <a:xfrm>
-            <a:off x="640080" y="2295144"/>
-            <a:ext cx="274320" cy="274320"/>
-          </a:xfrm>
-          <a:prstGeom prst="rect">
-            <a:avLst/>
-          </a:prstGeom>
-          <a:solidFill>
-            <a:srgbClr val="FFFFFF"/>
-          </a:solidFill>
-          <a:ln>
-            <a:solidFill>
-              <a:srgbClr val="333333"/>
-            </a:solidFill>
-          </a:ln>
-        </p:spPr>
-        <p:style>
-          <a:lnRef idx="1">
-            <a:schemeClr val="accent1"/>
-          </a:lnRef>
-          <a:fillRef idx="3">
-            <a:schemeClr val="accent1"/>
-          </a:fillRef>
-          <a:effectRef idx="2">
-            <a:schemeClr val="accent1"/>
-          </a:effectRef>
-          <a:fontRef idx="minor">
-            <a:schemeClr val="lt1"/>
-          </a:fontRef>
-        </p:style>
-        <p:txBody>
-          <a:bodyPr rtlCol="0" anchor="ctr"/>
-          <a:lstStyle/>
-          <a:p>
-            <a:pPr algn="ctr"/>
-          </a:p>
-        </p:txBody>
-      </p:sp>
-      <p:sp>
-        <p:nvSpPr>
-          <p:cNvPr id="12" name="Rectangle 11"/>
-          <p:cNvSpPr/>
-          <p:nvPr/>
-        </p:nvSpPr>
-        <p:spPr>
-          <a:xfrm>
-            <a:off x="640080" y="2295144"/>
-            <a:ext cx="73152" cy="274320"/>
-          </a:xfrm>
-          <a:prstGeom prst="rect">
-            <a:avLst/>
-          </a:prstGeom>
-          <a:solidFill>
-            <a:srgbClr val="269CCB"/>
-          </a:solidFill>
-          <a:ln>
-            <a:noFill/>
-          </a:ln>
-        </p:spPr>
-        <p:style>
-          <a:lnRef idx="1">
-            <a:schemeClr val="accent1"/>
-          </a:lnRef>
-          <a:fillRef idx="3">
-            <a:schemeClr val="accent1"/>
-          </a:fillRef>
-          <a:effectRef idx="2">
-            <a:schemeClr val="accent1"/>
-          </a:effectRef>
-          <a:fontRef idx="minor">
-            <a:schemeClr val="lt1"/>
-          </a:fontRef>
-        </p:style>
-        <p:txBody>
-          <a:bodyPr rtlCol="0" anchor="ctr"/>
-          <a:lstStyle/>
-          <a:p>
-            <a:pPr algn="ctr"/>
-          </a:p>
-        </p:txBody>
-      </p:sp>
-      <p:sp>
-        <p:nvSpPr>
-          <p:cNvPr id="13" name="TextBox 12"/>
-          <p:cNvSpPr txBox="1"/>
-          <p:nvPr/>
-        </p:nvSpPr>
-        <p:spPr>
-          <a:xfrm>
-            <a:off x="1097280" y="2240279"/>
-            <a:ext cx="10362895" cy="402336"/>
-          </a:xfrm>
-          <a:prstGeom prst="rect">
-            <a:avLst/>
-          </a:prstGeom>
-          <a:noFill/>
-        </p:spPr>
-        <p:txBody>
-          <a:bodyPr wrap="square" anchor="ctr"/>
-          <a:lstStyle/>
-          <a:p>
-            <a:r>
-              <a:rPr sz="1500" b="1" i="0">
-                <a:solidFill>
-                  <a:srgbClr val="333333"/>
-                </a:solidFill>
-                <a:latin typeface="Calibri"/>
-              </a:rPr>
-              <a:t>LO QUE FALTABA Y SE COMPLETÓ HOY</a:t>
-            </a:r>
-            <a:r>
-              <a:rPr sz="1500" b="0" i="0">
-                <a:solidFill>
-                  <a:srgbClr val="333333"/>
-                </a:solidFill>
-                <a:latin typeface="Calibri"/>
-              </a:rPr>
-              <a:t> — Los huecos que se marcaron en rojo, </a:t>
-            </a:r>
-            <a:r>
-              <a:rPr sz="1500" b="1" i="0">
-                <a:solidFill>
-                  <a:srgbClr val="333333"/>
-                </a:solidFill>
-                <a:latin typeface="Calibri"/>
-              </a:rPr>
-              <a:t>quién tomó cada uno</a:t>
-            </a:r>
-            <a:r>
-              <a:rPr sz="1500" b="0" i="0">
-                <a:solidFill>
-                  <a:srgbClr val="333333"/>
-                </a:solidFill>
-                <a:latin typeface="Calibri"/>
-              </a:rPr>
-              <a:t> y qué se escribió. Incluido el </a:t>
-            </a:r>
-            <a:r>
-              <a:rPr sz="1500" b="1" i="0">
-                <a:solidFill>
-                  <a:srgbClr val="333333"/>
-                </a:solidFill>
-                <a:latin typeface="Calibri"/>
-              </a:rPr>
-              <a:t>resumen</a:t>
-            </a:r>
-            <a:r>
-              <a:rPr sz="1500" b="0" i="0">
-                <a:solidFill>
-                  <a:srgbClr val="333333"/>
-                </a:solidFill>
-                <a:latin typeface="Calibri"/>
-              </a:rPr>
-              <a:t>, que es lo único nuevo.</a:t>
-            </a:r>
-          </a:p>
-        </p:txBody>
-      </p:sp>
-      <p:sp>
-        <p:nvSpPr>
-          <p:cNvPr id="14" name="Rounded Rectangle 13"/>
-          <p:cNvSpPr/>
-          <p:nvPr/>
-        </p:nvSpPr>
-        <p:spPr>
-          <a:xfrm>
-            <a:off x="457200" y="2825496"/>
-            <a:ext cx="11277295" cy="566928"/>
-          </a:xfrm>
-          <a:prstGeom prst="roundRect">
-            <a:avLst>
-              <a:gd name="adj" fmla="val 12000"/>
-            </a:avLst>
-          </a:prstGeom>
-          <a:solidFill>
-            <a:srgbClr val="F2F2F2"/>
-          </a:solidFill>
-          <a:ln>
-            <a:noFill/>
-          </a:ln>
-        </p:spPr>
-        <p:style>
-          <a:lnRef idx="1">
-            <a:schemeClr val="accent1"/>
-          </a:lnRef>
-          <a:fillRef idx="3">
-            <a:schemeClr val="accent1"/>
-          </a:fillRef>
-          <a:effectRef idx="2">
-            <a:schemeClr val="accent1"/>
-          </a:effectRef>
-          <a:fontRef idx="minor">
-            <a:schemeClr val="lt1"/>
-          </a:fontRef>
-        </p:style>
-        <p:txBody>
-          <a:bodyPr rtlCol="0" anchor="ctr"/>
-          <a:lstStyle/>
-          <a:p>
-            <a:pPr algn="ctr"/>
-          </a:p>
-        </p:txBody>
-      </p:sp>
-      <p:sp>
-        <p:nvSpPr>
-          <p:cNvPr id="15" name="Rectangle 14"/>
-          <p:cNvSpPr/>
-          <p:nvPr/>
-        </p:nvSpPr>
-        <p:spPr>
-          <a:xfrm>
-            <a:off x="640080" y="2971800"/>
-            <a:ext cx="274320" cy="274320"/>
-          </a:xfrm>
-          <a:prstGeom prst="rect">
-            <a:avLst/>
-          </a:prstGeom>
-          <a:solidFill>
-            <a:srgbClr val="FFFFFF"/>
-          </a:solidFill>
-          <a:ln>
-            <a:solidFill>
-              <a:srgbClr val="333333"/>
-            </a:solidFill>
-          </a:ln>
-        </p:spPr>
-        <p:style>
-          <a:lnRef idx="1">
-            <a:schemeClr val="accent1"/>
-          </a:lnRef>
-          <a:fillRef idx="3">
-            <a:schemeClr val="accent1"/>
-          </a:fillRef>
-          <a:effectRef idx="2">
-            <a:schemeClr val="accent1"/>
-          </a:effectRef>
-          <a:fontRef idx="minor">
-            <a:schemeClr val="lt1"/>
-          </a:fontRef>
-        </p:style>
-        <p:txBody>
-          <a:bodyPr rtlCol="0" anchor="ctr"/>
-          <a:lstStyle/>
-          <a:p>
-            <a:pPr algn="ctr"/>
-          </a:p>
-        </p:txBody>
-      </p:sp>
-      <p:sp>
-        <p:nvSpPr>
-          <p:cNvPr id="16" name="Rectangle 15"/>
-          <p:cNvSpPr/>
-          <p:nvPr/>
-        </p:nvSpPr>
-        <p:spPr>
-          <a:xfrm>
-            <a:off x="640080" y="2971800"/>
-            <a:ext cx="73152" cy="274320"/>
-          </a:xfrm>
-          <a:prstGeom prst="rect">
-            <a:avLst/>
-          </a:prstGeom>
-          <a:solidFill>
-            <a:srgbClr val="269CCB"/>
-          </a:solidFill>
-          <a:ln>
-            <a:noFill/>
-          </a:ln>
-        </p:spPr>
-        <p:style>
-          <a:lnRef idx="1">
-            <a:schemeClr val="accent1"/>
-          </a:lnRef>
-          <a:fillRef idx="3">
-            <a:schemeClr val="accent1"/>
-          </a:fillRef>
-          <a:effectRef idx="2">
-            <a:schemeClr val="accent1"/>
-          </a:effectRef>
-          <a:fontRef idx="minor">
-            <a:schemeClr val="lt1"/>
-          </a:fontRef>
-        </p:style>
-        <p:txBody>
-          <a:bodyPr rtlCol="0" anchor="ctr"/>
-          <a:lstStyle/>
-          <a:p>
-            <a:pPr algn="ctr"/>
-          </a:p>
-        </p:txBody>
-      </p:sp>
-      <p:sp>
-        <p:nvSpPr>
-          <p:cNvPr id="17" name="TextBox 16"/>
-          <p:cNvSpPr txBox="1"/>
-          <p:nvPr/>
-        </p:nvSpPr>
-        <p:spPr>
-          <a:xfrm>
-            <a:off x="1097280" y="2916936"/>
-            <a:ext cx="10362895" cy="402336"/>
-          </a:xfrm>
-          <a:prstGeom prst="rect">
-            <a:avLst/>
-          </a:prstGeom>
-          <a:noFill/>
-        </p:spPr>
-        <p:txBody>
-          <a:bodyPr wrap="square" anchor="ctr"/>
-          <a:lstStyle/>
-          <a:p>
-            <a:r>
-              <a:rPr sz="1500" b="1" i="0">
-                <a:solidFill>
-                  <a:srgbClr val="333333"/>
-                </a:solidFill>
-                <a:latin typeface="Calibri"/>
-              </a:rPr>
-              <a:t>LA DECLARACIÓN DEL USO DE IA</a:t>
-            </a:r>
-            <a:r>
-              <a:rPr sz="1500" b="0" i="0">
-                <a:solidFill>
-                  <a:srgbClr val="333333"/>
-                </a:solidFill>
-                <a:latin typeface="Calibri"/>
-              </a:rPr>
-              <a:t> — Qué se le pidió al asistente, </a:t>
-            </a:r>
-            <a:r>
-              <a:rPr sz="1500" b="1" i="0">
-                <a:solidFill>
-                  <a:srgbClr val="333333"/>
-                </a:solidFill>
-                <a:latin typeface="Calibri"/>
-              </a:rPr>
-              <a:t>qué se corrigió a mano</a:t>
-            </a:r>
-            <a:r>
-              <a:rPr sz="1500" b="0" i="0">
-                <a:solidFill>
-                  <a:srgbClr val="333333"/>
-                </a:solidFill>
-                <a:latin typeface="Calibri"/>
-              </a:rPr>
-              <a:t> y </a:t>
-            </a:r>
-            <a:r>
-              <a:rPr sz="1500" b="1" i="0">
-                <a:solidFill>
-                  <a:srgbClr val="333333"/>
-                </a:solidFill>
-                <a:latin typeface="Calibri"/>
-              </a:rPr>
-              <a:t>qué no se le entregó</a:t>
-            </a:r>
-            <a:r>
-              <a:rPr sz="1500" b="0" i="0">
-                <a:solidFill>
-                  <a:srgbClr val="333333"/>
-                </a:solidFill>
-                <a:latin typeface="Calibri"/>
-              </a:rPr>
-              <a:t>. Si no se usó, se dice que no se usó.</a:t>
-            </a:r>
-          </a:p>
-        </p:txBody>
-      </p:sp>
-      <p:sp>
-        <p:nvSpPr>
-          <p:cNvPr id="18" name="Rounded Rectangle 17"/>
-          <p:cNvSpPr/>
-          <p:nvPr/>
-        </p:nvSpPr>
-        <p:spPr>
-          <a:xfrm>
-            <a:off x="457200" y="3502152"/>
-            <a:ext cx="11277295" cy="566928"/>
-          </a:xfrm>
-          <a:prstGeom prst="roundRect">
-            <a:avLst>
-              <a:gd name="adj" fmla="val 12000"/>
-            </a:avLst>
-          </a:prstGeom>
-          <a:solidFill>
-            <a:srgbClr val="F2F2F2"/>
-          </a:solidFill>
-          <a:ln>
-            <a:noFill/>
-          </a:ln>
-        </p:spPr>
-        <p:style>
-          <a:lnRef idx="1">
-            <a:schemeClr val="accent1"/>
-          </a:lnRef>
-          <a:fillRef idx="3">
-            <a:schemeClr val="accent1"/>
-          </a:fillRef>
-          <a:effectRef idx="2">
-            <a:schemeClr val="accent1"/>
-          </a:effectRef>
-          <a:fontRef idx="minor">
-            <a:schemeClr val="lt1"/>
-          </a:fontRef>
-        </p:style>
-        <p:txBody>
-          <a:bodyPr rtlCol="0" anchor="ctr"/>
-          <a:lstStyle/>
-          <a:p>
-            <a:pPr algn="ctr"/>
-          </a:p>
-        </p:txBody>
-      </p:sp>
-      <p:sp>
-        <p:nvSpPr>
-          <p:cNvPr id="19" name="Rectangle 18"/>
-          <p:cNvSpPr/>
-          <p:nvPr/>
-        </p:nvSpPr>
-        <p:spPr>
-          <a:xfrm>
-            <a:off x="640080" y="3648456"/>
-            <a:ext cx="274320" cy="274320"/>
-          </a:xfrm>
-          <a:prstGeom prst="rect">
-            <a:avLst/>
-          </a:prstGeom>
-          <a:solidFill>
-            <a:srgbClr val="FFFFFF"/>
-          </a:solidFill>
-          <a:ln>
-            <a:solidFill>
-              <a:srgbClr val="333333"/>
-            </a:solidFill>
-          </a:ln>
-        </p:spPr>
-        <p:style>
-          <a:lnRef idx="1">
-            <a:schemeClr val="accent1"/>
-          </a:lnRef>
-          <a:fillRef idx="3">
-            <a:schemeClr val="accent1"/>
-          </a:fillRef>
-          <a:effectRef idx="2">
-            <a:schemeClr val="accent1"/>
-          </a:effectRef>
-          <a:fontRef idx="minor">
-            <a:schemeClr val="lt1"/>
-          </a:fontRef>
-        </p:style>
-        <p:txBody>
-          <a:bodyPr rtlCol="0" anchor="ctr"/>
-          <a:lstStyle/>
-          <a:p>
-            <a:pPr algn="ctr"/>
-          </a:p>
-        </p:txBody>
-      </p:sp>
-      <p:sp>
-        <p:nvSpPr>
-          <p:cNvPr id="20" name="Rectangle 19"/>
-          <p:cNvSpPr/>
-          <p:nvPr/>
-        </p:nvSpPr>
-        <p:spPr>
-          <a:xfrm>
-            <a:off x="640080" y="3648456"/>
-            <a:ext cx="73152" cy="274320"/>
-          </a:xfrm>
-          <a:prstGeom prst="rect">
-            <a:avLst/>
-          </a:prstGeom>
-          <a:solidFill>
-            <a:srgbClr val="269CCB"/>
-          </a:solidFill>
-          <a:ln>
-            <a:noFill/>
-          </a:ln>
-        </p:spPr>
-        <p:style>
-          <a:lnRef idx="1">
-            <a:schemeClr val="accent1"/>
-          </a:lnRef>
-          <a:fillRef idx="3">
-            <a:schemeClr val="accent1"/>
-          </a:fillRef>
-          <a:effectRef idx="2">
-            <a:schemeClr val="accent1"/>
-          </a:effectRef>
-          <a:fontRef idx="minor">
-            <a:schemeClr val="lt1"/>
-          </a:fontRef>
-        </p:style>
-        <p:txBody>
-          <a:bodyPr rtlCol="0" anchor="ctr"/>
-          <a:lstStyle/>
-          <a:p>
-            <a:pPr algn="ctr"/>
-          </a:p>
-        </p:txBody>
-      </p:sp>
-      <p:sp>
-        <p:nvSpPr>
-          <p:cNvPr id="21" name="TextBox 20"/>
-          <p:cNvSpPr txBox="1"/>
-          <p:nvPr/>
-        </p:nvSpPr>
-        <p:spPr>
-          <a:xfrm>
-            <a:off x="1097280" y="3593592"/>
-            <a:ext cx="10362895" cy="402336"/>
-          </a:xfrm>
-          <a:prstGeom prst="rect">
-            <a:avLst/>
-          </a:prstGeom>
-          <a:noFill/>
-        </p:spPr>
-        <p:txBody>
-          <a:bodyPr wrap="square" anchor="ctr"/>
-          <a:lstStyle/>
-          <a:p>
-            <a:r>
-              <a:rPr sz="1500" b="1" i="0">
-                <a:solidFill>
-                  <a:srgbClr val="333333"/>
-                </a:solidFill>
-                <a:latin typeface="Calibri"/>
-              </a:rPr>
-              <a:t>LA AUTOEVALUACIÓN INDIVIDUAL</a:t>
-            </a:r>
-            <a:r>
-              <a:rPr sz="1500" b="0" i="0">
-                <a:solidFill>
-                  <a:srgbClr val="333333"/>
-                </a:solidFill>
-                <a:latin typeface="Calibri"/>
-              </a:rPr>
-              <a:t> — Cuatro respuestas </a:t>
-            </a:r>
-            <a:r>
-              <a:rPr sz="1500" b="1" i="0">
-                <a:solidFill>
-                  <a:srgbClr val="333333"/>
-                </a:solidFill>
-                <a:latin typeface="Calibri"/>
-              </a:rPr>
-              <a:t>con evidencia</a:t>
-            </a:r>
-            <a:r>
-              <a:rPr sz="1500" b="0" i="0">
-                <a:solidFill>
-                  <a:srgbClr val="333333"/>
-                </a:solidFill>
-                <a:latin typeface="Calibri"/>
-              </a:rPr>
-              <a:t>: qué hice yo · qué aprendí a hacer que no sabía · en qué fallé · qué haría distinto. </a:t>
-            </a:r>
-            <a:r>
-              <a:rPr sz="1500" b="1" i="0">
-                <a:solidFill>
-                  <a:srgbClr val="333333"/>
-                </a:solidFill>
-                <a:latin typeface="Calibri"/>
-              </a:rPr>
-              <a:t>Solo para el docente.</a:t>
-            </a:r>
-          </a:p>
-        </p:txBody>
-      </p:sp>
-      <p:sp>
-        <p:nvSpPr>
-          <p:cNvPr id="22" name="Rounded Rectangle 21"/>
-          <p:cNvSpPr/>
-          <p:nvPr/>
-        </p:nvSpPr>
-        <p:spPr>
-          <a:xfrm>
-            <a:off x="457200" y="4178808"/>
-            <a:ext cx="11277295" cy="566928"/>
-          </a:xfrm>
-          <a:prstGeom prst="roundRect">
-            <a:avLst>
-              <a:gd name="adj" fmla="val 12000"/>
-            </a:avLst>
-          </a:prstGeom>
-          <a:solidFill>
-            <a:srgbClr val="F2F2F2"/>
-          </a:solidFill>
-          <a:ln>
-            <a:noFill/>
-          </a:ln>
-        </p:spPr>
-        <p:style>
-          <a:lnRef idx="1">
-            <a:schemeClr val="accent1"/>
-          </a:lnRef>
-          <a:fillRef idx="3">
-            <a:schemeClr val="accent1"/>
-          </a:fillRef>
-          <a:effectRef idx="2">
-            <a:schemeClr val="accent1"/>
-          </a:effectRef>
-          <a:fontRef idx="minor">
-            <a:schemeClr val="lt1"/>
-          </a:fontRef>
-        </p:style>
-        <p:txBody>
-          <a:bodyPr rtlCol="0" anchor="ctr"/>
-          <a:lstStyle/>
-          <a:p>
-            <a:pPr algn="ctr"/>
-          </a:p>
-        </p:txBody>
-      </p:sp>
-      <p:sp>
-        <p:nvSpPr>
-          <p:cNvPr id="23" name="Rectangle 22"/>
-          <p:cNvSpPr/>
-          <p:nvPr/>
-        </p:nvSpPr>
-        <p:spPr>
-          <a:xfrm>
-            <a:off x="640080" y="4325112"/>
-            <a:ext cx="274320" cy="274320"/>
-          </a:xfrm>
-          <a:prstGeom prst="rect">
-            <a:avLst/>
-          </a:prstGeom>
-          <a:solidFill>
-            <a:srgbClr val="FFFFFF"/>
-          </a:solidFill>
-          <a:ln>
-            <a:solidFill>
-              <a:srgbClr val="333333"/>
-            </a:solidFill>
-          </a:ln>
-        </p:spPr>
-        <p:style>
-          <a:lnRef idx="1">
-            <a:schemeClr val="accent1"/>
-          </a:lnRef>
-          <a:fillRef idx="3">
-            <a:schemeClr val="accent1"/>
-          </a:fillRef>
-          <a:effectRef idx="2">
-            <a:schemeClr val="accent1"/>
-          </a:effectRef>
-          <a:fontRef idx="minor">
-            <a:schemeClr val="lt1"/>
-          </a:fontRef>
-        </p:style>
-        <p:txBody>
-          <a:bodyPr rtlCol="0" anchor="ctr"/>
-          <a:lstStyle/>
-          <a:p>
-            <a:pPr algn="ctr"/>
-          </a:p>
-        </p:txBody>
-      </p:sp>
-      <p:sp>
-        <p:nvSpPr>
-          <p:cNvPr id="24" name="Rectangle 23"/>
-          <p:cNvSpPr/>
-          <p:nvPr/>
-        </p:nvSpPr>
-        <p:spPr>
-          <a:xfrm>
-            <a:off x="640080" y="4325112"/>
-            <a:ext cx="73152" cy="274320"/>
-          </a:xfrm>
-          <a:prstGeom prst="rect">
-            <a:avLst/>
-          </a:prstGeom>
-          <a:solidFill>
-            <a:srgbClr val="269CCB"/>
-          </a:solidFill>
-          <a:ln>
-            <a:noFill/>
-          </a:ln>
-        </p:spPr>
-        <p:style>
-          <a:lnRef idx="1">
-            <a:schemeClr val="accent1"/>
-          </a:lnRef>
-          <a:fillRef idx="3">
-            <a:schemeClr val="accent1"/>
-          </a:fillRef>
-          <a:effectRef idx="2">
-            <a:schemeClr val="accent1"/>
-          </a:effectRef>
-          <a:fontRef idx="minor">
-            <a:schemeClr val="lt1"/>
-          </a:fontRef>
-        </p:style>
-        <p:txBody>
-          <a:bodyPr rtlCol="0" anchor="ctr"/>
-          <a:lstStyle/>
-          <a:p>
-            <a:pPr algn="ctr"/>
-          </a:p>
-        </p:txBody>
-      </p:sp>
-      <p:sp>
-        <p:nvSpPr>
-          <p:cNvPr id="25" name="TextBox 24"/>
-          <p:cNvSpPr txBox="1"/>
-          <p:nvPr/>
-        </p:nvSpPr>
-        <p:spPr>
-          <a:xfrm>
-            <a:off x="1097280" y="4270248"/>
-            <a:ext cx="10362895" cy="402336"/>
-          </a:xfrm>
-          <a:prstGeom prst="rect">
-            <a:avLst/>
-          </a:prstGeom>
-          <a:noFill/>
-        </p:spPr>
-        <p:txBody>
-          <a:bodyPr wrap="square" anchor="ctr"/>
-          <a:lstStyle/>
-          <a:p>
-            <a:r>
-              <a:rPr sz="1500" b="1" i="0">
-                <a:solidFill>
-                  <a:srgbClr val="333333"/>
-                </a:solidFill>
-                <a:latin typeface="Calibri"/>
-              </a:rPr>
-              <a:t>LA COEVALUACIÓN DEL EQUIPO</a:t>
-            </a:r>
-            <a:r>
-              <a:rPr sz="1500" b="0" i="0">
-                <a:solidFill>
-                  <a:srgbClr val="333333"/>
-                </a:solidFill>
-                <a:latin typeface="Calibri"/>
-              </a:rPr>
-              <a:t> — Cumplimiento de acuerdos, aporte al proyecto y disposición para ayudar, con </a:t>
-            </a:r>
-            <a:r>
-              <a:rPr sz="1500" b="1" i="0">
-                <a:solidFill>
-                  <a:srgbClr val="333333"/>
-                </a:solidFill>
-                <a:latin typeface="Calibri"/>
-              </a:rPr>
-              <a:t>observaciones y no adjetivos</a:t>
-            </a:r>
-            <a:r>
-              <a:rPr sz="1500" b="0" i="0">
+            <a:pPr>
+              <a:spcAft>
+                <a:spcPts val="800"/>
+              </a:spcAft>
+            </a:pPr>
+            <a:r>
+              <a:rPr sz="2000" b="0" i="0">
+                <a:solidFill>
+                  <a:srgbClr val="333333"/>
+                </a:solidFill>
+                <a:latin typeface="Calibri"/>
+              </a:rPr>
+              <a:t>–   La apertura de la última sesión tiene una función precisa: </a:t>
+            </a:r>
+            <a:r>
+              <a:rPr sz="2000" b="1" i="0">
+                <a:solidFill>
+                  <a:srgbClr val="333333"/>
+                </a:solidFill>
+                <a:latin typeface="Calibri"/>
+              </a:rPr>
+              <a:t>quitar el pánico y hacer visible una lección de método</a:t>
+            </a:r>
+            <a:r>
+              <a:rPr sz="2000" b="0" i="0">
                 <a:solidFill>
                   <a:srgbClr val="333333"/>
                 </a:solidFill>
@@ -5414,11 +4441,181 @@
               <a:t>.</a:t>
             </a:r>
           </a:p>
-        </p:txBody>
-      </p:sp>
-      <p:sp>
-        <p:nvSpPr>
-          <p:cNvPr id="26" name="TextBox 25"/>
+          <a:p>
+            <a:pPr>
+              <a:spcAft>
+                <a:spcPts val="800"/>
+              </a:spcAft>
+            </a:pPr>
+            <a:r>
+              <a:rPr sz="2000" b="0" i="0">
+                <a:solidFill>
+                  <a:srgbClr val="333333"/>
+                </a:solidFill>
+                <a:latin typeface="Calibri"/>
+              </a:rPr>
+              <a:t>–   La pregunta —«el informe tiene doce secciones y vale el 20 %, ¿cuántas van a escribir hoy desde cero?»— produce respuestas de «ocho», «todas», y la respuesta real es </a:t>
+            </a:r>
+            <a:r>
+              <a:rPr sz="2000" b="1" i="0">
+                <a:solidFill>
+                  <a:srgbClr val="333333"/>
+                </a:solidFill>
+                <a:latin typeface="Calibri"/>
+              </a:rPr>
+              <a:t>una</a:t>
+            </a:r>
+            <a:r>
+              <a:rPr sz="2000" b="0" i="0">
+                <a:solidFill>
+                  <a:srgbClr val="333333"/>
+                </a:solidFill>
+                <a:latin typeface="Calibri"/>
+              </a:rPr>
+              <a:t>.</a:t>
+            </a:r>
+          </a:p>
+          <a:p>
+            <a:pPr>
+              <a:spcAft>
+                <a:spcPts val="800"/>
+              </a:spcAft>
+            </a:pPr>
+            <a:r>
+              <a:rPr sz="2000" b="0" i="0">
+                <a:solidFill>
+                  <a:srgbClr val="333333"/>
+                </a:solidFill>
+                <a:latin typeface="Calibri"/>
+              </a:rPr>
+              <a:t>–   Ningún equipo tuvo que escribir un informe: tuvieron que </a:t>
+            </a:r>
+            <a:r>
+              <a:rPr sz="2000" b="1" i="0">
+                <a:solidFill>
+                  <a:srgbClr val="333333"/>
+                </a:solidFill>
+                <a:latin typeface="Calibri"/>
+              </a:rPr>
+              <a:t>armarlo</a:t>
+            </a:r>
+            <a:r>
+              <a:rPr sz="2000" b="0" i="0">
+                <a:solidFill>
+                  <a:srgbClr val="333333"/>
+                </a:solidFill>
+                <a:latin typeface="Calibri"/>
+              </a:rPr>
+              <a:t>.</a:t>
+            </a:r>
+          </a:p>
+          <a:p>
+            <a:pPr>
+              <a:spcAft>
+                <a:spcPts val="800"/>
+              </a:spcAft>
+            </a:pPr>
+            <a:r>
+              <a:rPr sz="2000" b="0" i="0">
+                <a:solidFill>
+                  <a:srgbClr val="333333"/>
+                </a:solidFill>
+                <a:latin typeface="Calibri"/>
+              </a:rPr>
+              <a:t>–   Dígalo con el contraste explícito, porque es lo que se van a llevar a las otras asignaturas: </a:t>
+            </a:r>
+            <a:r>
+              <a:rPr sz="2000" b="1" i="0">
+                <a:solidFill>
+                  <a:srgbClr val="333333"/>
+                </a:solidFill>
+                <a:latin typeface="Calibri"/>
+              </a:rPr>
+              <a:t>la alternativa era llegar hoy con veinticuatro minutos y doce secciones en blanco.</a:t>
+            </a:r>
+            <a:r>
+              <a:rPr sz="2000" b="0" i="0">
+                <a:solidFill>
+                  <a:srgbClr val="333333"/>
+                </a:solidFill>
+                <a:latin typeface="Calibri"/>
+              </a:rPr>
+              <a:t> Es exactamente lo que le pasa a quien deja la documentación para el final, y no es un problema de tiempo sino de método.</a:t>
+            </a:r>
+          </a:p>
+          <a:p>
+            <a:pPr>
+              <a:spcAft>
+                <a:spcPts val="800"/>
+              </a:spcAft>
+            </a:pPr>
+            <a:r>
+              <a:rPr sz="2000" b="0" i="0">
+                <a:solidFill>
+                  <a:srgbClr val="333333"/>
+                </a:solidFill>
+                <a:latin typeface="Calibri"/>
+              </a:rPr>
+              <a:t>–   Después, en un minuto, diga qué se hace hoy y qué </a:t>
+            </a:r>
+            <a:r>
+              <a:rPr sz="2000" b="1" i="0">
+                <a:solidFill>
+                  <a:srgbClr val="333333"/>
+                </a:solidFill>
+                <a:latin typeface="Calibri"/>
+              </a:rPr>
+              <a:t>no</a:t>
+            </a:r>
+            <a:r>
+              <a:rPr sz="2000" b="0" i="0">
+                <a:solidFill>
+                  <a:srgbClr val="333333"/>
+                </a:solidFill>
+                <a:latin typeface="Calibri"/>
+              </a:rPr>
+              <a:t>: se arma y se entrega el informe, se socializa</a:t>
+            </a:r>
+          </a:p>
+          <a:p>
+            <a:pPr>
+              <a:spcAft>
+                <a:spcPts val="800"/>
+              </a:spcAft>
+            </a:pPr>
+            <a:r>
+              <a:rPr sz="2000" b="0" i="0">
+                <a:solidFill>
+                  <a:srgbClr val="333333"/>
+                </a:solidFill>
+                <a:latin typeface="Calibri"/>
+              </a:rPr>
+              <a:t>–   Se autoevalúan y se cierra el curso. </a:t>
+            </a:r>
+            <a:r>
+              <a:rPr sz="2000" b="1" i="0">
+                <a:solidFill>
+                  <a:srgbClr val="333333"/>
+                </a:solidFill>
+                <a:latin typeface="Calibri"/>
+              </a:rPr>
+              <a:t>No hay examen final escrito</a:t>
+            </a:r>
+            <a:r>
+              <a:rPr sz="2000" b="0" i="0">
+                <a:solidFill>
+                  <a:srgbClr val="333333"/>
+                </a:solidFill>
+                <a:latin typeface="Calibri"/>
+              </a:rPr>
+              <a:t> — conviene decirlo explícitamente porque la mitad del curso llega esperándolo, y saberlo cambia cómo usan los veinticuatro minutos del informe.</a:t>
+            </a:r>
+          </a:p>
+        </p:txBody>
+      </p:sp>
+      <p:sp>
+        <p:nvSpPr>
+          <p:cNvPr id="6" name="TextBox 5"/>
           <p:cNvSpPr txBox="1"/>
           <p:nvPr/>
         </p:nvSpPr>
@@ -5486,7 +4683,7 @@
         <p:spPr>
           <a:xfrm>
             <a:off x="0" y="0"/>
-            <a:ext cx="12191695" cy="1170432"/>
+            <a:ext cx="12191695" cy="960120"/>
           </a:xfrm>
           <a:prstGeom prst="rect">
             <a:avLst/>
@@ -5528,7 +4725,7 @@
         </p:nvSpPr>
         <p:spPr>
           <a:xfrm>
-            <a:off x="0" y="1170432"/>
+            <a:off x="0" y="960120"/>
             <a:ext cx="12191695" cy="41148"/>
           </a:xfrm>
           <a:prstGeom prst="rect">
@@ -5572,7 +4769,7 @@
         <p:spPr>
           <a:xfrm>
             <a:off x="457200" y="164592"/>
-            <a:ext cx="11277295" cy="384048"/>
+            <a:ext cx="11277295" cy="502920"/>
           </a:xfrm>
           <a:prstGeom prst="rect">
             <a:avLst/>
@@ -5592,7 +4789,7 @@
                 </a:solidFill>
                 <a:latin typeface="Calibri"/>
               </a:rPr>
-              <a:t>Cómo se expone en 3 minutos</a:t>
+              <a:t>Las doce secciones, y el orden correcto para armarlas (1/2)</a:t>
             </a:r>
           </a:p>
         </p:txBody>
@@ -5605,8 +4802,8 @@
         </p:nvSpPr>
         <p:spPr>
           <a:xfrm>
-            <a:off x="457200" y="566928"/>
-            <a:ext cx="11277295" cy="411480"/>
+            <a:off x="457200" y="1170432"/>
+            <a:ext cx="11277295" cy="5230368"/>
           </a:xfrm>
           <a:prstGeom prst="rect">
             <a:avLst/>
@@ -5619,705 +4816,196 @@
           </a:bodyPr>
           <a:lstStyle/>
           <a:p>
-            <a:r>
-              <a:rPr sz="1400" b="0" i="0">
-                <a:solidFill>
-                  <a:srgbClr val="B8D8EE"/>
-                </a:solidFill>
-                <a:latin typeface="Calibri"/>
-              </a:rPr>
-              <a:t>Habla el vocero con la pantalla ya compartida · cronómetro en pantalla · se corta al llegar a cero</a:t>
-            </a:r>
-          </a:p>
-        </p:txBody>
-      </p:sp>
-      <p:sp>
-        <p:nvSpPr>
-          <p:cNvPr id="6" name="Rounded Rectangle 5"/>
-          <p:cNvSpPr/>
-          <p:nvPr/>
-        </p:nvSpPr>
-        <p:spPr>
-          <a:xfrm>
-            <a:off x="457200" y="1659636"/>
-            <a:ext cx="11277295" cy="1051560"/>
-          </a:xfrm>
-          <a:prstGeom prst="roundRect">
-            <a:avLst>
-              <a:gd name="adj" fmla="val 12000"/>
-            </a:avLst>
-          </a:prstGeom>
-          <a:solidFill>
-            <a:srgbClr val="F2F2F2"/>
-          </a:solidFill>
-          <a:ln>
-            <a:noFill/>
-          </a:ln>
-        </p:spPr>
-        <p:style>
-          <a:lnRef idx="1">
-            <a:schemeClr val="accent1"/>
-          </a:lnRef>
-          <a:fillRef idx="3">
-            <a:schemeClr val="accent1"/>
-          </a:fillRef>
-          <a:effectRef idx="2">
-            <a:schemeClr val="accent1"/>
-          </a:effectRef>
-          <a:fontRef idx="minor">
-            <a:schemeClr val="lt1"/>
-          </a:fontRef>
-        </p:style>
-        <p:txBody>
-          <a:bodyPr rtlCol="0" anchor="ctr"/>
-          <a:lstStyle/>
-          <a:p>
-            <a:pPr algn="ctr"/>
-          </a:p>
-        </p:txBody>
-      </p:sp>
-      <p:sp>
-        <p:nvSpPr>
-          <p:cNvPr id="7" name="Rounded Rectangle 6"/>
-          <p:cNvSpPr/>
-          <p:nvPr/>
-        </p:nvSpPr>
-        <p:spPr>
-          <a:xfrm>
-            <a:off x="594360" y="1965960"/>
-            <a:ext cx="438912" cy="438912"/>
-          </a:xfrm>
-          <a:prstGeom prst="roundRect">
-            <a:avLst>
-              <a:gd name="adj" fmla="val 12000"/>
-            </a:avLst>
-          </a:prstGeom>
-          <a:solidFill>
-            <a:srgbClr val="095292"/>
-          </a:solidFill>
-          <a:ln>
-            <a:noFill/>
-          </a:ln>
-        </p:spPr>
-        <p:style>
-          <a:lnRef idx="1">
-            <a:schemeClr val="accent1"/>
-          </a:lnRef>
-          <a:fillRef idx="3">
-            <a:schemeClr val="accent1"/>
-          </a:fillRef>
-          <a:effectRef idx="2">
-            <a:schemeClr val="accent1"/>
-          </a:effectRef>
-          <a:fontRef idx="minor">
-            <a:schemeClr val="lt1"/>
-          </a:fontRef>
-        </p:style>
-        <p:txBody>
-          <a:bodyPr rtlCol="0" anchor="ctr"/>
-          <a:lstStyle/>
-          <a:p>
-            <a:pPr algn="ctr"/>
-          </a:p>
-        </p:txBody>
-      </p:sp>
-      <p:sp>
-        <p:nvSpPr>
-          <p:cNvPr id="8" name="TextBox 7"/>
-          <p:cNvSpPr txBox="1"/>
-          <p:nvPr/>
-        </p:nvSpPr>
-        <p:spPr>
-          <a:xfrm>
-            <a:off x="594360" y="1965960"/>
-            <a:ext cx="438912" cy="438912"/>
-          </a:xfrm>
-          <a:prstGeom prst="rect">
-            <a:avLst/>
-          </a:prstGeom>
-          <a:noFill/>
-        </p:spPr>
-        <p:txBody>
-          <a:bodyPr wrap="square" anchor="ctr"/>
-          <a:lstStyle/>
-          <a:p>
-            <a:pPr algn="ctr"/>
-            <a:r>
-              <a:rPr sz="1600" b="1" i="0">
-                <a:solidFill>
-                  <a:srgbClr val="FFFFFF"/>
-                </a:solidFill>
-                <a:latin typeface="Calibri"/>
-              </a:rPr>
-              <a:t>1</a:t>
-            </a:r>
-          </a:p>
-        </p:txBody>
-      </p:sp>
-      <p:sp>
-        <p:nvSpPr>
-          <p:cNvPr id="9" name="TextBox 8"/>
-          <p:cNvSpPr txBox="1"/>
-          <p:nvPr/>
-        </p:nvSpPr>
-        <p:spPr>
-          <a:xfrm>
-            <a:off x="1188720" y="1751076"/>
-            <a:ext cx="10271455" cy="886968"/>
-          </a:xfrm>
-          <a:prstGeom prst="rect">
-            <a:avLst/>
-          </a:prstGeom>
-          <a:noFill/>
-        </p:spPr>
-        <p:txBody>
-          <a:bodyPr wrap="square" anchor="ctr"/>
-          <a:lstStyle/>
-          <a:p>
-            <a:r>
-              <a:rPr sz="1500" b="1" i="0">
-                <a:solidFill>
-                  <a:srgbClr val="095292"/>
-                </a:solidFill>
-                <a:latin typeface="Calibri"/>
-              </a:rPr>
-              <a:t>Imagen 1</a:t>
-            </a:r>
-          </a:p>
-          <a:p>
             <a:pPr>
-              <a:spcBef>
-                <a:spcPts val="200"/>
-              </a:spcBef>
+              <a:spcAft>
+                <a:spcPts val="800"/>
+              </a:spcAft>
             </a:pPr>
             <a:r>
-              <a:rPr sz="1300" b="0" i="0">
-                <a:solidFill>
-                  <a:srgbClr val="333333"/>
-                </a:solidFill>
-                <a:latin typeface="Calibri"/>
-              </a:rPr>
-              <a:t>Una pantalla del prototipo funcionando.</a:t>
-            </a:r>
-          </a:p>
-        </p:txBody>
-      </p:sp>
-      <p:sp>
-        <p:nvSpPr>
-          <p:cNvPr id="10" name="Rounded Rectangle 9"/>
-          <p:cNvSpPr/>
-          <p:nvPr/>
-        </p:nvSpPr>
-        <p:spPr>
-          <a:xfrm>
-            <a:off x="457200" y="2802636"/>
-            <a:ext cx="11277295" cy="1051560"/>
-          </a:xfrm>
-          <a:prstGeom prst="roundRect">
-            <a:avLst>
-              <a:gd name="adj" fmla="val 12000"/>
-            </a:avLst>
-          </a:prstGeom>
-          <a:solidFill>
-            <a:srgbClr val="E8F4FA"/>
-          </a:solidFill>
-          <a:ln>
-            <a:noFill/>
-          </a:ln>
-        </p:spPr>
-        <p:style>
-          <a:lnRef idx="1">
-            <a:schemeClr val="accent1"/>
-          </a:lnRef>
-          <a:fillRef idx="3">
-            <a:schemeClr val="accent1"/>
-          </a:fillRef>
-          <a:effectRef idx="2">
-            <a:schemeClr val="accent1"/>
-          </a:effectRef>
-          <a:fontRef idx="minor">
-            <a:schemeClr val="lt1"/>
-          </a:fontRef>
-        </p:style>
-        <p:txBody>
-          <a:bodyPr rtlCol="0" anchor="ctr"/>
-          <a:lstStyle/>
-          <a:p>
-            <a:pPr algn="ctr"/>
-          </a:p>
-        </p:txBody>
-      </p:sp>
-      <p:sp>
-        <p:nvSpPr>
-          <p:cNvPr id="11" name="Rounded Rectangle 10"/>
-          <p:cNvSpPr/>
-          <p:nvPr/>
-        </p:nvSpPr>
-        <p:spPr>
-          <a:xfrm>
-            <a:off x="594360" y="3108960"/>
-            <a:ext cx="438912" cy="438912"/>
-          </a:xfrm>
-          <a:prstGeom prst="roundRect">
-            <a:avLst>
-              <a:gd name="adj" fmla="val 12000"/>
-            </a:avLst>
-          </a:prstGeom>
-          <a:solidFill>
-            <a:srgbClr val="095292"/>
-          </a:solidFill>
-          <a:ln>
-            <a:noFill/>
-          </a:ln>
-        </p:spPr>
-        <p:style>
-          <a:lnRef idx="1">
-            <a:schemeClr val="accent1"/>
-          </a:lnRef>
-          <a:fillRef idx="3">
-            <a:schemeClr val="accent1"/>
-          </a:fillRef>
-          <a:effectRef idx="2">
-            <a:schemeClr val="accent1"/>
-          </a:effectRef>
-          <a:fontRef idx="minor">
-            <a:schemeClr val="lt1"/>
-          </a:fontRef>
-        </p:style>
-        <p:txBody>
-          <a:bodyPr rtlCol="0" anchor="ctr"/>
-          <a:lstStyle/>
-          <a:p>
-            <a:pPr algn="ctr"/>
-          </a:p>
-        </p:txBody>
-      </p:sp>
-      <p:sp>
-        <p:nvSpPr>
-          <p:cNvPr id="12" name="TextBox 11"/>
-          <p:cNvSpPr txBox="1"/>
-          <p:nvPr/>
-        </p:nvSpPr>
-        <p:spPr>
-          <a:xfrm>
-            <a:off x="594360" y="3108960"/>
-            <a:ext cx="438912" cy="438912"/>
-          </a:xfrm>
-          <a:prstGeom prst="rect">
-            <a:avLst/>
-          </a:prstGeom>
-          <a:noFill/>
-        </p:spPr>
-        <p:txBody>
-          <a:bodyPr wrap="square" anchor="ctr"/>
-          <a:lstStyle/>
-          <a:p>
-            <a:pPr algn="ctr"/>
-            <a:r>
-              <a:rPr sz="1600" b="1" i="0">
-                <a:solidFill>
-                  <a:srgbClr val="FFFFFF"/>
-                </a:solidFill>
-                <a:latin typeface="Calibri"/>
-              </a:rPr>
-              <a:t>2</a:t>
-            </a:r>
-          </a:p>
-        </p:txBody>
-      </p:sp>
-      <p:sp>
-        <p:nvSpPr>
-          <p:cNvPr id="13" name="TextBox 12"/>
-          <p:cNvSpPr txBox="1"/>
-          <p:nvPr/>
-        </p:nvSpPr>
-        <p:spPr>
-          <a:xfrm>
-            <a:off x="1188720" y="2894076"/>
-            <a:ext cx="10271455" cy="886968"/>
-          </a:xfrm>
-          <a:prstGeom prst="rect">
-            <a:avLst/>
-          </a:prstGeom>
-          <a:noFill/>
-        </p:spPr>
-        <p:txBody>
-          <a:bodyPr wrap="square" anchor="ctr"/>
-          <a:lstStyle/>
-          <a:p>
-            <a:r>
-              <a:rPr sz="1500" b="1" i="0">
-                <a:solidFill>
-                  <a:srgbClr val="095292"/>
-                </a:solidFill>
-                <a:latin typeface="Calibri"/>
-              </a:rPr>
-              <a:t>Imagen 2</a:t>
+              <a:rPr sz="2000" b="0" i="0">
+                <a:solidFill>
+                  <a:srgbClr val="333333"/>
+                </a:solidFill>
+                <a:latin typeface="Calibri"/>
+              </a:rPr>
+              <a:t>–   Las dos tablas de secciones son el corazón de la sesión y hay que proyectarlas juntas</a:t>
             </a:r>
           </a:p>
           <a:p>
             <a:pPr>
-              <a:spcBef>
-                <a:spcPts val="200"/>
-              </a:spcBef>
+              <a:spcAft>
+                <a:spcPts val="800"/>
+              </a:spcAft>
             </a:pPr>
             <a:r>
-              <a:rPr sz="1300" b="0" i="0">
-                <a:solidFill>
-                  <a:srgbClr val="333333"/>
-                </a:solidFill>
-                <a:latin typeface="Calibri"/>
-              </a:rPr>
-              <a:t>La matriz de impacto, o la diapositiva del problema con su cifra.</a:t>
-            </a:r>
-          </a:p>
-        </p:txBody>
-      </p:sp>
-      <p:sp>
-        <p:nvSpPr>
-          <p:cNvPr id="14" name="Rounded Rectangle 13"/>
-          <p:cNvSpPr/>
-          <p:nvPr/>
-        </p:nvSpPr>
-        <p:spPr>
-          <a:xfrm>
-            <a:off x="457200" y="3945636"/>
-            <a:ext cx="11277295" cy="1051560"/>
-          </a:xfrm>
-          <a:prstGeom prst="roundRect">
-            <a:avLst>
-              <a:gd name="adj" fmla="val 12000"/>
-            </a:avLst>
-          </a:prstGeom>
-          <a:solidFill>
-            <a:srgbClr val="F2F2F2"/>
-          </a:solidFill>
-          <a:ln>
-            <a:noFill/>
-          </a:ln>
-        </p:spPr>
-        <p:style>
-          <a:lnRef idx="1">
-            <a:schemeClr val="accent1"/>
-          </a:lnRef>
-          <a:fillRef idx="3">
-            <a:schemeClr val="accent1"/>
-          </a:fillRef>
-          <a:effectRef idx="2">
-            <a:schemeClr val="accent1"/>
-          </a:effectRef>
-          <a:fontRef idx="minor">
-            <a:schemeClr val="lt1"/>
-          </a:fontRef>
-        </p:style>
-        <p:txBody>
-          <a:bodyPr rtlCol="0" anchor="ctr"/>
-          <a:lstStyle/>
-          <a:p>
-            <a:pPr algn="ctr"/>
-          </a:p>
-        </p:txBody>
-      </p:sp>
-      <p:sp>
-        <p:nvSpPr>
-          <p:cNvPr id="15" name="Rounded Rectangle 14"/>
-          <p:cNvSpPr/>
-          <p:nvPr/>
-        </p:nvSpPr>
-        <p:spPr>
-          <a:xfrm>
-            <a:off x="594360" y="4251960"/>
-            <a:ext cx="438912" cy="438912"/>
-          </a:xfrm>
-          <a:prstGeom prst="roundRect">
-            <a:avLst>
-              <a:gd name="adj" fmla="val 12000"/>
-            </a:avLst>
-          </a:prstGeom>
-          <a:solidFill>
-            <a:srgbClr val="095292"/>
-          </a:solidFill>
-          <a:ln>
-            <a:noFill/>
-          </a:ln>
-        </p:spPr>
-        <p:style>
-          <a:lnRef idx="1">
-            <a:schemeClr val="accent1"/>
-          </a:lnRef>
-          <a:fillRef idx="3">
-            <a:schemeClr val="accent1"/>
-          </a:fillRef>
-          <a:effectRef idx="2">
-            <a:schemeClr val="accent1"/>
-          </a:effectRef>
-          <a:fontRef idx="minor">
-            <a:schemeClr val="lt1"/>
-          </a:fontRef>
-        </p:style>
-        <p:txBody>
-          <a:bodyPr rtlCol="0" anchor="ctr"/>
-          <a:lstStyle/>
-          <a:p>
-            <a:pPr algn="ctr"/>
-          </a:p>
-        </p:txBody>
-      </p:sp>
-      <p:sp>
-        <p:nvSpPr>
-          <p:cNvPr id="16" name="TextBox 15"/>
-          <p:cNvSpPr txBox="1"/>
-          <p:nvPr/>
-        </p:nvSpPr>
-        <p:spPr>
-          <a:xfrm>
-            <a:off x="594360" y="4251960"/>
-            <a:ext cx="438912" cy="438912"/>
-          </a:xfrm>
-          <a:prstGeom prst="rect">
-            <a:avLst/>
-          </a:prstGeom>
-          <a:noFill/>
-        </p:spPr>
-        <p:txBody>
-          <a:bodyPr wrap="square" anchor="ctr"/>
-          <a:lstStyle/>
-          <a:p>
-            <a:pPr algn="ctr"/>
-            <a:r>
-              <a:rPr sz="1600" b="1" i="0">
-                <a:solidFill>
-                  <a:srgbClr val="FFFFFF"/>
-                </a:solidFill>
-                <a:latin typeface="Calibri"/>
-              </a:rPr>
-              <a:t>3</a:t>
-            </a:r>
-          </a:p>
-        </p:txBody>
-      </p:sp>
-      <p:sp>
-        <p:nvSpPr>
-          <p:cNvPr id="17" name="TextBox 16"/>
-          <p:cNvSpPr txBox="1"/>
-          <p:nvPr/>
-        </p:nvSpPr>
-        <p:spPr>
-          <a:xfrm>
-            <a:off x="1188720" y="4037076"/>
-            <a:ext cx="10271455" cy="886968"/>
-          </a:xfrm>
-          <a:prstGeom prst="rect">
-            <a:avLst/>
-          </a:prstGeom>
-          <a:noFill/>
-        </p:spPr>
-        <p:txBody>
-          <a:bodyPr wrap="square" anchor="ctr"/>
-          <a:lstStyle/>
-          <a:p>
-            <a:r>
-              <a:rPr sz="1500" b="1" i="0">
-                <a:solidFill>
-                  <a:srgbClr val="095292"/>
-                </a:solidFill>
-                <a:latin typeface="Calibri"/>
-              </a:rPr>
-              <a:t>Cinco líneas</a:t>
+              <a:rPr sz="2000" b="0" i="0">
+                <a:solidFill>
+                  <a:srgbClr val="333333"/>
+                </a:solidFill>
+                <a:latin typeface="Calibri"/>
+              </a:rPr>
+              <a:t>–   Porque el efecto está en la columna del medio: </a:t>
+            </a:r>
+            <a:r>
+              <a:rPr sz="2000" b="1" i="0">
+                <a:solidFill>
+                  <a:srgbClr val="333333"/>
+                </a:solidFill>
+                <a:latin typeface="Calibri"/>
+              </a:rPr>
+              <a:t>casi todas las filas dicen una sesión.</a:t>
+            </a:r>
+            <a:r>
+              <a:rPr sz="2000" b="0" i="0">
+                <a:solidFill>
+                  <a:srgbClr val="333333"/>
+                </a:solidFill>
+                <a:latin typeface="Calibri"/>
+              </a:rPr>
+              <a:t> No las lea completas —son doce filas y aburre—; señale tres o cuatro y deje que el curso vea el patrón.</a:t>
             </a:r>
           </a:p>
           <a:p>
             <a:pPr>
-              <a:spcBef>
-                <a:spcPts val="200"/>
-              </a:spcBef>
+              <a:spcAft>
+                <a:spcPts val="800"/>
+              </a:spcAft>
             </a:pPr>
             <a:r>
-              <a:rPr sz="1300" b="0" i="0">
-                <a:solidFill>
-                  <a:srgbClr val="333333"/>
-                </a:solidFill>
-                <a:latin typeface="Calibri"/>
-              </a:rPr>
-              <a:t>Problema · decisión · un hallazgo · un número de impacto · siguiente paso.</a:t>
-            </a:r>
-          </a:p>
-        </p:txBody>
-      </p:sp>
-      <p:sp>
-        <p:nvSpPr>
-          <p:cNvPr id="18" name="Rounded Rectangle 17"/>
-          <p:cNvSpPr/>
-          <p:nvPr/>
-        </p:nvSpPr>
-        <p:spPr>
-          <a:xfrm>
-            <a:off x="457200" y="5088636"/>
-            <a:ext cx="11277295" cy="1051560"/>
-          </a:xfrm>
-          <a:prstGeom prst="roundRect">
-            <a:avLst>
-              <a:gd name="adj" fmla="val 12000"/>
-            </a:avLst>
-          </a:prstGeom>
-          <a:solidFill>
-            <a:srgbClr val="E8F4FA"/>
-          </a:solidFill>
-          <a:ln>
-            <a:noFill/>
-          </a:ln>
-        </p:spPr>
-        <p:style>
-          <a:lnRef idx="1">
-            <a:schemeClr val="accent1"/>
-          </a:lnRef>
-          <a:fillRef idx="3">
-            <a:schemeClr val="accent1"/>
-          </a:fillRef>
-          <a:effectRef idx="2">
-            <a:schemeClr val="accent1"/>
-          </a:effectRef>
-          <a:fontRef idx="minor">
-            <a:schemeClr val="lt1"/>
-          </a:fontRef>
-        </p:style>
-        <p:txBody>
-          <a:bodyPr rtlCol="0" anchor="ctr"/>
-          <a:lstStyle/>
-          <a:p>
-            <a:pPr algn="ctr"/>
-          </a:p>
-        </p:txBody>
-      </p:sp>
-      <p:sp>
-        <p:nvSpPr>
-          <p:cNvPr id="19" name="Rounded Rectangle 18"/>
-          <p:cNvSpPr/>
-          <p:nvPr/>
-        </p:nvSpPr>
-        <p:spPr>
-          <a:xfrm>
-            <a:off x="594360" y="5394960"/>
-            <a:ext cx="438912" cy="438912"/>
-          </a:xfrm>
-          <a:prstGeom prst="roundRect">
-            <a:avLst>
-              <a:gd name="adj" fmla="val 12000"/>
-            </a:avLst>
-          </a:prstGeom>
-          <a:solidFill>
-            <a:srgbClr val="095292"/>
-          </a:solidFill>
-          <a:ln>
-            <a:noFill/>
-          </a:ln>
-        </p:spPr>
-        <p:style>
-          <a:lnRef idx="1">
-            <a:schemeClr val="accent1"/>
-          </a:lnRef>
-          <a:fillRef idx="3">
-            <a:schemeClr val="accent1"/>
-          </a:fillRef>
-          <a:effectRef idx="2">
-            <a:schemeClr val="accent1"/>
-          </a:effectRef>
-          <a:fontRef idx="minor">
-            <a:schemeClr val="lt1"/>
-          </a:fontRef>
-        </p:style>
-        <p:txBody>
-          <a:bodyPr rtlCol="0" anchor="ctr"/>
-          <a:lstStyle/>
-          <a:p>
-            <a:pPr algn="ctr"/>
-          </a:p>
-        </p:txBody>
-      </p:sp>
-      <p:sp>
-        <p:nvSpPr>
-          <p:cNvPr id="20" name="TextBox 19"/>
-          <p:cNvSpPr txBox="1"/>
-          <p:nvPr/>
-        </p:nvSpPr>
-        <p:spPr>
-          <a:xfrm>
-            <a:off x="594360" y="5394960"/>
-            <a:ext cx="438912" cy="438912"/>
-          </a:xfrm>
-          <a:prstGeom prst="rect">
-            <a:avLst/>
-          </a:prstGeom>
-          <a:noFill/>
-        </p:spPr>
-        <p:txBody>
-          <a:bodyPr wrap="square" anchor="ctr"/>
-          <a:lstStyle/>
-          <a:p>
-            <a:pPr algn="ctr"/>
-            <a:r>
-              <a:rPr sz="1600" b="1" i="0">
-                <a:solidFill>
-                  <a:srgbClr val="FFFFFF"/>
-                </a:solidFill>
-                <a:latin typeface="Calibri"/>
-              </a:rPr>
-              <a:t>4</a:t>
-            </a:r>
-          </a:p>
-        </p:txBody>
-      </p:sp>
-      <p:sp>
-        <p:nvSpPr>
-          <p:cNvPr id="21" name="TextBox 20"/>
-          <p:cNvSpPr txBox="1"/>
-          <p:nvPr/>
-        </p:nvSpPr>
-        <p:spPr>
-          <a:xfrm>
-            <a:off x="1188720" y="5180076"/>
-            <a:ext cx="10271455" cy="886968"/>
-          </a:xfrm>
-          <a:prstGeom prst="rect">
-            <a:avLst/>
-          </a:prstGeom>
-          <a:noFill/>
-        </p:spPr>
-        <p:txBody>
-          <a:bodyPr wrap="square" anchor="ctr"/>
-          <a:lstStyle/>
-          <a:p>
-            <a:r>
-              <a:rPr sz="1500" b="1" i="0">
-                <a:solidFill>
-                  <a:srgbClr val="095292"/>
-                </a:solidFill>
-                <a:latin typeface="Calibri"/>
-              </a:rPr>
-              <a:t>Recorrido libre</a:t>
+              <a:rPr sz="2000" b="0" i="0">
+                <a:solidFill>
+                  <a:srgbClr val="333333"/>
+                </a:solidFill>
+                <a:latin typeface="Calibri"/>
+              </a:rPr>
+              <a:t>–   El </a:t>
+            </a:r>
+            <a:r>
+              <a:rPr sz="2000" b="1" i="0">
+                <a:solidFill>
+                  <a:srgbClr val="333333"/>
+                </a:solidFill>
+                <a:latin typeface="Calibri"/>
+              </a:rPr>
+              <a:t>largo por sección</a:t>
+            </a:r>
+            <a:r>
+              <a:rPr sz="2000" b="0" i="0">
+                <a:solidFill>
+                  <a:srgbClr val="333333"/>
+                </a:solidFill>
+                <a:latin typeface="Calibri"/>
+              </a:rPr>
+              <a:t> está en la tabla y sirve para dos cosas: evita el informe de veinticinco páginas donde nadie encuentra nada, y evita el de tres donde no cabe el trabajo.</a:t>
             </a:r>
           </a:p>
           <a:p>
             <a:pPr>
-              <a:spcBef>
-                <a:spcPts val="200"/>
-              </a:spcBef>
+              <a:spcAft>
+                <a:spcPts val="800"/>
+              </a:spcAft>
             </a:pPr>
             <a:r>
-              <a:rPr sz="1300" b="0" i="0">
-                <a:solidFill>
-                  <a:srgbClr val="333333"/>
-                </a:solidFill>
-                <a:latin typeface="Calibri"/>
-              </a:rPr>
-              <a:t>Cada estudiante comenta en la columna de otro equipo.</a:t>
-            </a:r>
-          </a:p>
-        </p:txBody>
-      </p:sp>
-      <p:sp>
-        <p:nvSpPr>
-          <p:cNvPr id="22" name="TextBox 21"/>
+              <a:rPr sz="2000" b="0" i="0">
+                <a:solidFill>
+                  <a:srgbClr val="333333"/>
+                </a:solidFill>
+                <a:latin typeface="Calibri"/>
+              </a:rPr>
+              <a:t>–   En total son unas </a:t>
+            </a:r>
+            <a:r>
+              <a:rPr sz="2000" b="1" i="0">
+                <a:solidFill>
+                  <a:srgbClr val="333333"/>
+                </a:solidFill>
+                <a:latin typeface="Calibri"/>
+              </a:rPr>
+              <a:t>9 a 11 páginas</a:t>
+            </a:r>
+            <a:r>
+              <a:rPr sz="2000" b="0" i="0">
+                <a:solidFill>
+                  <a:srgbClr val="333333"/>
+                </a:solidFill>
+                <a:latin typeface="Calibri"/>
+              </a:rPr>
+              <a:t>, que es una extensión razonable para un proyecto de primer semestre.</a:t>
+            </a:r>
+          </a:p>
+          <a:p>
+            <a:pPr>
+              <a:spcAft>
+                <a:spcPts val="800"/>
+              </a:spcAft>
+            </a:pPr>
+            <a:r>
+              <a:rPr sz="2000" b="0" i="0">
+                <a:solidFill>
+                  <a:srgbClr val="333333"/>
+                </a:solidFill>
+                <a:latin typeface="Calibri"/>
+              </a:rPr>
+              <a:t>–   Si un equipo pregunta si puede ser más largo, la respuesta es que </a:t>
+            </a:r>
+            <a:r>
+              <a:rPr sz="2000" b="1" i="0">
+                <a:solidFill>
+                  <a:srgbClr val="333333"/>
+                </a:solidFill>
+                <a:latin typeface="Calibri"/>
+              </a:rPr>
+              <a:t>la extensión no es una virtud</a:t>
+            </a:r>
+            <a:r>
+              <a:rPr sz="2000" b="0" i="0">
+                <a:solidFill>
+                  <a:srgbClr val="333333"/>
+                </a:solidFill>
+                <a:latin typeface="Calibri"/>
+              </a:rPr>
+              <a:t>: un informe donde la decisión está en la página 18 es un informe que no se va a leer. </a:t>
+            </a:r>
+            <a:r>
+              <a:rPr sz="2000" b="1" i="0">
+                <a:solidFill>
+                  <a:srgbClr val="333333"/>
+                </a:solidFill>
+                <a:latin typeface="Calibri"/>
+              </a:rPr>
+              <a:t>El orden de armado importa y es contraintuitivo</a:t>
+            </a:r>
+            <a:r>
+              <a:rPr sz="2000" b="0" i="0">
+                <a:solidFill>
+                  <a:srgbClr val="333333"/>
+                </a:solidFill>
+                <a:latin typeface="Calibri"/>
+              </a:rPr>
+              <a:t>, así que hay que insistir: **pegar primero, revisar después</a:t>
+            </a:r>
+          </a:p>
+          <a:p>
+            <a:pPr>
+              <a:spcAft>
+                <a:spcPts val="800"/>
+              </a:spcAft>
+            </a:pPr>
+            <a:r>
+              <a:rPr sz="2000" b="0" i="0">
+                <a:solidFill>
+                  <a:srgbClr val="333333"/>
+                </a:solidFill>
+                <a:latin typeface="Calibri"/>
+              </a:rPr>
+              <a:t>–   Y el resumen al final.** El error que hace que no alcancen los veinticuatro minutos es empezar por el resumen —o peor, por la portada— porque el resumen exige tener todo lo demás decidido.</a:t>
+            </a:r>
+          </a:p>
+        </p:txBody>
+      </p:sp>
+      <p:sp>
+        <p:nvSpPr>
+          <p:cNvPr id="6" name="TextBox 5"/>
           <p:cNvSpPr txBox="1"/>
           <p:nvPr/>
         </p:nvSpPr>
@@ -6491,7 +5179,7 @@
                 </a:solidFill>
                 <a:latin typeface="Calibri"/>
               </a:rPr>
-              <a:t>Cierre del curso</a:t>
+              <a:t>Las doce secciones, y el orden correcto para armarlas (2/2)</a:t>
             </a:r>
           </a:p>
         </p:txBody>
@@ -6530,61 +5218,7 @@
                 </a:solidFill>
                 <a:latin typeface="Calibri"/>
               </a:rPr>
-              <a:t>–   </a:t>
-            </a:r>
-            <a:r>
-              <a:rPr sz="2000" b="1" i="0">
-                <a:solidFill>
-                  <a:srgbClr val="333333"/>
-                </a:solidFill>
-                <a:latin typeface="Calibri"/>
-              </a:rPr>
-              <a:t>Lo que queda entregado:</a:t>
-            </a:r>
-            <a:r>
-              <a:rPr sz="2000" b="0" i="0">
-                <a:solidFill>
-                  <a:srgbClr val="333333"/>
-                </a:solidFill>
-                <a:latin typeface="Calibri"/>
-              </a:rPr>
-              <a:t> el </a:t>
-            </a:r>
-            <a:r>
-              <a:rPr sz="2000" b="1" i="0">
-                <a:solidFill>
-                  <a:srgbClr val="333333"/>
-                </a:solidFill>
-                <a:latin typeface="Calibri"/>
-              </a:rPr>
-              <a:t>informe final</a:t>
-            </a:r>
-            <a:r>
-              <a:rPr sz="2000" b="0" i="0">
-                <a:solidFill>
-                  <a:srgbClr val="333333"/>
-                </a:solidFill>
-                <a:latin typeface="Calibri"/>
-              </a:rPr>
-              <a:t> con sus doce secciones (20 %), la </a:t>
-            </a:r>
-            <a:r>
-              <a:rPr sz="2000" b="1" i="0">
-                <a:solidFill>
-                  <a:srgbClr val="333333"/>
-                </a:solidFill>
-                <a:latin typeface="Calibri"/>
-              </a:rPr>
-              <a:t>exposición final</a:t>
-            </a:r>
-            <a:r>
-              <a:rPr sz="2000" b="0" i="0">
-                <a:solidFill>
-                  <a:srgbClr val="333333"/>
-                </a:solidFill>
-                <a:latin typeface="Calibri"/>
-              </a:rPr>
-              <a:t> de la Clase 15 (15 %), el prototipo probado con personas reales y la galería del curso.</a:t>
+              <a:t>–   Se escribe último aunque vaya primero.</a:t>
             </a:r>
           </a:p>
           <a:p>
@@ -6600,25 +5234,7 @@
                 </a:solidFill>
                 <a:latin typeface="Calibri"/>
               </a:rPr>
-              <a:t>–   </a:t>
-            </a:r>
-            <a:r>
-              <a:rPr sz="2000" b="1" i="0">
-                <a:solidFill>
-                  <a:srgbClr val="333333"/>
-                </a:solidFill>
-                <a:latin typeface="Calibri"/>
-              </a:rPr>
-              <a:t>Autoevaluación:</a:t>
-            </a:r>
-            <a:r>
-              <a:rPr sz="2000" b="0" i="0">
-                <a:solidFill>
-                  <a:srgbClr val="333333"/>
-                </a:solidFill>
-                <a:latin typeface="Calibri"/>
-              </a:rPr>
-              <a:t> queda hecha, con evidencia y no con impresiones — junto con la coevaluación del equipo.</a:t>
+              <a:t>–   Esta regla es general para cualquier documento técnico y vale la pena nombrarla como tal. **El paso 2 tiene un detalle que cambia el resultado: marcar lo que falta</a:t>
             </a:r>
           </a:p>
           <a:p>
@@ -6634,16 +5250,7 @@
                 </a:solidFill>
                 <a:latin typeface="Calibri"/>
               </a:rPr>
-              <a:t>–   </a:t>
-            </a:r>
-            <a:r>
-              <a:rPr sz="2000" b="1" i="0">
-                <a:solidFill>
-                  <a:srgbClr val="333333"/>
-                </a:solidFill>
-                <a:latin typeface="Calibri"/>
-              </a:rPr>
-              <a:t>Lo que se llevan es un método, no un tema: definir un problema con evidencia, revisar qué ya existe, decidir con criterios, probar con personas reales y mirar a quién afecta.</a:t>
+              <a:t>–   No lo que está.** Un equipo que va marcando lo hecho termina con una lista de logros y sin saber qué le falta.</a:t>
             </a:r>
           </a:p>
           <a:p>
@@ -6659,7 +5266,23 @@
                 </a:solidFill>
                 <a:latin typeface="Calibri"/>
               </a:rPr>
-              <a:t>–   </a:t>
+              <a:t>–   Marcando en rojo los huecos, la lista de tareas aparece sola, y el paso 3 —repartir los huecos, uno por integrante— se hace en cuatro minutos.</a:t>
+            </a:r>
+          </a:p>
+          <a:p>
+            <a:pPr>
+              <a:spcAft>
+                <a:spcPts val="800"/>
+              </a:spcAft>
+            </a:pPr>
+            <a:r>
+              <a:rPr sz="2000" b="0" i="0">
+                <a:solidFill>
+                  <a:srgbClr val="333333"/>
+                </a:solidFill>
+                <a:latin typeface="Calibri"/>
+              </a:rPr>
+              <a:t>–   Sobre la </a:t>
             </a:r>
             <a:r>
               <a:rPr sz="2000" b="1" i="0">
@@ -6668,7 +5291,7 @@
                 </a:solidFill>
                 <a:latin typeface="Calibri"/>
               </a:rPr>
-              <a:t>Aviso:</a:t>
+              <a:t>sección 11, la declaración del uso de IA</a:t>
             </a:r>
             <a:r>
               <a:rPr sz="2000" b="0" i="0">
@@ -6677,7 +5300,23 @@
                 </a:solidFill>
                 <a:latin typeface="Calibri"/>
               </a:rPr>
-              <a:t> El informe y las capturas quedan en la carpeta del equipo: es un proyecto completo y documentado, hecho en primer semestre, y sirve para un portafolio. Y </a:t>
+              <a:t>: es un cuarto de página y es la que más se olvida.</a:t>
+            </a:r>
+          </a:p>
+          <a:p>
+            <a:pPr>
+              <a:spcAft>
+                <a:spcPts val="800"/>
+              </a:spcAft>
+            </a:pPr>
+            <a:r>
+              <a:rPr sz="2000" b="0" i="0">
+                <a:solidFill>
+                  <a:srgbClr val="333333"/>
+                </a:solidFill>
+                <a:latin typeface="Calibri"/>
+              </a:rPr>
+              <a:t>–   Tiene que decir qué se le pidió al asistente, qué se corrigió a mano y </a:t>
             </a:r>
             <a:r>
               <a:rPr sz="2000" b="1" i="0">
@@ -6686,7 +5325,7 @@
                 </a:solidFill>
                 <a:latin typeface="Calibri"/>
               </a:rPr>
-              <a:t>el siguiente paso de su proyecto está escrito en la sección 10</a:t>
+              <a:t>qué no se le entregó</a:t>
             </a:r>
             <a:r>
               <a:rPr sz="2000" b="0" i="0">
@@ -6695,7 +5334,39 @@
                 </a:solidFill>
                 <a:latin typeface="Calibri"/>
               </a:rPr>
-              <a:t> — quien quiera continuarlo ya no tiene que decidir por dónde empezar.</a:t>
+              <a:t> —ningún dato personal de terceros, que es la regla del curso desde la sesión 4 y que se trabajó en la 11—.</a:t>
+            </a:r>
+          </a:p>
+          <a:p>
+            <a:pPr>
+              <a:spcAft>
+                <a:spcPts val="800"/>
+              </a:spcAft>
+            </a:pPr>
+            <a:r>
+              <a:rPr sz="2000" b="0" i="0">
+                <a:solidFill>
+                  <a:srgbClr val="333333"/>
+                </a:solidFill>
+                <a:latin typeface="Calibri"/>
+              </a:rPr>
+              <a:t>–   Los equipos que no usaron IA también escriben la sección: dicen que no la usaron.</a:t>
+            </a:r>
+          </a:p>
+          <a:p>
+            <a:pPr>
+              <a:spcAft>
+                <a:spcPts val="800"/>
+              </a:spcAft>
+            </a:pPr>
+            <a:r>
+              <a:rPr sz="2000" b="0" i="0">
+                <a:solidFill>
+                  <a:srgbClr val="333333"/>
+                </a:solidFill>
+                <a:latin typeface="Calibri"/>
+              </a:rPr>
+              <a:t>–   Declarar es la norma, usarla o no es la decisión.</a:t>
             </a:r>
           </a:p>
         </p:txBody>
@@ -6770,13 +5441,13 @@
         <p:spPr>
           <a:xfrm>
             <a:off x="0" y="0"/>
-            <a:ext cx="12191695" cy="164592"/>
+            <a:ext cx="12191695" cy="960120"/>
           </a:xfrm>
           <a:prstGeom prst="rect">
             <a:avLst/>
           </a:prstGeom>
           <a:solidFill>
-            <a:srgbClr val="269CCB"/>
+            <a:srgbClr val="095292"/>
           </a:solidFill>
           <a:ln>
             <a:noFill/>
@@ -6804,30 +5475,49 @@
           </a:p>
         </p:txBody>
       </p:sp>
-      <p:pic>
-        <p:nvPicPr>
-          <p:cNvPr id="3" name="Picture 2" descr="logo_uniajc_color.png"/>
-          <p:cNvPicPr>
-            <a:picLocks noChangeAspect="1"/>
-          </p:cNvPicPr>
-          <p:nvPr/>
-        </p:nvPicPr>
-        <p:blipFill>
-          <a:blip r:embed="rId2"/>
-          <a:stretch>
-            <a:fillRect/>
-          </a:stretch>
-        </p:blipFill>
-        <p:spPr>
-          <a:xfrm>
-            <a:off x="10271455" y="5998464"/>
-            <a:ext cx="1463040" cy="643233"/>
-          </a:xfrm>
-          <a:prstGeom prst="rect">
-            <a:avLst/>
-          </a:prstGeom>
-        </p:spPr>
-      </p:pic>
+      <p:sp>
+        <p:nvSpPr>
+          <p:cNvPr id="3" name="Rectangle 2"/>
+          <p:cNvSpPr/>
+          <p:nvPr/>
+        </p:nvSpPr>
+        <p:spPr>
+          <a:xfrm>
+            <a:off x="0" y="960120"/>
+            <a:ext cx="12191695" cy="41148"/>
+          </a:xfrm>
+          <a:prstGeom prst="rect">
+            <a:avLst/>
+          </a:prstGeom>
+          <a:solidFill>
+            <a:srgbClr val="FFD000"/>
+          </a:solidFill>
+          <a:ln>
+            <a:noFill/>
+          </a:ln>
+        </p:spPr>
+        <p:style>
+          <a:lnRef idx="1">
+            <a:schemeClr val="accent1"/>
+          </a:lnRef>
+          <a:fillRef idx="3">
+            <a:schemeClr val="accent1"/>
+          </a:fillRef>
+          <a:effectRef idx="2">
+            <a:schemeClr val="accent1"/>
+          </a:effectRef>
+          <a:fontRef idx="minor">
+            <a:schemeClr val="lt1"/>
+          </a:fontRef>
+        </p:style>
+        <p:txBody>
+          <a:bodyPr rtlCol="0" anchor="ctr"/>
+          <a:lstStyle/>
+          <a:p>
+            <a:pPr algn="ctr"/>
+          </a:p>
+        </p:txBody>
+      </p:sp>
       <p:sp>
         <p:nvSpPr>
           <p:cNvPr id="4" name="TextBox 3"/>
@@ -6836,41 +5526,8 @@
         </p:nvSpPr>
         <p:spPr>
           <a:xfrm>
-            <a:off x="457200" y="1737360"/>
-            <a:ext cx="11277295" cy="1097280"/>
-          </a:xfrm>
-          <a:prstGeom prst="rect">
-            <a:avLst/>
-          </a:prstGeom>
-          <a:noFill/>
-        </p:spPr>
-        <p:txBody>
-          <a:bodyPr wrap="square" anchor="ctr"/>
-          <a:lstStyle/>
-          <a:p>
-            <a:pPr algn="ctr"/>
-            <a:r>
-              <a:rPr sz="3400" b="1" i="0">
-                <a:solidFill>
-                  <a:srgbClr val="095292"/>
-                </a:solidFill>
-                <a:latin typeface="Calibri"/>
-              </a:rPr>
-              <a:t>Gracias · Introducción a la Ingeniería</a:t>
-            </a:r>
-          </a:p>
-        </p:txBody>
-      </p:sp>
-      <p:sp>
-        <p:nvSpPr>
-          <p:cNvPr id="5" name="TextBox 4"/>
-          <p:cNvSpPr txBox="1"/>
-          <p:nvPr/>
-        </p:nvSpPr>
-        <p:spPr>
-          <a:xfrm>
-            <a:off x="457200" y="3017520"/>
-            <a:ext cx="11277295" cy="1645920"/>
+            <a:off x="457200" y="164592"/>
+            <a:ext cx="11277295" cy="502920"/>
           </a:xfrm>
           <a:prstGeom prst="rect">
             <a:avLst/>
@@ -6883,49 +5540,28 @@
           </a:bodyPr>
           <a:lstStyle/>
           <a:p>
-            <a:pPr algn="ctr">
-              <a:spcAft>
-                <a:spcPts val="600"/>
-              </a:spcAft>
-            </a:pPr>
-            <a:r>
-              <a:rPr sz="1600" b="0" i="0">
-                <a:solidFill>
-                  <a:srgbClr val="333333"/>
-                </a:solidFill>
-                <a:latin typeface="Calibri"/>
-              </a:rPr>
-              <a:t>Socialización y evaluación final del curso · Clase 16</a:t>
-            </a:r>
-          </a:p>
-          <a:p>
-            <a:pPr algn="ctr">
-              <a:spcAft>
-                <a:spcPts val="600"/>
-              </a:spcAft>
-            </a:pPr>
-            <a:r>
-              <a:rPr sz="1600" b="0" i="0">
-                <a:solidFill>
-                  <a:srgbClr val="333333"/>
-                </a:solidFill>
-                <a:latin typeface="Calibri"/>
-              </a:rPr>
-              <a:t>FI300101 · UNIAJC · Ingeniería de Sistemas</a:t>
-            </a:r>
-          </a:p>
-        </p:txBody>
-      </p:sp>
-      <p:sp>
-        <p:nvSpPr>
-          <p:cNvPr id="6" name="TextBox 5"/>
+            <a:r>
+              <a:rPr sz="2600" b="1" i="0">
+                <a:solidFill>
+                  <a:srgbClr val="FFFFFF"/>
+                </a:solidFill>
+                <a:latin typeface="Calibri"/>
+              </a:rPr>
+              <a:t>La galería, y por qué socializar no es exponer otra vez (1/2)</a:t>
+            </a:r>
+          </a:p>
+        </p:txBody>
+      </p:sp>
+      <p:sp>
+        <p:nvSpPr>
+          <p:cNvPr id="5" name="TextBox 4"/>
           <p:cNvSpPr txBox="1"/>
           <p:nvPr/>
         </p:nvSpPr>
         <p:spPr>
           <a:xfrm>
-            <a:off x="457200" y="4754880"/>
-            <a:ext cx="11277295" cy="640080"/>
+            <a:off x="457200" y="1170432"/>
+            <a:ext cx="11277295" cy="5230368"/>
           </a:xfrm>
           <a:prstGeom prst="rect">
             <a:avLst/>
@@ -6938,15 +5574,1942 @@
           </a:bodyPr>
           <a:lstStyle/>
           <a:p>
+            <a:pPr>
+              <a:spcAft>
+                <a:spcPts val="800"/>
+              </a:spcAft>
+            </a:pPr>
+            <a:r>
+              <a:rPr sz="2000" b="0" i="0">
+                <a:solidFill>
+                  <a:srgbClr val="333333"/>
+                </a:solidFill>
+                <a:latin typeface="Calibri"/>
+              </a:rPr>
+              <a:t>–   Los veinte minutos de socialización </a:t>
+            </a:r>
+            <a:r>
+              <a:rPr sz="2000" b="1" i="0">
+                <a:solidFill>
+                  <a:srgbClr val="333333"/>
+                </a:solidFill>
+                <a:latin typeface="Calibri"/>
+              </a:rPr>
+              <a:t>no son una segunda ronda de exposiciones</a:t>
+            </a:r>
+            <a:r>
+              <a:rPr sz="2000" b="0" i="0">
+                <a:solidFill>
+                  <a:srgbClr val="333333"/>
+                </a:solidFill>
+                <a:latin typeface="Calibri"/>
+              </a:rPr>
+              <a:t> — eso fue la Clase 15 y ya tiene nota.</a:t>
+            </a:r>
+          </a:p>
+          <a:p>
+            <a:pPr>
+              <a:spcAft>
+                <a:spcPts val="800"/>
+              </a:spcAft>
+            </a:pPr>
+            <a:r>
+              <a:rPr sz="2000" b="0" i="0">
+                <a:solidFill>
+                  <a:srgbClr val="333333"/>
+                </a:solidFill>
+                <a:latin typeface="Calibri"/>
+              </a:rPr>
+              <a:t>–   Aquí el formato es una </a:t>
+            </a:r>
+            <a:r>
+              <a:rPr sz="2000" b="1" i="0">
+                <a:solidFill>
+                  <a:srgbClr val="333333"/>
+                </a:solidFill>
+                <a:latin typeface="Calibri"/>
+              </a:rPr>
+              <a:t>galería</a:t>
+            </a:r>
+            <a:r>
+              <a:rPr sz="2000" b="0" i="0">
+                <a:solidFill>
+                  <a:srgbClr val="333333"/>
+                </a:solidFill>
+                <a:latin typeface="Calibri"/>
+              </a:rPr>
+              <a:t>: cada equipo deja en su columna del muro tres imágenes —una pantalla del prototipo</a:t>
+            </a:r>
+          </a:p>
+          <a:p>
+            <a:pPr>
+              <a:spcAft>
+                <a:spcPts val="800"/>
+              </a:spcAft>
+            </a:pPr>
+            <a:r>
+              <a:rPr sz="2000" b="0" i="0">
+                <a:solidFill>
+                  <a:srgbClr val="333333"/>
+                </a:solidFill>
+                <a:latin typeface="Calibri"/>
+              </a:rPr>
+              <a:t>–   La matriz de impacto y la diapositiva del problema— y </a:t>
+            </a:r>
+            <a:r>
+              <a:rPr sz="2000" b="1" i="0">
+                <a:solidFill>
+                  <a:srgbClr val="333333"/>
+                </a:solidFill>
+                <a:latin typeface="Calibri"/>
+              </a:rPr>
+              <a:t>cinco líneas</a:t>
+            </a:r>
+            <a:r>
+              <a:rPr sz="2000" b="0" i="0">
+                <a:solidFill>
+                  <a:srgbClr val="333333"/>
+                </a:solidFill>
+                <a:latin typeface="Calibri"/>
+              </a:rPr>
+              <a:t>: el problema, la decisión, un hallazgo, un número de impacto y el siguiente paso.</a:t>
+            </a:r>
+          </a:p>
+          <a:p>
+            <a:pPr>
+              <a:spcAft>
+                <a:spcPts val="800"/>
+              </a:spcAft>
+            </a:pPr>
+            <a:r>
+              <a:rPr sz="2000" b="0" i="0">
+                <a:solidFill>
+                  <a:srgbClr val="333333"/>
+                </a:solidFill>
+                <a:latin typeface="Calibri"/>
+              </a:rPr>
+              <a:t>–   El reparto son 3 minutos por equipo para presentar la columna, y los 5 restantes para </a:t>
+            </a:r>
+            <a:r>
+              <a:rPr sz="2000" b="1" i="0">
+                <a:solidFill>
+                  <a:srgbClr val="333333"/>
+                </a:solidFill>
+                <a:latin typeface="Calibri"/>
+              </a:rPr>
+              <a:t>recorrido libre</a:t>
+            </a:r>
+            <a:r>
+              <a:rPr sz="2000" b="0" i="0">
+                <a:solidFill>
+                  <a:srgbClr val="333333"/>
+                </a:solidFill>
+                <a:latin typeface="Calibri"/>
+              </a:rPr>
+              <a:t>: cada estudiante entra a la columna de otro equipo y deja un comentario.</a:t>
+            </a:r>
+          </a:p>
+          <a:p>
+            <a:pPr>
+              <a:spcAft>
+                <a:spcPts val="800"/>
+              </a:spcAft>
+            </a:pPr>
+            <a:r>
+              <a:rPr sz="2000" b="0" i="0">
+                <a:solidFill>
+                  <a:srgbClr val="333333"/>
+                </a:solidFill>
+                <a:latin typeface="Calibri"/>
+              </a:rPr>
+              <a:t>–   Es rápido, es de baja presión —después de la Clase 15 el curso está cansado— y deja un registro del semestre que se puede mostrar el año siguiente. </a:t>
+            </a:r>
+            <a:r>
+              <a:rPr sz="2000" b="1" i="0">
+                <a:solidFill>
+                  <a:srgbClr val="333333"/>
+                </a:solidFill>
+                <a:latin typeface="Calibri"/>
+              </a:rPr>
+              <a:t>Por qué vale la pena y no es relleno:</a:t>
+            </a:r>
+            <a:r>
+              <a:rPr sz="2000" b="0" i="0">
+                <a:solidFill>
+                  <a:srgbClr val="333333"/>
+                </a:solidFill>
+                <a:latin typeface="Calibri"/>
+              </a:rPr>
+              <a:t> en la Clase 15 cada equipo escuchó cuatro exposiciones de nueve minutos, y a esa velocidad casi nadie retiene los detalles de los otros proyectos.</a:t>
+            </a:r>
+          </a:p>
+        </p:txBody>
+      </p:sp>
+      <p:sp>
+        <p:nvSpPr>
+          <p:cNvPr id="6" name="TextBox 5"/>
+          <p:cNvSpPr txBox="1"/>
+          <p:nvPr/>
+        </p:nvSpPr>
+        <p:spPr>
+          <a:xfrm>
+            <a:off x="11185855" y="6473952"/>
+            <a:ext cx="640080" cy="274320"/>
+          </a:xfrm>
+          <a:prstGeom prst="rect">
+            <a:avLst/>
+          </a:prstGeom>
+          <a:noFill/>
+        </p:spPr>
+        <p:txBody>
+          <a:bodyPr wrap="square">
+            <a:spAutoFit/>
+          </a:bodyPr>
+          <a:lstStyle/>
+          <a:p>
+            <a:pPr algn="r"/>
+            <a:r>
+              <a:rPr sz="1100" b="0" i="0">
+                <a:solidFill>
+                  <a:srgbClr val="666666"/>
+                </a:solidFill>
+                <a:latin typeface="Calibri"/>
+              </a:rPr>
+              <a:t>14</a:t>
+            </a:r>
+          </a:p>
+        </p:txBody>
+      </p:sp>
+    </p:spTree>
+  </p:cSld>
+  <p:clrMapOvr>
+    <a:masterClrMapping/>
+  </p:clrMapOvr>
+</p:sld>
+</file>
+
+<file path=ppt/slides/slide15.xml><?xml version="1.0" encoding="utf-8"?>
+<p:sld xmlns:a="http://schemas.openxmlformats.org/drawingml/2006/main" xmlns:p="http://schemas.openxmlformats.org/presentationml/2006/main" xmlns:r="http://schemas.openxmlformats.org/officeDocument/2006/relationships">
+  <p:cSld>
+    <p:bg>
+      <p:bgPr>
+        <a:solidFill>
+          <a:srgbClr val="FFFFFF"/>
+        </a:solidFill>
+        <a:effectLst/>
+      </p:bgPr>
+    </p:bg>
+    <p:spTree>
+      <p:nvGrpSpPr>
+        <p:cNvPr id="1" name=""/>
+        <p:cNvGrpSpPr/>
+        <p:nvPr/>
+      </p:nvGrpSpPr>
+      <p:grpSpPr/>
+      <p:sp>
+        <p:nvSpPr>
+          <p:cNvPr id="2" name="Rectangle 1"/>
+          <p:cNvSpPr/>
+          <p:nvPr/>
+        </p:nvSpPr>
+        <p:spPr>
+          <a:xfrm>
+            <a:off x="0" y="0"/>
+            <a:ext cx="12191695" cy="960120"/>
+          </a:xfrm>
+          <a:prstGeom prst="rect">
+            <a:avLst/>
+          </a:prstGeom>
+          <a:solidFill>
+            <a:srgbClr val="095292"/>
+          </a:solidFill>
+          <a:ln>
+            <a:noFill/>
+          </a:ln>
+        </p:spPr>
+        <p:style>
+          <a:lnRef idx="1">
+            <a:schemeClr val="accent1"/>
+          </a:lnRef>
+          <a:fillRef idx="3">
+            <a:schemeClr val="accent1"/>
+          </a:fillRef>
+          <a:effectRef idx="2">
+            <a:schemeClr val="accent1"/>
+          </a:effectRef>
+          <a:fontRef idx="minor">
+            <a:schemeClr val="lt1"/>
+          </a:fontRef>
+        </p:style>
+        <p:txBody>
+          <a:bodyPr rtlCol="0" anchor="ctr"/>
+          <a:lstStyle/>
+          <a:p>
             <a:pPr algn="ctr"/>
+          </a:p>
+        </p:txBody>
+      </p:sp>
+      <p:sp>
+        <p:nvSpPr>
+          <p:cNvPr id="3" name="Rectangle 2"/>
+          <p:cNvSpPr/>
+          <p:nvPr/>
+        </p:nvSpPr>
+        <p:spPr>
+          <a:xfrm>
+            <a:off x="0" y="960120"/>
+            <a:ext cx="12191695" cy="41148"/>
+          </a:xfrm>
+          <a:prstGeom prst="rect">
+            <a:avLst/>
+          </a:prstGeom>
+          <a:solidFill>
+            <a:srgbClr val="FFD000"/>
+          </a:solidFill>
+          <a:ln>
+            <a:noFill/>
+          </a:ln>
+        </p:spPr>
+        <p:style>
+          <a:lnRef idx="1">
+            <a:schemeClr val="accent1"/>
+          </a:lnRef>
+          <a:fillRef idx="3">
+            <a:schemeClr val="accent1"/>
+          </a:fillRef>
+          <a:effectRef idx="2">
+            <a:schemeClr val="accent1"/>
+          </a:effectRef>
+          <a:fontRef idx="minor">
+            <a:schemeClr val="lt1"/>
+          </a:fontRef>
+        </p:style>
+        <p:txBody>
+          <a:bodyPr rtlCol="0" anchor="ctr"/>
+          <a:lstStyle/>
+          <a:p>
+            <a:pPr algn="ctr"/>
+          </a:p>
+        </p:txBody>
+      </p:sp>
+      <p:sp>
+        <p:nvSpPr>
+          <p:cNvPr id="4" name="TextBox 3"/>
+          <p:cNvSpPr txBox="1"/>
+          <p:nvPr/>
+        </p:nvSpPr>
+        <p:spPr>
+          <a:xfrm>
+            <a:off x="457200" y="164592"/>
+            <a:ext cx="11277295" cy="502920"/>
+          </a:xfrm>
+          <a:prstGeom prst="rect">
+            <a:avLst/>
+          </a:prstGeom>
+          <a:noFill/>
+        </p:spPr>
+        <p:txBody>
+          <a:bodyPr wrap="square">
+            <a:spAutoFit/>
+          </a:bodyPr>
+          <a:lstStyle/>
+          <a:p>
+            <a:r>
+              <a:rPr sz="2600" b="1" i="0">
+                <a:solidFill>
+                  <a:srgbClr val="FFFFFF"/>
+                </a:solidFill>
+                <a:latin typeface="Calibri"/>
+              </a:rPr>
+              <a:t>La galería, y por qué socializar no es exponer otra vez (2/2)</a:t>
+            </a:r>
+          </a:p>
+        </p:txBody>
+      </p:sp>
+      <p:sp>
+        <p:nvSpPr>
+          <p:cNvPr id="5" name="TextBox 4"/>
+          <p:cNvSpPr txBox="1"/>
+          <p:nvPr/>
+        </p:nvSpPr>
+        <p:spPr>
+          <a:xfrm>
+            <a:off x="457200" y="1170432"/>
+            <a:ext cx="11277295" cy="5230368"/>
+          </a:xfrm>
+          <a:prstGeom prst="rect">
+            <a:avLst/>
+          </a:prstGeom>
+          <a:noFill/>
+        </p:spPr>
+        <p:txBody>
+          <a:bodyPr wrap="square">
+            <a:spAutoFit/>
+          </a:bodyPr>
+          <a:lstStyle/>
+          <a:p>
+            <a:pPr>
+              <a:spcAft>
+                <a:spcPts val="800"/>
+              </a:spcAft>
+            </a:pPr>
+            <a:r>
+              <a:rPr sz="2000" b="0" i="0">
+                <a:solidFill>
+                  <a:srgbClr val="333333"/>
+                </a:solidFill>
+                <a:latin typeface="Calibri"/>
+              </a:rPr>
+              <a:t>–   La galería deja los cinco proyectos </a:t>
+            </a:r>
             <a:r>
               <a:rPr sz="2000" b="1" i="0">
                 <a:solidFill>
-                  <a:srgbClr val="269CCB"/>
-                </a:solidFill>
-                <a:latin typeface="Calibri"/>
-              </a:rPr>
-              <a:t>Hace dieciséis sesiones era una ocurrencia; hoy es un proyecto con evidencia</a:t>
+                  <a:srgbClr val="333333"/>
+                </a:solidFill>
+                <a:latin typeface="Calibri"/>
+              </a:rPr>
+              <a:t>lado a lado y por escrito</a:t>
+            </a:r>
+            <a:r>
+              <a:rPr sz="2000" b="0" i="0">
+                <a:solidFill>
+                  <a:srgbClr val="333333"/>
+                </a:solidFill>
+                <a:latin typeface="Calibri"/>
+              </a:rPr>
+              <a:t>, y ahí sí se ven las comparaciones: cinco maneras distintas de definir un problema, cinco matrices de decisión, cinco listas de afectados.</a:t>
+            </a:r>
+          </a:p>
+          <a:p>
+            <a:pPr>
+              <a:spcAft>
+                <a:spcPts val="800"/>
+              </a:spcAft>
+            </a:pPr>
+            <a:r>
+              <a:rPr sz="2000" b="0" i="0">
+                <a:solidFill>
+                  <a:srgbClr val="333333"/>
+                </a:solidFill>
+                <a:latin typeface="Calibri"/>
+              </a:rPr>
+              <a:t>–   Es la única vez en el semestre en que el curso ve su propio trabajo completo.</a:t>
+            </a:r>
+          </a:p>
+          <a:p>
+            <a:pPr>
+              <a:spcAft>
+                <a:spcPts val="800"/>
+              </a:spcAft>
+            </a:pPr>
+            <a:r>
+              <a:rPr sz="2000" b="0" i="0">
+                <a:solidFill>
+                  <a:srgbClr val="333333"/>
+                </a:solidFill>
+                <a:latin typeface="Calibri"/>
+              </a:rPr>
+              <a:t>–   Aproveche los cuatro errores del informe [Slide 8] durante este bloque, mientras los equipos terminan de subir la columna: son las cuatro cosas que va a encontrar calificando y decirlas ahora les da tiempo de corregirlas. </a:t>
+            </a:r>
+            <a:r>
+              <a:rPr sz="2000" b="1" i="0">
+                <a:solidFill>
+                  <a:srgbClr val="333333"/>
+                </a:solidFill>
+                <a:latin typeface="Calibri"/>
+              </a:rPr>
+              <a:t>La más frecuente es la sección 10 vacía</a:t>
+            </a:r>
+            <a:r>
+              <a:rPr sz="2000" b="0" i="0">
+                <a:solidFill>
+                  <a:srgbClr val="333333"/>
+                </a:solidFill>
+                <a:latin typeface="Calibri"/>
+              </a:rPr>
+              <a:t> —«ninguna limitación»—, que después de la Clase 12 no es creíble en ningún equipo.</a:t>
+            </a:r>
+          </a:p>
+        </p:txBody>
+      </p:sp>
+      <p:sp>
+        <p:nvSpPr>
+          <p:cNvPr id="6" name="TextBox 5"/>
+          <p:cNvSpPr txBox="1"/>
+          <p:nvPr/>
+        </p:nvSpPr>
+        <p:spPr>
+          <a:xfrm>
+            <a:off x="11185855" y="6473952"/>
+            <a:ext cx="640080" cy="274320"/>
+          </a:xfrm>
+          <a:prstGeom prst="rect">
+            <a:avLst/>
+          </a:prstGeom>
+          <a:noFill/>
+        </p:spPr>
+        <p:txBody>
+          <a:bodyPr wrap="square">
+            <a:spAutoFit/>
+          </a:bodyPr>
+          <a:lstStyle/>
+          <a:p>
+            <a:pPr algn="r"/>
+            <a:r>
+              <a:rPr sz="1100" b="0" i="0">
+                <a:solidFill>
+                  <a:srgbClr val="666666"/>
+                </a:solidFill>
+                <a:latin typeface="Calibri"/>
+              </a:rPr>
+              <a:t>15</a:t>
+            </a:r>
+          </a:p>
+        </p:txBody>
+      </p:sp>
+    </p:spTree>
+  </p:cSld>
+  <p:clrMapOvr>
+    <a:masterClrMapping/>
+  </p:clrMapOvr>
+</p:sld>
+</file>
+
+<file path=ppt/slides/slide16.xml><?xml version="1.0" encoding="utf-8"?>
+<p:sld xmlns:a="http://schemas.openxmlformats.org/drawingml/2006/main" xmlns:p="http://schemas.openxmlformats.org/presentationml/2006/main" xmlns:r="http://schemas.openxmlformats.org/officeDocument/2006/relationships">
+  <p:cSld>
+    <p:bg>
+      <p:bgPr>
+        <a:solidFill>
+          <a:srgbClr val="FFFFFF"/>
+        </a:solidFill>
+        <a:effectLst/>
+      </p:bgPr>
+    </p:bg>
+    <p:spTree>
+      <p:nvGrpSpPr>
+        <p:cNvPr id="1" name=""/>
+        <p:cNvGrpSpPr/>
+        <p:nvPr/>
+      </p:nvGrpSpPr>
+      <p:grpSpPr/>
+      <p:sp>
+        <p:nvSpPr>
+          <p:cNvPr id="2" name="Rectangle 1"/>
+          <p:cNvSpPr/>
+          <p:nvPr/>
+        </p:nvSpPr>
+        <p:spPr>
+          <a:xfrm>
+            <a:off x="0" y="0"/>
+            <a:ext cx="12191695" cy="960120"/>
+          </a:xfrm>
+          <a:prstGeom prst="rect">
+            <a:avLst/>
+          </a:prstGeom>
+          <a:solidFill>
+            <a:srgbClr val="095292"/>
+          </a:solidFill>
+          <a:ln>
+            <a:noFill/>
+          </a:ln>
+        </p:spPr>
+        <p:style>
+          <a:lnRef idx="1">
+            <a:schemeClr val="accent1"/>
+          </a:lnRef>
+          <a:fillRef idx="3">
+            <a:schemeClr val="accent1"/>
+          </a:fillRef>
+          <a:effectRef idx="2">
+            <a:schemeClr val="accent1"/>
+          </a:effectRef>
+          <a:fontRef idx="minor">
+            <a:schemeClr val="lt1"/>
+          </a:fontRef>
+        </p:style>
+        <p:txBody>
+          <a:bodyPr rtlCol="0" anchor="ctr"/>
+          <a:lstStyle/>
+          <a:p>
+            <a:pPr algn="ctr"/>
+          </a:p>
+        </p:txBody>
+      </p:sp>
+      <p:sp>
+        <p:nvSpPr>
+          <p:cNvPr id="3" name="Rectangle 2"/>
+          <p:cNvSpPr/>
+          <p:nvPr/>
+        </p:nvSpPr>
+        <p:spPr>
+          <a:xfrm>
+            <a:off x="0" y="960120"/>
+            <a:ext cx="12191695" cy="41148"/>
+          </a:xfrm>
+          <a:prstGeom prst="rect">
+            <a:avLst/>
+          </a:prstGeom>
+          <a:solidFill>
+            <a:srgbClr val="FFD000"/>
+          </a:solidFill>
+          <a:ln>
+            <a:noFill/>
+          </a:ln>
+        </p:spPr>
+        <p:style>
+          <a:lnRef idx="1">
+            <a:schemeClr val="accent1"/>
+          </a:lnRef>
+          <a:fillRef idx="3">
+            <a:schemeClr val="accent1"/>
+          </a:fillRef>
+          <a:effectRef idx="2">
+            <a:schemeClr val="accent1"/>
+          </a:effectRef>
+          <a:fontRef idx="minor">
+            <a:schemeClr val="lt1"/>
+          </a:fontRef>
+        </p:style>
+        <p:txBody>
+          <a:bodyPr rtlCol="0" anchor="ctr"/>
+          <a:lstStyle/>
+          <a:p>
+            <a:pPr algn="ctr"/>
+          </a:p>
+        </p:txBody>
+      </p:sp>
+      <p:sp>
+        <p:nvSpPr>
+          <p:cNvPr id="4" name="TextBox 3"/>
+          <p:cNvSpPr txBox="1"/>
+          <p:nvPr/>
+        </p:nvSpPr>
+        <p:spPr>
+          <a:xfrm>
+            <a:off x="457200" y="164592"/>
+            <a:ext cx="11277295" cy="502920"/>
+          </a:xfrm>
+          <a:prstGeom prst="rect">
+            <a:avLst/>
+          </a:prstGeom>
+          <a:noFill/>
+        </p:spPr>
+        <p:txBody>
+          <a:bodyPr wrap="square">
+            <a:spAutoFit/>
+          </a:bodyPr>
+          <a:lstStyle/>
+          <a:p>
+            <a:r>
+              <a:rPr sz="2600" b="1" i="0">
+                <a:solidFill>
+                  <a:srgbClr val="FFFFFF"/>
+                </a:solidFill>
+                <a:latin typeface="Calibri"/>
+              </a:rPr>
+              <a:t>Autoevaluación y coevaluación: cómo evitar que sea un trámite (1/2)</a:t>
+            </a:r>
+          </a:p>
+        </p:txBody>
+      </p:sp>
+      <p:sp>
+        <p:nvSpPr>
+          <p:cNvPr id="5" name="TextBox 4"/>
+          <p:cNvSpPr txBox="1"/>
+          <p:nvPr/>
+        </p:nvSpPr>
+        <p:spPr>
+          <a:xfrm>
+            <a:off x="457200" y="1170432"/>
+            <a:ext cx="11277295" cy="5230368"/>
+          </a:xfrm>
+          <a:prstGeom prst="rect">
+            <a:avLst/>
+          </a:prstGeom>
+          <a:noFill/>
+        </p:spPr>
+        <p:txBody>
+          <a:bodyPr wrap="square">
+            <a:spAutoFit/>
+          </a:bodyPr>
+          <a:lstStyle/>
+          <a:p>
+            <a:pPr>
+              <a:spcAft>
+                <a:spcPts val="800"/>
+              </a:spcAft>
+            </a:pPr>
+            <a:r>
+              <a:rPr sz="2000" b="0" i="0">
+                <a:solidFill>
+                  <a:srgbClr val="333333"/>
+                </a:solidFill>
+                <a:latin typeface="Calibri"/>
+              </a:rPr>
+              <a:t>–   La autoevaluación se degrada en trámite cuando se pide una nota. </a:t>
+            </a:r>
+            <a:r>
+              <a:rPr sz="2000" b="1" i="0">
+                <a:solidFill>
+                  <a:srgbClr val="333333"/>
+                </a:solidFill>
+                <a:latin typeface="Calibri"/>
+              </a:rPr>
+              <a:t>Pedir cuatro respuestas con evidencia lo evita</a:t>
+            </a:r>
+            <a:r>
+              <a:rPr sz="2000" b="0" i="0">
+                <a:solidFill>
+                  <a:srgbClr val="333333"/>
+                </a:solidFill>
+                <a:latin typeface="Calibri"/>
+              </a:rPr>
+              <a:t>: qué hice yo concretamente —secciones que escribí</a:t>
+            </a:r>
+          </a:p>
+          <a:p>
+            <a:pPr>
+              <a:spcAft>
+                <a:spcPts val="800"/>
+              </a:spcAft>
+            </a:pPr>
+            <a:r>
+              <a:rPr sz="2000" b="0" i="0">
+                <a:solidFill>
+                  <a:srgbClr val="333333"/>
+                </a:solidFill>
+                <a:latin typeface="Calibri"/>
+              </a:rPr>
+              <a:t>–   Prueba que hice, tramo que expuse—, qué aprendí a hacer que no sabía, en qué fallé, qué haría distinto.</a:t>
+            </a:r>
+          </a:p>
+          <a:p>
+            <a:pPr>
+              <a:spcAft>
+                <a:spcPts val="800"/>
+              </a:spcAft>
+            </a:pPr>
+            <a:r>
+              <a:rPr sz="2000" b="0" i="0">
+                <a:solidFill>
+                  <a:srgbClr val="333333"/>
+                </a:solidFill>
+                <a:latin typeface="Calibri"/>
+              </a:rPr>
+              <a:t>–   Todo verificable en el documento del equipo.</a:t>
+            </a:r>
+          </a:p>
+          <a:p>
+            <a:pPr>
+              <a:spcAft>
+                <a:spcPts val="800"/>
+              </a:spcAft>
+            </a:pPr>
+            <a:r>
+              <a:rPr sz="2000" b="0" i="0">
+                <a:solidFill>
+                  <a:srgbClr val="333333"/>
+                </a:solidFill>
+                <a:latin typeface="Calibri"/>
+              </a:rPr>
+              <a:t>–   Y hay que decir la consecuencia con claridad, porque cambia el resultado: </a:t>
+            </a:r>
+            <a:r>
+              <a:rPr sz="2000" b="1" i="0">
+                <a:solidFill>
+                  <a:srgbClr val="333333"/>
+                </a:solidFill>
+                <a:latin typeface="Calibri"/>
+              </a:rPr>
+              <a:t>ponerse la nota máxima sin evidencia baja el puntaje.</a:t>
+            </a:r>
+            <a:r>
+              <a:rPr sz="2000" b="0" i="0">
+                <a:solidFill>
+                  <a:srgbClr val="333333"/>
+                </a:solidFill>
+                <a:latin typeface="Calibri"/>
+              </a:rPr>
+              <a:t> Lo que se evalúa no es la autoestima: es </a:t>
+            </a:r>
+            <a:r>
+              <a:rPr sz="2000" b="1" i="0">
+                <a:solidFill>
+                  <a:srgbClr val="333333"/>
+                </a:solidFill>
+                <a:latin typeface="Calibri"/>
+              </a:rPr>
+              <a:t>la capacidad de mirar el propio trabajo con honestidad</a:t>
+            </a:r>
+            <a:r>
+              <a:rPr sz="2000" b="0" i="0">
+                <a:solidFill>
+                  <a:srgbClr val="333333"/>
+                </a:solidFill>
+                <a:latin typeface="Calibri"/>
+              </a:rPr>
+              <a:t>, que es una competencia profesional.</a:t>
+            </a:r>
+          </a:p>
+          <a:p>
+            <a:pPr>
+              <a:spcAft>
+                <a:spcPts val="800"/>
+              </a:spcAft>
+            </a:pPr>
+            <a:r>
+              <a:rPr sz="2000" b="0" i="0">
+                <a:solidFill>
+                  <a:srgbClr val="333333"/>
+                </a:solidFill>
+                <a:latin typeface="Calibri"/>
+              </a:rPr>
+              <a:t>–   El estudiante que escribe «no entregué mi sección a tiempo dos veces y el equipo tuvo que cubrirme» está demostrando exactamente lo que se busca.</a:t>
+            </a:r>
+          </a:p>
+          <a:p>
+            <a:pPr>
+              <a:spcAft>
+                <a:spcPts val="800"/>
+              </a:spcAft>
+            </a:pPr>
+            <a:r>
+              <a:rPr sz="2000" b="0" i="0">
+                <a:solidFill>
+                  <a:srgbClr val="333333"/>
+                </a:solidFill>
+                <a:latin typeface="Calibri"/>
+              </a:rPr>
+              <a:t>–   La coevaluación es más delicada y necesita una regla dura: </a:t>
+            </a:r>
+            <a:r>
+              <a:rPr sz="2000" b="1" i="0">
+                <a:solidFill>
+                  <a:srgbClr val="333333"/>
+                </a:solidFill>
+                <a:latin typeface="Calibri"/>
+              </a:rPr>
+              <a:t>se evalúa el trabajo, no la persona.</a:t>
+            </a:r>
+            <a:r>
+              <a:rPr sz="2000" b="0" i="0">
+                <a:solidFill>
+                  <a:srgbClr val="333333"/>
+                </a:solidFill>
+                <a:latin typeface="Calibri"/>
+              </a:rPr>
+              <a:t> Tres criterios —cumplimiento de acuerdos, aporte al proyecto, disposición para ayudar— y la misma exigencia de la Clase 12: </a:t>
+            </a:r>
+            <a:r>
+              <a:rPr sz="2000" b="1" i="0">
+                <a:solidFill>
+                  <a:srgbClr val="333333"/>
+                </a:solidFill>
+                <a:latin typeface="Calibri"/>
+              </a:rPr>
+              <a:t>observación, no adjetivo</a:t>
+            </a:r>
+            <a:r>
+              <a:rPr sz="2000" b="0" i="0">
+                <a:solidFill>
+                  <a:srgbClr val="333333"/>
+                </a:solidFill>
+                <a:latin typeface="Calibri"/>
+              </a:rPr>
+              <a:t>.</a:t>
+            </a:r>
+          </a:p>
+        </p:txBody>
+      </p:sp>
+      <p:sp>
+        <p:nvSpPr>
+          <p:cNvPr id="6" name="TextBox 5"/>
+          <p:cNvSpPr txBox="1"/>
+          <p:nvPr/>
+        </p:nvSpPr>
+        <p:spPr>
+          <a:xfrm>
+            <a:off x="11185855" y="6473952"/>
+            <a:ext cx="640080" cy="274320"/>
+          </a:xfrm>
+          <a:prstGeom prst="rect">
+            <a:avLst/>
+          </a:prstGeom>
+          <a:noFill/>
+        </p:spPr>
+        <p:txBody>
+          <a:bodyPr wrap="square">
+            <a:spAutoFit/>
+          </a:bodyPr>
+          <a:lstStyle/>
+          <a:p>
+            <a:pPr algn="r"/>
+            <a:r>
+              <a:rPr sz="1100" b="0" i="0">
+                <a:solidFill>
+                  <a:srgbClr val="666666"/>
+                </a:solidFill>
+                <a:latin typeface="Calibri"/>
+              </a:rPr>
+              <a:t>16</a:t>
+            </a:r>
+          </a:p>
+        </p:txBody>
+      </p:sp>
+    </p:spTree>
+  </p:cSld>
+  <p:clrMapOvr>
+    <a:masterClrMapping/>
+  </p:clrMapOvr>
+</p:sld>
+</file>
+
+<file path=ppt/slides/slide17.xml><?xml version="1.0" encoding="utf-8"?>
+<p:sld xmlns:a="http://schemas.openxmlformats.org/drawingml/2006/main" xmlns:p="http://schemas.openxmlformats.org/presentationml/2006/main" xmlns:r="http://schemas.openxmlformats.org/officeDocument/2006/relationships">
+  <p:cSld>
+    <p:bg>
+      <p:bgPr>
+        <a:solidFill>
+          <a:srgbClr val="FFFFFF"/>
+        </a:solidFill>
+        <a:effectLst/>
+      </p:bgPr>
+    </p:bg>
+    <p:spTree>
+      <p:nvGrpSpPr>
+        <p:cNvPr id="1" name=""/>
+        <p:cNvGrpSpPr/>
+        <p:nvPr/>
+      </p:nvGrpSpPr>
+      <p:grpSpPr/>
+      <p:sp>
+        <p:nvSpPr>
+          <p:cNvPr id="2" name="Rectangle 1"/>
+          <p:cNvSpPr/>
+          <p:nvPr/>
+        </p:nvSpPr>
+        <p:spPr>
+          <a:xfrm>
+            <a:off x="0" y="0"/>
+            <a:ext cx="12191695" cy="960120"/>
+          </a:xfrm>
+          <a:prstGeom prst="rect">
+            <a:avLst/>
+          </a:prstGeom>
+          <a:solidFill>
+            <a:srgbClr val="095292"/>
+          </a:solidFill>
+          <a:ln>
+            <a:noFill/>
+          </a:ln>
+        </p:spPr>
+        <p:style>
+          <a:lnRef idx="1">
+            <a:schemeClr val="accent1"/>
+          </a:lnRef>
+          <a:fillRef idx="3">
+            <a:schemeClr val="accent1"/>
+          </a:fillRef>
+          <a:effectRef idx="2">
+            <a:schemeClr val="accent1"/>
+          </a:effectRef>
+          <a:fontRef idx="minor">
+            <a:schemeClr val="lt1"/>
+          </a:fontRef>
+        </p:style>
+        <p:txBody>
+          <a:bodyPr rtlCol="0" anchor="ctr"/>
+          <a:lstStyle/>
+          <a:p>
+            <a:pPr algn="ctr"/>
+          </a:p>
+        </p:txBody>
+      </p:sp>
+      <p:sp>
+        <p:nvSpPr>
+          <p:cNvPr id="3" name="Rectangle 2"/>
+          <p:cNvSpPr/>
+          <p:nvPr/>
+        </p:nvSpPr>
+        <p:spPr>
+          <a:xfrm>
+            <a:off x="0" y="960120"/>
+            <a:ext cx="12191695" cy="41148"/>
+          </a:xfrm>
+          <a:prstGeom prst="rect">
+            <a:avLst/>
+          </a:prstGeom>
+          <a:solidFill>
+            <a:srgbClr val="FFD000"/>
+          </a:solidFill>
+          <a:ln>
+            <a:noFill/>
+          </a:ln>
+        </p:spPr>
+        <p:style>
+          <a:lnRef idx="1">
+            <a:schemeClr val="accent1"/>
+          </a:lnRef>
+          <a:fillRef idx="3">
+            <a:schemeClr val="accent1"/>
+          </a:fillRef>
+          <a:effectRef idx="2">
+            <a:schemeClr val="accent1"/>
+          </a:effectRef>
+          <a:fontRef idx="minor">
+            <a:schemeClr val="lt1"/>
+          </a:fontRef>
+        </p:style>
+        <p:txBody>
+          <a:bodyPr rtlCol="0" anchor="ctr"/>
+          <a:lstStyle/>
+          <a:p>
+            <a:pPr algn="ctr"/>
+          </a:p>
+        </p:txBody>
+      </p:sp>
+      <p:sp>
+        <p:nvSpPr>
+          <p:cNvPr id="4" name="TextBox 3"/>
+          <p:cNvSpPr txBox="1"/>
+          <p:nvPr/>
+        </p:nvSpPr>
+        <p:spPr>
+          <a:xfrm>
+            <a:off x="457200" y="164592"/>
+            <a:ext cx="11277295" cy="502920"/>
+          </a:xfrm>
+          <a:prstGeom prst="rect">
+            <a:avLst/>
+          </a:prstGeom>
+          <a:noFill/>
+        </p:spPr>
+        <p:txBody>
+          <a:bodyPr wrap="square">
+            <a:spAutoFit/>
+          </a:bodyPr>
+          <a:lstStyle/>
+          <a:p>
+            <a:r>
+              <a:rPr sz="2600" b="1" i="0">
+                <a:solidFill>
+                  <a:srgbClr val="FFFFFF"/>
+                </a:solidFill>
+                <a:latin typeface="Calibri"/>
+              </a:rPr>
+              <a:t>Autoevaluación y coevaluación: cómo evitar que sea un trámite (2/2)</a:t>
+            </a:r>
+          </a:p>
+        </p:txBody>
+      </p:sp>
+      <p:sp>
+        <p:nvSpPr>
+          <p:cNvPr id="5" name="TextBox 4"/>
+          <p:cNvSpPr txBox="1"/>
+          <p:nvPr/>
+        </p:nvSpPr>
+        <p:spPr>
+          <a:xfrm>
+            <a:off x="457200" y="1170432"/>
+            <a:ext cx="11277295" cy="5230368"/>
+          </a:xfrm>
+          <a:prstGeom prst="rect">
+            <a:avLst/>
+          </a:prstGeom>
+          <a:noFill/>
+        </p:spPr>
+        <p:txBody>
+          <a:bodyPr wrap="square">
+            <a:spAutoFit/>
+          </a:bodyPr>
+          <a:lstStyle/>
+          <a:p>
+            <a:pPr>
+              <a:spcAft>
+                <a:spcPts val="800"/>
+              </a:spcAft>
+            </a:pPr>
+            <a:r>
+              <a:rPr sz="2000" b="0" i="0">
+                <a:solidFill>
+                  <a:srgbClr val="333333"/>
+                </a:solidFill>
+                <a:latin typeface="Calibri"/>
+              </a:rPr>
+              <a:t>–   «No aportó» no sirve como coevaluación</a:t>
+            </a:r>
+          </a:p>
+          <a:p>
+            <a:pPr>
+              <a:spcAft>
+                <a:spcPts val="800"/>
+              </a:spcAft>
+            </a:pPr>
+            <a:r>
+              <a:rPr sz="2000" b="0" i="0">
+                <a:solidFill>
+                  <a:srgbClr val="333333"/>
+                </a:solidFill>
+                <a:latin typeface="Calibri"/>
+              </a:rPr>
+              <a:t>–   «no entregó su sección en las tres últimas sesiones» sí, porque es verificable y porque la persona puede responder a un hecho y no a una etiqueta. </a:t>
+            </a:r>
+            <a:r>
+              <a:rPr sz="2000" b="1" i="0">
+                <a:solidFill>
+                  <a:srgbClr val="333333"/>
+                </a:solidFill>
+                <a:latin typeface="Calibri"/>
+              </a:rPr>
+              <a:t>La autoevaluación individual se entrega solo al docente</a:t>
+            </a:r>
+            <a:r>
+              <a:rPr sz="2000" b="0" i="0">
+                <a:solidFill>
+                  <a:srgbClr val="333333"/>
+                </a:solidFill>
+                <a:latin typeface="Calibri"/>
+              </a:rPr>
+              <a:t>, no al muro ni al equipo.</a:t>
+            </a:r>
+          </a:p>
+          <a:p>
+            <a:pPr>
+              <a:spcAft>
+                <a:spcPts val="800"/>
+              </a:spcAft>
+            </a:pPr>
+            <a:r>
+              <a:rPr sz="2000" b="0" i="0">
+                <a:solidFill>
+                  <a:srgbClr val="333333"/>
+                </a:solidFill>
+                <a:latin typeface="Calibri"/>
+              </a:rPr>
+              <a:t>–   Sin esa garantía nadie escribe nada honesto, y el ejercicio se vuelve un intercambio de cortesías.</a:t>
+            </a:r>
+          </a:p>
+          <a:p>
+            <a:pPr>
+              <a:spcAft>
+                <a:spcPts val="800"/>
+              </a:spcAft>
+            </a:pPr>
+            <a:r>
+              <a:rPr sz="2000" b="0" i="0">
+                <a:solidFill>
+                  <a:srgbClr val="333333"/>
+                </a:solidFill>
+                <a:latin typeface="Calibri"/>
+              </a:rPr>
+              <a:t>–   Dígalo antes de que empiecen a escribir.</a:t>
+            </a:r>
+          </a:p>
+          <a:p>
+            <a:pPr>
+              <a:spcAft>
+                <a:spcPts val="800"/>
+              </a:spcAft>
+            </a:pPr>
+            <a:r>
+              <a:rPr sz="2000" b="0" i="0">
+                <a:solidFill>
+                  <a:srgbClr val="333333"/>
+                </a:solidFill>
+                <a:latin typeface="Calibri"/>
+              </a:rPr>
+              <a:t>–   Un caso que aparece casi siempre: un equipo donde uno trabajó mucho menos.</a:t>
+            </a:r>
+          </a:p>
+          <a:p>
+            <a:pPr>
+              <a:spcAft>
+                <a:spcPts val="800"/>
+              </a:spcAft>
+            </a:pPr>
+            <a:r>
+              <a:rPr sz="2000" b="0" i="0">
+                <a:solidFill>
+                  <a:srgbClr val="333333"/>
+                </a:solidFill>
+                <a:latin typeface="Calibri"/>
+              </a:rPr>
+              <a:t>–   Si tres coevaluaciones independientes lo señalan </a:t>
+            </a:r>
+            <a:r>
+              <a:rPr sz="2000" b="1" i="0">
+                <a:solidFill>
+                  <a:srgbClr val="333333"/>
+                </a:solidFill>
+                <a:latin typeface="Calibri"/>
+              </a:rPr>
+              <a:t>con hechos</a:t>
+            </a:r>
+            <a:r>
+              <a:rPr sz="2000" b="0" i="0">
+                <a:solidFill>
+                  <a:srgbClr val="333333"/>
+                </a:solidFill>
+                <a:latin typeface="Calibri"/>
+              </a:rPr>
+              <a:t>, es información válida y puede diferenciar la nota individual.</a:t>
+            </a:r>
+          </a:p>
+          <a:p>
+            <a:pPr>
+              <a:spcAft>
+                <a:spcPts val="800"/>
+              </a:spcAft>
+            </a:pPr>
+            <a:r>
+              <a:rPr sz="2000" b="0" i="0">
+                <a:solidFill>
+                  <a:srgbClr val="333333"/>
+                </a:solidFill>
+                <a:latin typeface="Calibri"/>
+              </a:rPr>
+              <a:t>–   Si es una sola persona señalando y sin hechos, no alcanza.</a:t>
+            </a:r>
+          </a:p>
+          <a:p>
+            <a:pPr>
+              <a:spcAft>
+                <a:spcPts val="800"/>
+              </a:spcAft>
+            </a:pPr>
+            <a:r>
+              <a:rPr sz="2000" b="0" i="0">
+                <a:solidFill>
+                  <a:srgbClr val="333333"/>
+                </a:solidFill>
+                <a:latin typeface="Calibri"/>
+              </a:rPr>
+              <a:t>–   Y no resuelva el conflicto en público: recoja las coevaluaciones, léalas después y ajuste con criterio.</a:t>
+            </a:r>
+          </a:p>
+        </p:txBody>
+      </p:sp>
+      <p:sp>
+        <p:nvSpPr>
+          <p:cNvPr id="6" name="TextBox 5"/>
+          <p:cNvSpPr txBox="1"/>
+          <p:nvPr/>
+        </p:nvSpPr>
+        <p:spPr>
+          <a:xfrm>
+            <a:off x="11185855" y="6473952"/>
+            <a:ext cx="640080" cy="274320"/>
+          </a:xfrm>
+          <a:prstGeom prst="rect">
+            <a:avLst/>
+          </a:prstGeom>
+          <a:noFill/>
+        </p:spPr>
+        <p:txBody>
+          <a:bodyPr wrap="square">
+            <a:spAutoFit/>
+          </a:bodyPr>
+          <a:lstStyle/>
+          <a:p>
+            <a:pPr algn="r"/>
+            <a:r>
+              <a:rPr sz="1100" b="0" i="0">
+                <a:solidFill>
+                  <a:srgbClr val="666666"/>
+                </a:solidFill>
+                <a:latin typeface="Calibri"/>
+              </a:rPr>
+              <a:t>17</a:t>
+            </a:r>
+          </a:p>
+        </p:txBody>
+      </p:sp>
+    </p:spTree>
+  </p:cSld>
+  <p:clrMapOvr>
+    <a:masterClrMapping/>
+  </p:clrMapOvr>
+</p:sld>
+</file>
+
+<file path=ppt/slides/slide18.xml><?xml version="1.0" encoding="utf-8"?>
+<p:sld xmlns:a="http://schemas.openxmlformats.org/drawingml/2006/main" xmlns:p="http://schemas.openxmlformats.org/presentationml/2006/main" xmlns:r="http://schemas.openxmlformats.org/officeDocument/2006/relationships">
+  <p:cSld>
+    <p:bg>
+      <p:bgPr>
+        <a:solidFill>
+          <a:srgbClr val="FFFFFF"/>
+        </a:solidFill>
+        <a:effectLst/>
+      </p:bgPr>
+    </p:bg>
+    <p:spTree>
+      <p:nvGrpSpPr>
+        <p:cNvPr id="1" name=""/>
+        <p:cNvGrpSpPr/>
+        <p:nvPr/>
+      </p:nvGrpSpPr>
+      <p:grpSpPr/>
+      <p:sp>
+        <p:nvSpPr>
+          <p:cNvPr id="2" name="Rectangle 1"/>
+          <p:cNvSpPr/>
+          <p:nvPr/>
+        </p:nvSpPr>
+        <p:spPr>
+          <a:xfrm>
+            <a:off x="0" y="0"/>
+            <a:ext cx="12191695" cy="960120"/>
+          </a:xfrm>
+          <a:prstGeom prst="rect">
+            <a:avLst/>
+          </a:prstGeom>
+          <a:solidFill>
+            <a:srgbClr val="095292"/>
+          </a:solidFill>
+          <a:ln>
+            <a:noFill/>
+          </a:ln>
+        </p:spPr>
+        <p:style>
+          <a:lnRef idx="1">
+            <a:schemeClr val="accent1"/>
+          </a:lnRef>
+          <a:fillRef idx="3">
+            <a:schemeClr val="accent1"/>
+          </a:fillRef>
+          <a:effectRef idx="2">
+            <a:schemeClr val="accent1"/>
+          </a:effectRef>
+          <a:fontRef idx="minor">
+            <a:schemeClr val="lt1"/>
+          </a:fontRef>
+        </p:style>
+        <p:txBody>
+          <a:bodyPr rtlCol="0" anchor="ctr"/>
+          <a:lstStyle/>
+          <a:p>
+            <a:pPr algn="ctr"/>
+          </a:p>
+        </p:txBody>
+      </p:sp>
+      <p:sp>
+        <p:nvSpPr>
+          <p:cNvPr id="3" name="Rectangle 2"/>
+          <p:cNvSpPr/>
+          <p:nvPr/>
+        </p:nvSpPr>
+        <p:spPr>
+          <a:xfrm>
+            <a:off x="0" y="960120"/>
+            <a:ext cx="12191695" cy="41148"/>
+          </a:xfrm>
+          <a:prstGeom prst="rect">
+            <a:avLst/>
+          </a:prstGeom>
+          <a:solidFill>
+            <a:srgbClr val="FFD000"/>
+          </a:solidFill>
+          <a:ln>
+            <a:noFill/>
+          </a:ln>
+        </p:spPr>
+        <p:style>
+          <a:lnRef idx="1">
+            <a:schemeClr val="accent1"/>
+          </a:lnRef>
+          <a:fillRef idx="3">
+            <a:schemeClr val="accent1"/>
+          </a:fillRef>
+          <a:effectRef idx="2">
+            <a:schemeClr val="accent1"/>
+          </a:effectRef>
+          <a:fontRef idx="minor">
+            <a:schemeClr val="lt1"/>
+          </a:fontRef>
+        </p:style>
+        <p:txBody>
+          <a:bodyPr rtlCol="0" anchor="ctr"/>
+          <a:lstStyle/>
+          <a:p>
+            <a:pPr algn="ctr"/>
+          </a:p>
+        </p:txBody>
+      </p:sp>
+      <p:sp>
+        <p:nvSpPr>
+          <p:cNvPr id="4" name="TextBox 3"/>
+          <p:cNvSpPr txBox="1"/>
+          <p:nvPr/>
+        </p:nvSpPr>
+        <p:spPr>
+          <a:xfrm>
+            <a:off x="457200" y="164592"/>
+            <a:ext cx="11277295" cy="502920"/>
+          </a:xfrm>
+          <a:prstGeom prst="rect">
+            <a:avLst/>
+          </a:prstGeom>
+          <a:noFill/>
+        </p:spPr>
+        <p:txBody>
+          <a:bodyPr wrap="square">
+            <a:spAutoFit/>
+          </a:bodyPr>
+          <a:lstStyle/>
+          <a:p>
+            <a:r>
+              <a:rPr sz="2600" b="1" i="0">
+                <a:solidFill>
+                  <a:srgbClr val="FFFFFF"/>
+                </a:solidFill>
+                <a:latin typeface="Calibri"/>
+              </a:rPr>
+              <a:t>El cierre del curso: veinte minutos que no son un discurso (1/2)</a:t>
+            </a:r>
+          </a:p>
+        </p:txBody>
+      </p:sp>
+      <p:sp>
+        <p:nvSpPr>
+          <p:cNvPr id="5" name="TextBox 4"/>
+          <p:cNvSpPr txBox="1"/>
+          <p:nvPr/>
+        </p:nvSpPr>
+        <p:spPr>
+          <a:xfrm>
+            <a:off x="457200" y="1170432"/>
+            <a:ext cx="11277295" cy="5230368"/>
+          </a:xfrm>
+          <a:prstGeom prst="rect">
+            <a:avLst/>
+          </a:prstGeom>
+          <a:noFill/>
+        </p:spPr>
+        <p:txBody>
+          <a:bodyPr wrap="square">
+            <a:spAutoFit/>
+          </a:bodyPr>
+          <a:lstStyle/>
+          <a:p>
+            <a:pPr>
+              <a:spcAft>
+                <a:spcPts val="800"/>
+              </a:spcAft>
+            </a:pPr>
+            <a:r>
+              <a:rPr sz="2000" b="0" i="0">
+                <a:solidFill>
+                  <a:srgbClr val="333333"/>
+                </a:solidFill>
+                <a:latin typeface="Calibri"/>
+              </a:rPr>
+              <a:t>–   Los últimos veinte minutos se pueden desperdiciar fácilmente en un discurso de despedida. **Úselos para hacer visible el aprendizaje</a:t>
+            </a:r>
+          </a:p>
+          <a:p>
+            <a:pPr>
+              <a:spcAft>
+                <a:spcPts val="800"/>
+              </a:spcAft>
+            </a:pPr>
+            <a:r>
+              <a:rPr sz="2000" b="0" i="0">
+                <a:solidFill>
+                  <a:srgbClr val="333333"/>
+                </a:solidFill>
+                <a:latin typeface="Calibri"/>
+              </a:rPr>
+              <a:t>–   Con evidencia.** La diapositiva de antes y después es la herramienta: en la columna izquierda están las respuestas reales de la prueba diagnóstica de la sesión 1 —vale la pena tenerlas a mano de verdad, no parafraseadas— y en la derecha lo que hoy pueden sostener.</a:t>
+            </a:r>
+          </a:p>
+          <a:p>
+            <a:pPr>
+              <a:spcAft>
+                <a:spcPts val="800"/>
+              </a:spcAft>
+            </a:pPr>
+            <a:r>
+              <a:rPr sz="2000" b="0" i="0">
+                <a:solidFill>
+                  <a:srgbClr val="333333"/>
+                </a:solidFill>
+                <a:latin typeface="Calibri"/>
+              </a:rPr>
+              <a:t>–   El punto que hay que hacer explícito, y que es la diferencia entre una clase y un curso: </a:t>
+            </a:r>
+            <a:r>
+              <a:rPr sz="2000" b="1" i="0">
+                <a:solidFill>
+                  <a:srgbClr val="333333"/>
+                </a:solidFill>
+                <a:latin typeface="Calibri"/>
+              </a:rPr>
+              <a:t>cada frase de la columna derecha está sostenida por una sección de su propio informe.</a:t>
+            </a:r>
+            <a:r>
+              <a:rPr sz="2000" b="0" i="0">
+                <a:solidFill>
+                  <a:srgbClr val="333333"/>
+                </a:solidFill>
+                <a:latin typeface="Calibri"/>
+              </a:rPr>
+              <a:t> «Toda decisión sacrifica algo» no es una frase aprendida: está en la sección 6, escrita por ellos, con una matriz detrás.</a:t>
+            </a:r>
+          </a:p>
+          <a:p>
+            <a:pPr>
+              <a:spcAft>
+                <a:spcPts val="800"/>
+              </a:spcAft>
+            </a:pPr>
+            <a:r>
+              <a:rPr sz="2000" b="0" i="0">
+                <a:solidFill>
+                  <a:srgbClr val="333333"/>
+                </a:solidFill>
+                <a:latin typeface="Calibri"/>
+              </a:rPr>
+              <a:t>–   «Hay afectados que nunca la usan» está en la sección 9, con la voluntaria que trabaja diez minutos más.</a:t>
+            </a:r>
+          </a:p>
+          <a:p>
+            <a:pPr>
+              <a:spcAft>
+                <a:spcPts val="800"/>
+              </a:spcAft>
+            </a:pPr>
+            <a:r>
+              <a:rPr sz="2000" b="0" i="0">
+                <a:solidFill>
+                  <a:srgbClr val="333333"/>
+                </a:solidFill>
+                <a:latin typeface="Calibri"/>
+              </a:rPr>
+              <a:t>–   Eso es lo que distingue haber entendido de haber memorizado, y conviene nombrarlo.</a:t>
+            </a:r>
+          </a:p>
+          <a:p>
+            <a:pPr>
+              <a:spcAft>
+                <a:spcPts val="800"/>
+              </a:spcAft>
+            </a:pPr>
+            <a:r>
+              <a:rPr sz="2000" b="0" i="0">
+                <a:solidFill>
+                  <a:srgbClr val="333333"/>
+                </a:solidFill>
+                <a:latin typeface="Calibri"/>
+              </a:rPr>
+              <a:t>–   Conecte con los tres RAA sin recitar códigos: reconocer la ingeniería como práctica que decide bajo restricciones (RAA1), aplicar un método para definir y resolver un problema con evidencia (RAA2)</a:t>
+            </a:r>
+          </a:p>
+        </p:txBody>
+      </p:sp>
+      <p:sp>
+        <p:nvSpPr>
+          <p:cNvPr id="6" name="TextBox 5"/>
+          <p:cNvSpPr txBox="1"/>
+          <p:nvPr/>
+        </p:nvSpPr>
+        <p:spPr>
+          <a:xfrm>
+            <a:off x="11185855" y="6473952"/>
+            <a:ext cx="640080" cy="274320"/>
+          </a:xfrm>
+          <a:prstGeom prst="rect">
+            <a:avLst/>
+          </a:prstGeom>
+          <a:noFill/>
+        </p:spPr>
+        <p:txBody>
+          <a:bodyPr wrap="square">
+            <a:spAutoFit/>
+          </a:bodyPr>
+          <a:lstStyle/>
+          <a:p>
+            <a:pPr algn="r"/>
+            <a:r>
+              <a:rPr sz="1100" b="0" i="0">
+                <a:solidFill>
+                  <a:srgbClr val="666666"/>
+                </a:solidFill>
+                <a:latin typeface="Calibri"/>
+              </a:rPr>
+              <a:t>18</a:t>
+            </a:r>
+          </a:p>
+        </p:txBody>
+      </p:sp>
+    </p:spTree>
+  </p:cSld>
+  <p:clrMapOvr>
+    <a:masterClrMapping/>
+  </p:clrMapOvr>
+</p:sld>
+</file>
+
+<file path=ppt/slides/slide19.xml><?xml version="1.0" encoding="utf-8"?>
+<p:sld xmlns:a="http://schemas.openxmlformats.org/drawingml/2006/main" xmlns:p="http://schemas.openxmlformats.org/presentationml/2006/main" xmlns:r="http://schemas.openxmlformats.org/officeDocument/2006/relationships">
+  <p:cSld>
+    <p:bg>
+      <p:bgPr>
+        <a:solidFill>
+          <a:srgbClr val="FFFFFF"/>
+        </a:solidFill>
+        <a:effectLst/>
+      </p:bgPr>
+    </p:bg>
+    <p:spTree>
+      <p:nvGrpSpPr>
+        <p:cNvPr id="1" name=""/>
+        <p:cNvGrpSpPr/>
+        <p:nvPr/>
+      </p:nvGrpSpPr>
+      <p:grpSpPr/>
+      <p:sp>
+        <p:nvSpPr>
+          <p:cNvPr id="2" name="Rectangle 1"/>
+          <p:cNvSpPr/>
+          <p:nvPr/>
+        </p:nvSpPr>
+        <p:spPr>
+          <a:xfrm>
+            <a:off x="0" y="0"/>
+            <a:ext cx="12191695" cy="960120"/>
+          </a:xfrm>
+          <a:prstGeom prst="rect">
+            <a:avLst/>
+          </a:prstGeom>
+          <a:solidFill>
+            <a:srgbClr val="095292"/>
+          </a:solidFill>
+          <a:ln>
+            <a:noFill/>
+          </a:ln>
+        </p:spPr>
+        <p:style>
+          <a:lnRef idx="1">
+            <a:schemeClr val="accent1"/>
+          </a:lnRef>
+          <a:fillRef idx="3">
+            <a:schemeClr val="accent1"/>
+          </a:fillRef>
+          <a:effectRef idx="2">
+            <a:schemeClr val="accent1"/>
+          </a:effectRef>
+          <a:fontRef idx="minor">
+            <a:schemeClr val="lt1"/>
+          </a:fontRef>
+        </p:style>
+        <p:txBody>
+          <a:bodyPr rtlCol="0" anchor="ctr"/>
+          <a:lstStyle/>
+          <a:p>
+            <a:pPr algn="ctr"/>
+          </a:p>
+        </p:txBody>
+      </p:sp>
+      <p:sp>
+        <p:nvSpPr>
+          <p:cNvPr id="3" name="Rectangle 2"/>
+          <p:cNvSpPr/>
+          <p:nvPr/>
+        </p:nvSpPr>
+        <p:spPr>
+          <a:xfrm>
+            <a:off x="0" y="960120"/>
+            <a:ext cx="12191695" cy="41148"/>
+          </a:xfrm>
+          <a:prstGeom prst="rect">
+            <a:avLst/>
+          </a:prstGeom>
+          <a:solidFill>
+            <a:srgbClr val="FFD000"/>
+          </a:solidFill>
+          <a:ln>
+            <a:noFill/>
+          </a:ln>
+        </p:spPr>
+        <p:style>
+          <a:lnRef idx="1">
+            <a:schemeClr val="accent1"/>
+          </a:lnRef>
+          <a:fillRef idx="3">
+            <a:schemeClr val="accent1"/>
+          </a:fillRef>
+          <a:effectRef idx="2">
+            <a:schemeClr val="accent1"/>
+          </a:effectRef>
+          <a:fontRef idx="minor">
+            <a:schemeClr val="lt1"/>
+          </a:fontRef>
+        </p:style>
+        <p:txBody>
+          <a:bodyPr rtlCol="0" anchor="ctr"/>
+          <a:lstStyle/>
+          <a:p>
+            <a:pPr algn="ctr"/>
+          </a:p>
+        </p:txBody>
+      </p:sp>
+      <p:sp>
+        <p:nvSpPr>
+          <p:cNvPr id="4" name="TextBox 3"/>
+          <p:cNvSpPr txBox="1"/>
+          <p:nvPr/>
+        </p:nvSpPr>
+        <p:spPr>
+          <a:xfrm>
+            <a:off x="457200" y="164592"/>
+            <a:ext cx="11277295" cy="502920"/>
+          </a:xfrm>
+          <a:prstGeom prst="rect">
+            <a:avLst/>
+          </a:prstGeom>
+          <a:noFill/>
+        </p:spPr>
+        <p:txBody>
+          <a:bodyPr wrap="square">
+            <a:spAutoFit/>
+          </a:bodyPr>
+          <a:lstStyle/>
+          <a:p>
+            <a:r>
+              <a:rPr sz="2600" b="1" i="0">
+                <a:solidFill>
+                  <a:srgbClr val="FFFFFF"/>
+                </a:solidFill>
+                <a:latin typeface="Calibri"/>
+              </a:rPr>
+              <a:t>El cierre del curso: veinte minutos que no son un discurso (2/2)</a:t>
+            </a:r>
+          </a:p>
+        </p:txBody>
+      </p:sp>
+      <p:sp>
+        <p:nvSpPr>
+          <p:cNvPr id="5" name="TextBox 4"/>
+          <p:cNvSpPr txBox="1"/>
+          <p:nvPr/>
+        </p:nvSpPr>
+        <p:spPr>
+          <a:xfrm>
+            <a:off x="457200" y="1170432"/>
+            <a:ext cx="11277295" cy="5230368"/>
+          </a:xfrm>
+          <a:prstGeom prst="rect">
+            <a:avLst/>
+          </a:prstGeom>
+          <a:noFill/>
+        </p:spPr>
+        <p:txBody>
+          <a:bodyPr wrap="square">
+            <a:spAutoFit/>
+          </a:bodyPr>
+          <a:lstStyle/>
+          <a:p>
+            <a:pPr>
+              <a:spcAft>
+                <a:spcPts val="800"/>
+              </a:spcAft>
+            </a:pPr>
+            <a:r>
+              <a:rPr sz="2000" b="0" i="0">
+                <a:solidFill>
+                  <a:srgbClr val="333333"/>
+                </a:solidFill>
+                <a:latin typeface="Calibri"/>
+              </a:rPr>
+              <a:t>–   Y valorar las consecuencias sociales y ambientales de una solución (RAA3).</a:t>
+            </a:r>
+          </a:p>
+          <a:p>
+            <a:pPr>
+              <a:spcAft>
+                <a:spcPts val="800"/>
+              </a:spcAft>
+            </a:pPr>
+            <a:r>
+              <a:rPr sz="2000" b="0" i="0">
+                <a:solidFill>
+                  <a:srgbClr val="333333"/>
+                </a:solidFill>
+                <a:latin typeface="Calibri"/>
+              </a:rPr>
+              <a:t>–   Los tres se pueden verificar en el informe que acaban de entregar, y esa verificabilidad es el sentido de haber trabajado por proyecto.</a:t>
+            </a:r>
+          </a:p>
+          <a:p>
+            <a:pPr>
+              <a:spcAft>
+                <a:spcPts val="800"/>
+              </a:spcAft>
+            </a:pPr>
+            <a:r>
+              <a:rPr sz="2000" b="0" i="0">
+                <a:solidFill>
+                  <a:srgbClr val="333333"/>
+                </a:solidFill>
+                <a:latin typeface="Calibri"/>
+              </a:rPr>
+              <a:t>–   Cierre con dos cosas concretas y ninguna solemne.</a:t>
+            </a:r>
+          </a:p>
+          <a:p>
+            <a:pPr>
+              <a:spcAft>
+                <a:spcPts val="800"/>
+              </a:spcAft>
+            </a:pPr>
+            <a:r>
+              <a:rPr sz="2000" b="0" i="0">
+                <a:solidFill>
+                  <a:srgbClr val="333333"/>
+                </a:solidFill>
+                <a:latin typeface="Calibri"/>
+              </a:rPr>
+              <a:t>–   La primera: </a:t>
+            </a:r>
+            <a:r>
+              <a:rPr sz="2000" b="1" i="0">
+                <a:solidFill>
+                  <a:srgbClr val="333333"/>
+                </a:solidFill>
+                <a:latin typeface="Calibri"/>
+              </a:rPr>
+              <a:t>lo que se llevan es un método, no un tema.</a:t>
+            </a:r>
+            <a:r>
+              <a:rPr sz="2000" b="0" i="0">
+                <a:solidFill>
+                  <a:srgbClr val="333333"/>
+                </a:solidFill>
+                <a:latin typeface="Calibri"/>
+              </a:rPr>
+              <a:t> Definir un problema con evidencia, revisar qué existe, decidir con criterios</a:t>
+            </a:r>
+          </a:p>
+          <a:p>
+            <a:pPr>
+              <a:spcAft>
+                <a:spcPts val="800"/>
+              </a:spcAft>
+            </a:pPr>
+            <a:r>
+              <a:rPr sz="2000" b="0" i="0">
+                <a:solidFill>
+                  <a:srgbClr val="333333"/>
+                </a:solidFill>
+                <a:latin typeface="Calibri"/>
+              </a:rPr>
+              <a:t>–   Probar con personas reales y mirar a quién afecta — eso sirve igual para un trabajo de otra asignatura, para un proyecto de grado y para el primer empleo.</a:t>
+            </a:r>
+          </a:p>
+          <a:p>
+            <a:pPr>
+              <a:spcAft>
+                <a:spcPts val="800"/>
+              </a:spcAft>
+            </a:pPr>
+            <a:r>
+              <a:rPr sz="2000" b="0" i="0">
+                <a:solidFill>
+                  <a:srgbClr val="333333"/>
+                </a:solidFill>
+                <a:latin typeface="Calibri"/>
+              </a:rPr>
+              <a:t>–   La segunda: </a:t>
+            </a:r>
+            <a:r>
+              <a:rPr sz="2000" b="1" i="0">
+                <a:solidFill>
+                  <a:srgbClr val="333333"/>
+                </a:solidFill>
+                <a:latin typeface="Calibri"/>
+              </a:rPr>
+              <a:t>el proyecto queda como evidencia.</a:t>
+            </a:r>
+            <a:r>
+              <a:rPr sz="2000" b="0" i="0">
+                <a:solidFill>
+                  <a:srgbClr val="333333"/>
+                </a:solidFill>
+                <a:latin typeface="Calibri"/>
+              </a:rPr>
+              <a:t> Es un trabajo completo, documentado y con su propio prototipo, hecho en primer semestre; el documento y las capturas quedan en la carpeta y valen para un portafolio.</a:t>
+            </a:r>
+          </a:p>
+          <a:p>
+            <a:pPr>
+              <a:spcAft>
+                <a:spcPts val="800"/>
+              </a:spcAft>
+            </a:pPr>
+            <a:r>
+              <a:rPr sz="2000" b="0" i="0">
+                <a:solidFill>
+                  <a:srgbClr val="333333"/>
+                </a:solidFill>
+                <a:latin typeface="Calibri"/>
+              </a:rPr>
+              <a:t>–   Y una recomendación práctica de despedida, corta: </a:t>
+            </a:r>
+            <a:r>
+              <a:rPr sz="2000" b="1" i="0">
+                <a:solidFill>
+                  <a:srgbClr val="333333"/>
+                </a:solidFill>
+                <a:latin typeface="Calibri"/>
+              </a:rPr>
+              <a:t>el siguiente paso de su proyecto está escrito en la sección 10.</a:t>
+            </a:r>
+            <a:r>
+              <a:rPr sz="2000" b="0" i="0">
+                <a:solidFill>
+                  <a:srgbClr val="333333"/>
+                </a:solidFill>
+                <a:latin typeface="Calibri"/>
+              </a:rPr>
+              <a:t> Si alguno quiere continuarlo, no tiene que empezar por decidir qué hacer; ya lo decidió.</a:t>
+            </a:r>
+          </a:p>
+        </p:txBody>
+      </p:sp>
+      <p:sp>
+        <p:nvSpPr>
+          <p:cNvPr id="6" name="TextBox 5"/>
+          <p:cNvSpPr txBox="1"/>
+          <p:nvPr/>
+        </p:nvSpPr>
+        <p:spPr>
+          <a:xfrm>
+            <a:off x="11185855" y="6473952"/>
+            <a:ext cx="640080" cy="274320"/>
+          </a:xfrm>
+          <a:prstGeom prst="rect">
+            <a:avLst/>
+          </a:prstGeom>
+          <a:noFill/>
+        </p:spPr>
+        <p:txBody>
+          <a:bodyPr wrap="square">
+            <a:spAutoFit/>
+          </a:bodyPr>
+          <a:lstStyle/>
+          <a:p>
+            <a:pPr algn="r"/>
+            <a:r>
+              <a:rPr sz="1100" b="0" i="0">
+                <a:solidFill>
+                  <a:srgbClr val="666666"/>
+                </a:solidFill>
+                <a:latin typeface="Calibri"/>
+              </a:rPr>
+              <a:t>19</a:t>
             </a:r>
           </a:p>
         </p:txBody>
@@ -7860,6 +8423,2726 @@
                 <a:latin typeface="Calibri"/>
               </a:rPr>
               <a:t>2</a:t>
+            </a:r>
+          </a:p>
+        </p:txBody>
+      </p:sp>
+    </p:spTree>
+  </p:cSld>
+  <p:clrMapOvr>
+    <a:masterClrMapping/>
+  </p:clrMapOvr>
+</p:sld>
+</file>
+
+<file path=ppt/slides/slide20.xml><?xml version="1.0" encoding="utf-8"?>
+<p:sld xmlns:a="http://schemas.openxmlformats.org/drawingml/2006/main" xmlns:p="http://schemas.openxmlformats.org/presentationml/2006/main" xmlns:r="http://schemas.openxmlformats.org/officeDocument/2006/relationships">
+  <p:cSld>
+    <p:bg>
+      <p:bgPr>
+        <a:solidFill>
+          <a:srgbClr val="FFFFFF"/>
+        </a:solidFill>
+        <a:effectLst/>
+      </p:bgPr>
+    </p:bg>
+    <p:spTree>
+      <p:nvGrpSpPr>
+        <p:cNvPr id="1" name=""/>
+        <p:cNvGrpSpPr/>
+        <p:nvPr/>
+      </p:nvGrpSpPr>
+      <p:grpSpPr/>
+      <p:sp>
+        <p:nvSpPr>
+          <p:cNvPr id="2" name="Rectangle 1"/>
+          <p:cNvSpPr/>
+          <p:nvPr/>
+        </p:nvSpPr>
+        <p:spPr>
+          <a:xfrm>
+            <a:off x="0" y="0"/>
+            <a:ext cx="12191695" cy="1170432"/>
+          </a:xfrm>
+          <a:prstGeom prst="rect">
+            <a:avLst/>
+          </a:prstGeom>
+          <a:solidFill>
+            <a:srgbClr val="095292"/>
+          </a:solidFill>
+          <a:ln>
+            <a:noFill/>
+          </a:ln>
+        </p:spPr>
+        <p:style>
+          <a:lnRef idx="1">
+            <a:schemeClr val="accent1"/>
+          </a:lnRef>
+          <a:fillRef idx="3">
+            <a:schemeClr val="accent1"/>
+          </a:fillRef>
+          <a:effectRef idx="2">
+            <a:schemeClr val="accent1"/>
+          </a:effectRef>
+          <a:fontRef idx="minor">
+            <a:schemeClr val="lt1"/>
+          </a:fontRef>
+        </p:style>
+        <p:txBody>
+          <a:bodyPr rtlCol="0" anchor="ctr"/>
+          <a:lstStyle/>
+          <a:p>
+            <a:pPr algn="ctr"/>
+          </a:p>
+        </p:txBody>
+      </p:sp>
+      <p:sp>
+        <p:nvSpPr>
+          <p:cNvPr id="3" name="Rectangle 2"/>
+          <p:cNvSpPr/>
+          <p:nvPr/>
+        </p:nvSpPr>
+        <p:spPr>
+          <a:xfrm>
+            <a:off x="0" y="1170432"/>
+            <a:ext cx="12191695" cy="41148"/>
+          </a:xfrm>
+          <a:prstGeom prst="rect">
+            <a:avLst/>
+          </a:prstGeom>
+          <a:solidFill>
+            <a:srgbClr val="FFD000"/>
+          </a:solidFill>
+          <a:ln>
+            <a:noFill/>
+          </a:ln>
+        </p:spPr>
+        <p:style>
+          <a:lnRef idx="1">
+            <a:schemeClr val="accent1"/>
+          </a:lnRef>
+          <a:fillRef idx="3">
+            <a:schemeClr val="accent1"/>
+          </a:fillRef>
+          <a:effectRef idx="2">
+            <a:schemeClr val="accent1"/>
+          </a:effectRef>
+          <a:fontRef idx="minor">
+            <a:schemeClr val="lt1"/>
+          </a:fontRef>
+        </p:style>
+        <p:txBody>
+          <a:bodyPr rtlCol="0" anchor="ctr"/>
+          <a:lstStyle/>
+          <a:p>
+            <a:pPr algn="ctr"/>
+          </a:p>
+        </p:txBody>
+      </p:sp>
+      <p:sp>
+        <p:nvSpPr>
+          <p:cNvPr id="4" name="TextBox 3"/>
+          <p:cNvSpPr txBox="1"/>
+          <p:nvPr/>
+        </p:nvSpPr>
+        <p:spPr>
+          <a:xfrm>
+            <a:off x="457200" y="164592"/>
+            <a:ext cx="11277295" cy="384048"/>
+          </a:xfrm>
+          <a:prstGeom prst="rect">
+            <a:avLst/>
+          </a:prstGeom>
+          <a:noFill/>
+        </p:spPr>
+        <p:txBody>
+          <a:bodyPr wrap="square">
+            <a:spAutoFit/>
+          </a:bodyPr>
+          <a:lstStyle/>
+          <a:p>
+            <a:r>
+              <a:rPr sz="2600" b="1" i="0">
+                <a:solidFill>
+                  <a:srgbClr val="FFFFFF"/>
+                </a:solidFill>
+                <a:latin typeface="Calibri"/>
+              </a:rPr>
+              <a:t>Taller de hoy: Informe final y autoevaluación</a:t>
+            </a:r>
+          </a:p>
+        </p:txBody>
+      </p:sp>
+      <p:sp>
+        <p:nvSpPr>
+          <p:cNvPr id="5" name="TextBox 4"/>
+          <p:cNvSpPr txBox="1"/>
+          <p:nvPr/>
+        </p:nvSpPr>
+        <p:spPr>
+          <a:xfrm>
+            <a:off x="457200" y="566928"/>
+            <a:ext cx="11277295" cy="411480"/>
+          </a:xfrm>
+          <a:prstGeom prst="rect">
+            <a:avLst/>
+          </a:prstGeom>
+          <a:noFill/>
+        </p:spPr>
+        <p:txBody>
+          <a:bodyPr wrap="square">
+            <a:spAutoFit/>
+          </a:bodyPr>
+          <a:lstStyle/>
+          <a:p>
+            <a:r>
+              <a:rPr sz="1400" b="0" i="0">
+                <a:solidFill>
+                  <a:srgbClr val="B8D8EE"/>
+                </a:solidFill>
+                <a:latin typeface="Calibri"/>
+              </a:rPr>
+              <a:t>24 min en equipos · 24 min: pegar, verificar, repartir huecos, resumen y entregar · informe final en PDF + galería en el muro + autoevaluación y coevaluación</a:t>
+            </a:r>
+          </a:p>
+        </p:txBody>
+      </p:sp>
+      <p:sp>
+        <p:nvSpPr>
+          <p:cNvPr id="6" name="Rounded Rectangle 5"/>
+          <p:cNvSpPr/>
+          <p:nvPr/>
+        </p:nvSpPr>
+        <p:spPr>
+          <a:xfrm>
+            <a:off x="457200" y="1472184"/>
+            <a:ext cx="11277295" cy="566928"/>
+          </a:xfrm>
+          <a:prstGeom prst="roundRect">
+            <a:avLst>
+              <a:gd name="adj" fmla="val 12000"/>
+            </a:avLst>
+          </a:prstGeom>
+          <a:solidFill>
+            <a:srgbClr val="F2F2F2"/>
+          </a:solidFill>
+          <a:ln>
+            <a:noFill/>
+          </a:ln>
+        </p:spPr>
+        <p:style>
+          <a:lnRef idx="1">
+            <a:schemeClr val="accent1"/>
+          </a:lnRef>
+          <a:fillRef idx="3">
+            <a:schemeClr val="accent1"/>
+          </a:fillRef>
+          <a:effectRef idx="2">
+            <a:schemeClr val="accent1"/>
+          </a:effectRef>
+          <a:fontRef idx="minor">
+            <a:schemeClr val="lt1"/>
+          </a:fontRef>
+        </p:style>
+        <p:txBody>
+          <a:bodyPr rtlCol="0" anchor="ctr"/>
+          <a:lstStyle/>
+          <a:p>
+            <a:pPr algn="ctr"/>
+          </a:p>
+        </p:txBody>
+      </p:sp>
+      <p:sp>
+        <p:nvSpPr>
+          <p:cNvPr id="7" name="Rectangle 6"/>
+          <p:cNvSpPr/>
+          <p:nvPr/>
+        </p:nvSpPr>
+        <p:spPr>
+          <a:xfrm>
+            <a:off x="640080" y="1618487"/>
+            <a:ext cx="274320" cy="274320"/>
+          </a:xfrm>
+          <a:prstGeom prst="rect">
+            <a:avLst/>
+          </a:prstGeom>
+          <a:solidFill>
+            <a:srgbClr val="FFFFFF"/>
+          </a:solidFill>
+          <a:ln>
+            <a:solidFill>
+              <a:srgbClr val="333333"/>
+            </a:solidFill>
+          </a:ln>
+        </p:spPr>
+        <p:style>
+          <a:lnRef idx="1">
+            <a:schemeClr val="accent1"/>
+          </a:lnRef>
+          <a:fillRef idx="3">
+            <a:schemeClr val="accent1"/>
+          </a:fillRef>
+          <a:effectRef idx="2">
+            <a:schemeClr val="accent1"/>
+          </a:effectRef>
+          <a:fontRef idx="minor">
+            <a:schemeClr val="lt1"/>
+          </a:fontRef>
+        </p:style>
+        <p:txBody>
+          <a:bodyPr rtlCol="0" anchor="ctr"/>
+          <a:lstStyle/>
+          <a:p>
+            <a:pPr algn="ctr"/>
+          </a:p>
+        </p:txBody>
+      </p:sp>
+      <p:sp>
+        <p:nvSpPr>
+          <p:cNvPr id="8" name="Rectangle 7"/>
+          <p:cNvSpPr/>
+          <p:nvPr/>
+        </p:nvSpPr>
+        <p:spPr>
+          <a:xfrm>
+            <a:off x="640080" y="1618487"/>
+            <a:ext cx="73152" cy="274320"/>
+          </a:xfrm>
+          <a:prstGeom prst="rect">
+            <a:avLst/>
+          </a:prstGeom>
+          <a:solidFill>
+            <a:srgbClr val="269CCB"/>
+          </a:solidFill>
+          <a:ln>
+            <a:noFill/>
+          </a:ln>
+        </p:spPr>
+        <p:style>
+          <a:lnRef idx="1">
+            <a:schemeClr val="accent1"/>
+          </a:lnRef>
+          <a:fillRef idx="3">
+            <a:schemeClr val="accent1"/>
+          </a:fillRef>
+          <a:effectRef idx="2">
+            <a:schemeClr val="accent1"/>
+          </a:effectRef>
+          <a:fontRef idx="minor">
+            <a:schemeClr val="lt1"/>
+          </a:fontRef>
+        </p:style>
+        <p:txBody>
+          <a:bodyPr rtlCol="0" anchor="ctr"/>
+          <a:lstStyle/>
+          <a:p>
+            <a:pPr algn="ctr"/>
+          </a:p>
+        </p:txBody>
+      </p:sp>
+      <p:sp>
+        <p:nvSpPr>
+          <p:cNvPr id="9" name="TextBox 8"/>
+          <p:cNvSpPr txBox="1"/>
+          <p:nvPr/>
+        </p:nvSpPr>
+        <p:spPr>
+          <a:xfrm>
+            <a:off x="1097280" y="1563624"/>
+            <a:ext cx="10362895" cy="402336"/>
+          </a:xfrm>
+          <a:prstGeom prst="rect">
+            <a:avLst/>
+          </a:prstGeom>
+          <a:noFill/>
+        </p:spPr>
+        <p:txBody>
+          <a:bodyPr wrap="square" anchor="ctr"/>
+          <a:lstStyle/>
+          <a:p>
+            <a:r>
+              <a:rPr sz="1500" b="1" i="0">
+                <a:solidFill>
+                  <a:srgbClr val="333333"/>
+                </a:solidFill>
+                <a:latin typeface="Calibri"/>
+              </a:rPr>
+              <a:t>LA LISTA DE VERIFICACIÓN DEL INFORME</a:t>
+            </a:r>
+            <a:r>
+              <a:rPr sz="1500" b="0" i="0">
+                <a:solidFill>
+                  <a:srgbClr val="333333"/>
+                </a:solidFill>
+                <a:latin typeface="Calibri"/>
+              </a:rPr>
+              <a:t> — Las </a:t>
+            </a:r>
+            <a:r>
+              <a:rPr sz="1500" b="1" i="0">
+                <a:solidFill>
+                  <a:srgbClr val="333333"/>
+                </a:solidFill>
+                <a:latin typeface="Calibri"/>
+              </a:rPr>
+              <a:t>doce secciones</a:t>
+            </a:r>
+            <a:r>
+              <a:rPr sz="1500" b="0" i="0">
+                <a:solidFill>
+                  <a:srgbClr val="333333"/>
+                </a:solidFill>
+                <a:latin typeface="Calibri"/>
+              </a:rPr>
+              <a:t> en un solo documento, cada una con lo que ya estaba escrito desde su sesión, y con el largo de la tabla.</a:t>
+            </a:r>
+          </a:p>
+        </p:txBody>
+      </p:sp>
+      <p:sp>
+        <p:nvSpPr>
+          <p:cNvPr id="10" name="Rounded Rectangle 9"/>
+          <p:cNvSpPr/>
+          <p:nvPr/>
+        </p:nvSpPr>
+        <p:spPr>
+          <a:xfrm>
+            <a:off x="457200" y="2148839"/>
+            <a:ext cx="11277295" cy="566928"/>
+          </a:xfrm>
+          <a:prstGeom prst="roundRect">
+            <a:avLst>
+              <a:gd name="adj" fmla="val 12000"/>
+            </a:avLst>
+          </a:prstGeom>
+          <a:solidFill>
+            <a:srgbClr val="F2F2F2"/>
+          </a:solidFill>
+          <a:ln>
+            <a:noFill/>
+          </a:ln>
+        </p:spPr>
+        <p:style>
+          <a:lnRef idx="1">
+            <a:schemeClr val="accent1"/>
+          </a:lnRef>
+          <a:fillRef idx="3">
+            <a:schemeClr val="accent1"/>
+          </a:fillRef>
+          <a:effectRef idx="2">
+            <a:schemeClr val="accent1"/>
+          </a:effectRef>
+          <a:fontRef idx="minor">
+            <a:schemeClr val="lt1"/>
+          </a:fontRef>
+        </p:style>
+        <p:txBody>
+          <a:bodyPr rtlCol="0" anchor="ctr"/>
+          <a:lstStyle/>
+          <a:p>
+            <a:pPr algn="ctr"/>
+          </a:p>
+        </p:txBody>
+      </p:sp>
+      <p:sp>
+        <p:nvSpPr>
+          <p:cNvPr id="11" name="Rectangle 10"/>
+          <p:cNvSpPr/>
+          <p:nvPr/>
+        </p:nvSpPr>
+        <p:spPr>
+          <a:xfrm>
+            <a:off x="640080" y="2295144"/>
+            <a:ext cx="274320" cy="274320"/>
+          </a:xfrm>
+          <a:prstGeom prst="rect">
+            <a:avLst/>
+          </a:prstGeom>
+          <a:solidFill>
+            <a:srgbClr val="FFFFFF"/>
+          </a:solidFill>
+          <a:ln>
+            <a:solidFill>
+              <a:srgbClr val="333333"/>
+            </a:solidFill>
+          </a:ln>
+        </p:spPr>
+        <p:style>
+          <a:lnRef idx="1">
+            <a:schemeClr val="accent1"/>
+          </a:lnRef>
+          <a:fillRef idx="3">
+            <a:schemeClr val="accent1"/>
+          </a:fillRef>
+          <a:effectRef idx="2">
+            <a:schemeClr val="accent1"/>
+          </a:effectRef>
+          <a:fontRef idx="minor">
+            <a:schemeClr val="lt1"/>
+          </a:fontRef>
+        </p:style>
+        <p:txBody>
+          <a:bodyPr rtlCol="0" anchor="ctr"/>
+          <a:lstStyle/>
+          <a:p>
+            <a:pPr algn="ctr"/>
+          </a:p>
+        </p:txBody>
+      </p:sp>
+      <p:sp>
+        <p:nvSpPr>
+          <p:cNvPr id="12" name="Rectangle 11"/>
+          <p:cNvSpPr/>
+          <p:nvPr/>
+        </p:nvSpPr>
+        <p:spPr>
+          <a:xfrm>
+            <a:off x="640080" y="2295144"/>
+            <a:ext cx="73152" cy="274320"/>
+          </a:xfrm>
+          <a:prstGeom prst="rect">
+            <a:avLst/>
+          </a:prstGeom>
+          <a:solidFill>
+            <a:srgbClr val="269CCB"/>
+          </a:solidFill>
+          <a:ln>
+            <a:noFill/>
+          </a:ln>
+        </p:spPr>
+        <p:style>
+          <a:lnRef idx="1">
+            <a:schemeClr val="accent1"/>
+          </a:lnRef>
+          <a:fillRef idx="3">
+            <a:schemeClr val="accent1"/>
+          </a:fillRef>
+          <a:effectRef idx="2">
+            <a:schemeClr val="accent1"/>
+          </a:effectRef>
+          <a:fontRef idx="minor">
+            <a:schemeClr val="lt1"/>
+          </a:fontRef>
+        </p:style>
+        <p:txBody>
+          <a:bodyPr rtlCol="0" anchor="ctr"/>
+          <a:lstStyle/>
+          <a:p>
+            <a:pPr algn="ctr"/>
+          </a:p>
+        </p:txBody>
+      </p:sp>
+      <p:sp>
+        <p:nvSpPr>
+          <p:cNvPr id="13" name="TextBox 12"/>
+          <p:cNvSpPr txBox="1"/>
+          <p:nvPr/>
+        </p:nvSpPr>
+        <p:spPr>
+          <a:xfrm>
+            <a:off x="1097280" y="2240279"/>
+            <a:ext cx="10362895" cy="402336"/>
+          </a:xfrm>
+          <a:prstGeom prst="rect">
+            <a:avLst/>
+          </a:prstGeom>
+          <a:noFill/>
+        </p:spPr>
+        <p:txBody>
+          <a:bodyPr wrap="square" anchor="ctr"/>
+          <a:lstStyle/>
+          <a:p>
+            <a:r>
+              <a:rPr sz="1500" b="1" i="0">
+                <a:solidFill>
+                  <a:srgbClr val="333333"/>
+                </a:solidFill>
+                <a:latin typeface="Calibri"/>
+              </a:rPr>
+              <a:t>LO QUE FALTABA Y SE COMPLETÓ HOY</a:t>
+            </a:r>
+            <a:r>
+              <a:rPr sz="1500" b="0" i="0">
+                <a:solidFill>
+                  <a:srgbClr val="333333"/>
+                </a:solidFill>
+                <a:latin typeface="Calibri"/>
+              </a:rPr>
+              <a:t> — Los huecos que se marcaron en rojo, </a:t>
+            </a:r>
+            <a:r>
+              <a:rPr sz="1500" b="1" i="0">
+                <a:solidFill>
+                  <a:srgbClr val="333333"/>
+                </a:solidFill>
+                <a:latin typeface="Calibri"/>
+              </a:rPr>
+              <a:t>quién tomó cada uno</a:t>
+            </a:r>
+            <a:r>
+              <a:rPr sz="1500" b="0" i="0">
+                <a:solidFill>
+                  <a:srgbClr val="333333"/>
+                </a:solidFill>
+                <a:latin typeface="Calibri"/>
+              </a:rPr>
+              <a:t> y qué se escribió. Incluido el </a:t>
+            </a:r>
+            <a:r>
+              <a:rPr sz="1500" b="1" i="0">
+                <a:solidFill>
+                  <a:srgbClr val="333333"/>
+                </a:solidFill>
+                <a:latin typeface="Calibri"/>
+              </a:rPr>
+              <a:t>resumen</a:t>
+            </a:r>
+            <a:r>
+              <a:rPr sz="1500" b="0" i="0">
+                <a:solidFill>
+                  <a:srgbClr val="333333"/>
+                </a:solidFill>
+                <a:latin typeface="Calibri"/>
+              </a:rPr>
+              <a:t>, que es lo único nuevo.</a:t>
+            </a:r>
+          </a:p>
+        </p:txBody>
+      </p:sp>
+      <p:sp>
+        <p:nvSpPr>
+          <p:cNvPr id="14" name="Rounded Rectangle 13"/>
+          <p:cNvSpPr/>
+          <p:nvPr/>
+        </p:nvSpPr>
+        <p:spPr>
+          <a:xfrm>
+            <a:off x="457200" y="2825496"/>
+            <a:ext cx="11277295" cy="566928"/>
+          </a:xfrm>
+          <a:prstGeom prst="roundRect">
+            <a:avLst>
+              <a:gd name="adj" fmla="val 12000"/>
+            </a:avLst>
+          </a:prstGeom>
+          <a:solidFill>
+            <a:srgbClr val="F2F2F2"/>
+          </a:solidFill>
+          <a:ln>
+            <a:noFill/>
+          </a:ln>
+        </p:spPr>
+        <p:style>
+          <a:lnRef idx="1">
+            <a:schemeClr val="accent1"/>
+          </a:lnRef>
+          <a:fillRef idx="3">
+            <a:schemeClr val="accent1"/>
+          </a:fillRef>
+          <a:effectRef idx="2">
+            <a:schemeClr val="accent1"/>
+          </a:effectRef>
+          <a:fontRef idx="minor">
+            <a:schemeClr val="lt1"/>
+          </a:fontRef>
+        </p:style>
+        <p:txBody>
+          <a:bodyPr rtlCol="0" anchor="ctr"/>
+          <a:lstStyle/>
+          <a:p>
+            <a:pPr algn="ctr"/>
+          </a:p>
+        </p:txBody>
+      </p:sp>
+      <p:sp>
+        <p:nvSpPr>
+          <p:cNvPr id="15" name="Rectangle 14"/>
+          <p:cNvSpPr/>
+          <p:nvPr/>
+        </p:nvSpPr>
+        <p:spPr>
+          <a:xfrm>
+            <a:off x="640080" y="2971800"/>
+            <a:ext cx="274320" cy="274320"/>
+          </a:xfrm>
+          <a:prstGeom prst="rect">
+            <a:avLst/>
+          </a:prstGeom>
+          <a:solidFill>
+            <a:srgbClr val="FFFFFF"/>
+          </a:solidFill>
+          <a:ln>
+            <a:solidFill>
+              <a:srgbClr val="333333"/>
+            </a:solidFill>
+          </a:ln>
+        </p:spPr>
+        <p:style>
+          <a:lnRef idx="1">
+            <a:schemeClr val="accent1"/>
+          </a:lnRef>
+          <a:fillRef idx="3">
+            <a:schemeClr val="accent1"/>
+          </a:fillRef>
+          <a:effectRef idx="2">
+            <a:schemeClr val="accent1"/>
+          </a:effectRef>
+          <a:fontRef idx="minor">
+            <a:schemeClr val="lt1"/>
+          </a:fontRef>
+        </p:style>
+        <p:txBody>
+          <a:bodyPr rtlCol="0" anchor="ctr"/>
+          <a:lstStyle/>
+          <a:p>
+            <a:pPr algn="ctr"/>
+          </a:p>
+        </p:txBody>
+      </p:sp>
+      <p:sp>
+        <p:nvSpPr>
+          <p:cNvPr id="16" name="Rectangle 15"/>
+          <p:cNvSpPr/>
+          <p:nvPr/>
+        </p:nvSpPr>
+        <p:spPr>
+          <a:xfrm>
+            <a:off x="640080" y="2971800"/>
+            <a:ext cx="73152" cy="274320"/>
+          </a:xfrm>
+          <a:prstGeom prst="rect">
+            <a:avLst/>
+          </a:prstGeom>
+          <a:solidFill>
+            <a:srgbClr val="269CCB"/>
+          </a:solidFill>
+          <a:ln>
+            <a:noFill/>
+          </a:ln>
+        </p:spPr>
+        <p:style>
+          <a:lnRef idx="1">
+            <a:schemeClr val="accent1"/>
+          </a:lnRef>
+          <a:fillRef idx="3">
+            <a:schemeClr val="accent1"/>
+          </a:fillRef>
+          <a:effectRef idx="2">
+            <a:schemeClr val="accent1"/>
+          </a:effectRef>
+          <a:fontRef idx="minor">
+            <a:schemeClr val="lt1"/>
+          </a:fontRef>
+        </p:style>
+        <p:txBody>
+          <a:bodyPr rtlCol="0" anchor="ctr"/>
+          <a:lstStyle/>
+          <a:p>
+            <a:pPr algn="ctr"/>
+          </a:p>
+        </p:txBody>
+      </p:sp>
+      <p:sp>
+        <p:nvSpPr>
+          <p:cNvPr id="17" name="TextBox 16"/>
+          <p:cNvSpPr txBox="1"/>
+          <p:nvPr/>
+        </p:nvSpPr>
+        <p:spPr>
+          <a:xfrm>
+            <a:off x="1097280" y="2916936"/>
+            <a:ext cx="10362895" cy="402336"/>
+          </a:xfrm>
+          <a:prstGeom prst="rect">
+            <a:avLst/>
+          </a:prstGeom>
+          <a:noFill/>
+        </p:spPr>
+        <p:txBody>
+          <a:bodyPr wrap="square" anchor="ctr"/>
+          <a:lstStyle/>
+          <a:p>
+            <a:r>
+              <a:rPr sz="1500" b="1" i="0">
+                <a:solidFill>
+                  <a:srgbClr val="333333"/>
+                </a:solidFill>
+                <a:latin typeface="Calibri"/>
+              </a:rPr>
+              <a:t>LA DECLARACIÓN DEL USO DE IA</a:t>
+            </a:r>
+            <a:r>
+              <a:rPr sz="1500" b="0" i="0">
+                <a:solidFill>
+                  <a:srgbClr val="333333"/>
+                </a:solidFill>
+                <a:latin typeface="Calibri"/>
+              </a:rPr>
+              <a:t> — Qué se le pidió al asistente, </a:t>
+            </a:r>
+            <a:r>
+              <a:rPr sz="1500" b="1" i="0">
+                <a:solidFill>
+                  <a:srgbClr val="333333"/>
+                </a:solidFill>
+                <a:latin typeface="Calibri"/>
+              </a:rPr>
+              <a:t>qué se corrigió a mano</a:t>
+            </a:r>
+            <a:r>
+              <a:rPr sz="1500" b="0" i="0">
+                <a:solidFill>
+                  <a:srgbClr val="333333"/>
+                </a:solidFill>
+                <a:latin typeface="Calibri"/>
+              </a:rPr>
+              <a:t> y </a:t>
+            </a:r>
+            <a:r>
+              <a:rPr sz="1500" b="1" i="0">
+                <a:solidFill>
+                  <a:srgbClr val="333333"/>
+                </a:solidFill>
+                <a:latin typeface="Calibri"/>
+              </a:rPr>
+              <a:t>qué no se le entregó</a:t>
+            </a:r>
+            <a:r>
+              <a:rPr sz="1500" b="0" i="0">
+                <a:solidFill>
+                  <a:srgbClr val="333333"/>
+                </a:solidFill>
+                <a:latin typeface="Calibri"/>
+              </a:rPr>
+              <a:t>. Si no se usó, se dice que no se usó.</a:t>
+            </a:r>
+          </a:p>
+        </p:txBody>
+      </p:sp>
+      <p:sp>
+        <p:nvSpPr>
+          <p:cNvPr id="18" name="Rounded Rectangle 17"/>
+          <p:cNvSpPr/>
+          <p:nvPr/>
+        </p:nvSpPr>
+        <p:spPr>
+          <a:xfrm>
+            <a:off x="457200" y="3502152"/>
+            <a:ext cx="11277295" cy="566928"/>
+          </a:xfrm>
+          <a:prstGeom prst="roundRect">
+            <a:avLst>
+              <a:gd name="adj" fmla="val 12000"/>
+            </a:avLst>
+          </a:prstGeom>
+          <a:solidFill>
+            <a:srgbClr val="F2F2F2"/>
+          </a:solidFill>
+          <a:ln>
+            <a:noFill/>
+          </a:ln>
+        </p:spPr>
+        <p:style>
+          <a:lnRef idx="1">
+            <a:schemeClr val="accent1"/>
+          </a:lnRef>
+          <a:fillRef idx="3">
+            <a:schemeClr val="accent1"/>
+          </a:fillRef>
+          <a:effectRef idx="2">
+            <a:schemeClr val="accent1"/>
+          </a:effectRef>
+          <a:fontRef idx="minor">
+            <a:schemeClr val="lt1"/>
+          </a:fontRef>
+        </p:style>
+        <p:txBody>
+          <a:bodyPr rtlCol="0" anchor="ctr"/>
+          <a:lstStyle/>
+          <a:p>
+            <a:pPr algn="ctr"/>
+          </a:p>
+        </p:txBody>
+      </p:sp>
+      <p:sp>
+        <p:nvSpPr>
+          <p:cNvPr id="19" name="Rectangle 18"/>
+          <p:cNvSpPr/>
+          <p:nvPr/>
+        </p:nvSpPr>
+        <p:spPr>
+          <a:xfrm>
+            <a:off x="640080" y="3648456"/>
+            <a:ext cx="274320" cy="274320"/>
+          </a:xfrm>
+          <a:prstGeom prst="rect">
+            <a:avLst/>
+          </a:prstGeom>
+          <a:solidFill>
+            <a:srgbClr val="FFFFFF"/>
+          </a:solidFill>
+          <a:ln>
+            <a:solidFill>
+              <a:srgbClr val="333333"/>
+            </a:solidFill>
+          </a:ln>
+        </p:spPr>
+        <p:style>
+          <a:lnRef idx="1">
+            <a:schemeClr val="accent1"/>
+          </a:lnRef>
+          <a:fillRef idx="3">
+            <a:schemeClr val="accent1"/>
+          </a:fillRef>
+          <a:effectRef idx="2">
+            <a:schemeClr val="accent1"/>
+          </a:effectRef>
+          <a:fontRef idx="minor">
+            <a:schemeClr val="lt1"/>
+          </a:fontRef>
+        </p:style>
+        <p:txBody>
+          <a:bodyPr rtlCol="0" anchor="ctr"/>
+          <a:lstStyle/>
+          <a:p>
+            <a:pPr algn="ctr"/>
+          </a:p>
+        </p:txBody>
+      </p:sp>
+      <p:sp>
+        <p:nvSpPr>
+          <p:cNvPr id="20" name="Rectangle 19"/>
+          <p:cNvSpPr/>
+          <p:nvPr/>
+        </p:nvSpPr>
+        <p:spPr>
+          <a:xfrm>
+            <a:off x="640080" y="3648456"/>
+            <a:ext cx="73152" cy="274320"/>
+          </a:xfrm>
+          <a:prstGeom prst="rect">
+            <a:avLst/>
+          </a:prstGeom>
+          <a:solidFill>
+            <a:srgbClr val="269CCB"/>
+          </a:solidFill>
+          <a:ln>
+            <a:noFill/>
+          </a:ln>
+        </p:spPr>
+        <p:style>
+          <a:lnRef idx="1">
+            <a:schemeClr val="accent1"/>
+          </a:lnRef>
+          <a:fillRef idx="3">
+            <a:schemeClr val="accent1"/>
+          </a:fillRef>
+          <a:effectRef idx="2">
+            <a:schemeClr val="accent1"/>
+          </a:effectRef>
+          <a:fontRef idx="minor">
+            <a:schemeClr val="lt1"/>
+          </a:fontRef>
+        </p:style>
+        <p:txBody>
+          <a:bodyPr rtlCol="0" anchor="ctr"/>
+          <a:lstStyle/>
+          <a:p>
+            <a:pPr algn="ctr"/>
+          </a:p>
+        </p:txBody>
+      </p:sp>
+      <p:sp>
+        <p:nvSpPr>
+          <p:cNvPr id="21" name="TextBox 20"/>
+          <p:cNvSpPr txBox="1"/>
+          <p:nvPr/>
+        </p:nvSpPr>
+        <p:spPr>
+          <a:xfrm>
+            <a:off x="1097280" y="3593592"/>
+            <a:ext cx="10362895" cy="402336"/>
+          </a:xfrm>
+          <a:prstGeom prst="rect">
+            <a:avLst/>
+          </a:prstGeom>
+          <a:noFill/>
+        </p:spPr>
+        <p:txBody>
+          <a:bodyPr wrap="square" anchor="ctr"/>
+          <a:lstStyle/>
+          <a:p>
+            <a:r>
+              <a:rPr sz="1500" b="1" i="0">
+                <a:solidFill>
+                  <a:srgbClr val="333333"/>
+                </a:solidFill>
+                <a:latin typeface="Calibri"/>
+              </a:rPr>
+              <a:t>LA AUTOEVALUACIÓN INDIVIDUAL</a:t>
+            </a:r>
+            <a:r>
+              <a:rPr sz="1500" b="0" i="0">
+                <a:solidFill>
+                  <a:srgbClr val="333333"/>
+                </a:solidFill>
+                <a:latin typeface="Calibri"/>
+              </a:rPr>
+              <a:t> — Cuatro respuestas </a:t>
+            </a:r>
+            <a:r>
+              <a:rPr sz="1500" b="1" i="0">
+                <a:solidFill>
+                  <a:srgbClr val="333333"/>
+                </a:solidFill>
+                <a:latin typeface="Calibri"/>
+              </a:rPr>
+              <a:t>con evidencia</a:t>
+            </a:r>
+            <a:r>
+              <a:rPr sz="1500" b="0" i="0">
+                <a:solidFill>
+                  <a:srgbClr val="333333"/>
+                </a:solidFill>
+                <a:latin typeface="Calibri"/>
+              </a:rPr>
+              <a:t>: qué hice yo · qué aprendí a hacer que no sabía · en qué fallé · qué haría distinto. </a:t>
+            </a:r>
+            <a:r>
+              <a:rPr sz="1500" b="1" i="0">
+                <a:solidFill>
+                  <a:srgbClr val="333333"/>
+                </a:solidFill>
+                <a:latin typeface="Calibri"/>
+              </a:rPr>
+              <a:t>Solo para el docente.</a:t>
+            </a:r>
+          </a:p>
+        </p:txBody>
+      </p:sp>
+      <p:sp>
+        <p:nvSpPr>
+          <p:cNvPr id="22" name="Rounded Rectangle 21"/>
+          <p:cNvSpPr/>
+          <p:nvPr/>
+        </p:nvSpPr>
+        <p:spPr>
+          <a:xfrm>
+            <a:off x="457200" y="4178808"/>
+            <a:ext cx="11277295" cy="566928"/>
+          </a:xfrm>
+          <a:prstGeom prst="roundRect">
+            <a:avLst>
+              <a:gd name="adj" fmla="val 12000"/>
+            </a:avLst>
+          </a:prstGeom>
+          <a:solidFill>
+            <a:srgbClr val="F2F2F2"/>
+          </a:solidFill>
+          <a:ln>
+            <a:noFill/>
+          </a:ln>
+        </p:spPr>
+        <p:style>
+          <a:lnRef idx="1">
+            <a:schemeClr val="accent1"/>
+          </a:lnRef>
+          <a:fillRef idx="3">
+            <a:schemeClr val="accent1"/>
+          </a:fillRef>
+          <a:effectRef idx="2">
+            <a:schemeClr val="accent1"/>
+          </a:effectRef>
+          <a:fontRef idx="minor">
+            <a:schemeClr val="lt1"/>
+          </a:fontRef>
+        </p:style>
+        <p:txBody>
+          <a:bodyPr rtlCol="0" anchor="ctr"/>
+          <a:lstStyle/>
+          <a:p>
+            <a:pPr algn="ctr"/>
+          </a:p>
+        </p:txBody>
+      </p:sp>
+      <p:sp>
+        <p:nvSpPr>
+          <p:cNvPr id="23" name="Rectangle 22"/>
+          <p:cNvSpPr/>
+          <p:nvPr/>
+        </p:nvSpPr>
+        <p:spPr>
+          <a:xfrm>
+            <a:off x="640080" y="4325112"/>
+            <a:ext cx="274320" cy="274320"/>
+          </a:xfrm>
+          <a:prstGeom prst="rect">
+            <a:avLst/>
+          </a:prstGeom>
+          <a:solidFill>
+            <a:srgbClr val="FFFFFF"/>
+          </a:solidFill>
+          <a:ln>
+            <a:solidFill>
+              <a:srgbClr val="333333"/>
+            </a:solidFill>
+          </a:ln>
+        </p:spPr>
+        <p:style>
+          <a:lnRef idx="1">
+            <a:schemeClr val="accent1"/>
+          </a:lnRef>
+          <a:fillRef idx="3">
+            <a:schemeClr val="accent1"/>
+          </a:fillRef>
+          <a:effectRef idx="2">
+            <a:schemeClr val="accent1"/>
+          </a:effectRef>
+          <a:fontRef idx="minor">
+            <a:schemeClr val="lt1"/>
+          </a:fontRef>
+        </p:style>
+        <p:txBody>
+          <a:bodyPr rtlCol="0" anchor="ctr"/>
+          <a:lstStyle/>
+          <a:p>
+            <a:pPr algn="ctr"/>
+          </a:p>
+        </p:txBody>
+      </p:sp>
+      <p:sp>
+        <p:nvSpPr>
+          <p:cNvPr id="24" name="Rectangle 23"/>
+          <p:cNvSpPr/>
+          <p:nvPr/>
+        </p:nvSpPr>
+        <p:spPr>
+          <a:xfrm>
+            <a:off x="640080" y="4325112"/>
+            <a:ext cx="73152" cy="274320"/>
+          </a:xfrm>
+          <a:prstGeom prst="rect">
+            <a:avLst/>
+          </a:prstGeom>
+          <a:solidFill>
+            <a:srgbClr val="269CCB"/>
+          </a:solidFill>
+          <a:ln>
+            <a:noFill/>
+          </a:ln>
+        </p:spPr>
+        <p:style>
+          <a:lnRef idx="1">
+            <a:schemeClr val="accent1"/>
+          </a:lnRef>
+          <a:fillRef idx="3">
+            <a:schemeClr val="accent1"/>
+          </a:fillRef>
+          <a:effectRef idx="2">
+            <a:schemeClr val="accent1"/>
+          </a:effectRef>
+          <a:fontRef idx="minor">
+            <a:schemeClr val="lt1"/>
+          </a:fontRef>
+        </p:style>
+        <p:txBody>
+          <a:bodyPr rtlCol="0" anchor="ctr"/>
+          <a:lstStyle/>
+          <a:p>
+            <a:pPr algn="ctr"/>
+          </a:p>
+        </p:txBody>
+      </p:sp>
+      <p:sp>
+        <p:nvSpPr>
+          <p:cNvPr id="25" name="TextBox 24"/>
+          <p:cNvSpPr txBox="1"/>
+          <p:nvPr/>
+        </p:nvSpPr>
+        <p:spPr>
+          <a:xfrm>
+            <a:off x="1097280" y="4270248"/>
+            <a:ext cx="10362895" cy="402336"/>
+          </a:xfrm>
+          <a:prstGeom prst="rect">
+            <a:avLst/>
+          </a:prstGeom>
+          <a:noFill/>
+        </p:spPr>
+        <p:txBody>
+          <a:bodyPr wrap="square" anchor="ctr"/>
+          <a:lstStyle/>
+          <a:p>
+            <a:r>
+              <a:rPr sz="1500" b="1" i="0">
+                <a:solidFill>
+                  <a:srgbClr val="333333"/>
+                </a:solidFill>
+                <a:latin typeface="Calibri"/>
+              </a:rPr>
+              <a:t>LA COEVALUACIÓN DEL EQUIPO</a:t>
+            </a:r>
+            <a:r>
+              <a:rPr sz="1500" b="0" i="0">
+                <a:solidFill>
+                  <a:srgbClr val="333333"/>
+                </a:solidFill>
+                <a:latin typeface="Calibri"/>
+              </a:rPr>
+              <a:t> — Cumplimiento de acuerdos, aporte al proyecto y disposición para ayudar, con </a:t>
+            </a:r>
+            <a:r>
+              <a:rPr sz="1500" b="1" i="0">
+                <a:solidFill>
+                  <a:srgbClr val="333333"/>
+                </a:solidFill>
+                <a:latin typeface="Calibri"/>
+              </a:rPr>
+              <a:t>observaciones y no adjetivos</a:t>
+            </a:r>
+            <a:r>
+              <a:rPr sz="1500" b="0" i="0">
+                <a:solidFill>
+                  <a:srgbClr val="333333"/>
+                </a:solidFill>
+                <a:latin typeface="Calibri"/>
+              </a:rPr>
+              <a:t>.</a:t>
+            </a:r>
+          </a:p>
+        </p:txBody>
+      </p:sp>
+      <p:sp>
+        <p:nvSpPr>
+          <p:cNvPr id="26" name="TextBox 25"/>
+          <p:cNvSpPr txBox="1"/>
+          <p:nvPr/>
+        </p:nvSpPr>
+        <p:spPr>
+          <a:xfrm>
+            <a:off x="11185855" y="6473952"/>
+            <a:ext cx="640080" cy="274320"/>
+          </a:xfrm>
+          <a:prstGeom prst="rect">
+            <a:avLst/>
+          </a:prstGeom>
+          <a:noFill/>
+        </p:spPr>
+        <p:txBody>
+          <a:bodyPr wrap="square">
+            <a:spAutoFit/>
+          </a:bodyPr>
+          <a:lstStyle/>
+          <a:p>
+            <a:pPr algn="r"/>
+            <a:r>
+              <a:rPr sz="1100" b="0" i="0">
+                <a:solidFill>
+                  <a:srgbClr val="666666"/>
+                </a:solidFill>
+                <a:latin typeface="Calibri"/>
+              </a:rPr>
+              <a:t>20</a:t>
+            </a:r>
+          </a:p>
+        </p:txBody>
+      </p:sp>
+    </p:spTree>
+  </p:cSld>
+  <p:clrMapOvr>
+    <a:masterClrMapping/>
+  </p:clrMapOvr>
+</p:sld>
+</file>
+
+<file path=ppt/slides/slide21.xml><?xml version="1.0" encoding="utf-8"?>
+<p:sld xmlns:a="http://schemas.openxmlformats.org/drawingml/2006/main" xmlns:p="http://schemas.openxmlformats.org/presentationml/2006/main" xmlns:r="http://schemas.openxmlformats.org/officeDocument/2006/relationships">
+  <p:cSld>
+    <p:bg>
+      <p:bgPr>
+        <a:solidFill>
+          <a:srgbClr val="FFFFFF"/>
+        </a:solidFill>
+        <a:effectLst/>
+      </p:bgPr>
+    </p:bg>
+    <p:spTree>
+      <p:nvGrpSpPr>
+        <p:cNvPr id="1" name=""/>
+        <p:cNvGrpSpPr/>
+        <p:nvPr/>
+      </p:nvGrpSpPr>
+      <p:grpSpPr/>
+      <p:sp>
+        <p:nvSpPr>
+          <p:cNvPr id="2" name="Rectangle 1"/>
+          <p:cNvSpPr/>
+          <p:nvPr/>
+        </p:nvSpPr>
+        <p:spPr>
+          <a:xfrm>
+            <a:off x="0" y="0"/>
+            <a:ext cx="12191695" cy="1170432"/>
+          </a:xfrm>
+          <a:prstGeom prst="rect">
+            <a:avLst/>
+          </a:prstGeom>
+          <a:solidFill>
+            <a:srgbClr val="095292"/>
+          </a:solidFill>
+          <a:ln>
+            <a:noFill/>
+          </a:ln>
+        </p:spPr>
+        <p:style>
+          <a:lnRef idx="1">
+            <a:schemeClr val="accent1"/>
+          </a:lnRef>
+          <a:fillRef idx="3">
+            <a:schemeClr val="accent1"/>
+          </a:fillRef>
+          <a:effectRef idx="2">
+            <a:schemeClr val="accent1"/>
+          </a:effectRef>
+          <a:fontRef idx="minor">
+            <a:schemeClr val="lt1"/>
+          </a:fontRef>
+        </p:style>
+        <p:txBody>
+          <a:bodyPr rtlCol="0" anchor="ctr"/>
+          <a:lstStyle/>
+          <a:p>
+            <a:pPr algn="ctr"/>
+          </a:p>
+        </p:txBody>
+      </p:sp>
+      <p:sp>
+        <p:nvSpPr>
+          <p:cNvPr id="3" name="Rectangle 2"/>
+          <p:cNvSpPr/>
+          <p:nvPr/>
+        </p:nvSpPr>
+        <p:spPr>
+          <a:xfrm>
+            <a:off x="0" y="1170432"/>
+            <a:ext cx="12191695" cy="41148"/>
+          </a:xfrm>
+          <a:prstGeom prst="rect">
+            <a:avLst/>
+          </a:prstGeom>
+          <a:solidFill>
+            <a:srgbClr val="FFD000"/>
+          </a:solidFill>
+          <a:ln>
+            <a:noFill/>
+          </a:ln>
+        </p:spPr>
+        <p:style>
+          <a:lnRef idx="1">
+            <a:schemeClr val="accent1"/>
+          </a:lnRef>
+          <a:fillRef idx="3">
+            <a:schemeClr val="accent1"/>
+          </a:fillRef>
+          <a:effectRef idx="2">
+            <a:schemeClr val="accent1"/>
+          </a:effectRef>
+          <a:fontRef idx="minor">
+            <a:schemeClr val="lt1"/>
+          </a:fontRef>
+        </p:style>
+        <p:txBody>
+          <a:bodyPr rtlCol="0" anchor="ctr"/>
+          <a:lstStyle/>
+          <a:p>
+            <a:pPr algn="ctr"/>
+          </a:p>
+        </p:txBody>
+      </p:sp>
+      <p:sp>
+        <p:nvSpPr>
+          <p:cNvPr id="4" name="TextBox 3"/>
+          <p:cNvSpPr txBox="1"/>
+          <p:nvPr/>
+        </p:nvSpPr>
+        <p:spPr>
+          <a:xfrm>
+            <a:off x="457200" y="164592"/>
+            <a:ext cx="11277295" cy="384048"/>
+          </a:xfrm>
+          <a:prstGeom prst="rect">
+            <a:avLst/>
+          </a:prstGeom>
+          <a:noFill/>
+        </p:spPr>
+        <p:txBody>
+          <a:bodyPr wrap="square">
+            <a:spAutoFit/>
+          </a:bodyPr>
+          <a:lstStyle/>
+          <a:p>
+            <a:r>
+              <a:rPr sz="2600" b="1" i="0">
+                <a:solidFill>
+                  <a:srgbClr val="FFFFFF"/>
+                </a:solidFill>
+                <a:latin typeface="Calibri"/>
+              </a:rPr>
+              <a:t>Cómo se expone en 3 minutos</a:t>
+            </a:r>
+          </a:p>
+        </p:txBody>
+      </p:sp>
+      <p:sp>
+        <p:nvSpPr>
+          <p:cNvPr id="5" name="TextBox 4"/>
+          <p:cNvSpPr txBox="1"/>
+          <p:nvPr/>
+        </p:nvSpPr>
+        <p:spPr>
+          <a:xfrm>
+            <a:off x="457200" y="566928"/>
+            <a:ext cx="11277295" cy="411480"/>
+          </a:xfrm>
+          <a:prstGeom prst="rect">
+            <a:avLst/>
+          </a:prstGeom>
+          <a:noFill/>
+        </p:spPr>
+        <p:txBody>
+          <a:bodyPr wrap="square">
+            <a:spAutoFit/>
+          </a:bodyPr>
+          <a:lstStyle/>
+          <a:p>
+            <a:r>
+              <a:rPr sz="1400" b="0" i="0">
+                <a:solidFill>
+                  <a:srgbClr val="B8D8EE"/>
+                </a:solidFill>
+                <a:latin typeface="Calibri"/>
+              </a:rPr>
+              <a:t>Habla el vocero con la pantalla ya compartida · cronómetro en pantalla · se corta al llegar a cero</a:t>
+            </a:r>
+          </a:p>
+        </p:txBody>
+      </p:sp>
+      <p:sp>
+        <p:nvSpPr>
+          <p:cNvPr id="6" name="Rounded Rectangle 5"/>
+          <p:cNvSpPr/>
+          <p:nvPr/>
+        </p:nvSpPr>
+        <p:spPr>
+          <a:xfrm>
+            <a:off x="457200" y="1659636"/>
+            <a:ext cx="11277295" cy="1051560"/>
+          </a:xfrm>
+          <a:prstGeom prst="roundRect">
+            <a:avLst>
+              <a:gd name="adj" fmla="val 12000"/>
+            </a:avLst>
+          </a:prstGeom>
+          <a:solidFill>
+            <a:srgbClr val="F2F2F2"/>
+          </a:solidFill>
+          <a:ln>
+            <a:noFill/>
+          </a:ln>
+        </p:spPr>
+        <p:style>
+          <a:lnRef idx="1">
+            <a:schemeClr val="accent1"/>
+          </a:lnRef>
+          <a:fillRef idx="3">
+            <a:schemeClr val="accent1"/>
+          </a:fillRef>
+          <a:effectRef idx="2">
+            <a:schemeClr val="accent1"/>
+          </a:effectRef>
+          <a:fontRef idx="minor">
+            <a:schemeClr val="lt1"/>
+          </a:fontRef>
+        </p:style>
+        <p:txBody>
+          <a:bodyPr rtlCol="0" anchor="ctr"/>
+          <a:lstStyle/>
+          <a:p>
+            <a:pPr algn="ctr"/>
+          </a:p>
+        </p:txBody>
+      </p:sp>
+      <p:sp>
+        <p:nvSpPr>
+          <p:cNvPr id="7" name="Rounded Rectangle 6"/>
+          <p:cNvSpPr/>
+          <p:nvPr/>
+        </p:nvSpPr>
+        <p:spPr>
+          <a:xfrm>
+            <a:off x="594360" y="1965960"/>
+            <a:ext cx="438912" cy="438912"/>
+          </a:xfrm>
+          <a:prstGeom prst="roundRect">
+            <a:avLst>
+              <a:gd name="adj" fmla="val 12000"/>
+            </a:avLst>
+          </a:prstGeom>
+          <a:solidFill>
+            <a:srgbClr val="095292"/>
+          </a:solidFill>
+          <a:ln>
+            <a:noFill/>
+          </a:ln>
+        </p:spPr>
+        <p:style>
+          <a:lnRef idx="1">
+            <a:schemeClr val="accent1"/>
+          </a:lnRef>
+          <a:fillRef idx="3">
+            <a:schemeClr val="accent1"/>
+          </a:fillRef>
+          <a:effectRef idx="2">
+            <a:schemeClr val="accent1"/>
+          </a:effectRef>
+          <a:fontRef idx="minor">
+            <a:schemeClr val="lt1"/>
+          </a:fontRef>
+        </p:style>
+        <p:txBody>
+          <a:bodyPr rtlCol="0" anchor="ctr"/>
+          <a:lstStyle/>
+          <a:p>
+            <a:pPr algn="ctr"/>
+          </a:p>
+        </p:txBody>
+      </p:sp>
+      <p:sp>
+        <p:nvSpPr>
+          <p:cNvPr id="8" name="TextBox 7"/>
+          <p:cNvSpPr txBox="1"/>
+          <p:nvPr/>
+        </p:nvSpPr>
+        <p:spPr>
+          <a:xfrm>
+            <a:off x="594360" y="1965960"/>
+            <a:ext cx="438912" cy="438912"/>
+          </a:xfrm>
+          <a:prstGeom prst="rect">
+            <a:avLst/>
+          </a:prstGeom>
+          <a:noFill/>
+        </p:spPr>
+        <p:txBody>
+          <a:bodyPr wrap="square" anchor="ctr"/>
+          <a:lstStyle/>
+          <a:p>
+            <a:pPr algn="ctr"/>
+            <a:r>
+              <a:rPr sz="1600" b="1" i="0">
+                <a:solidFill>
+                  <a:srgbClr val="FFFFFF"/>
+                </a:solidFill>
+                <a:latin typeface="Calibri"/>
+              </a:rPr>
+              <a:t>1</a:t>
+            </a:r>
+          </a:p>
+        </p:txBody>
+      </p:sp>
+      <p:sp>
+        <p:nvSpPr>
+          <p:cNvPr id="9" name="TextBox 8"/>
+          <p:cNvSpPr txBox="1"/>
+          <p:nvPr/>
+        </p:nvSpPr>
+        <p:spPr>
+          <a:xfrm>
+            <a:off x="1188720" y="1751076"/>
+            <a:ext cx="10271455" cy="886968"/>
+          </a:xfrm>
+          <a:prstGeom prst="rect">
+            <a:avLst/>
+          </a:prstGeom>
+          <a:noFill/>
+        </p:spPr>
+        <p:txBody>
+          <a:bodyPr wrap="square" anchor="ctr"/>
+          <a:lstStyle/>
+          <a:p>
+            <a:r>
+              <a:rPr sz="1500" b="1" i="0">
+                <a:solidFill>
+                  <a:srgbClr val="095292"/>
+                </a:solidFill>
+                <a:latin typeface="Calibri"/>
+              </a:rPr>
+              <a:t>Imagen 1</a:t>
+            </a:r>
+          </a:p>
+          <a:p>
+            <a:pPr>
+              <a:spcBef>
+                <a:spcPts val="200"/>
+              </a:spcBef>
+            </a:pPr>
+            <a:r>
+              <a:rPr sz="1300" b="0" i="0">
+                <a:solidFill>
+                  <a:srgbClr val="333333"/>
+                </a:solidFill>
+                <a:latin typeface="Calibri"/>
+              </a:rPr>
+              <a:t>Una pantalla del prototipo funcionando.</a:t>
+            </a:r>
+          </a:p>
+        </p:txBody>
+      </p:sp>
+      <p:sp>
+        <p:nvSpPr>
+          <p:cNvPr id="10" name="Rounded Rectangle 9"/>
+          <p:cNvSpPr/>
+          <p:nvPr/>
+        </p:nvSpPr>
+        <p:spPr>
+          <a:xfrm>
+            <a:off x="457200" y="2802636"/>
+            <a:ext cx="11277295" cy="1051560"/>
+          </a:xfrm>
+          <a:prstGeom prst="roundRect">
+            <a:avLst>
+              <a:gd name="adj" fmla="val 12000"/>
+            </a:avLst>
+          </a:prstGeom>
+          <a:solidFill>
+            <a:srgbClr val="E8F4FA"/>
+          </a:solidFill>
+          <a:ln>
+            <a:noFill/>
+          </a:ln>
+        </p:spPr>
+        <p:style>
+          <a:lnRef idx="1">
+            <a:schemeClr val="accent1"/>
+          </a:lnRef>
+          <a:fillRef idx="3">
+            <a:schemeClr val="accent1"/>
+          </a:fillRef>
+          <a:effectRef idx="2">
+            <a:schemeClr val="accent1"/>
+          </a:effectRef>
+          <a:fontRef idx="minor">
+            <a:schemeClr val="lt1"/>
+          </a:fontRef>
+        </p:style>
+        <p:txBody>
+          <a:bodyPr rtlCol="0" anchor="ctr"/>
+          <a:lstStyle/>
+          <a:p>
+            <a:pPr algn="ctr"/>
+          </a:p>
+        </p:txBody>
+      </p:sp>
+      <p:sp>
+        <p:nvSpPr>
+          <p:cNvPr id="11" name="Rounded Rectangle 10"/>
+          <p:cNvSpPr/>
+          <p:nvPr/>
+        </p:nvSpPr>
+        <p:spPr>
+          <a:xfrm>
+            <a:off x="594360" y="3108960"/>
+            <a:ext cx="438912" cy="438912"/>
+          </a:xfrm>
+          <a:prstGeom prst="roundRect">
+            <a:avLst>
+              <a:gd name="adj" fmla="val 12000"/>
+            </a:avLst>
+          </a:prstGeom>
+          <a:solidFill>
+            <a:srgbClr val="095292"/>
+          </a:solidFill>
+          <a:ln>
+            <a:noFill/>
+          </a:ln>
+        </p:spPr>
+        <p:style>
+          <a:lnRef idx="1">
+            <a:schemeClr val="accent1"/>
+          </a:lnRef>
+          <a:fillRef idx="3">
+            <a:schemeClr val="accent1"/>
+          </a:fillRef>
+          <a:effectRef idx="2">
+            <a:schemeClr val="accent1"/>
+          </a:effectRef>
+          <a:fontRef idx="minor">
+            <a:schemeClr val="lt1"/>
+          </a:fontRef>
+        </p:style>
+        <p:txBody>
+          <a:bodyPr rtlCol="0" anchor="ctr"/>
+          <a:lstStyle/>
+          <a:p>
+            <a:pPr algn="ctr"/>
+          </a:p>
+        </p:txBody>
+      </p:sp>
+      <p:sp>
+        <p:nvSpPr>
+          <p:cNvPr id="12" name="TextBox 11"/>
+          <p:cNvSpPr txBox="1"/>
+          <p:nvPr/>
+        </p:nvSpPr>
+        <p:spPr>
+          <a:xfrm>
+            <a:off x="594360" y="3108960"/>
+            <a:ext cx="438912" cy="438912"/>
+          </a:xfrm>
+          <a:prstGeom prst="rect">
+            <a:avLst/>
+          </a:prstGeom>
+          <a:noFill/>
+        </p:spPr>
+        <p:txBody>
+          <a:bodyPr wrap="square" anchor="ctr"/>
+          <a:lstStyle/>
+          <a:p>
+            <a:pPr algn="ctr"/>
+            <a:r>
+              <a:rPr sz="1600" b="1" i="0">
+                <a:solidFill>
+                  <a:srgbClr val="FFFFFF"/>
+                </a:solidFill>
+                <a:latin typeface="Calibri"/>
+              </a:rPr>
+              <a:t>2</a:t>
+            </a:r>
+          </a:p>
+        </p:txBody>
+      </p:sp>
+      <p:sp>
+        <p:nvSpPr>
+          <p:cNvPr id="13" name="TextBox 12"/>
+          <p:cNvSpPr txBox="1"/>
+          <p:nvPr/>
+        </p:nvSpPr>
+        <p:spPr>
+          <a:xfrm>
+            <a:off x="1188720" y="2894076"/>
+            <a:ext cx="10271455" cy="886968"/>
+          </a:xfrm>
+          <a:prstGeom prst="rect">
+            <a:avLst/>
+          </a:prstGeom>
+          <a:noFill/>
+        </p:spPr>
+        <p:txBody>
+          <a:bodyPr wrap="square" anchor="ctr"/>
+          <a:lstStyle/>
+          <a:p>
+            <a:r>
+              <a:rPr sz="1500" b="1" i="0">
+                <a:solidFill>
+                  <a:srgbClr val="095292"/>
+                </a:solidFill>
+                <a:latin typeface="Calibri"/>
+              </a:rPr>
+              <a:t>Imagen 2</a:t>
+            </a:r>
+          </a:p>
+          <a:p>
+            <a:pPr>
+              <a:spcBef>
+                <a:spcPts val="200"/>
+              </a:spcBef>
+            </a:pPr>
+            <a:r>
+              <a:rPr sz="1300" b="0" i="0">
+                <a:solidFill>
+                  <a:srgbClr val="333333"/>
+                </a:solidFill>
+                <a:latin typeface="Calibri"/>
+              </a:rPr>
+              <a:t>La matriz de impacto, o la diapositiva del problema con su cifra.</a:t>
+            </a:r>
+          </a:p>
+        </p:txBody>
+      </p:sp>
+      <p:sp>
+        <p:nvSpPr>
+          <p:cNvPr id="14" name="Rounded Rectangle 13"/>
+          <p:cNvSpPr/>
+          <p:nvPr/>
+        </p:nvSpPr>
+        <p:spPr>
+          <a:xfrm>
+            <a:off x="457200" y="3945636"/>
+            <a:ext cx="11277295" cy="1051560"/>
+          </a:xfrm>
+          <a:prstGeom prst="roundRect">
+            <a:avLst>
+              <a:gd name="adj" fmla="val 12000"/>
+            </a:avLst>
+          </a:prstGeom>
+          <a:solidFill>
+            <a:srgbClr val="F2F2F2"/>
+          </a:solidFill>
+          <a:ln>
+            <a:noFill/>
+          </a:ln>
+        </p:spPr>
+        <p:style>
+          <a:lnRef idx="1">
+            <a:schemeClr val="accent1"/>
+          </a:lnRef>
+          <a:fillRef idx="3">
+            <a:schemeClr val="accent1"/>
+          </a:fillRef>
+          <a:effectRef idx="2">
+            <a:schemeClr val="accent1"/>
+          </a:effectRef>
+          <a:fontRef idx="minor">
+            <a:schemeClr val="lt1"/>
+          </a:fontRef>
+        </p:style>
+        <p:txBody>
+          <a:bodyPr rtlCol="0" anchor="ctr"/>
+          <a:lstStyle/>
+          <a:p>
+            <a:pPr algn="ctr"/>
+          </a:p>
+        </p:txBody>
+      </p:sp>
+      <p:sp>
+        <p:nvSpPr>
+          <p:cNvPr id="15" name="Rounded Rectangle 14"/>
+          <p:cNvSpPr/>
+          <p:nvPr/>
+        </p:nvSpPr>
+        <p:spPr>
+          <a:xfrm>
+            <a:off x="594360" y="4251960"/>
+            <a:ext cx="438912" cy="438912"/>
+          </a:xfrm>
+          <a:prstGeom prst="roundRect">
+            <a:avLst>
+              <a:gd name="adj" fmla="val 12000"/>
+            </a:avLst>
+          </a:prstGeom>
+          <a:solidFill>
+            <a:srgbClr val="095292"/>
+          </a:solidFill>
+          <a:ln>
+            <a:noFill/>
+          </a:ln>
+        </p:spPr>
+        <p:style>
+          <a:lnRef idx="1">
+            <a:schemeClr val="accent1"/>
+          </a:lnRef>
+          <a:fillRef idx="3">
+            <a:schemeClr val="accent1"/>
+          </a:fillRef>
+          <a:effectRef idx="2">
+            <a:schemeClr val="accent1"/>
+          </a:effectRef>
+          <a:fontRef idx="minor">
+            <a:schemeClr val="lt1"/>
+          </a:fontRef>
+        </p:style>
+        <p:txBody>
+          <a:bodyPr rtlCol="0" anchor="ctr"/>
+          <a:lstStyle/>
+          <a:p>
+            <a:pPr algn="ctr"/>
+          </a:p>
+        </p:txBody>
+      </p:sp>
+      <p:sp>
+        <p:nvSpPr>
+          <p:cNvPr id="16" name="TextBox 15"/>
+          <p:cNvSpPr txBox="1"/>
+          <p:nvPr/>
+        </p:nvSpPr>
+        <p:spPr>
+          <a:xfrm>
+            <a:off x="594360" y="4251960"/>
+            <a:ext cx="438912" cy="438912"/>
+          </a:xfrm>
+          <a:prstGeom prst="rect">
+            <a:avLst/>
+          </a:prstGeom>
+          <a:noFill/>
+        </p:spPr>
+        <p:txBody>
+          <a:bodyPr wrap="square" anchor="ctr"/>
+          <a:lstStyle/>
+          <a:p>
+            <a:pPr algn="ctr"/>
+            <a:r>
+              <a:rPr sz="1600" b="1" i="0">
+                <a:solidFill>
+                  <a:srgbClr val="FFFFFF"/>
+                </a:solidFill>
+                <a:latin typeface="Calibri"/>
+              </a:rPr>
+              <a:t>3</a:t>
+            </a:r>
+          </a:p>
+        </p:txBody>
+      </p:sp>
+      <p:sp>
+        <p:nvSpPr>
+          <p:cNvPr id="17" name="TextBox 16"/>
+          <p:cNvSpPr txBox="1"/>
+          <p:nvPr/>
+        </p:nvSpPr>
+        <p:spPr>
+          <a:xfrm>
+            <a:off x="1188720" y="4037076"/>
+            <a:ext cx="10271455" cy="886968"/>
+          </a:xfrm>
+          <a:prstGeom prst="rect">
+            <a:avLst/>
+          </a:prstGeom>
+          <a:noFill/>
+        </p:spPr>
+        <p:txBody>
+          <a:bodyPr wrap="square" anchor="ctr"/>
+          <a:lstStyle/>
+          <a:p>
+            <a:r>
+              <a:rPr sz="1500" b="1" i="0">
+                <a:solidFill>
+                  <a:srgbClr val="095292"/>
+                </a:solidFill>
+                <a:latin typeface="Calibri"/>
+              </a:rPr>
+              <a:t>Cinco líneas</a:t>
+            </a:r>
+          </a:p>
+          <a:p>
+            <a:pPr>
+              <a:spcBef>
+                <a:spcPts val="200"/>
+              </a:spcBef>
+            </a:pPr>
+            <a:r>
+              <a:rPr sz="1300" b="0" i="0">
+                <a:solidFill>
+                  <a:srgbClr val="333333"/>
+                </a:solidFill>
+                <a:latin typeface="Calibri"/>
+              </a:rPr>
+              <a:t>Problema · decisión · un hallazgo · un número de impacto · siguiente paso.</a:t>
+            </a:r>
+          </a:p>
+        </p:txBody>
+      </p:sp>
+      <p:sp>
+        <p:nvSpPr>
+          <p:cNvPr id="18" name="Rounded Rectangle 17"/>
+          <p:cNvSpPr/>
+          <p:nvPr/>
+        </p:nvSpPr>
+        <p:spPr>
+          <a:xfrm>
+            <a:off x="457200" y="5088636"/>
+            <a:ext cx="11277295" cy="1051560"/>
+          </a:xfrm>
+          <a:prstGeom prst="roundRect">
+            <a:avLst>
+              <a:gd name="adj" fmla="val 12000"/>
+            </a:avLst>
+          </a:prstGeom>
+          <a:solidFill>
+            <a:srgbClr val="E8F4FA"/>
+          </a:solidFill>
+          <a:ln>
+            <a:noFill/>
+          </a:ln>
+        </p:spPr>
+        <p:style>
+          <a:lnRef idx="1">
+            <a:schemeClr val="accent1"/>
+          </a:lnRef>
+          <a:fillRef idx="3">
+            <a:schemeClr val="accent1"/>
+          </a:fillRef>
+          <a:effectRef idx="2">
+            <a:schemeClr val="accent1"/>
+          </a:effectRef>
+          <a:fontRef idx="minor">
+            <a:schemeClr val="lt1"/>
+          </a:fontRef>
+        </p:style>
+        <p:txBody>
+          <a:bodyPr rtlCol="0" anchor="ctr"/>
+          <a:lstStyle/>
+          <a:p>
+            <a:pPr algn="ctr"/>
+          </a:p>
+        </p:txBody>
+      </p:sp>
+      <p:sp>
+        <p:nvSpPr>
+          <p:cNvPr id="19" name="Rounded Rectangle 18"/>
+          <p:cNvSpPr/>
+          <p:nvPr/>
+        </p:nvSpPr>
+        <p:spPr>
+          <a:xfrm>
+            <a:off x="594360" y="5394960"/>
+            <a:ext cx="438912" cy="438912"/>
+          </a:xfrm>
+          <a:prstGeom prst="roundRect">
+            <a:avLst>
+              <a:gd name="adj" fmla="val 12000"/>
+            </a:avLst>
+          </a:prstGeom>
+          <a:solidFill>
+            <a:srgbClr val="095292"/>
+          </a:solidFill>
+          <a:ln>
+            <a:noFill/>
+          </a:ln>
+        </p:spPr>
+        <p:style>
+          <a:lnRef idx="1">
+            <a:schemeClr val="accent1"/>
+          </a:lnRef>
+          <a:fillRef idx="3">
+            <a:schemeClr val="accent1"/>
+          </a:fillRef>
+          <a:effectRef idx="2">
+            <a:schemeClr val="accent1"/>
+          </a:effectRef>
+          <a:fontRef idx="minor">
+            <a:schemeClr val="lt1"/>
+          </a:fontRef>
+        </p:style>
+        <p:txBody>
+          <a:bodyPr rtlCol="0" anchor="ctr"/>
+          <a:lstStyle/>
+          <a:p>
+            <a:pPr algn="ctr"/>
+          </a:p>
+        </p:txBody>
+      </p:sp>
+      <p:sp>
+        <p:nvSpPr>
+          <p:cNvPr id="20" name="TextBox 19"/>
+          <p:cNvSpPr txBox="1"/>
+          <p:nvPr/>
+        </p:nvSpPr>
+        <p:spPr>
+          <a:xfrm>
+            <a:off x="594360" y="5394960"/>
+            <a:ext cx="438912" cy="438912"/>
+          </a:xfrm>
+          <a:prstGeom prst="rect">
+            <a:avLst/>
+          </a:prstGeom>
+          <a:noFill/>
+        </p:spPr>
+        <p:txBody>
+          <a:bodyPr wrap="square" anchor="ctr"/>
+          <a:lstStyle/>
+          <a:p>
+            <a:pPr algn="ctr"/>
+            <a:r>
+              <a:rPr sz="1600" b="1" i="0">
+                <a:solidFill>
+                  <a:srgbClr val="FFFFFF"/>
+                </a:solidFill>
+                <a:latin typeface="Calibri"/>
+              </a:rPr>
+              <a:t>4</a:t>
+            </a:r>
+          </a:p>
+        </p:txBody>
+      </p:sp>
+      <p:sp>
+        <p:nvSpPr>
+          <p:cNvPr id="21" name="TextBox 20"/>
+          <p:cNvSpPr txBox="1"/>
+          <p:nvPr/>
+        </p:nvSpPr>
+        <p:spPr>
+          <a:xfrm>
+            <a:off x="1188720" y="5180076"/>
+            <a:ext cx="10271455" cy="886968"/>
+          </a:xfrm>
+          <a:prstGeom prst="rect">
+            <a:avLst/>
+          </a:prstGeom>
+          <a:noFill/>
+        </p:spPr>
+        <p:txBody>
+          <a:bodyPr wrap="square" anchor="ctr"/>
+          <a:lstStyle/>
+          <a:p>
+            <a:r>
+              <a:rPr sz="1500" b="1" i="0">
+                <a:solidFill>
+                  <a:srgbClr val="095292"/>
+                </a:solidFill>
+                <a:latin typeface="Calibri"/>
+              </a:rPr>
+              <a:t>Recorrido libre</a:t>
+            </a:r>
+          </a:p>
+          <a:p>
+            <a:pPr>
+              <a:spcBef>
+                <a:spcPts val="200"/>
+              </a:spcBef>
+            </a:pPr>
+            <a:r>
+              <a:rPr sz="1300" b="0" i="0">
+                <a:solidFill>
+                  <a:srgbClr val="333333"/>
+                </a:solidFill>
+                <a:latin typeface="Calibri"/>
+              </a:rPr>
+              <a:t>Cada estudiante comenta en la columna de otro equipo.</a:t>
+            </a:r>
+          </a:p>
+        </p:txBody>
+      </p:sp>
+      <p:sp>
+        <p:nvSpPr>
+          <p:cNvPr id="22" name="TextBox 21"/>
+          <p:cNvSpPr txBox="1"/>
+          <p:nvPr/>
+        </p:nvSpPr>
+        <p:spPr>
+          <a:xfrm>
+            <a:off x="11185855" y="6473952"/>
+            <a:ext cx="640080" cy="274320"/>
+          </a:xfrm>
+          <a:prstGeom prst="rect">
+            <a:avLst/>
+          </a:prstGeom>
+          <a:noFill/>
+        </p:spPr>
+        <p:txBody>
+          <a:bodyPr wrap="square">
+            <a:spAutoFit/>
+          </a:bodyPr>
+          <a:lstStyle/>
+          <a:p>
+            <a:pPr algn="r"/>
+            <a:r>
+              <a:rPr sz="1100" b="0" i="0">
+                <a:solidFill>
+                  <a:srgbClr val="666666"/>
+                </a:solidFill>
+                <a:latin typeface="Calibri"/>
+              </a:rPr>
+              <a:t>21</a:t>
+            </a:r>
+          </a:p>
+        </p:txBody>
+      </p:sp>
+    </p:spTree>
+  </p:cSld>
+  <p:clrMapOvr>
+    <a:masterClrMapping/>
+  </p:clrMapOvr>
+</p:sld>
+</file>
+
+<file path=ppt/slides/slide22.xml><?xml version="1.0" encoding="utf-8"?>
+<p:sld xmlns:a="http://schemas.openxmlformats.org/drawingml/2006/main" xmlns:p="http://schemas.openxmlformats.org/presentationml/2006/main" xmlns:r="http://schemas.openxmlformats.org/officeDocument/2006/relationships">
+  <p:cSld>
+    <p:bg>
+      <p:bgPr>
+        <a:solidFill>
+          <a:srgbClr val="FFFFFF"/>
+        </a:solidFill>
+        <a:effectLst/>
+      </p:bgPr>
+    </p:bg>
+    <p:spTree>
+      <p:nvGrpSpPr>
+        <p:cNvPr id="1" name=""/>
+        <p:cNvGrpSpPr/>
+        <p:nvPr/>
+      </p:nvGrpSpPr>
+      <p:grpSpPr/>
+      <p:sp>
+        <p:nvSpPr>
+          <p:cNvPr id="2" name="Rectangle 1"/>
+          <p:cNvSpPr/>
+          <p:nvPr/>
+        </p:nvSpPr>
+        <p:spPr>
+          <a:xfrm>
+            <a:off x="0" y="0"/>
+            <a:ext cx="12191695" cy="960120"/>
+          </a:xfrm>
+          <a:prstGeom prst="rect">
+            <a:avLst/>
+          </a:prstGeom>
+          <a:solidFill>
+            <a:srgbClr val="095292"/>
+          </a:solidFill>
+          <a:ln>
+            <a:noFill/>
+          </a:ln>
+        </p:spPr>
+        <p:style>
+          <a:lnRef idx="1">
+            <a:schemeClr val="accent1"/>
+          </a:lnRef>
+          <a:fillRef idx="3">
+            <a:schemeClr val="accent1"/>
+          </a:fillRef>
+          <a:effectRef idx="2">
+            <a:schemeClr val="accent1"/>
+          </a:effectRef>
+          <a:fontRef idx="minor">
+            <a:schemeClr val="lt1"/>
+          </a:fontRef>
+        </p:style>
+        <p:txBody>
+          <a:bodyPr rtlCol="0" anchor="ctr"/>
+          <a:lstStyle/>
+          <a:p>
+            <a:pPr algn="ctr"/>
+          </a:p>
+        </p:txBody>
+      </p:sp>
+      <p:sp>
+        <p:nvSpPr>
+          <p:cNvPr id="3" name="Rectangle 2"/>
+          <p:cNvSpPr/>
+          <p:nvPr/>
+        </p:nvSpPr>
+        <p:spPr>
+          <a:xfrm>
+            <a:off x="0" y="960120"/>
+            <a:ext cx="12191695" cy="41148"/>
+          </a:xfrm>
+          <a:prstGeom prst="rect">
+            <a:avLst/>
+          </a:prstGeom>
+          <a:solidFill>
+            <a:srgbClr val="FFD000"/>
+          </a:solidFill>
+          <a:ln>
+            <a:noFill/>
+          </a:ln>
+        </p:spPr>
+        <p:style>
+          <a:lnRef idx="1">
+            <a:schemeClr val="accent1"/>
+          </a:lnRef>
+          <a:fillRef idx="3">
+            <a:schemeClr val="accent1"/>
+          </a:fillRef>
+          <a:effectRef idx="2">
+            <a:schemeClr val="accent1"/>
+          </a:effectRef>
+          <a:fontRef idx="minor">
+            <a:schemeClr val="lt1"/>
+          </a:fontRef>
+        </p:style>
+        <p:txBody>
+          <a:bodyPr rtlCol="0" anchor="ctr"/>
+          <a:lstStyle/>
+          <a:p>
+            <a:pPr algn="ctr"/>
+          </a:p>
+        </p:txBody>
+      </p:sp>
+      <p:sp>
+        <p:nvSpPr>
+          <p:cNvPr id="4" name="TextBox 3"/>
+          <p:cNvSpPr txBox="1"/>
+          <p:nvPr/>
+        </p:nvSpPr>
+        <p:spPr>
+          <a:xfrm>
+            <a:off x="457200" y="164592"/>
+            <a:ext cx="11277295" cy="502920"/>
+          </a:xfrm>
+          <a:prstGeom prst="rect">
+            <a:avLst/>
+          </a:prstGeom>
+          <a:noFill/>
+        </p:spPr>
+        <p:txBody>
+          <a:bodyPr wrap="square">
+            <a:spAutoFit/>
+          </a:bodyPr>
+          <a:lstStyle/>
+          <a:p>
+            <a:r>
+              <a:rPr sz="2600" b="1" i="0">
+                <a:solidFill>
+                  <a:srgbClr val="FFFFFF"/>
+                </a:solidFill>
+                <a:latin typeface="Calibri"/>
+              </a:rPr>
+              <a:t>Cierre del curso</a:t>
+            </a:r>
+          </a:p>
+        </p:txBody>
+      </p:sp>
+      <p:sp>
+        <p:nvSpPr>
+          <p:cNvPr id="5" name="TextBox 4"/>
+          <p:cNvSpPr txBox="1"/>
+          <p:nvPr/>
+        </p:nvSpPr>
+        <p:spPr>
+          <a:xfrm>
+            <a:off x="457200" y="1170432"/>
+            <a:ext cx="11277295" cy="5230368"/>
+          </a:xfrm>
+          <a:prstGeom prst="rect">
+            <a:avLst/>
+          </a:prstGeom>
+          <a:noFill/>
+        </p:spPr>
+        <p:txBody>
+          <a:bodyPr wrap="square">
+            <a:spAutoFit/>
+          </a:bodyPr>
+          <a:lstStyle/>
+          <a:p>
+            <a:pPr>
+              <a:spcAft>
+                <a:spcPts val="800"/>
+              </a:spcAft>
+            </a:pPr>
+            <a:r>
+              <a:rPr sz="2000" b="0" i="0">
+                <a:solidFill>
+                  <a:srgbClr val="333333"/>
+                </a:solidFill>
+                <a:latin typeface="Calibri"/>
+              </a:rPr>
+              <a:t>–   </a:t>
+            </a:r>
+            <a:r>
+              <a:rPr sz="2000" b="1" i="0">
+                <a:solidFill>
+                  <a:srgbClr val="333333"/>
+                </a:solidFill>
+                <a:latin typeface="Calibri"/>
+              </a:rPr>
+              <a:t>Lo que queda entregado:</a:t>
+            </a:r>
+            <a:r>
+              <a:rPr sz="2000" b="0" i="0">
+                <a:solidFill>
+                  <a:srgbClr val="333333"/>
+                </a:solidFill>
+                <a:latin typeface="Calibri"/>
+              </a:rPr>
+              <a:t> el </a:t>
+            </a:r>
+            <a:r>
+              <a:rPr sz="2000" b="1" i="0">
+                <a:solidFill>
+                  <a:srgbClr val="333333"/>
+                </a:solidFill>
+                <a:latin typeface="Calibri"/>
+              </a:rPr>
+              <a:t>informe final</a:t>
+            </a:r>
+            <a:r>
+              <a:rPr sz="2000" b="0" i="0">
+                <a:solidFill>
+                  <a:srgbClr val="333333"/>
+                </a:solidFill>
+                <a:latin typeface="Calibri"/>
+              </a:rPr>
+              <a:t> con sus doce secciones (20 %), la </a:t>
+            </a:r>
+            <a:r>
+              <a:rPr sz="2000" b="1" i="0">
+                <a:solidFill>
+                  <a:srgbClr val="333333"/>
+                </a:solidFill>
+                <a:latin typeface="Calibri"/>
+              </a:rPr>
+              <a:t>exposición final</a:t>
+            </a:r>
+            <a:r>
+              <a:rPr sz="2000" b="0" i="0">
+                <a:solidFill>
+                  <a:srgbClr val="333333"/>
+                </a:solidFill>
+                <a:latin typeface="Calibri"/>
+              </a:rPr>
+              <a:t> de la Clase 15 (15 %), el prototipo probado con personas reales y la galería del curso.</a:t>
+            </a:r>
+          </a:p>
+          <a:p>
+            <a:pPr>
+              <a:spcAft>
+                <a:spcPts val="800"/>
+              </a:spcAft>
+            </a:pPr>
+            <a:r>
+              <a:rPr sz="2000" b="0" i="0">
+                <a:solidFill>
+                  <a:srgbClr val="333333"/>
+                </a:solidFill>
+                <a:latin typeface="Calibri"/>
+              </a:rPr>
+              <a:t>–   </a:t>
+            </a:r>
+            <a:r>
+              <a:rPr sz="2000" b="1" i="0">
+                <a:solidFill>
+                  <a:srgbClr val="333333"/>
+                </a:solidFill>
+                <a:latin typeface="Calibri"/>
+              </a:rPr>
+              <a:t>Autoevaluación:</a:t>
+            </a:r>
+            <a:r>
+              <a:rPr sz="2000" b="0" i="0">
+                <a:solidFill>
+                  <a:srgbClr val="333333"/>
+                </a:solidFill>
+                <a:latin typeface="Calibri"/>
+              </a:rPr>
+              <a:t> queda hecha, con evidencia y no con impresiones — junto con la coevaluación del equipo.</a:t>
+            </a:r>
+          </a:p>
+          <a:p>
+            <a:pPr>
+              <a:spcAft>
+                <a:spcPts val="800"/>
+              </a:spcAft>
+            </a:pPr>
+            <a:r>
+              <a:rPr sz="2000" b="0" i="0">
+                <a:solidFill>
+                  <a:srgbClr val="333333"/>
+                </a:solidFill>
+                <a:latin typeface="Calibri"/>
+              </a:rPr>
+              <a:t>–   </a:t>
+            </a:r>
+            <a:r>
+              <a:rPr sz="2000" b="1" i="0">
+                <a:solidFill>
+                  <a:srgbClr val="333333"/>
+                </a:solidFill>
+                <a:latin typeface="Calibri"/>
+              </a:rPr>
+              <a:t>Lo que se llevan es un método, no un tema: definir un problema con evidencia, revisar qué ya existe, decidir con criterios, probar con personas reales y mirar a quién afecta.</a:t>
+            </a:r>
+          </a:p>
+          <a:p>
+            <a:pPr>
+              <a:spcAft>
+                <a:spcPts val="800"/>
+              </a:spcAft>
+            </a:pPr>
+            <a:r>
+              <a:rPr sz="2000" b="0" i="0">
+                <a:solidFill>
+                  <a:srgbClr val="333333"/>
+                </a:solidFill>
+                <a:latin typeface="Calibri"/>
+              </a:rPr>
+              <a:t>–   </a:t>
+            </a:r>
+            <a:r>
+              <a:rPr sz="2000" b="1" i="0">
+                <a:solidFill>
+                  <a:srgbClr val="333333"/>
+                </a:solidFill>
+                <a:latin typeface="Calibri"/>
+              </a:rPr>
+              <a:t>Aviso:</a:t>
+            </a:r>
+            <a:r>
+              <a:rPr sz="2000" b="0" i="0">
+                <a:solidFill>
+                  <a:srgbClr val="333333"/>
+                </a:solidFill>
+                <a:latin typeface="Calibri"/>
+              </a:rPr>
+              <a:t> El informe y las capturas quedan en la carpeta del equipo: es un proyecto completo y documentado, hecho en primer semestre, y sirve para un portafolio. Y </a:t>
+            </a:r>
+            <a:r>
+              <a:rPr sz="2000" b="1" i="0">
+                <a:solidFill>
+                  <a:srgbClr val="333333"/>
+                </a:solidFill>
+                <a:latin typeface="Calibri"/>
+              </a:rPr>
+              <a:t>el siguiente paso de su proyecto está escrito en la sección 10</a:t>
+            </a:r>
+            <a:r>
+              <a:rPr sz="2000" b="0" i="0">
+                <a:solidFill>
+                  <a:srgbClr val="333333"/>
+                </a:solidFill>
+                <a:latin typeface="Calibri"/>
+              </a:rPr>
+              <a:t> — quien quiera continuarlo ya no tiene que decidir por dónde empezar.</a:t>
+            </a:r>
+          </a:p>
+        </p:txBody>
+      </p:sp>
+      <p:sp>
+        <p:nvSpPr>
+          <p:cNvPr id="6" name="TextBox 5"/>
+          <p:cNvSpPr txBox="1"/>
+          <p:nvPr/>
+        </p:nvSpPr>
+        <p:spPr>
+          <a:xfrm>
+            <a:off x="11185855" y="6473952"/>
+            <a:ext cx="640080" cy="274320"/>
+          </a:xfrm>
+          <a:prstGeom prst="rect">
+            <a:avLst/>
+          </a:prstGeom>
+          <a:noFill/>
+        </p:spPr>
+        <p:txBody>
+          <a:bodyPr wrap="square">
+            <a:spAutoFit/>
+          </a:bodyPr>
+          <a:lstStyle/>
+          <a:p>
+            <a:pPr algn="r"/>
+            <a:r>
+              <a:rPr sz="1100" b="0" i="0">
+                <a:solidFill>
+                  <a:srgbClr val="666666"/>
+                </a:solidFill>
+                <a:latin typeface="Calibri"/>
+              </a:rPr>
+              <a:t>22</a:t>
+            </a:r>
+          </a:p>
+        </p:txBody>
+      </p:sp>
+    </p:spTree>
+  </p:cSld>
+  <p:clrMapOvr>
+    <a:masterClrMapping/>
+  </p:clrMapOvr>
+</p:sld>
+</file>
+
+<file path=ppt/slides/slide23.xml><?xml version="1.0" encoding="utf-8"?>
+<p:sld xmlns:a="http://schemas.openxmlformats.org/drawingml/2006/main" xmlns:p="http://schemas.openxmlformats.org/presentationml/2006/main" xmlns:r="http://schemas.openxmlformats.org/officeDocument/2006/relationships">
+  <p:cSld>
+    <p:bg>
+      <p:bgPr>
+        <a:solidFill>
+          <a:srgbClr val="FFFFFF"/>
+        </a:solidFill>
+        <a:effectLst/>
+      </p:bgPr>
+    </p:bg>
+    <p:spTree>
+      <p:nvGrpSpPr>
+        <p:cNvPr id="1" name=""/>
+        <p:cNvGrpSpPr/>
+        <p:nvPr/>
+      </p:nvGrpSpPr>
+      <p:grpSpPr/>
+      <p:sp>
+        <p:nvSpPr>
+          <p:cNvPr id="2" name="Rectangle 1"/>
+          <p:cNvSpPr/>
+          <p:nvPr/>
+        </p:nvSpPr>
+        <p:spPr>
+          <a:xfrm>
+            <a:off x="0" y="0"/>
+            <a:ext cx="12191695" cy="164592"/>
+          </a:xfrm>
+          <a:prstGeom prst="rect">
+            <a:avLst/>
+          </a:prstGeom>
+          <a:solidFill>
+            <a:srgbClr val="269CCB"/>
+          </a:solidFill>
+          <a:ln>
+            <a:noFill/>
+          </a:ln>
+        </p:spPr>
+        <p:style>
+          <a:lnRef idx="1">
+            <a:schemeClr val="accent1"/>
+          </a:lnRef>
+          <a:fillRef idx="3">
+            <a:schemeClr val="accent1"/>
+          </a:fillRef>
+          <a:effectRef idx="2">
+            <a:schemeClr val="accent1"/>
+          </a:effectRef>
+          <a:fontRef idx="minor">
+            <a:schemeClr val="lt1"/>
+          </a:fontRef>
+        </p:style>
+        <p:txBody>
+          <a:bodyPr rtlCol="0" anchor="ctr"/>
+          <a:lstStyle/>
+          <a:p>
+            <a:pPr algn="ctr"/>
+          </a:p>
+        </p:txBody>
+      </p:sp>
+      <p:pic>
+        <p:nvPicPr>
+          <p:cNvPr id="3" name="Picture 2" descr="logo_uniajc_color.png"/>
+          <p:cNvPicPr>
+            <a:picLocks noChangeAspect="1"/>
+          </p:cNvPicPr>
+          <p:nvPr/>
+        </p:nvPicPr>
+        <p:blipFill>
+          <a:blip r:embed="rId2"/>
+          <a:stretch>
+            <a:fillRect/>
+          </a:stretch>
+        </p:blipFill>
+        <p:spPr>
+          <a:xfrm>
+            <a:off x="10271455" y="5998464"/>
+            <a:ext cx="1463040" cy="643233"/>
+          </a:xfrm>
+          <a:prstGeom prst="rect">
+            <a:avLst/>
+          </a:prstGeom>
+        </p:spPr>
+      </p:pic>
+      <p:sp>
+        <p:nvSpPr>
+          <p:cNvPr id="4" name="TextBox 3"/>
+          <p:cNvSpPr txBox="1"/>
+          <p:nvPr/>
+        </p:nvSpPr>
+        <p:spPr>
+          <a:xfrm>
+            <a:off x="457200" y="1737360"/>
+            <a:ext cx="11277295" cy="1097280"/>
+          </a:xfrm>
+          <a:prstGeom prst="rect">
+            <a:avLst/>
+          </a:prstGeom>
+          <a:noFill/>
+        </p:spPr>
+        <p:txBody>
+          <a:bodyPr wrap="square" anchor="ctr"/>
+          <a:lstStyle/>
+          <a:p>
+            <a:pPr algn="ctr"/>
+            <a:r>
+              <a:rPr sz="3400" b="1" i="0">
+                <a:solidFill>
+                  <a:srgbClr val="095292"/>
+                </a:solidFill>
+                <a:latin typeface="Calibri"/>
+              </a:rPr>
+              <a:t>Gracias · Introducción a la Ingeniería</a:t>
+            </a:r>
+          </a:p>
+        </p:txBody>
+      </p:sp>
+      <p:sp>
+        <p:nvSpPr>
+          <p:cNvPr id="5" name="TextBox 4"/>
+          <p:cNvSpPr txBox="1"/>
+          <p:nvPr/>
+        </p:nvSpPr>
+        <p:spPr>
+          <a:xfrm>
+            <a:off x="457200" y="3017520"/>
+            <a:ext cx="11277295" cy="1645920"/>
+          </a:xfrm>
+          <a:prstGeom prst="rect">
+            <a:avLst/>
+          </a:prstGeom>
+          <a:noFill/>
+        </p:spPr>
+        <p:txBody>
+          <a:bodyPr wrap="square">
+            <a:spAutoFit/>
+          </a:bodyPr>
+          <a:lstStyle/>
+          <a:p>
+            <a:pPr algn="ctr">
+              <a:spcAft>
+                <a:spcPts val="600"/>
+              </a:spcAft>
+            </a:pPr>
+            <a:r>
+              <a:rPr sz="1600" b="0" i="0">
+                <a:solidFill>
+                  <a:srgbClr val="333333"/>
+                </a:solidFill>
+                <a:latin typeface="Calibri"/>
+              </a:rPr>
+              <a:t>Socialización y evaluación final del curso · Clase 16</a:t>
+            </a:r>
+          </a:p>
+          <a:p>
+            <a:pPr algn="ctr">
+              <a:spcAft>
+                <a:spcPts val="600"/>
+              </a:spcAft>
+            </a:pPr>
+            <a:r>
+              <a:rPr sz="1600" b="0" i="0">
+                <a:solidFill>
+                  <a:srgbClr val="333333"/>
+                </a:solidFill>
+                <a:latin typeface="Calibri"/>
+              </a:rPr>
+              <a:t>FI300101 · UNIAJC · Ingeniería de Sistemas</a:t>
+            </a:r>
+          </a:p>
+        </p:txBody>
+      </p:sp>
+      <p:sp>
+        <p:nvSpPr>
+          <p:cNvPr id="6" name="TextBox 5"/>
+          <p:cNvSpPr txBox="1"/>
+          <p:nvPr/>
+        </p:nvSpPr>
+        <p:spPr>
+          <a:xfrm>
+            <a:off x="457200" y="4754880"/>
+            <a:ext cx="11277295" cy="640080"/>
+          </a:xfrm>
+          <a:prstGeom prst="rect">
+            <a:avLst/>
+          </a:prstGeom>
+          <a:noFill/>
+        </p:spPr>
+        <p:txBody>
+          <a:bodyPr wrap="square">
+            <a:spAutoFit/>
+          </a:bodyPr>
+          <a:lstStyle/>
+          <a:p>
+            <a:pPr algn="ctr"/>
+            <a:r>
+              <a:rPr sz="2000" b="1" i="0">
+                <a:solidFill>
+                  <a:srgbClr val="269CCB"/>
+                </a:solidFill>
+                <a:latin typeface="Calibri"/>
+              </a:rPr>
+              <a:t>Hace dieciséis sesiones era una ocurrencia; hoy es un proyecto con evidencia</a:t>
             </a:r>
           </a:p>
         </p:txBody>

--- a/Introduccion a la Ingenieria/Clases/Clase 16 - Socializacion y evaluacion final del curso/Presentacion.pptx
+++ b/Introduccion a la Ingenieria/Clases/Clase 16 - Socializacion y evaluacion final del curso/Presentacion.pptx
@@ -28,6 +28,8 @@
     <p:sldId id="276" r:id="rId27"/>
     <p:sldId id="277" r:id="rId28"/>
     <p:sldId id="278" r:id="rId29"/>
+    <p:sldId id="279" r:id="rId30"/>
+    <p:sldId id="280" r:id="rId31"/>
   </p:sldIdLst>
   <p:sldSz cx="12191695" cy="6858000" type="screen4x3"/>
   <p:notesSz cx="6858000" cy="9144000"/>
@@ -4381,7 +4383,7 @@
                 </a:solidFill>
                 <a:latin typeface="Calibri"/>
               </a:rPr>
-              <a:t>La pregunta de entrada: el pago de haber escrito en cada sesión</a:t>
+              <a:t>La pregunta de entrada: el pago de haber escrito en cada sesión (1/2)</a:t>
             </a:r>
           </a:p>
         </p:txBody>
@@ -4541,74 +4543,6 @@
                 <a:latin typeface="Calibri"/>
               </a:rPr>
               <a:t> Es exactamente lo que le pasa a quien deja la documentación para el final, y no es un problema de tiempo sino de método.</a:t>
-            </a:r>
-          </a:p>
-          <a:p>
-            <a:pPr>
-              <a:spcAft>
-                <a:spcPts val="800"/>
-              </a:spcAft>
-            </a:pPr>
-            <a:r>
-              <a:rPr sz="2000" b="0" i="0">
-                <a:solidFill>
-                  <a:srgbClr val="333333"/>
-                </a:solidFill>
-                <a:latin typeface="Calibri"/>
-              </a:rPr>
-              <a:t>–   Después, en un minuto, diga qué se hace hoy y qué </a:t>
-            </a:r>
-            <a:r>
-              <a:rPr sz="2000" b="1" i="0">
-                <a:solidFill>
-                  <a:srgbClr val="333333"/>
-                </a:solidFill>
-                <a:latin typeface="Calibri"/>
-              </a:rPr>
-              <a:t>no</a:t>
-            </a:r>
-            <a:r>
-              <a:rPr sz="2000" b="0" i="0">
-                <a:solidFill>
-                  <a:srgbClr val="333333"/>
-                </a:solidFill>
-                <a:latin typeface="Calibri"/>
-              </a:rPr>
-              <a:t>: se arma y se entrega el informe, se socializa</a:t>
-            </a:r>
-          </a:p>
-          <a:p>
-            <a:pPr>
-              <a:spcAft>
-                <a:spcPts val="800"/>
-              </a:spcAft>
-            </a:pPr>
-            <a:r>
-              <a:rPr sz="2000" b="0" i="0">
-                <a:solidFill>
-                  <a:srgbClr val="333333"/>
-                </a:solidFill>
-                <a:latin typeface="Calibri"/>
-              </a:rPr>
-              <a:t>–   Se autoevalúan y se cierra el curso. </a:t>
-            </a:r>
-            <a:r>
-              <a:rPr sz="2000" b="1" i="0">
-                <a:solidFill>
-                  <a:srgbClr val="333333"/>
-                </a:solidFill>
-                <a:latin typeface="Calibri"/>
-              </a:rPr>
-              <a:t>No hay examen final escrito</a:t>
-            </a:r>
-            <a:r>
-              <a:rPr sz="2000" b="0" i="0">
-                <a:solidFill>
-                  <a:srgbClr val="333333"/>
-                </a:solidFill>
-                <a:latin typeface="Calibri"/>
-              </a:rPr>
-              <a:t> — conviene decirlo explícitamente porque la mitad del curso llega esperándolo, y saberlo cambia cómo usan los veinticuatro minutos del informe.</a:t>
             </a:r>
           </a:p>
         </p:txBody>
@@ -4789,7 +4723,7 @@
                 </a:solidFill>
                 <a:latin typeface="Calibri"/>
               </a:rPr>
-              <a:t>Las doce secciones, y el orden correcto para armarlas (1/2)</a:t>
+              <a:t>La pregunta de entrada: el pago de haber escrito en cada sesión (2/2)</a:t>
             </a:r>
           </a:p>
         </p:txBody>
@@ -4828,7 +4762,25 @@
                 </a:solidFill>
                 <a:latin typeface="Calibri"/>
               </a:rPr>
-              <a:t>–   Las dos tablas de secciones son el corazón de la sesión y hay que proyectarlas juntas</a:t>
+              <a:t>–   Después, en un minuto, diga qué se hace hoy y qué </a:t>
+            </a:r>
+            <a:r>
+              <a:rPr sz="2000" b="1" i="0">
+                <a:solidFill>
+                  <a:srgbClr val="333333"/>
+                </a:solidFill>
+                <a:latin typeface="Calibri"/>
+              </a:rPr>
+              <a:t>no</a:t>
+            </a:r>
+            <a:r>
+              <a:rPr sz="2000" b="0" i="0">
+                <a:solidFill>
+                  <a:srgbClr val="333333"/>
+                </a:solidFill>
+                <a:latin typeface="Calibri"/>
+              </a:rPr>
+              <a:t>: se arma y se entrega el informe, se socializa</a:t>
             </a:r>
           </a:p>
           <a:p>
@@ -4844,7 +4796,7 @@
                 </a:solidFill>
                 <a:latin typeface="Calibri"/>
               </a:rPr>
-              <a:t>–   Porque el efecto está en la columna del medio: </a:t>
+              <a:t>–   Se autoevalúan y se cierra el curso. </a:t>
             </a:r>
             <a:r>
               <a:rPr sz="2000" b="1" i="0">
@@ -4853,7 +4805,7 @@
                 </a:solidFill>
                 <a:latin typeface="Calibri"/>
               </a:rPr>
-              <a:t>casi todas las filas dicen una sesión.</a:t>
+              <a:t>No hay examen final escrito</a:t>
             </a:r>
             <a:r>
               <a:rPr sz="2000" b="0" i="0">
@@ -4862,143 +4814,7 @@
                 </a:solidFill>
                 <a:latin typeface="Calibri"/>
               </a:rPr>
-              <a:t> No las lea completas —son doce filas y aburre—; señale tres o cuatro y deje que el curso vea el patrón.</a:t>
-            </a:r>
-          </a:p>
-          <a:p>
-            <a:pPr>
-              <a:spcAft>
-                <a:spcPts val="800"/>
-              </a:spcAft>
-            </a:pPr>
-            <a:r>
-              <a:rPr sz="2000" b="0" i="0">
-                <a:solidFill>
-                  <a:srgbClr val="333333"/>
-                </a:solidFill>
-                <a:latin typeface="Calibri"/>
-              </a:rPr>
-              <a:t>–   El </a:t>
-            </a:r>
-            <a:r>
-              <a:rPr sz="2000" b="1" i="0">
-                <a:solidFill>
-                  <a:srgbClr val="333333"/>
-                </a:solidFill>
-                <a:latin typeface="Calibri"/>
-              </a:rPr>
-              <a:t>largo por sección</a:t>
-            </a:r>
-            <a:r>
-              <a:rPr sz="2000" b="0" i="0">
-                <a:solidFill>
-                  <a:srgbClr val="333333"/>
-                </a:solidFill>
-                <a:latin typeface="Calibri"/>
-              </a:rPr>
-              <a:t> está en la tabla y sirve para dos cosas: evita el informe de veinticinco páginas donde nadie encuentra nada, y evita el de tres donde no cabe el trabajo.</a:t>
-            </a:r>
-          </a:p>
-          <a:p>
-            <a:pPr>
-              <a:spcAft>
-                <a:spcPts val="800"/>
-              </a:spcAft>
-            </a:pPr>
-            <a:r>
-              <a:rPr sz="2000" b="0" i="0">
-                <a:solidFill>
-                  <a:srgbClr val="333333"/>
-                </a:solidFill>
-                <a:latin typeface="Calibri"/>
-              </a:rPr>
-              <a:t>–   En total son unas </a:t>
-            </a:r>
-            <a:r>
-              <a:rPr sz="2000" b="1" i="0">
-                <a:solidFill>
-                  <a:srgbClr val="333333"/>
-                </a:solidFill>
-                <a:latin typeface="Calibri"/>
-              </a:rPr>
-              <a:t>9 a 11 páginas</a:t>
-            </a:r>
-            <a:r>
-              <a:rPr sz="2000" b="0" i="0">
-                <a:solidFill>
-                  <a:srgbClr val="333333"/>
-                </a:solidFill>
-                <a:latin typeface="Calibri"/>
-              </a:rPr>
-              <a:t>, que es una extensión razonable para un proyecto de primer semestre.</a:t>
-            </a:r>
-          </a:p>
-          <a:p>
-            <a:pPr>
-              <a:spcAft>
-                <a:spcPts val="800"/>
-              </a:spcAft>
-            </a:pPr>
-            <a:r>
-              <a:rPr sz="2000" b="0" i="0">
-                <a:solidFill>
-                  <a:srgbClr val="333333"/>
-                </a:solidFill>
-                <a:latin typeface="Calibri"/>
-              </a:rPr>
-              <a:t>–   Si un equipo pregunta si puede ser más largo, la respuesta es que </a:t>
-            </a:r>
-            <a:r>
-              <a:rPr sz="2000" b="1" i="0">
-                <a:solidFill>
-                  <a:srgbClr val="333333"/>
-                </a:solidFill>
-                <a:latin typeface="Calibri"/>
-              </a:rPr>
-              <a:t>la extensión no es una virtud</a:t>
-            </a:r>
-            <a:r>
-              <a:rPr sz="2000" b="0" i="0">
-                <a:solidFill>
-                  <a:srgbClr val="333333"/>
-                </a:solidFill>
-                <a:latin typeface="Calibri"/>
-              </a:rPr>
-              <a:t>: un informe donde la decisión está en la página 18 es un informe que no se va a leer. </a:t>
-            </a:r>
-            <a:r>
-              <a:rPr sz="2000" b="1" i="0">
-                <a:solidFill>
-                  <a:srgbClr val="333333"/>
-                </a:solidFill>
-                <a:latin typeface="Calibri"/>
-              </a:rPr>
-              <a:t>El orden de armado importa y es contraintuitivo</a:t>
-            </a:r>
-            <a:r>
-              <a:rPr sz="2000" b="0" i="0">
-                <a:solidFill>
-                  <a:srgbClr val="333333"/>
-                </a:solidFill>
-                <a:latin typeface="Calibri"/>
-              </a:rPr>
-              <a:t>, así que hay que insistir: **pegar primero, revisar después</a:t>
-            </a:r>
-          </a:p>
-          <a:p>
-            <a:pPr>
-              <a:spcAft>
-                <a:spcPts val="800"/>
-              </a:spcAft>
-            </a:pPr>
-            <a:r>
-              <a:rPr sz="2000" b="0" i="0">
-                <a:solidFill>
-                  <a:srgbClr val="333333"/>
-                </a:solidFill>
-                <a:latin typeface="Calibri"/>
-              </a:rPr>
-              <a:t>–   Y el resumen al final.** El error que hace que no alcancen los veinticuatro minutos es empezar por el resumen —o peor, por la portada— porque el resumen exige tener todo lo demás decidido.</a:t>
+              <a:t> — conviene decirlo explícitamente porque la mitad del curso llega esperándolo, y saberlo cambia cómo usan los veinticuatro minutos del informe.</a:t>
             </a:r>
           </a:p>
         </p:txBody>
@@ -5179,7 +4995,7 @@
                 </a:solidFill>
                 <a:latin typeface="Calibri"/>
               </a:rPr>
-              <a:t>Las doce secciones, y el orden correcto para armarlas (2/2)</a:t>
+              <a:t>Las doce secciones, y el orden correcto para armarlas (1/3)</a:t>
             </a:r>
           </a:p>
         </p:txBody>
@@ -5218,7 +5034,7 @@
                 </a:solidFill>
                 <a:latin typeface="Calibri"/>
               </a:rPr>
-              <a:t>–   Se escribe último aunque vaya primero.</a:t>
+              <a:t>–   Las dos tablas de secciones son el corazón de la sesión y hay que proyectarlas juntas</a:t>
             </a:r>
           </a:p>
           <a:p>
@@ -5234,7 +5050,25 @@
                 </a:solidFill>
                 <a:latin typeface="Calibri"/>
               </a:rPr>
-              <a:t>–   Esta regla es general para cualquier documento técnico y vale la pena nombrarla como tal. **El paso 2 tiene un detalle que cambia el resultado: marcar lo que falta</a:t>
+              <a:t>–   Porque el efecto está en la columna del medio: </a:t>
+            </a:r>
+            <a:r>
+              <a:rPr sz="2000" b="1" i="0">
+                <a:solidFill>
+                  <a:srgbClr val="333333"/>
+                </a:solidFill>
+                <a:latin typeface="Calibri"/>
+              </a:rPr>
+              <a:t>casi todas las filas dicen una sesión.</a:t>
+            </a:r>
+            <a:r>
+              <a:rPr sz="2000" b="0" i="0">
+                <a:solidFill>
+                  <a:srgbClr val="333333"/>
+                </a:solidFill>
+                <a:latin typeface="Calibri"/>
+              </a:rPr>
+              <a:t> No las lea completas —son doce filas y aburre—; señale tres o cuatro y deje que el curso vea el patrón.</a:t>
             </a:r>
           </a:p>
           <a:p>
@@ -5250,7 +5084,25 @@
                 </a:solidFill>
                 <a:latin typeface="Calibri"/>
               </a:rPr>
-              <a:t>–   No lo que está.** Un equipo que va marcando lo hecho termina con una lista de logros y sin saber qué le falta.</a:t>
+              <a:t>–   El </a:t>
+            </a:r>
+            <a:r>
+              <a:rPr sz="2000" b="1" i="0">
+                <a:solidFill>
+                  <a:srgbClr val="333333"/>
+                </a:solidFill>
+                <a:latin typeface="Calibri"/>
+              </a:rPr>
+              <a:t>largo por sección</a:t>
+            </a:r>
+            <a:r>
+              <a:rPr sz="2000" b="0" i="0">
+                <a:solidFill>
+                  <a:srgbClr val="333333"/>
+                </a:solidFill>
+                <a:latin typeface="Calibri"/>
+              </a:rPr>
+              <a:t> está en la tabla y sirve para dos cosas: evita el informe de veinticinco páginas donde nadie encuentra nada, y evita el de tres donde no cabe el trabajo.</a:t>
             </a:r>
           </a:p>
           <a:p>
@@ -5266,7 +5118,25 @@
                 </a:solidFill>
                 <a:latin typeface="Calibri"/>
               </a:rPr>
-              <a:t>–   Marcando en rojo los huecos, la lista de tareas aparece sola, y el paso 3 —repartir los huecos, uno por integrante— se hace en cuatro minutos.</a:t>
+              <a:t>–   En total son unas </a:t>
+            </a:r>
+            <a:r>
+              <a:rPr sz="2000" b="1" i="0">
+                <a:solidFill>
+                  <a:srgbClr val="333333"/>
+                </a:solidFill>
+                <a:latin typeface="Calibri"/>
+              </a:rPr>
+              <a:t>9 a 11 páginas</a:t>
+            </a:r>
+            <a:r>
+              <a:rPr sz="2000" b="0" i="0">
+                <a:solidFill>
+                  <a:srgbClr val="333333"/>
+                </a:solidFill>
+                <a:latin typeface="Calibri"/>
+              </a:rPr>
+              <a:t>, que es una extensión razonable para un proyecto de primer semestre.</a:t>
             </a:r>
           </a:p>
           <a:p>
@@ -5282,7 +5152,7 @@
                 </a:solidFill>
                 <a:latin typeface="Calibri"/>
               </a:rPr>
-              <a:t>–   Sobre la </a:t>
+              <a:t>–   Si un equipo pregunta si puede ser más largo, la respuesta es que </a:t>
             </a:r>
             <a:r>
               <a:rPr sz="2000" b="1" i="0">
@@ -5291,7 +5161,7 @@
                 </a:solidFill>
                 <a:latin typeface="Calibri"/>
               </a:rPr>
-              <a:t>sección 11, la declaración del uso de IA</a:t>
+              <a:t>la extensión no es una virtud</a:t>
             </a:r>
             <a:r>
               <a:rPr sz="2000" b="0" i="0">
@@ -5300,15 +5170,17 @@
                 </a:solidFill>
                 <a:latin typeface="Calibri"/>
               </a:rPr>
-              <a:t>: es un cuarto de página y es la que más se olvida.</a:t>
-            </a:r>
-          </a:p>
-          <a:p>
-            <a:pPr>
-              <a:spcAft>
-                <a:spcPts val="800"/>
-              </a:spcAft>
-            </a:pPr>
+              <a:t>: un informe donde la decisión está en la página 18 es un informe que no se va a leer. </a:t>
+            </a:r>
+            <a:r>
+              <a:rPr sz="2000" b="1" i="0">
+                <a:solidFill>
+                  <a:srgbClr val="333333"/>
+                </a:solidFill>
+                <a:latin typeface="Calibri"/>
+              </a:rPr>
+              <a:t>El orden de armado importa y es contraintuitivo</a:t>
+            </a:r>
             <a:r>
               <a:rPr sz="2000" b="0" i="0">
                 <a:solidFill>
@@ -5316,57 +5188,7 @@
                 </a:solidFill>
                 <a:latin typeface="Calibri"/>
               </a:rPr>
-              <a:t>–   Tiene que decir qué se le pidió al asistente, qué se corrigió a mano y </a:t>
-            </a:r>
-            <a:r>
-              <a:rPr sz="2000" b="1" i="0">
-                <a:solidFill>
-                  <a:srgbClr val="333333"/>
-                </a:solidFill>
-                <a:latin typeface="Calibri"/>
-              </a:rPr>
-              <a:t>qué no se le entregó</a:t>
-            </a:r>
-            <a:r>
-              <a:rPr sz="2000" b="0" i="0">
-                <a:solidFill>
-                  <a:srgbClr val="333333"/>
-                </a:solidFill>
-                <a:latin typeface="Calibri"/>
-              </a:rPr>
-              <a:t> —ningún dato personal de terceros, que es la regla del curso desde la sesión 4 y que se trabajó en la 11—.</a:t>
-            </a:r>
-          </a:p>
-          <a:p>
-            <a:pPr>
-              <a:spcAft>
-                <a:spcPts val="800"/>
-              </a:spcAft>
-            </a:pPr>
-            <a:r>
-              <a:rPr sz="2000" b="0" i="0">
-                <a:solidFill>
-                  <a:srgbClr val="333333"/>
-                </a:solidFill>
-                <a:latin typeface="Calibri"/>
-              </a:rPr>
-              <a:t>–   Los equipos que no usaron IA también escriben la sección: dicen que no la usaron.</a:t>
-            </a:r>
-          </a:p>
-          <a:p>
-            <a:pPr>
-              <a:spcAft>
-                <a:spcPts val="800"/>
-              </a:spcAft>
-            </a:pPr>
-            <a:r>
-              <a:rPr sz="2000" b="0" i="0">
-                <a:solidFill>
-                  <a:srgbClr val="333333"/>
-                </a:solidFill>
-                <a:latin typeface="Calibri"/>
-              </a:rPr>
-              <a:t>–   Declarar es la norma, usarla o no es la decisión.</a:t>
+              <a:t>, así que hay que insistir: **pegar primero, revisar después</a:t>
             </a:r>
           </a:p>
         </p:txBody>
@@ -5547,7 +5369,7 @@
                 </a:solidFill>
                 <a:latin typeface="Calibri"/>
               </a:rPr>
-              <a:t>La galería, y por qué socializar no es exponer otra vez (1/2)</a:t>
+              <a:t>Las doce secciones, y el orden correcto para armarlas (2/3)</a:t>
             </a:r>
           </a:p>
         </p:txBody>
@@ -5586,25 +5408,7 @@
                 </a:solidFill>
                 <a:latin typeface="Calibri"/>
               </a:rPr>
-              <a:t>–   Los veinte minutos de socialización </a:t>
-            </a:r>
-            <a:r>
-              <a:rPr sz="2000" b="1" i="0">
-                <a:solidFill>
-                  <a:srgbClr val="333333"/>
-                </a:solidFill>
-                <a:latin typeface="Calibri"/>
-              </a:rPr>
-              <a:t>no son una segunda ronda de exposiciones</a:t>
-            </a:r>
-            <a:r>
-              <a:rPr sz="2000" b="0" i="0">
-                <a:solidFill>
-                  <a:srgbClr val="333333"/>
-                </a:solidFill>
-                <a:latin typeface="Calibri"/>
-              </a:rPr>
-              <a:t> — eso fue la Clase 15 y ya tiene nota.</a:t>
+              <a:t>–   Y el resumen al final.** El error que hace que no alcancen los veinticuatro minutos es empezar por el resumen —o peor, por la portada— porque el resumen exige tener todo lo demás decidido.</a:t>
             </a:r>
           </a:p>
           <a:p>
@@ -5620,25 +5424,7 @@
                 </a:solidFill>
                 <a:latin typeface="Calibri"/>
               </a:rPr>
-              <a:t>–   Aquí el formato es una </a:t>
-            </a:r>
-            <a:r>
-              <a:rPr sz="2000" b="1" i="0">
-                <a:solidFill>
-                  <a:srgbClr val="333333"/>
-                </a:solidFill>
-                <a:latin typeface="Calibri"/>
-              </a:rPr>
-              <a:t>galería</a:t>
-            </a:r>
-            <a:r>
-              <a:rPr sz="2000" b="0" i="0">
-                <a:solidFill>
-                  <a:srgbClr val="333333"/>
-                </a:solidFill>
-                <a:latin typeface="Calibri"/>
-              </a:rPr>
-              <a:t>: cada equipo deja en su columna del muro tres imágenes —una pantalla del prototipo</a:t>
+              <a:t>–   Se escribe último aunque vaya primero.</a:t>
             </a:r>
           </a:p>
           <a:p>
@@ -5654,25 +5440,7 @@
                 </a:solidFill>
                 <a:latin typeface="Calibri"/>
               </a:rPr>
-              <a:t>–   La matriz de impacto y la diapositiva del problema— y </a:t>
-            </a:r>
-            <a:r>
-              <a:rPr sz="2000" b="1" i="0">
-                <a:solidFill>
-                  <a:srgbClr val="333333"/>
-                </a:solidFill>
-                <a:latin typeface="Calibri"/>
-              </a:rPr>
-              <a:t>cinco líneas</a:t>
-            </a:r>
-            <a:r>
-              <a:rPr sz="2000" b="0" i="0">
-                <a:solidFill>
-                  <a:srgbClr val="333333"/>
-                </a:solidFill>
-                <a:latin typeface="Calibri"/>
-              </a:rPr>
-              <a:t>: el problema, la decisión, un hallazgo, un número de impacto y el siguiente paso.</a:t>
+              <a:t>–   Esta regla es general para cualquier documento técnico y vale la pena nombrarla como tal. **El paso 2 tiene un detalle que cambia el resultado: marcar lo que falta</a:t>
             </a:r>
           </a:p>
           <a:p>
@@ -5688,25 +5456,7 @@
                 </a:solidFill>
                 <a:latin typeface="Calibri"/>
               </a:rPr>
-              <a:t>–   El reparto son 3 minutos por equipo para presentar la columna, y los 5 restantes para </a:t>
-            </a:r>
-            <a:r>
-              <a:rPr sz="2000" b="1" i="0">
-                <a:solidFill>
-                  <a:srgbClr val="333333"/>
-                </a:solidFill>
-                <a:latin typeface="Calibri"/>
-              </a:rPr>
-              <a:t>recorrido libre</a:t>
-            </a:r>
-            <a:r>
-              <a:rPr sz="2000" b="0" i="0">
-                <a:solidFill>
-                  <a:srgbClr val="333333"/>
-                </a:solidFill>
-                <a:latin typeface="Calibri"/>
-              </a:rPr>
-              <a:t>: cada estudiante entra a la columna de otro equipo y deja un comentario.</a:t>
+              <a:t>–   No lo que está.** Un equipo que va marcando lo hecho termina con una lista de logros y sin saber qué le falta.</a:t>
             </a:r>
           </a:p>
           <a:p>
@@ -5722,25 +5472,7 @@
                 </a:solidFill>
                 <a:latin typeface="Calibri"/>
               </a:rPr>
-              <a:t>–   Es rápido, es de baja presión —después de la Clase 15 el curso está cansado— y deja un registro del semestre que se puede mostrar el año siguiente. </a:t>
-            </a:r>
-            <a:r>
-              <a:rPr sz="2000" b="1" i="0">
-                <a:solidFill>
-                  <a:srgbClr val="333333"/>
-                </a:solidFill>
-                <a:latin typeface="Calibri"/>
-              </a:rPr>
-              <a:t>Por qué vale la pena y no es relleno:</a:t>
-            </a:r>
-            <a:r>
-              <a:rPr sz="2000" b="0" i="0">
-                <a:solidFill>
-                  <a:srgbClr val="333333"/>
-                </a:solidFill>
-                <a:latin typeface="Calibri"/>
-              </a:rPr>
-              <a:t> en la Clase 15 cada equipo escuchó cuatro exposiciones de nueve minutos, y a esa velocidad casi nadie retiene los detalles de los otros proyectos.</a:t>
+              <a:t>–   Marcando en rojo los huecos, la lista de tareas aparece sola, y el paso 3 —repartir los huecos, uno por integrante— se hace en cuatro minutos.</a:t>
             </a:r>
           </a:p>
         </p:txBody>
@@ -5921,7 +5653,7 @@
                 </a:solidFill>
                 <a:latin typeface="Calibri"/>
               </a:rPr>
-              <a:t>La galería, y por qué socializar no es exponer otra vez (2/2)</a:t>
+              <a:t>Las doce secciones, y el orden correcto para armarlas (3/3)</a:t>
             </a:r>
           </a:p>
         </p:txBody>
@@ -5960,7 +5692,7 @@
                 </a:solidFill>
                 <a:latin typeface="Calibri"/>
               </a:rPr>
-              <a:t>–   La galería deja los cinco proyectos </a:t>
+              <a:t>–   Tiene que decir qué se le pidió al asistente, qué se corrigió a mano y </a:t>
             </a:r>
             <a:r>
               <a:rPr sz="2000" b="1" i="0">
@@ -5969,7 +5701,7 @@
                 </a:solidFill>
                 <a:latin typeface="Calibri"/>
               </a:rPr>
-              <a:t>lado a lado y por escrito</a:t>
+              <a:t>qué no se le entregó</a:t>
             </a:r>
             <a:r>
               <a:rPr sz="2000" b="0" i="0">
@@ -5978,7 +5710,7 @@
                 </a:solidFill>
                 <a:latin typeface="Calibri"/>
               </a:rPr>
-              <a:t>, y ahí sí se ven las comparaciones: cinco maneras distintas de definir un problema, cinco matrices de decisión, cinco listas de afectados.</a:t>
+              <a:t> —ningún dato personal de terceros, que es la regla del curso desde la sesión 4 y que se trabajó en la 11—.</a:t>
             </a:r>
           </a:p>
           <a:p>
@@ -5994,7 +5726,7 @@
                 </a:solidFill>
                 <a:latin typeface="Calibri"/>
               </a:rPr>
-              <a:t>–   Es la única vez en el semestre en que el curso ve su propio trabajo completo.</a:t>
+              <a:t>–   Los equipos que no usaron IA también escriben la sección: dicen que no la usaron.</a:t>
             </a:r>
           </a:p>
           <a:p>
@@ -6010,25 +5742,7 @@
                 </a:solidFill>
                 <a:latin typeface="Calibri"/>
               </a:rPr>
-              <a:t>–   Aproveche los cuatro errores del informe [Slide 8] durante este bloque, mientras los equipos terminan de subir la columna: son las cuatro cosas que va a encontrar calificando y decirlas ahora les da tiempo de corregirlas. </a:t>
-            </a:r>
-            <a:r>
-              <a:rPr sz="2000" b="1" i="0">
-                <a:solidFill>
-                  <a:srgbClr val="333333"/>
-                </a:solidFill>
-                <a:latin typeface="Calibri"/>
-              </a:rPr>
-              <a:t>La más frecuente es la sección 10 vacía</a:t>
-            </a:r>
-            <a:r>
-              <a:rPr sz="2000" b="0" i="0">
-                <a:solidFill>
-                  <a:srgbClr val="333333"/>
-                </a:solidFill>
-                <a:latin typeface="Calibri"/>
-              </a:rPr>
-              <a:t> —«ninguna limitación»—, que después de la Clase 12 no es creíble en ningún equipo.</a:t>
+              <a:t>–   Declarar es la norma, usarla o no es la decisión.</a:t>
             </a:r>
           </a:p>
         </p:txBody>
@@ -6209,7 +5923,7 @@
                 </a:solidFill>
                 <a:latin typeface="Calibri"/>
               </a:rPr>
-              <a:t>Autoevaluación y coevaluación: cómo evitar que sea un trámite (1/2)</a:t>
+              <a:t>La galería, y por qué socializar no es exponer otra vez (1/2)</a:t>
             </a:r>
           </a:p>
         </p:txBody>
@@ -6248,7 +5962,7 @@
                 </a:solidFill>
                 <a:latin typeface="Calibri"/>
               </a:rPr>
-              <a:t>–   La autoevaluación se degrada en trámite cuando se pide una nota. </a:t>
+              <a:t>–   Los veinte minutos de socialización </a:t>
             </a:r>
             <a:r>
               <a:rPr sz="2000" b="1" i="0">
@@ -6257,7 +5971,7 @@
                 </a:solidFill>
                 <a:latin typeface="Calibri"/>
               </a:rPr>
-              <a:t>Pedir cuatro respuestas con evidencia lo evita</a:t>
+              <a:t>no son una segunda ronda de exposiciones</a:t>
             </a:r>
             <a:r>
               <a:rPr sz="2000" b="0" i="0">
@@ -6266,7 +5980,7 @@
                 </a:solidFill>
                 <a:latin typeface="Calibri"/>
               </a:rPr>
-              <a:t>: qué hice yo concretamente —secciones que escribí</a:t>
+              <a:t> — eso fue la Clase 15 y ya tiene nota.</a:t>
             </a:r>
           </a:p>
           <a:p>
@@ -6282,7 +5996,25 @@
                 </a:solidFill>
                 <a:latin typeface="Calibri"/>
               </a:rPr>
-              <a:t>–   Prueba que hice, tramo que expuse—, qué aprendí a hacer que no sabía, en qué fallé, qué haría distinto.</a:t>
+              <a:t>–   Aquí el formato es una </a:t>
+            </a:r>
+            <a:r>
+              <a:rPr sz="2000" b="1" i="0">
+                <a:solidFill>
+                  <a:srgbClr val="333333"/>
+                </a:solidFill>
+                <a:latin typeface="Calibri"/>
+              </a:rPr>
+              <a:t>galería</a:t>
+            </a:r>
+            <a:r>
+              <a:rPr sz="2000" b="0" i="0">
+                <a:solidFill>
+                  <a:srgbClr val="333333"/>
+                </a:solidFill>
+                <a:latin typeface="Calibri"/>
+              </a:rPr>
+              <a:t>: cada equipo deja en su columna del muro tres imágenes —una pantalla del prototipo</a:t>
             </a:r>
           </a:p>
           <a:p>
@@ -6298,7 +6030,25 @@
                 </a:solidFill>
                 <a:latin typeface="Calibri"/>
               </a:rPr>
-              <a:t>–   Todo verificable en el documento del equipo.</a:t>
+              <a:t>–   La matriz de impacto y la diapositiva del problema— y </a:t>
+            </a:r>
+            <a:r>
+              <a:rPr sz="2000" b="1" i="0">
+                <a:solidFill>
+                  <a:srgbClr val="333333"/>
+                </a:solidFill>
+                <a:latin typeface="Calibri"/>
+              </a:rPr>
+              <a:t>cinco líneas</a:t>
+            </a:r>
+            <a:r>
+              <a:rPr sz="2000" b="0" i="0">
+                <a:solidFill>
+                  <a:srgbClr val="333333"/>
+                </a:solidFill>
+                <a:latin typeface="Calibri"/>
+              </a:rPr>
+              <a:t>: el problema, la decisión, un hallazgo, un número de impacto y el siguiente paso.</a:t>
             </a:r>
           </a:p>
           <a:p>
@@ -6314,7 +6064,7 @@
                 </a:solidFill>
                 <a:latin typeface="Calibri"/>
               </a:rPr>
-              <a:t>–   Y hay que decir la consecuencia con claridad, porque cambia el resultado: </a:t>
+              <a:t>–   El reparto son 3 minutos por equipo para presentar la columna, y los 5 restantes para </a:t>
             </a:r>
             <a:r>
               <a:rPr sz="2000" b="1" i="0">
@@ -6323,7 +6073,7 @@
                 </a:solidFill>
                 <a:latin typeface="Calibri"/>
               </a:rPr>
-              <a:t>ponerse la nota máxima sin evidencia baja el puntaje.</a:t>
+              <a:t>recorrido libre</a:t>
             </a:r>
             <a:r>
               <a:rPr sz="2000" b="0" i="0">
@@ -6332,25 +6082,7 @@
                 </a:solidFill>
                 <a:latin typeface="Calibri"/>
               </a:rPr>
-              <a:t> Lo que se evalúa no es la autoestima: es </a:t>
-            </a:r>
-            <a:r>
-              <a:rPr sz="2000" b="1" i="0">
-                <a:solidFill>
-                  <a:srgbClr val="333333"/>
-                </a:solidFill>
-                <a:latin typeface="Calibri"/>
-              </a:rPr>
-              <a:t>la capacidad de mirar el propio trabajo con honestidad</a:t>
-            </a:r>
-            <a:r>
-              <a:rPr sz="2000" b="0" i="0">
-                <a:solidFill>
-                  <a:srgbClr val="333333"/>
-                </a:solidFill>
-                <a:latin typeface="Calibri"/>
-              </a:rPr>
-              <a:t>, que es una competencia profesional.</a:t>
+              <a:t>: cada estudiante entra a la columna de otro equipo y deja un comentario.</a:t>
             </a:r>
           </a:p>
           <a:p>
@@ -6366,15 +6098,17 @@
                 </a:solidFill>
                 <a:latin typeface="Calibri"/>
               </a:rPr>
-              <a:t>–   El estudiante que escribe «no entregué mi sección a tiempo dos veces y el equipo tuvo que cubrirme» está demostrando exactamente lo que se busca.</a:t>
-            </a:r>
-          </a:p>
-          <a:p>
-            <a:pPr>
-              <a:spcAft>
-                <a:spcPts val="800"/>
-              </a:spcAft>
-            </a:pPr>
+              <a:t>–   Es rápido, es de baja presión —después de la Clase 15 el curso está cansado— y deja un registro del semestre que se puede mostrar el año siguiente. </a:t>
+            </a:r>
+            <a:r>
+              <a:rPr sz="2000" b="1" i="0">
+                <a:solidFill>
+                  <a:srgbClr val="333333"/>
+                </a:solidFill>
+                <a:latin typeface="Calibri"/>
+              </a:rPr>
+              <a:t>Por qué vale la pena y no es relleno:</a:t>
+            </a:r>
             <a:r>
               <a:rPr sz="2000" b="0" i="0">
                 <a:solidFill>
@@ -6382,43 +6116,7 @@
                 </a:solidFill>
                 <a:latin typeface="Calibri"/>
               </a:rPr>
-              <a:t>–   La coevaluación es más delicada y necesita una regla dura: </a:t>
-            </a:r>
-            <a:r>
-              <a:rPr sz="2000" b="1" i="0">
-                <a:solidFill>
-                  <a:srgbClr val="333333"/>
-                </a:solidFill>
-                <a:latin typeface="Calibri"/>
-              </a:rPr>
-              <a:t>se evalúa el trabajo, no la persona.</a:t>
-            </a:r>
-            <a:r>
-              <a:rPr sz="2000" b="0" i="0">
-                <a:solidFill>
-                  <a:srgbClr val="333333"/>
-                </a:solidFill>
-                <a:latin typeface="Calibri"/>
-              </a:rPr>
-              <a:t> Tres criterios —cumplimiento de acuerdos, aporte al proyecto, disposición para ayudar— y la misma exigencia de la Clase 12: </a:t>
-            </a:r>
-            <a:r>
-              <a:rPr sz="2000" b="1" i="0">
-                <a:solidFill>
-                  <a:srgbClr val="333333"/>
-                </a:solidFill>
-                <a:latin typeface="Calibri"/>
-              </a:rPr>
-              <a:t>observación, no adjetivo</a:t>
-            </a:r>
-            <a:r>
-              <a:rPr sz="2000" b="0" i="0">
-                <a:solidFill>
-                  <a:srgbClr val="333333"/>
-                </a:solidFill>
-                <a:latin typeface="Calibri"/>
-              </a:rPr>
-              <a:t>.</a:t>
+              <a:t> en la Clase 15 cada equipo escuchó cuatro exposiciones de nueve minutos, y a esa velocidad casi nadie retiene los detalles de los otros proyectos.</a:t>
             </a:r>
           </a:p>
         </p:txBody>
@@ -6599,7 +6297,7 @@
                 </a:solidFill>
                 <a:latin typeface="Calibri"/>
               </a:rPr>
-              <a:t>Autoevaluación y coevaluación: cómo evitar que sea un trámite (2/2)</a:t>
+              <a:t>La galería, y por qué socializar no es exponer otra vez (2/2)</a:t>
             </a:r>
           </a:p>
         </p:txBody>
@@ -6638,7 +6336,25 @@
                 </a:solidFill>
                 <a:latin typeface="Calibri"/>
               </a:rPr>
-              <a:t>–   «No aportó» no sirve como coevaluación</a:t>
+              <a:t>–   La galería deja los cinco proyectos </a:t>
+            </a:r>
+            <a:r>
+              <a:rPr sz="2000" b="1" i="0">
+                <a:solidFill>
+                  <a:srgbClr val="333333"/>
+                </a:solidFill>
+                <a:latin typeface="Calibri"/>
+              </a:rPr>
+              <a:t>lado a lado y por escrito</a:t>
+            </a:r>
+            <a:r>
+              <a:rPr sz="2000" b="0" i="0">
+                <a:solidFill>
+                  <a:srgbClr val="333333"/>
+                </a:solidFill>
+                <a:latin typeface="Calibri"/>
+              </a:rPr>
+              <a:t>, y ahí sí se ven las comparaciones: cinco maneras distintas de definir un problema, cinco matrices de decisión, cinco listas de afectados.</a:t>
             </a:r>
           </a:p>
           <a:p>
@@ -6654,25 +6370,7 @@
                 </a:solidFill>
                 <a:latin typeface="Calibri"/>
               </a:rPr>
-              <a:t>–   «no entregó su sección en las tres últimas sesiones» sí, porque es verificable y porque la persona puede responder a un hecho y no a una etiqueta. </a:t>
-            </a:r>
-            <a:r>
-              <a:rPr sz="2000" b="1" i="0">
-                <a:solidFill>
-                  <a:srgbClr val="333333"/>
-                </a:solidFill>
-                <a:latin typeface="Calibri"/>
-              </a:rPr>
-              <a:t>La autoevaluación individual se entrega solo al docente</a:t>
-            </a:r>
-            <a:r>
-              <a:rPr sz="2000" b="0" i="0">
-                <a:solidFill>
-                  <a:srgbClr val="333333"/>
-                </a:solidFill>
-                <a:latin typeface="Calibri"/>
-              </a:rPr>
-              <a:t>, no al muro ni al equipo.</a:t>
+              <a:t>–   Es la única vez en el semestre en que el curso ve su propio trabajo completo.</a:t>
             </a:r>
           </a:p>
           <a:p>
@@ -6688,15 +6386,17 @@
                 </a:solidFill>
                 <a:latin typeface="Calibri"/>
               </a:rPr>
-              <a:t>–   Sin esa garantía nadie escribe nada honesto, y el ejercicio se vuelve un intercambio de cortesías.</a:t>
-            </a:r>
-          </a:p>
-          <a:p>
-            <a:pPr>
-              <a:spcAft>
-                <a:spcPts val="800"/>
-              </a:spcAft>
-            </a:pPr>
+              <a:t>–   Aproveche los cuatro errores del informe [Slide 8] durante este bloque, mientras los equipos terminan de subir la columna: son las cuatro cosas que va a encontrar calificando y decirlas ahora les da tiempo de corregirlas. </a:t>
+            </a:r>
+            <a:r>
+              <a:rPr sz="2000" b="1" i="0">
+                <a:solidFill>
+                  <a:srgbClr val="333333"/>
+                </a:solidFill>
+                <a:latin typeface="Calibri"/>
+              </a:rPr>
+              <a:t>La más frecuente es la sección 10 vacía</a:t>
+            </a:r>
             <a:r>
               <a:rPr sz="2000" b="0" i="0">
                 <a:solidFill>
@@ -6704,89 +6404,7 @@
                 </a:solidFill>
                 <a:latin typeface="Calibri"/>
               </a:rPr>
-              <a:t>–   Dígalo antes de que empiecen a escribir.</a:t>
-            </a:r>
-          </a:p>
-          <a:p>
-            <a:pPr>
-              <a:spcAft>
-                <a:spcPts val="800"/>
-              </a:spcAft>
-            </a:pPr>
-            <a:r>
-              <a:rPr sz="2000" b="0" i="0">
-                <a:solidFill>
-                  <a:srgbClr val="333333"/>
-                </a:solidFill>
-                <a:latin typeface="Calibri"/>
-              </a:rPr>
-              <a:t>–   Un caso que aparece casi siempre: un equipo donde uno trabajó mucho menos.</a:t>
-            </a:r>
-          </a:p>
-          <a:p>
-            <a:pPr>
-              <a:spcAft>
-                <a:spcPts val="800"/>
-              </a:spcAft>
-            </a:pPr>
-            <a:r>
-              <a:rPr sz="2000" b="0" i="0">
-                <a:solidFill>
-                  <a:srgbClr val="333333"/>
-                </a:solidFill>
-                <a:latin typeface="Calibri"/>
-              </a:rPr>
-              <a:t>–   Si tres coevaluaciones independientes lo señalan </a:t>
-            </a:r>
-            <a:r>
-              <a:rPr sz="2000" b="1" i="0">
-                <a:solidFill>
-                  <a:srgbClr val="333333"/>
-                </a:solidFill>
-                <a:latin typeface="Calibri"/>
-              </a:rPr>
-              <a:t>con hechos</a:t>
-            </a:r>
-            <a:r>
-              <a:rPr sz="2000" b="0" i="0">
-                <a:solidFill>
-                  <a:srgbClr val="333333"/>
-                </a:solidFill>
-                <a:latin typeface="Calibri"/>
-              </a:rPr>
-              <a:t>, es información válida y puede diferenciar la nota individual.</a:t>
-            </a:r>
-          </a:p>
-          <a:p>
-            <a:pPr>
-              <a:spcAft>
-                <a:spcPts val="800"/>
-              </a:spcAft>
-            </a:pPr>
-            <a:r>
-              <a:rPr sz="2000" b="0" i="0">
-                <a:solidFill>
-                  <a:srgbClr val="333333"/>
-                </a:solidFill>
-                <a:latin typeface="Calibri"/>
-              </a:rPr>
-              <a:t>–   Si es una sola persona señalando y sin hechos, no alcanza.</a:t>
-            </a:r>
-          </a:p>
-          <a:p>
-            <a:pPr>
-              <a:spcAft>
-                <a:spcPts val="800"/>
-              </a:spcAft>
-            </a:pPr>
-            <a:r>
-              <a:rPr sz="2000" b="0" i="0">
-                <a:solidFill>
-                  <a:srgbClr val="333333"/>
-                </a:solidFill>
-                <a:latin typeface="Calibri"/>
-              </a:rPr>
-              <a:t>–   Y no resuelva el conflicto en público: recoja las coevaluaciones, léalas después y ajuste con criterio.</a:t>
+              <a:t> —«ninguna limitación»—, que después de la Clase 12 no es creíble en ningún equipo.</a:t>
             </a:r>
           </a:p>
         </p:txBody>
@@ -6967,7 +6585,7 @@
                 </a:solidFill>
                 <a:latin typeface="Calibri"/>
               </a:rPr>
-              <a:t>El cierre del curso: veinte minutos que no son un discurso (1/2)</a:t>
+              <a:t>Autoevaluación y coevaluación: cómo evitar que sea un trámite (1/2)</a:t>
             </a:r>
           </a:p>
         </p:txBody>
@@ -7006,7 +6624,25 @@
                 </a:solidFill>
                 <a:latin typeface="Calibri"/>
               </a:rPr>
-              <a:t>–   Los últimos veinte minutos se pueden desperdiciar fácilmente en un discurso de despedida. **Úselos para hacer visible el aprendizaje</a:t>
+              <a:t>–   La autoevaluación se degrada en trámite cuando se pide una nota. </a:t>
+            </a:r>
+            <a:r>
+              <a:rPr sz="2000" b="1" i="0">
+                <a:solidFill>
+                  <a:srgbClr val="333333"/>
+                </a:solidFill>
+                <a:latin typeface="Calibri"/>
+              </a:rPr>
+              <a:t>Pedir cuatro respuestas con evidencia lo evita</a:t>
+            </a:r>
+            <a:r>
+              <a:rPr sz="2000" b="0" i="0">
+                <a:solidFill>
+                  <a:srgbClr val="333333"/>
+                </a:solidFill>
+                <a:latin typeface="Calibri"/>
+              </a:rPr>
+              <a:t>: qué hice yo concretamente —secciones que escribí</a:t>
             </a:r>
           </a:p>
           <a:p>
@@ -7022,7 +6658,7 @@
                 </a:solidFill>
                 <a:latin typeface="Calibri"/>
               </a:rPr>
-              <a:t>–   Con evidencia.** La diapositiva de antes y después es la herramienta: en la columna izquierda están las respuestas reales de la prueba diagnóstica de la sesión 1 —vale la pena tenerlas a mano de verdad, no parafraseadas— y en la derecha lo que hoy pueden sostener.</a:t>
+              <a:t>–   Prueba que hice, tramo que expuse—, qué aprendí a hacer que no sabía, en qué fallé, qué haría distinto.</a:t>
             </a:r>
           </a:p>
           <a:p>
@@ -7038,7 +6674,7 @@
                 </a:solidFill>
                 <a:latin typeface="Calibri"/>
               </a:rPr>
-              <a:t>–   El punto que hay que hacer explícito, y que es la diferencia entre una clase y un curso: </a:t>
+              <a:t>–   Y hay que decir la consecuencia con claridad, porque cambia el resultado: </a:t>
             </a:r>
             <a:r>
               <a:rPr sz="2000" b="1" i="0">
@@ -7047,7 +6683,7 @@
                 </a:solidFill>
                 <a:latin typeface="Calibri"/>
               </a:rPr>
-              <a:t>cada frase de la columna derecha está sostenida por una sección de su propio informe.</a:t>
+              <a:t>ponerse la nota máxima sin evidencia baja el puntaje.</a:t>
             </a:r>
             <a:r>
               <a:rPr sz="2000" b="0" i="0">
@@ -7056,7 +6692,25 @@
                 </a:solidFill>
                 <a:latin typeface="Calibri"/>
               </a:rPr>
-              <a:t> «Toda decisión sacrifica algo» no es una frase aprendida: está en la sección 6, escrita por ellos, con una matriz detrás.</a:t>
+              <a:t> Lo que se evalúa no es la autoestima: es </a:t>
+            </a:r>
+            <a:r>
+              <a:rPr sz="2000" b="1" i="0">
+                <a:solidFill>
+                  <a:srgbClr val="333333"/>
+                </a:solidFill>
+                <a:latin typeface="Calibri"/>
+              </a:rPr>
+              <a:t>la capacidad de mirar el propio trabajo con honestidad</a:t>
+            </a:r>
+            <a:r>
+              <a:rPr sz="2000" b="0" i="0">
+                <a:solidFill>
+                  <a:srgbClr val="333333"/>
+                </a:solidFill>
+                <a:latin typeface="Calibri"/>
+              </a:rPr>
+              <a:t>, que es una competencia profesional.</a:t>
             </a:r>
           </a:p>
           <a:p>
@@ -7072,15 +6726,17 @@
                 </a:solidFill>
                 <a:latin typeface="Calibri"/>
               </a:rPr>
-              <a:t>–   «Hay afectados que nunca la usan» está en la sección 9, con la voluntaria que trabaja diez minutos más.</a:t>
-            </a:r>
-          </a:p>
-          <a:p>
-            <a:pPr>
-              <a:spcAft>
-                <a:spcPts val="800"/>
-              </a:spcAft>
-            </a:pPr>
+              <a:t>–   La coevaluación es más delicada y necesita una regla dura: </a:t>
+            </a:r>
+            <a:r>
+              <a:rPr sz="2000" b="1" i="0">
+                <a:solidFill>
+                  <a:srgbClr val="333333"/>
+                </a:solidFill>
+                <a:latin typeface="Calibri"/>
+              </a:rPr>
+              <a:t>se evalúa el trabajo, no la persona.</a:t>
+            </a:r>
             <a:r>
               <a:rPr sz="2000" b="0" i="0">
                 <a:solidFill>
@@ -7088,15 +6744,17 @@
                 </a:solidFill>
                 <a:latin typeface="Calibri"/>
               </a:rPr>
-              <a:t>–   Eso es lo que distingue haber entendido de haber memorizado, y conviene nombrarlo.</a:t>
-            </a:r>
-          </a:p>
-          <a:p>
-            <a:pPr>
-              <a:spcAft>
-                <a:spcPts val="800"/>
-              </a:spcAft>
-            </a:pPr>
+              <a:t> Tres criterios —cumplimiento de acuerdos, aporte al proyecto, disposición para ayudar— y la misma exigencia de la Clase 12: </a:t>
+            </a:r>
+            <a:r>
+              <a:rPr sz="2000" b="1" i="0">
+                <a:solidFill>
+                  <a:srgbClr val="333333"/>
+                </a:solidFill>
+                <a:latin typeface="Calibri"/>
+              </a:rPr>
+              <a:t>observación, no adjetivo</a:t>
+            </a:r>
             <a:r>
               <a:rPr sz="2000" b="0" i="0">
                 <a:solidFill>
@@ -7104,7 +6762,7 @@
                 </a:solidFill>
                 <a:latin typeface="Calibri"/>
               </a:rPr>
-              <a:t>–   Conecte con los tres RAA sin recitar códigos: reconocer la ingeniería como práctica que decide bajo restricciones (RAA1), aplicar un método para definir y resolver un problema con evidencia (RAA2)</a:t>
+              <a:t>.</a:t>
             </a:r>
           </a:p>
         </p:txBody>
@@ -7285,7 +6943,7 @@
                 </a:solidFill>
                 <a:latin typeface="Calibri"/>
               </a:rPr>
-              <a:t>El cierre del curso: veinte minutos que no son un discurso (2/2)</a:t>
+              <a:t>Autoevaluación y coevaluación: cómo evitar que sea un trámite (2/2)</a:t>
             </a:r>
           </a:p>
         </p:txBody>
@@ -7324,7 +6982,7 @@
                 </a:solidFill>
                 <a:latin typeface="Calibri"/>
               </a:rPr>
-              <a:t>–   Y valorar las consecuencias sociales y ambientales de una solución (RAA3).</a:t>
+              <a:t>–   «No aportó» no sirve como coevaluación</a:t>
             </a:r>
           </a:p>
           <a:p>
@@ -7340,7 +6998,25 @@
                 </a:solidFill>
                 <a:latin typeface="Calibri"/>
               </a:rPr>
-              <a:t>–   Los tres se pueden verificar en el informe que acaban de entregar, y esa verificabilidad es el sentido de haber trabajado por proyecto.</a:t>
+              <a:t>–   «no entregó su sección en las tres últimas sesiones» sí, porque es verificable y porque la persona puede responder a un hecho y no a una etiqueta. </a:t>
+            </a:r>
+            <a:r>
+              <a:rPr sz="2000" b="1" i="0">
+                <a:solidFill>
+                  <a:srgbClr val="333333"/>
+                </a:solidFill>
+                <a:latin typeface="Calibri"/>
+              </a:rPr>
+              <a:t>La autoevaluación individual se entrega solo al docente</a:t>
+            </a:r>
+            <a:r>
+              <a:rPr sz="2000" b="0" i="0">
+                <a:solidFill>
+                  <a:srgbClr val="333333"/>
+                </a:solidFill>
+                <a:latin typeface="Calibri"/>
+              </a:rPr>
+              <a:t>, no al muro ni al equipo.</a:t>
             </a:r>
           </a:p>
           <a:p>
@@ -7356,7 +7032,7 @@
                 </a:solidFill>
                 <a:latin typeface="Calibri"/>
               </a:rPr>
-              <a:t>–   Cierre con dos cosas concretas y ninguna solemne.</a:t>
+              <a:t>–   Un caso que aparece casi siempre: un equipo donde uno trabajó mucho menos.</a:t>
             </a:r>
           </a:p>
           <a:p>
@@ -7372,7 +7048,7 @@
                 </a:solidFill>
                 <a:latin typeface="Calibri"/>
               </a:rPr>
-              <a:t>–   La primera: </a:t>
+              <a:t>–   Si tres coevaluaciones independientes lo señalan </a:t>
             </a:r>
             <a:r>
               <a:rPr sz="2000" b="1" i="0">
@@ -7381,7 +7057,7 @@
                 </a:solidFill>
                 <a:latin typeface="Calibri"/>
               </a:rPr>
-              <a:t>lo que se llevan es un método, no un tema.</a:t>
+              <a:t>con hechos</a:t>
             </a:r>
             <a:r>
               <a:rPr sz="2000" b="0" i="0">
@@ -7390,7 +7066,7 @@
                 </a:solidFill>
                 <a:latin typeface="Calibri"/>
               </a:rPr>
-              <a:t> Definir un problema con evidencia, revisar qué existe, decidir con criterios</a:t>
+              <a:t>, es información válida y puede diferenciar la nota individual.</a:t>
             </a:r>
           </a:p>
           <a:p>
@@ -7406,7 +7082,7 @@
                 </a:solidFill>
                 <a:latin typeface="Calibri"/>
               </a:rPr>
-              <a:t>–   Probar con personas reales y mirar a quién afecta — eso sirve igual para un trabajo de otra asignatura, para un proyecto de grado y para el primer empleo.</a:t>
+              <a:t>–   Si es una sola persona señalando y sin hechos, no alcanza.</a:t>
             </a:r>
           </a:p>
           <a:p>
@@ -7422,59 +7098,7 @@
                 </a:solidFill>
                 <a:latin typeface="Calibri"/>
               </a:rPr>
-              <a:t>–   La segunda: </a:t>
-            </a:r>
-            <a:r>
-              <a:rPr sz="2000" b="1" i="0">
-                <a:solidFill>
-                  <a:srgbClr val="333333"/>
-                </a:solidFill>
-                <a:latin typeface="Calibri"/>
-              </a:rPr>
-              <a:t>el proyecto queda como evidencia.</a:t>
-            </a:r>
-            <a:r>
-              <a:rPr sz="2000" b="0" i="0">
-                <a:solidFill>
-                  <a:srgbClr val="333333"/>
-                </a:solidFill>
-                <a:latin typeface="Calibri"/>
-              </a:rPr>
-              <a:t> Es un trabajo completo, documentado y con su propio prototipo, hecho en primer semestre; el documento y las capturas quedan en la carpeta y valen para un portafolio.</a:t>
-            </a:r>
-          </a:p>
-          <a:p>
-            <a:pPr>
-              <a:spcAft>
-                <a:spcPts val="800"/>
-              </a:spcAft>
-            </a:pPr>
-            <a:r>
-              <a:rPr sz="2000" b="0" i="0">
-                <a:solidFill>
-                  <a:srgbClr val="333333"/>
-                </a:solidFill>
-                <a:latin typeface="Calibri"/>
-              </a:rPr>
-              <a:t>–   Y una recomendación práctica de despedida, corta: </a:t>
-            </a:r>
-            <a:r>
-              <a:rPr sz="2000" b="1" i="0">
-                <a:solidFill>
-                  <a:srgbClr val="333333"/>
-                </a:solidFill>
-                <a:latin typeface="Calibri"/>
-              </a:rPr>
-              <a:t>el siguiente paso de su proyecto está escrito en la sección 10.</a:t>
-            </a:r>
-            <a:r>
-              <a:rPr sz="2000" b="0" i="0">
-                <a:solidFill>
-                  <a:srgbClr val="333333"/>
-                </a:solidFill>
-                <a:latin typeface="Calibri"/>
-              </a:rPr>
-              <a:t> Si alguno quiere continuarlo, no tiene que empezar por decidir qué hacer; ya lo decidió.</a:t>
+              <a:t>–   Y no resuelva el conflicto en público: recoja las coevaluaciones, léalas después y ajuste con criterio.</a:t>
             </a:r>
           </a:p>
         </p:txBody>
@@ -8462,7 +8086,7 @@
         <p:spPr>
           <a:xfrm>
             <a:off x="0" y="0"/>
-            <a:ext cx="12191695" cy="1170432"/>
+            <a:ext cx="12191695" cy="960120"/>
           </a:xfrm>
           <a:prstGeom prst="rect">
             <a:avLst/>
@@ -8504,7 +8128,7 @@
         </p:nvSpPr>
         <p:spPr>
           <a:xfrm>
-            <a:off x="0" y="1170432"/>
+            <a:off x="0" y="960120"/>
             <a:ext cx="12191695" cy="41148"/>
           </a:xfrm>
           <a:prstGeom prst="rect">
@@ -8548,7 +8172,7 @@
         <p:spPr>
           <a:xfrm>
             <a:off x="457200" y="164592"/>
-            <a:ext cx="11277295" cy="384048"/>
+            <a:ext cx="11277295" cy="502920"/>
           </a:xfrm>
           <a:prstGeom prst="rect">
             <a:avLst/>
@@ -8568,7 +8192,7 @@
                 </a:solidFill>
                 <a:latin typeface="Calibri"/>
               </a:rPr>
-              <a:t>Taller de hoy: Informe final y autoevaluación</a:t>
+              <a:t>El cierre del curso: veinte minutos que no son un discurso (1/2)</a:t>
             </a:r>
           </a:p>
         </p:txBody>
@@ -8581,8 +8205,8 @@
         </p:nvSpPr>
         <p:spPr>
           <a:xfrm>
-            <a:off x="457200" y="566928"/>
-            <a:ext cx="11277295" cy="411480"/>
+            <a:off x="457200" y="1170432"/>
+            <a:ext cx="11277295" cy="5230368"/>
           </a:xfrm>
           <a:prstGeom prst="rect">
             <a:avLst/>
@@ -8595,1026 +8219,74 @@
           </a:bodyPr>
           <a:lstStyle/>
           <a:p>
-            <a:r>
-              <a:rPr sz="1400" b="0" i="0">
-                <a:solidFill>
-                  <a:srgbClr val="B8D8EE"/>
-                </a:solidFill>
-                <a:latin typeface="Calibri"/>
-              </a:rPr>
-              <a:t>24 min en equipos · 24 min: pegar, verificar, repartir huecos, resumen y entregar · informe final en PDF + galería en el muro + autoevaluación y coevaluación</a:t>
-            </a:r>
-          </a:p>
-        </p:txBody>
-      </p:sp>
-      <p:sp>
-        <p:nvSpPr>
-          <p:cNvPr id="6" name="Rounded Rectangle 5"/>
-          <p:cNvSpPr/>
-          <p:nvPr/>
-        </p:nvSpPr>
-        <p:spPr>
-          <a:xfrm>
-            <a:off x="457200" y="1472184"/>
-            <a:ext cx="11277295" cy="566928"/>
-          </a:xfrm>
-          <a:prstGeom prst="roundRect">
-            <a:avLst>
-              <a:gd name="adj" fmla="val 12000"/>
-            </a:avLst>
-          </a:prstGeom>
-          <a:solidFill>
-            <a:srgbClr val="F2F2F2"/>
-          </a:solidFill>
-          <a:ln>
-            <a:noFill/>
-          </a:ln>
-        </p:spPr>
-        <p:style>
-          <a:lnRef idx="1">
-            <a:schemeClr val="accent1"/>
-          </a:lnRef>
-          <a:fillRef idx="3">
-            <a:schemeClr val="accent1"/>
-          </a:fillRef>
-          <a:effectRef idx="2">
-            <a:schemeClr val="accent1"/>
-          </a:effectRef>
-          <a:fontRef idx="minor">
-            <a:schemeClr val="lt1"/>
-          </a:fontRef>
-        </p:style>
-        <p:txBody>
-          <a:bodyPr rtlCol="0" anchor="ctr"/>
-          <a:lstStyle/>
-          <a:p>
-            <a:pPr algn="ctr"/>
-          </a:p>
-        </p:txBody>
-      </p:sp>
-      <p:sp>
-        <p:nvSpPr>
-          <p:cNvPr id="7" name="Rectangle 6"/>
-          <p:cNvSpPr/>
-          <p:nvPr/>
-        </p:nvSpPr>
-        <p:spPr>
-          <a:xfrm>
-            <a:off x="640080" y="1618487"/>
-            <a:ext cx="274320" cy="274320"/>
-          </a:xfrm>
-          <a:prstGeom prst="rect">
-            <a:avLst/>
-          </a:prstGeom>
-          <a:solidFill>
-            <a:srgbClr val="FFFFFF"/>
-          </a:solidFill>
-          <a:ln>
-            <a:solidFill>
-              <a:srgbClr val="333333"/>
-            </a:solidFill>
-          </a:ln>
-        </p:spPr>
-        <p:style>
-          <a:lnRef idx="1">
-            <a:schemeClr val="accent1"/>
-          </a:lnRef>
-          <a:fillRef idx="3">
-            <a:schemeClr val="accent1"/>
-          </a:fillRef>
-          <a:effectRef idx="2">
-            <a:schemeClr val="accent1"/>
-          </a:effectRef>
-          <a:fontRef idx="minor">
-            <a:schemeClr val="lt1"/>
-          </a:fontRef>
-        </p:style>
-        <p:txBody>
-          <a:bodyPr rtlCol="0" anchor="ctr"/>
-          <a:lstStyle/>
-          <a:p>
-            <a:pPr algn="ctr"/>
-          </a:p>
-        </p:txBody>
-      </p:sp>
-      <p:sp>
-        <p:nvSpPr>
-          <p:cNvPr id="8" name="Rectangle 7"/>
-          <p:cNvSpPr/>
-          <p:nvPr/>
-        </p:nvSpPr>
-        <p:spPr>
-          <a:xfrm>
-            <a:off x="640080" y="1618487"/>
-            <a:ext cx="73152" cy="274320"/>
-          </a:xfrm>
-          <a:prstGeom prst="rect">
-            <a:avLst/>
-          </a:prstGeom>
-          <a:solidFill>
-            <a:srgbClr val="269CCB"/>
-          </a:solidFill>
-          <a:ln>
-            <a:noFill/>
-          </a:ln>
-        </p:spPr>
-        <p:style>
-          <a:lnRef idx="1">
-            <a:schemeClr val="accent1"/>
-          </a:lnRef>
-          <a:fillRef idx="3">
-            <a:schemeClr val="accent1"/>
-          </a:fillRef>
-          <a:effectRef idx="2">
-            <a:schemeClr val="accent1"/>
-          </a:effectRef>
-          <a:fontRef idx="minor">
-            <a:schemeClr val="lt1"/>
-          </a:fontRef>
-        </p:style>
-        <p:txBody>
-          <a:bodyPr rtlCol="0" anchor="ctr"/>
-          <a:lstStyle/>
-          <a:p>
-            <a:pPr algn="ctr"/>
-          </a:p>
-        </p:txBody>
-      </p:sp>
-      <p:sp>
-        <p:nvSpPr>
-          <p:cNvPr id="9" name="TextBox 8"/>
-          <p:cNvSpPr txBox="1"/>
-          <p:nvPr/>
-        </p:nvSpPr>
-        <p:spPr>
-          <a:xfrm>
-            <a:off x="1097280" y="1563624"/>
-            <a:ext cx="10362895" cy="402336"/>
-          </a:xfrm>
-          <a:prstGeom prst="rect">
-            <a:avLst/>
-          </a:prstGeom>
-          <a:noFill/>
-        </p:spPr>
-        <p:txBody>
-          <a:bodyPr wrap="square" anchor="ctr"/>
-          <a:lstStyle/>
-          <a:p>
-            <a:r>
-              <a:rPr sz="1500" b="1" i="0">
-                <a:solidFill>
-                  <a:srgbClr val="333333"/>
-                </a:solidFill>
-                <a:latin typeface="Calibri"/>
-              </a:rPr>
-              <a:t>LA LISTA DE VERIFICACIÓN DEL INFORME</a:t>
-            </a:r>
-            <a:r>
-              <a:rPr sz="1500" b="0" i="0">
-                <a:solidFill>
-                  <a:srgbClr val="333333"/>
-                </a:solidFill>
-                <a:latin typeface="Calibri"/>
-              </a:rPr>
-              <a:t> — Las </a:t>
-            </a:r>
-            <a:r>
-              <a:rPr sz="1500" b="1" i="0">
-                <a:solidFill>
-                  <a:srgbClr val="333333"/>
-                </a:solidFill>
-                <a:latin typeface="Calibri"/>
-              </a:rPr>
-              <a:t>doce secciones</a:t>
-            </a:r>
-            <a:r>
-              <a:rPr sz="1500" b="0" i="0">
-                <a:solidFill>
-                  <a:srgbClr val="333333"/>
-                </a:solidFill>
-                <a:latin typeface="Calibri"/>
-              </a:rPr>
-              <a:t> en un solo documento, cada una con lo que ya estaba escrito desde su sesión, y con el largo de la tabla.</a:t>
-            </a:r>
-          </a:p>
-        </p:txBody>
-      </p:sp>
-      <p:sp>
-        <p:nvSpPr>
-          <p:cNvPr id="10" name="Rounded Rectangle 9"/>
-          <p:cNvSpPr/>
-          <p:nvPr/>
-        </p:nvSpPr>
-        <p:spPr>
-          <a:xfrm>
-            <a:off x="457200" y="2148839"/>
-            <a:ext cx="11277295" cy="566928"/>
-          </a:xfrm>
-          <a:prstGeom prst="roundRect">
-            <a:avLst>
-              <a:gd name="adj" fmla="val 12000"/>
-            </a:avLst>
-          </a:prstGeom>
-          <a:solidFill>
-            <a:srgbClr val="F2F2F2"/>
-          </a:solidFill>
-          <a:ln>
-            <a:noFill/>
-          </a:ln>
-        </p:spPr>
-        <p:style>
-          <a:lnRef idx="1">
-            <a:schemeClr val="accent1"/>
-          </a:lnRef>
-          <a:fillRef idx="3">
-            <a:schemeClr val="accent1"/>
-          </a:fillRef>
-          <a:effectRef idx="2">
-            <a:schemeClr val="accent1"/>
-          </a:effectRef>
-          <a:fontRef idx="minor">
-            <a:schemeClr val="lt1"/>
-          </a:fontRef>
-        </p:style>
-        <p:txBody>
-          <a:bodyPr rtlCol="0" anchor="ctr"/>
-          <a:lstStyle/>
-          <a:p>
-            <a:pPr algn="ctr"/>
-          </a:p>
-        </p:txBody>
-      </p:sp>
-      <p:sp>
-        <p:nvSpPr>
-          <p:cNvPr id="11" name="Rectangle 10"/>
-          <p:cNvSpPr/>
-          <p:nvPr/>
-        </p:nvSpPr>
-        <p:spPr>
-          <a:xfrm>
-            <a:off x="640080" y="2295144"/>
-            <a:ext cx="274320" cy="274320"/>
-          </a:xfrm>
-          <a:prstGeom prst="rect">
-            <a:avLst/>
-          </a:prstGeom>
-          <a:solidFill>
-            <a:srgbClr val="FFFFFF"/>
-          </a:solidFill>
-          <a:ln>
-            <a:solidFill>
-              <a:srgbClr val="333333"/>
-            </a:solidFill>
-          </a:ln>
-        </p:spPr>
-        <p:style>
-          <a:lnRef idx="1">
-            <a:schemeClr val="accent1"/>
-          </a:lnRef>
-          <a:fillRef idx="3">
-            <a:schemeClr val="accent1"/>
-          </a:fillRef>
-          <a:effectRef idx="2">
-            <a:schemeClr val="accent1"/>
-          </a:effectRef>
-          <a:fontRef idx="minor">
-            <a:schemeClr val="lt1"/>
-          </a:fontRef>
-        </p:style>
-        <p:txBody>
-          <a:bodyPr rtlCol="0" anchor="ctr"/>
-          <a:lstStyle/>
-          <a:p>
-            <a:pPr algn="ctr"/>
-          </a:p>
-        </p:txBody>
-      </p:sp>
-      <p:sp>
-        <p:nvSpPr>
-          <p:cNvPr id="12" name="Rectangle 11"/>
-          <p:cNvSpPr/>
-          <p:nvPr/>
-        </p:nvSpPr>
-        <p:spPr>
-          <a:xfrm>
-            <a:off x="640080" y="2295144"/>
-            <a:ext cx="73152" cy="274320"/>
-          </a:xfrm>
-          <a:prstGeom prst="rect">
-            <a:avLst/>
-          </a:prstGeom>
-          <a:solidFill>
-            <a:srgbClr val="269CCB"/>
-          </a:solidFill>
-          <a:ln>
-            <a:noFill/>
-          </a:ln>
-        </p:spPr>
-        <p:style>
-          <a:lnRef idx="1">
-            <a:schemeClr val="accent1"/>
-          </a:lnRef>
-          <a:fillRef idx="3">
-            <a:schemeClr val="accent1"/>
-          </a:fillRef>
-          <a:effectRef idx="2">
-            <a:schemeClr val="accent1"/>
-          </a:effectRef>
-          <a:fontRef idx="minor">
-            <a:schemeClr val="lt1"/>
-          </a:fontRef>
-        </p:style>
-        <p:txBody>
-          <a:bodyPr rtlCol="0" anchor="ctr"/>
-          <a:lstStyle/>
-          <a:p>
-            <a:pPr algn="ctr"/>
-          </a:p>
-        </p:txBody>
-      </p:sp>
-      <p:sp>
-        <p:nvSpPr>
-          <p:cNvPr id="13" name="TextBox 12"/>
-          <p:cNvSpPr txBox="1"/>
-          <p:nvPr/>
-        </p:nvSpPr>
-        <p:spPr>
-          <a:xfrm>
-            <a:off x="1097280" y="2240279"/>
-            <a:ext cx="10362895" cy="402336"/>
-          </a:xfrm>
-          <a:prstGeom prst="rect">
-            <a:avLst/>
-          </a:prstGeom>
-          <a:noFill/>
-        </p:spPr>
-        <p:txBody>
-          <a:bodyPr wrap="square" anchor="ctr"/>
-          <a:lstStyle/>
-          <a:p>
-            <a:r>
-              <a:rPr sz="1500" b="1" i="0">
-                <a:solidFill>
-                  <a:srgbClr val="333333"/>
-                </a:solidFill>
-                <a:latin typeface="Calibri"/>
-              </a:rPr>
-              <a:t>LO QUE FALTABA Y SE COMPLETÓ HOY</a:t>
-            </a:r>
-            <a:r>
-              <a:rPr sz="1500" b="0" i="0">
-                <a:solidFill>
-                  <a:srgbClr val="333333"/>
-                </a:solidFill>
-                <a:latin typeface="Calibri"/>
-              </a:rPr>
-              <a:t> — Los huecos que se marcaron en rojo, </a:t>
-            </a:r>
-            <a:r>
-              <a:rPr sz="1500" b="1" i="0">
-                <a:solidFill>
-                  <a:srgbClr val="333333"/>
-                </a:solidFill>
-                <a:latin typeface="Calibri"/>
-              </a:rPr>
-              <a:t>quién tomó cada uno</a:t>
-            </a:r>
-            <a:r>
-              <a:rPr sz="1500" b="0" i="0">
-                <a:solidFill>
-                  <a:srgbClr val="333333"/>
-                </a:solidFill>
-                <a:latin typeface="Calibri"/>
-              </a:rPr>
-              <a:t> y qué se escribió. Incluido el </a:t>
-            </a:r>
-            <a:r>
-              <a:rPr sz="1500" b="1" i="0">
-                <a:solidFill>
-                  <a:srgbClr val="333333"/>
-                </a:solidFill>
-                <a:latin typeface="Calibri"/>
-              </a:rPr>
-              <a:t>resumen</a:t>
-            </a:r>
-            <a:r>
-              <a:rPr sz="1500" b="0" i="0">
-                <a:solidFill>
-                  <a:srgbClr val="333333"/>
-                </a:solidFill>
-                <a:latin typeface="Calibri"/>
-              </a:rPr>
-              <a:t>, que es lo único nuevo.</a:t>
-            </a:r>
-          </a:p>
-        </p:txBody>
-      </p:sp>
-      <p:sp>
-        <p:nvSpPr>
-          <p:cNvPr id="14" name="Rounded Rectangle 13"/>
-          <p:cNvSpPr/>
-          <p:nvPr/>
-        </p:nvSpPr>
-        <p:spPr>
-          <a:xfrm>
-            <a:off x="457200" y="2825496"/>
-            <a:ext cx="11277295" cy="566928"/>
-          </a:xfrm>
-          <a:prstGeom prst="roundRect">
-            <a:avLst>
-              <a:gd name="adj" fmla="val 12000"/>
-            </a:avLst>
-          </a:prstGeom>
-          <a:solidFill>
-            <a:srgbClr val="F2F2F2"/>
-          </a:solidFill>
-          <a:ln>
-            <a:noFill/>
-          </a:ln>
-        </p:spPr>
-        <p:style>
-          <a:lnRef idx="1">
-            <a:schemeClr val="accent1"/>
-          </a:lnRef>
-          <a:fillRef idx="3">
-            <a:schemeClr val="accent1"/>
-          </a:fillRef>
-          <a:effectRef idx="2">
-            <a:schemeClr val="accent1"/>
-          </a:effectRef>
-          <a:fontRef idx="minor">
-            <a:schemeClr val="lt1"/>
-          </a:fontRef>
-        </p:style>
-        <p:txBody>
-          <a:bodyPr rtlCol="0" anchor="ctr"/>
-          <a:lstStyle/>
-          <a:p>
-            <a:pPr algn="ctr"/>
-          </a:p>
-        </p:txBody>
-      </p:sp>
-      <p:sp>
-        <p:nvSpPr>
-          <p:cNvPr id="15" name="Rectangle 14"/>
-          <p:cNvSpPr/>
-          <p:nvPr/>
-        </p:nvSpPr>
-        <p:spPr>
-          <a:xfrm>
-            <a:off x="640080" y="2971800"/>
-            <a:ext cx="274320" cy="274320"/>
-          </a:xfrm>
-          <a:prstGeom prst="rect">
-            <a:avLst/>
-          </a:prstGeom>
-          <a:solidFill>
-            <a:srgbClr val="FFFFFF"/>
-          </a:solidFill>
-          <a:ln>
-            <a:solidFill>
-              <a:srgbClr val="333333"/>
-            </a:solidFill>
-          </a:ln>
-        </p:spPr>
-        <p:style>
-          <a:lnRef idx="1">
-            <a:schemeClr val="accent1"/>
-          </a:lnRef>
-          <a:fillRef idx="3">
-            <a:schemeClr val="accent1"/>
-          </a:fillRef>
-          <a:effectRef idx="2">
-            <a:schemeClr val="accent1"/>
-          </a:effectRef>
-          <a:fontRef idx="minor">
-            <a:schemeClr val="lt1"/>
-          </a:fontRef>
-        </p:style>
-        <p:txBody>
-          <a:bodyPr rtlCol="0" anchor="ctr"/>
-          <a:lstStyle/>
-          <a:p>
-            <a:pPr algn="ctr"/>
-          </a:p>
-        </p:txBody>
-      </p:sp>
-      <p:sp>
-        <p:nvSpPr>
-          <p:cNvPr id="16" name="Rectangle 15"/>
-          <p:cNvSpPr/>
-          <p:nvPr/>
-        </p:nvSpPr>
-        <p:spPr>
-          <a:xfrm>
-            <a:off x="640080" y="2971800"/>
-            <a:ext cx="73152" cy="274320"/>
-          </a:xfrm>
-          <a:prstGeom prst="rect">
-            <a:avLst/>
-          </a:prstGeom>
-          <a:solidFill>
-            <a:srgbClr val="269CCB"/>
-          </a:solidFill>
-          <a:ln>
-            <a:noFill/>
-          </a:ln>
-        </p:spPr>
-        <p:style>
-          <a:lnRef idx="1">
-            <a:schemeClr val="accent1"/>
-          </a:lnRef>
-          <a:fillRef idx="3">
-            <a:schemeClr val="accent1"/>
-          </a:fillRef>
-          <a:effectRef idx="2">
-            <a:schemeClr val="accent1"/>
-          </a:effectRef>
-          <a:fontRef idx="minor">
-            <a:schemeClr val="lt1"/>
-          </a:fontRef>
-        </p:style>
-        <p:txBody>
-          <a:bodyPr rtlCol="0" anchor="ctr"/>
-          <a:lstStyle/>
-          <a:p>
-            <a:pPr algn="ctr"/>
-          </a:p>
-        </p:txBody>
-      </p:sp>
-      <p:sp>
-        <p:nvSpPr>
-          <p:cNvPr id="17" name="TextBox 16"/>
-          <p:cNvSpPr txBox="1"/>
-          <p:nvPr/>
-        </p:nvSpPr>
-        <p:spPr>
-          <a:xfrm>
-            <a:off x="1097280" y="2916936"/>
-            <a:ext cx="10362895" cy="402336"/>
-          </a:xfrm>
-          <a:prstGeom prst="rect">
-            <a:avLst/>
-          </a:prstGeom>
-          <a:noFill/>
-        </p:spPr>
-        <p:txBody>
-          <a:bodyPr wrap="square" anchor="ctr"/>
-          <a:lstStyle/>
-          <a:p>
-            <a:r>
-              <a:rPr sz="1500" b="1" i="0">
-                <a:solidFill>
-                  <a:srgbClr val="333333"/>
-                </a:solidFill>
-                <a:latin typeface="Calibri"/>
-              </a:rPr>
-              <a:t>LA DECLARACIÓN DEL USO DE IA</a:t>
-            </a:r>
-            <a:r>
-              <a:rPr sz="1500" b="0" i="0">
-                <a:solidFill>
-                  <a:srgbClr val="333333"/>
-                </a:solidFill>
-                <a:latin typeface="Calibri"/>
-              </a:rPr>
-              <a:t> — Qué se le pidió al asistente, </a:t>
-            </a:r>
-            <a:r>
-              <a:rPr sz="1500" b="1" i="0">
-                <a:solidFill>
-                  <a:srgbClr val="333333"/>
-                </a:solidFill>
-                <a:latin typeface="Calibri"/>
-              </a:rPr>
-              <a:t>qué se corrigió a mano</a:t>
-            </a:r>
-            <a:r>
-              <a:rPr sz="1500" b="0" i="0">
-                <a:solidFill>
-                  <a:srgbClr val="333333"/>
-                </a:solidFill>
-                <a:latin typeface="Calibri"/>
-              </a:rPr>
-              <a:t> y </a:t>
-            </a:r>
-            <a:r>
-              <a:rPr sz="1500" b="1" i="0">
-                <a:solidFill>
-                  <a:srgbClr val="333333"/>
-                </a:solidFill>
-                <a:latin typeface="Calibri"/>
-              </a:rPr>
-              <a:t>qué no se le entregó</a:t>
-            </a:r>
-            <a:r>
-              <a:rPr sz="1500" b="0" i="0">
-                <a:solidFill>
-                  <a:srgbClr val="333333"/>
-                </a:solidFill>
-                <a:latin typeface="Calibri"/>
-              </a:rPr>
-              <a:t>. Si no se usó, se dice que no se usó.</a:t>
-            </a:r>
-          </a:p>
-        </p:txBody>
-      </p:sp>
-      <p:sp>
-        <p:nvSpPr>
-          <p:cNvPr id="18" name="Rounded Rectangle 17"/>
-          <p:cNvSpPr/>
-          <p:nvPr/>
-        </p:nvSpPr>
-        <p:spPr>
-          <a:xfrm>
-            <a:off x="457200" y="3502152"/>
-            <a:ext cx="11277295" cy="566928"/>
-          </a:xfrm>
-          <a:prstGeom prst="roundRect">
-            <a:avLst>
-              <a:gd name="adj" fmla="val 12000"/>
-            </a:avLst>
-          </a:prstGeom>
-          <a:solidFill>
-            <a:srgbClr val="F2F2F2"/>
-          </a:solidFill>
-          <a:ln>
-            <a:noFill/>
-          </a:ln>
-        </p:spPr>
-        <p:style>
-          <a:lnRef idx="1">
-            <a:schemeClr val="accent1"/>
-          </a:lnRef>
-          <a:fillRef idx="3">
-            <a:schemeClr val="accent1"/>
-          </a:fillRef>
-          <a:effectRef idx="2">
-            <a:schemeClr val="accent1"/>
-          </a:effectRef>
-          <a:fontRef idx="minor">
-            <a:schemeClr val="lt1"/>
-          </a:fontRef>
-        </p:style>
-        <p:txBody>
-          <a:bodyPr rtlCol="0" anchor="ctr"/>
-          <a:lstStyle/>
-          <a:p>
-            <a:pPr algn="ctr"/>
-          </a:p>
-        </p:txBody>
-      </p:sp>
-      <p:sp>
-        <p:nvSpPr>
-          <p:cNvPr id="19" name="Rectangle 18"/>
-          <p:cNvSpPr/>
-          <p:nvPr/>
-        </p:nvSpPr>
-        <p:spPr>
-          <a:xfrm>
-            <a:off x="640080" y="3648456"/>
-            <a:ext cx="274320" cy="274320"/>
-          </a:xfrm>
-          <a:prstGeom prst="rect">
-            <a:avLst/>
-          </a:prstGeom>
-          <a:solidFill>
-            <a:srgbClr val="FFFFFF"/>
-          </a:solidFill>
-          <a:ln>
-            <a:solidFill>
-              <a:srgbClr val="333333"/>
-            </a:solidFill>
-          </a:ln>
-        </p:spPr>
-        <p:style>
-          <a:lnRef idx="1">
-            <a:schemeClr val="accent1"/>
-          </a:lnRef>
-          <a:fillRef idx="3">
-            <a:schemeClr val="accent1"/>
-          </a:fillRef>
-          <a:effectRef idx="2">
-            <a:schemeClr val="accent1"/>
-          </a:effectRef>
-          <a:fontRef idx="minor">
-            <a:schemeClr val="lt1"/>
-          </a:fontRef>
-        </p:style>
-        <p:txBody>
-          <a:bodyPr rtlCol="0" anchor="ctr"/>
-          <a:lstStyle/>
-          <a:p>
-            <a:pPr algn="ctr"/>
-          </a:p>
-        </p:txBody>
-      </p:sp>
-      <p:sp>
-        <p:nvSpPr>
-          <p:cNvPr id="20" name="Rectangle 19"/>
-          <p:cNvSpPr/>
-          <p:nvPr/>
-        </p:nvSpPr>
-        <p:spPr>
-          <a:xfrm>
-            <a:off x="640080" y="3648456"/>
-            <a:ext cx="73152" cy="274320"/>
-          </a:xfrm>
-          <a:prstGeom prst="rect">
-            <a:avLst/>
-          </a:prstGeom>
-          <a:solidFill>
-            <a:srgbClr val="269CCB"/>
-          </a:solidFill>
-          <a:ln>
-            <a:noFill/>
-          </a:ln>
-        </p:spPr>
-        <p:style>
-          <a:lnRef idx="1">
-            <a:schemeClr val="accent1"/>
-          </a:lnRef>
-          <a:fillRef idx="3">
-            <a:schemeClr val="accent1"/>
-          </a:fillRef>
-          <a:effectRef idx="2">
-            <a:schemeClr val="accent1"/>
-          </a:effectRef>
-          <a:fontRef idx="minor">
-            <a:schemeClr val="lt1"/>
-          </a:fontRef>
-        </p:style>
-        <p:txBody>
-          <a:bodyPr rtlCol="0" anchor="ctr"/>
-          <a:lstStyle/>
-          <a:p>
-            <a:pPr algn="ctr"/>
-          </a:p>
-        </p:txBody>
-      </p:sp>
-      <p:sp>
-        <p:nvSpPr>
-          <p:cNvPr id="21" name="TextBox 20"/>
-          <p:cNvSpPr txBox="1"/>
-          <p:nvPr/>
-        </p:nvSpPr>
-        <p:spPr>
-          <a:xfrm>
-            <a:off x="1097280" y="3593592"/>
-            <a:ext cx="10362895" cy="402336"/>
-          </a:xfrm>
-          <a:prstGeom prst="rect">
-            <a:avLst/>
-          </a:prstGeom>
-          <a:noFill/>
-        </p:spPr>
-        <p:txBody>
-          <a:bodyPr wrap="square" anchor="ctr"/>
-          <a:lstStyle/>
-          <a:p>
-            <a:r>
-              <a:rPr sz="1500" b="1" i="0">
-                <a:solidFill>
-                  <a:srgbClr val="333333"/>
-                </a:solidFill>
-                <a:latin typeface="Calibri"/>
-              </a:rPr>
-              <a:t>LA AUTOEVALUACIÓN INDIVIDUAL</a:t>
-            </a:r>
-            <a:r>
-              <a:rPr sz="1500" b="0" i="0">
-                <a:solidFill>
-                  <a:srgbClr val="333333"/>
-                </a:solidFill>
-                <a:latin typeface="Calibri"/>
-              </a:rPr>
-              <a:t> — Cuatro respuestas </a:t>
-            </a:r>
-            <a:r>
-              <a:rPr sz="1500" b="1" i="0">
-                <a:solidFill>
-                  <a:srgbClr val="333333"/>
-                </a:solidFill>
-                <a:latin typeface="Calibri"/>
-              </a:rPr>
-              <a:t>con evidencia</a:t>
-            </a:r>
-            <a:r>
-              <a:rPr sz="1500" b="0" i="0">
-                <a:solidFill>
-                  <a:srgbClr val="333333"/>
-                </a:solidFill>
-                <a:latin typeface="Calibri"/>
-              </a:rPr>
-              <a:t>: qué hice yo · qué aprendí a hacer que no sabía · en qué fallé · qué haría distinto. </a:t>
-            </a:r>
-            <a:r>
-              <a:rPr sz="1500" b="1" i="0">
-                <a:solidFill>
-                  <a:srgbClr val="333333"/>
-                </a:solidFill>
-                <a:latin typeface="Calibri"/>
-              </a:rPr>
-              <a:t>Solo para el docente.</a:t>
-            </a:r>
-          </a:p>
-        </p:txBody>
-      </p:sp>
-      <p:sp>
-        <p:nvSpPr>
-          <p:cNvPr id="22" name="Rounded Rectangle 21"/>
-          <p:cNvSpPr/>
-          <p:nvPr/>
-        </p:nvSpPr>
-        <p:spPr>
-          <a:xfrm>
-            <a:off x="457200" y="4178808"/>
-            <a:ext cx="11277295" cy="566928"/>
-          </a:xfrm>
-          <a:prstGeom prst="roundRect">
-            <a:avLst>
-              <a:gd name="adj" fmla="val 12000"/>
-            </a:avLst>
-          </a:prstGeom>
-          <a:solidFill>
-            <a:srgbClr val="F2F2F2"/>
-          </a:solidFill>
-          <a:ln>
-            <a:noFill/>
-          </a:ln>
-        </p:spPr>
-        <p:style>
-          <a:lnRef idx="1">
-            <a:schemeClr val="accent1"/>
-          </a:lnRef>
-          <a:fillRef idx="3">
-            <a:schemeClr val="accent1"/>
-          </a:fillRef>
-          <a:effectRef idx="2">
-            <a:schemeClr val="accent1"/>
-          </a:effectRef>
-          <a:fontRef idx="minor">
-            <a:schemeClr val="lt1"/>
-          </a:fontRef>
-        </p:style>
-        <p:txBody>
-          <a:bodyPr rtlCol="0" anchor="ctr"/>
-          <a:lstStyle/>
-          <a:p>
-            <a:pPr algn="ctr"/>
-          </a:p>
-        </p:txBody>
-      </p:sp>
-      <p:sp>
-        <p:nvSpPr>
-          <p:cNvPr id="23" name="Rectangle 22"/>
-          <p:cNvSpPr/>
-          <p:nvPr/>
-        </p:nvSpPr>
-        <p:spPr>
-          <a:xfrm>
-            <a:off x="640080" y="4325112"/>
-            <a:ext cx="274320" cy="274320"/>
-          </a:xfrm>
-          <a:prstGeom prst="rect">
-            <a:avLst/>
-          </a:prstGeom>
-          <a:solidFill>
-            <a:srgbClr val="FFFFFF"/>
-          </a:solidFill>
-          <a:ln>
-            <a:solidFill>
-              <a:srgbClr val="333333"/>
-            </a:solidFill>
-          </a:ln>
-        </p:spPr>
-        <p:style>
-          <a:lnRef idx="1">
-            <a:schemeClr val="accent1"/>
-          </a:lnRef>
-          <a:fillRef idx="3">
-            <a:schemeClr val="accent1"/>
-          </a:fillRef>
-          <a:effectRef idx="2">
-            <a:schemeClr val="accent1"/>
-          </a:effectRef>
-          <a:fontRef idx="minor">
-            <a:schemeClr val="lt1"/>
-          </a:fontRef>
-        </p:style>
-        <p:txBody>
-          <a:bodyPr rtlCol="0" anchor="ctr"/>
-          <a:lstStyle/>
-          <a:p>
-            <a:pPr algn="ctr"/>
-          </a:p>
-        </p:txBody>
-      </p:sp>
-      <p:sp>
-        <p:nvSpPr>
-          <p:cNvPr id="24" name="Rectangle 23"/>
-          <p:cNvSpPr/>
-          <p:nvPr/>
-        </p:nvSpPr>
-        <p:spPr>
-          <a:xfrm>
-            <a:off x="640080" y="4325112"/>
-            <a:ext cx="73152" cy="274320"/>
-          </a:xfrm>
-          <a:prstGeom prst="rect">
-            <a:avLst/>
-          </a:prstGeom>
-          <a:solidFill>
-            <a:srgbClr val="269CCB"/>
-          </a:solidFill>
-          <a:ln>
-            <a:noFill/>
-          </a:ln>
-        </p:spPr>
-        <p:style>
-          <a:lnRef idx="1">
-            <a:schemeClr val="accent1"/>
-          </a:lnRef>
-          <a:fillRef idx="3">
-            <a:schemeClr val="accent1"/>
-          </a:fillRef>
-          <a:effectRef idx="2">
-            <a:schemeClr val="accent1"/>
-          </a:effectRef>
-          <a:fontRef idx="minor">
-            <a:schemeClr val="lt1"/>
-          </a:fontRef>
-        </p:style>
-        <p:txBody>
-          <a:bodyPr rtlCol="0" anchor="ctr"/>
-          <a:lstStyle/>
-          <a:p>
-            <a:pPr algn="ctr"/>
-          </a:p>
-        </p:txBody>
-      </p:sp>
-      <p:sp>
-        <p:nvSpPr>
-          <p:cNvPr id="25" name="TextBox 24"/>
-          <p:cNvSpPr txBox="1"/>
-          <p:nvPr/>
-        </p:nvSpPr>
-        <p:spPr>
-          <a:xfrm>
-            <a:off x="1097280" y="4270248"/>
-            <a:ext cx="10362895" cy="402336"/>
-          </a:xfrm>
-          <a:prstGeom prst="rect">
-            <a:avLst/>
-          </a:prstGeom>
-          <a:noFill/>
-        </p:spPr>
-        <p:txBody>
-          <a:bodyPr wrap="square" anchor="ctr"/>
-          <a:lstStyle/>
-          <a:p>
-            <a:r>
-              <a:rPr sz="1500" b="1" i="0">
-                <a:solidFill>
-                  <a:srgbClr val="333333"/>
-                </a:solidFill>
-                <a:latin typeface="Calibri"/>
-              </a:rPr>
-              <a:t>LA COEVALUACIÓN DEL EQUIPO</a:t>
-            </a:r>
-            <a:r>
-              <a:rPr sz="1500" b="0" i="0">
-                <a:solidFill>
-                  <a:srgbClr val="333333"/>
-                </a:solidFill>
-                <a:latin typeface="Calibri"/>
-              </a:rPr>
-              <a:t> — Cumplimiento de acuerdos, aporte al proyecto y disposición para ayudar, con </a:t>
-            </a:r>
-            <a:r>
-              <a:rPr sz="1500" b="1" i="0">
-                <a:solidFill>
-                  <a:srgbClr val="333333"/>
-                </a:solidFill>
-                <a:latin typeface="Calibri"/>
-              </a:rPr>
-              <a:t>observaciones y no adjetivos</a:t>
-            </a:r>
-            <a:r>
-              <a:rPr sz="1500" b="0" i="0">
-                <a:solidFill>
-                  <a:srgbClr val="333333"/>
-                </a:solidFill>
-                <a:latin typeface="Calibri"/>
-              </a:rPr>
-              <a:t>.</a:t>
-            </a:r>
-          </a:p>
-        </p:txBody>
-      </p:sp>
-      <p:sp>
-        <p:nvSpPr>
-          <p:cNvPr id="26" name="TextBox 25"/>
+            <a:pPr>
+              <a:spcAft>
+                <a:spcPts val="800"/>
+              </a:spcAft>
+            </a:pPr>
+            <a:r>
+              <a:rPr sz="2000" b="0" i="0">
+                <a:solidFill>
+                  <a:srgbClr val="333333"/>
+                </a:solidFill>
+                <a:latin typeface="Calibri"/>
+              </a:rPr>
+              <a:t>–   Los últimos veinte minutos se pueden desperdiciar fácilmente en un discurso de despedida. **Úselos para hacer visible el aprendizaje</a:t>
+            </a:r>
+          </a:p>
+          <a:p>
+            <a:pPr>
+              <a:spcAft>
+                <a:spcPts val="800"/>
+              </a:spcAft>
+            </a:pPr>
+            <a:r>
+              <a:rPr sz="2000" b="0" i="0">
+                <a:solidFill>
+                  <a:srgbClr val="333333"/>
+                </a:solidFill>
+                <a:latin typeface="Calibri"/>
+              </a:rPr>
+              <a:t>–   Con evidencia.** La diapositiva de antes y después es la herramienta: en la columna izquierda están las respuestas reales de la prueba diagnóstica de la sesión 1 —vale la pena tenerlas a mano de verdad, no parafraseadas— y en la derecha lo que hoy pueden sostener.</a:t>
+            </a:r>
+          </a:p>
+          <a:p>
+            <a:pPr>
+              <a:spcAft>
+                <a:spcPts val="800"/>
+              </a:spcAft>
+            </a:pPr>
+            <a:r>
+              <a:rPr sz="2000" b="0" i="0">
+                <a:solidFill>
+                  <a:srgbClr val="333333"/>
+                </a:solidFill>
+                <a:latin typeface="Calibri"/>
+              </a:rPr>
+              <a:t>–   «Hay afectados que nunca la usan» está en la sección 9, con la voluntaria que trabaja diez minutos más.</a:t>
+            </a:r>
+          </a:p>
+          <a:p>
+            <a:pPr>
+              <a:spcAft>
+                <a:spcPts val="800"/>
+              </a:spcAft>
+            </a:pPr>
+            <a:r>
+              <a:rPr sz="2000" b="0" i="0">
+                <a:solidFill>
+                  <a:srgbClr val="333333"/>
+                </a:solidFill>
+                <a:latin typeface="Calibri"/>
+              </a:rPr>
+              <a:t>–   Conecte con los tres RAA sin recitar códigos: reconocer la ingeniería como práctica que decide bajo restricciones (RAA1), aplicar un método para definir y resolver un problema con evidencia (RAA2)</a:t>
+            </a:r>
+          </a:p>
+        </p:txBody>
+      </p:sp>
+      <p:sp>
+        <p:nvSpPr>
+          <p:cNvPr id="6" name="TextBox 5"/>
           <p:cNvSpPr txBox="1"/>
           <p:nvPr/>
         </p:nvSpPr>
@@ -9682,7 +8354,7 @@
         <p:spPr>
           <a:xfrm>
             <a:off x="0" y="0"/>
-            <a:ext cx="12191695" cy="1170432"/>
+            <a:ext cx="12191695" cy="960120"/>
           </a:xfrm>
           <a:prstGeom prst="rect">
             <a:avLst/>
@@ -9724,7 +8396,7 @@
         </p:nvSpPr>
         <p:spPr>
           <a:xfrm>
-            <a:off x="0" y="1170432"/>
+            <a:off x="0" y="960120"/>
             <a:ext cx="12191695" cy="41148"/>
           </a:xfrm>
           <a:prstGeom prst="rect">
@@ -9768,7 +8440,7 @@
         <p:spPr>
           <a:xfrm>
             <a:off x="457200" y="164592"/>
-            <a:ext cx="11277295" cy="384048"/>
+            <a:ext cx="11277295" cy="502920"/>
           </a:xfrm>
           <a:prstGeom prst="rect">
             <a:avLst/>
@@ -9788,7 +8460,7 @@
                 </a:solidFill>
                 <a:latin typeface="Calibri"/>
               </a:rPr>
-              <a:t>Cómo se expone en 3 minutos</a:t>
+              <a:t>El cierre del curso: veinte minutos que no son un discurso (2/2)</a:t>
             </a:r>
           </a:p>
         </p:txBody>
@@ -9801,8 +8473,8 @@
         </p:nvSpPr>
         <p:spPr>
           <a:xfrm>
-            <a:off x="457200" y="566928"/>
-            <a:ext cx="11277295" cy="411480"/>
+            <a:off x="457200" y="1170432"/>
+            <a:ext cx="11277295" cy="5230368"/>
           </a:xfrm>
           <a:prstGeom prst="rect">
             <a:avLst/>
@@ -9815,705 +8487,160 @@
           </a:bodyPr>
           <a:lstStyle/>
           <a:p>
-            <a:r>
-              <a:rPr sz="1400" b="0" i="0">
-                <a:solidFill>
-                  <a:srgbClr val="B8D8EE"/>
-                </a:solidFill>
-                <a:latin typeface="Calibri"/>
-              </a:rPr>
-              <a:t>Habla el vocero con la pantalla ya compartida · cronómetro en pantalla · se corta al llegar a cero</a:t>
-            </a:r>
-          </a:p>
-        </p:txBody>
-      </p:sp>
-      <p:sp>
-        <p:nvSpPr>
-          <p:cNvPr id="6" name="Rounded Rectangle 5"/>
-          <p:cNvSpPr/>
-          <p:nvPr/>
-        </p:nvSpPr>
-        <p:spPr>
-          <a:xfrm>
-            <a:off x="457200" y="1659636"/>
-            <a:ext cx="11277295" cy="1051560"/>
-          </a:xfrm>
-          <a:prstGeom prst="roundRect">
-            <a:avLst>
-              <a:gd name="adj" fmla="val 12000"/>
-            </a:avLst>
-          </a:prstGeom>
-          <a:solidFill>
-            <a:srgbClr val="F2F2F2"/>
-          </a:solidFill>
-          <a:ln>
-            <a:noFill/>
-          </a:ln>
-        </p:spPr>
-        <p:style>
-          <a:lnRef idx="1">
-            <a:schemeClr val="accent1"/>
-          </a:lnRef>
-          <a:fillRef idx="3">
-            <a:schemeClr val="accent1"/>
-          </a:fillRef>
-          <a:effectRef idx="2">
-            <a:schemeClr val="accent1"/>
-          </a:effectRef>
-          <a:fontRef idx="minor">
-            <a:schemeClr val="lt1"/>
-          </a:fontRef>
-        </p:style>
-        <p:txBody>
-          <a:bodyPr rtlCol="0" anchor="ctr"/>
-          <a:lstStyle/>
-          <a:p>
-            <a:pPr algn="ctr"/>
-          </a:p>
-        </p:txBody>
-      </p:sp>
-      <p:sp>
-        <p:nvSpPr>
-          <p:cNvPr id="7" name="Rounded Rectangle 6"/>
-          <p:cNvSpPr/>
-          <p:nvPr/>
-        </p:nvSpPr>
-        <p:spPr>
-          <a:xfrm>
-            <a:off x="594360" y="1965960"/>
-            <a:ext cx="438912" cy="438912"/>
-          </a:xfrm>
-          <a:prstGeom prst="roundRect">
-            <a:avLst>
-              <a:gd name="adj" fmla="val 12000"/>
-            </a:avLst>
-          </a:prstGeom>
-          <a:solidFill>
-            <a:srgbClr val="095292"/>
-          </a:solidFill>
-          <a:ln>
-            <a:noFill/>
-          </a:ln>
-        </p:spPr>
-        <p:style>
-          <a:lnRef idx="1">
-            <a:schemeClr val="accent1"/>
-          </a:lnRef>
-          <a:fillRef idx="3">
-            <a:schemeClr val="accent1"/>
-          </a:fillRef>
-          <a:effectRef idx="2">
-            <a:schemeClr val="accent1"/>
-          </a:effectRef>
-          <a:fontRef idx="minor">
-            <a:schemeClr val="lt1"/>
-          </a:fontRef>
-        </p:style>
-        <p:txBody>
-          <a:bodyPr rtlCol="0" anchor="ctr"/>
-          <a:lstStyle/>
-          <a:p>
-            <a:pPr algn="ctr"/>
-          </a:p>
-        </p:txBody>
-      </p:sp>
-      <p:sp>
-        <p:nvSpPr>
-          <p:cNvPr id="8" name="TextBox 7"/>
-          <p:cNvSpPr txBox="1"/>
-          <p:nvPr/>
-        </p:nvSpPr>
-        <p:spPr>
-          <a:xfrm>
-            <a:off x="594360" y="1965960"/>
-            <a:ext cx="438912" cy="438912"/>
-          </a:xfrm>
-          <a:prstGeom prst="rect">
-            <a:avLst/>
-          </a:prstGeom>
-          <a:noFill/>
-        </p:spPr>
-        <p:txBody>
-          <a:bodyPr wrap="square" anchor="ctr"/>
-          <a:lstStyle/>
-          <a:p>
-            <a:pPr algn="ctr"/>
-            <a:r>
-              <a:rPr sz="1600" b="1" i="0">
-                <a:solidFill>
-                  <a:srgbClr val="FFFFFF"/>
-                </a:solidFill>
-                <a:latin typeface="Calibri"/>
-              </a:rPr>
-              <a:t>1</a:t>
-            </a:r>
-          </a:p>
-        </p:txBody>
-      </p:sp>
-      <p:sp>
-        <p:nvSpPr>
-          <p:cNvPr id="9" name="TextBox 8"/>
-          <p:cNvSpPr txBox="1"/>
-          <p:nvPr/>
-        </p:nvSpPr>
-        <p:spPr>
-          <a:xfrm>
-            <a:off x="1188720" y="1751076"/>
-            <a:ext cx="10271455" cy="886968"/>
-          </a:xfrm>
-          <a:prstGeom prst="rect">
-            <a:avLst/>
-          </a:prstGeom>
-          <a:noFill/>
-        </p:spPr>
-        <p:txBody>
-          <a:bodyPr wrap="square" anchor="ctr"/>
-          <a:lstStyle/>
-          <a:p>
-            <a:r>
-              <a:rPr sz="1500" b="1" i="0">
-                <a:solidFill>
-                  <a:srgbClr val="095292"/>
-                </a:solidFill>
-                <a:latin typeface="Calibri"/>
-              </a:rPr>
-              <a:t>Imagen 1</a:t>
-            </a:r>
-          </a:p>
-          <a:p>
             <a:pPr>
-              <a:spcBef>
-                <a:spcPts val="200"/>
-              </a:spcBef>
+              <a:spcAft>
+                <a:spcPts val="800"/>
+              </a:spcAft>
             </a:pPr>
             <a:r>
-              <a:rPr sz="1300" b="0" i="0">
-                <a:solidFill>
-                  <a:srgbClr val="333333"/>
-                </a:solidFill>
-                <a:latin typeface="Calibri"/>
-              </a:rPr>
-              <a:t>Una pantalla del prototipo funcionando.</a:t>
-            </a:r>
-          </a:p>
-        </p:txBody>
-      </p:sp>
-      <p:sp>
-        <p:nvSpPr>
-          <p:cNvPr id="10" name="Rounded Rectangle 9"/>
-          <p:cNvSpPr/>
-          <p:nvPr/>
-        </p:nvSpPr>
-        <p:spPr>
-          <a:xfrm>
-            <a:off x="457200" y="2802636"/>
-            <a:ext cx="11277295" cy="1051560"/>
-          </a:xfrm>
-          <a:prstGeom prst="roundRect">
-            <a:avLst>
-              <a:gd name="adj" fmla="val 12000"/>
-            </a:avLst>
-          </a:prstGeom>
-          <a:solidFill>
-            <a:srgbClr val="E8F4FA"/>
-          </a:solidFill>
-          <a:ln>
-            <a:noFill/>
-          </a:ln>
-        </p:spPr>
-        <p:style>
-          <a:lnRef idx="1">
-            <a:schemeClr val="accent1"/>
-          </a:lnRef>
-          <a:fillRef idx="3">
-            <a:schemeClr val="accent1"/>
-          </a:fillRef>
-          <a:effectRef idx="2">
-            <a:schemeClr val="accent1"/>
-          </a:effectRef>
-          <a:fontRef idx="minor">
-            <a:schemeClr val="lt1"/>
-          </a:fontRef>
-        </p:style>
-        <p:txBody>
-          <a:bodyPr rtlCol="0" anchor="ctr"/>
-          <a:lstStyle/>
-          <a:p>
-            <a:pPr algn="ctr"/>
-          </a:p>
-        </p:txBody>
-      </p:sp>
-      <p:sp>
-        <p:nvSpPr>
-          <p:cNvPr id="11" name="Rounded Rectangle 10"/>
-          <p:cNvSpPr/>
-          <p:nvPr/>
-        </p:nvSpPr>
-        <p:spPr>
-          <a:xfrm>
-            <a:off x="594360" y="3108960"/>
-            <a:ext cx="438912" cy="438912"/>
-          </a:xfrm>
-          <a:prstGeom prst="roundRect">
-            <a:avLst>
-              <a:gd name="adj" fmla="val 12000"/>
-            </a:avLst>
-          </a:prstGeom>
-          <a:solidFill>
-            <a:srgbClr val="095292"/>
-          </a:solidFill>
-          <a:ln>
-            <a:noFill/>
-          </a:ln>
-        </p:spPr>
-        <p:style>
-          <a:lnRef idx="1">
-            <a:schemeClr val="accent1"/>
-          </a:lnRef>
-          <a:fillRef idx="3">
-            <a:schemeClr val="accent1"/>
-          </a:fillRef>
-          <a:effectRef idx="2">
-            <a:schemeClr val="accent1"/>
-          </a:effectRef>
-          <a:fontRef idx="minor">
-            <a:schemeClr val="lt1"/>
-          </a:fontRef>
-        </p:style>
-        <p:txBody>
-          <a:bodyPr rtlCol="0" anchor="ctr"/>
-          <a:lstStyle/>
-          <a:p>
-            <a:pPr algn="ctr"/>
-          </a:p>
-        </p:txBody>
-      </p:sp>
-      <p:sp>
-        <p:nvSpPr>
-          <p:cNvPr id="12" name="TextBox 11"/>
-          <p:cNvSpPr txBox="1"/>
-          <p:nvPr/>
-        </p:nvSpPr>
-        <p:spPr>
-          <a:xfrm>
-            <a:off x="594360" y="3108960"/>
-            <a:ext cx="438912" cy="438912"/>
-          </a:xfrm>
-          <a:prstGeom prst="rect">
-            <a:avLst/>
-          </a:prstGeom>
-          <a:noFill/>
-        </p:spPr>
-        <p:txBody>
-          <a:bodyPr wrap="square" anchor="ctr"/>
-          <a:lstStyle/>
-          <a:p>
-            <a:pPr algn="ctr"/>
-            <a:r>
-              <a:rPr sz="1600" b="1" i="0">
-                <a:solidFill>
-                  <a:srgbClr val="FFFFFF"/>
-                </a:solidFill>
-                <a:latin typeface="Calibri"/>
-              </a:rPr>
-              <a:t>2</a:t>
-            </a:r>
-          </a:p>
-        </p:txBody>
-      </p:sp>
-      <p:sp>
-        <p:nvSpPr>
-          <p:cNvPr id="13" name="TextBox 12"/>
-          <p:cNvSpPr txBox="1"/>
-          <p:nvPr/>
-        </p:nvSpPr>
-        <p:spPr>
-          <a:xfrm>
-            <a:off x="1188720" y="2894076"/>
-            <a:ext cx="10271455" cy="886968"/>
-          </a:xfrm>
-          <a:prstGeom prst="rect">
-            <a:avLst/>
-          </a:prstGeom>
-          <a:noFill/>
-        </p:spPr>
-        <p:txBody>
-          <a:bodyPr wrap="square" anchor="ctr"/>
-          <a:lstStyle/>
-          <a:p>
-            <a:r>
-              <a:rPr sz="1500" b="1" i="0">
-                <a:solidFill>
-                  <a:srgbClr val="095292"/>
-                </a:solidFill>
-                <a:latin typeface="Calibri"/>
-              </a:rPr>
-              <a:t>Imagen 2</a:t>
+              <a:rPr sz="2000" b="0" i="0">
+                <a:solidFill>
+                  <a:srgbClr val="333333"/>
+                </a:solidFill>
+                <a:latin typeface="Calibri"/>
+              </a:rPr>
+              <a:t>–   Y valorar las consecuencias sociales y ambientales de una solución (RAA3).</a:t>
             </a:r>
           </a:p>
           <a:p>
             <a:pPr>
-              <a:spcBef>
-                <a:spcPts val="200"/>
-              </a:spcBef>
+              <a:spcAft>
+                <a:spcPts val="800"/>
+              </a:spcAft>
             </a:pPr>
             <a:r>
-              <a:rPr sz="1300" b="0" i="0">
-                <a:solidFill>
-                  <a:srgbClr val="333333"/>
-                </a:solidFill>
-                <a:latin typeface="Calibri"/>
-              </a:rPr>
-              <a:t>La matriz de impacto, o la diapositiva del problema con su cifra.</a:t>
-            </a:r>
-          </a:p>
-        </p:txBody>
-      </p:sp>
-      <p:sp>
-        <p:nvSpPr>
-          <p:cNvPr id="14" name="Rounded Rectangle 13"/>
-          <p:cNvSpPr/>
-          <p:nvPr/>
-        </p:nvSpPr>
-        <p:spPr>
-          <a:xfrm>
-            <a:off x="457200" y="3945636"/>
-            <a:ext cx="11277295" cy="1051560"/>
-          </a:xfrm>
-          <a:prstGeom prst="roundRect">
-            <a:avLst>
-              <a:gd name="adj" fmla="val 12000"/>
-            </a:avLst>
-          </a:prstGeom>
-          <a:solidFill>
-            <a:srgbClr val="F2F2F2"/>
-          </a:solidFill>
-          <a:ln>
-            <a:noFill/>
-          </a:ln>
-        </p:spPr>
-        <p:style>
-          <a:lnRef idx="1">
-            <a:schemeClr val="accent1"/>
-          </a:lnRef>
-          <a:fillRef idx="3">
-            <a:schemeClr val="accent1"/>
-          </a:fillRef>
-          <a:effectRef idx="2">
-            <a:schemeClr val="accent1"/>
-          </a:effectRef>
-          <a:fontRef idx="minor">
-            <a:schemeClr val="lt1"/>
-          </a:fontRef>
-        </p:style>
-        <p:txBody>
-          <a:bodyPr rtlCol="0" anchor="ctr"/>
-          <a:lstStyle/>
-          <a:p>
-            <a:pPr algn="ctr"/>
-          </a:p>
-        </p:txBody>
-      </p:sp>
-      <p:sp>
-        <p:nvSpPr>
-          <p:cNvPr id="15" name="Rounded Rectangle 14"/>
-          <p:cNvSpPr/>
-          <p:nvPr/>
-        </p:nvSpPr>
-        <p:spPr>
-          <a:xfrm>
-            <a:off x="594360" y="4251960"/>
-            <a:ext cx="438912" cy="438912"/>
-          </a:xfrm>
-          <a:prstGeom prst="roundRect">
-            <a:avLst>
-              <a:gd name="adj" fmla="val 12000"/>
-            </a:avLst>
-          </a:prstGeom>
-          <a:solidFill>
-            <a:srgbClr val="095292"/>
-          </a:solidFill>
-          <a:ln>
-            <a:noFill/>
-          </a:ln>
-        </p:spPr>
-        <p:style>
-          <a:lnRef idx="1">
-            <a:schemeClr val="accent1"/>
-          </a:lnRef>
-          <a:fillRef idx="3">
-            <a:schemeClr val="accent1"/>
-          </a:fillRef>
-          <a:effectRef idx="2">
-            <a:schemeClr val="accent1"/>
-          </a:effectRef>
-          <a:fontRef idx="minor">
-            <a:schemeClr val="lt1"/>
-          </a:fontRef>
-        </p:style>
-        <p:txBody>
-          <a:bodyPr rtlCol="0" anchor="ctr"/>
-          <a:lstStyle/>
-          <a:p>
-            <a:pPr algn="ctr"/>
-          </a:p>
-        </p:txBody>
-      </p:sp>
-      <p:sp>
-        <p:nvSpPr>
-          <p:cNvPr id="16" name="TextBox 15"/>
-          <p:cNvSpPr txBox="1"/>
-          <p:nvPr/>
-        </p:nvSpPr>
-        <p:spPr>
-          <a:xfrm>
-            <a:off x="594360" y="4251960"/>
-            <a:ext cx="438912" cy="438912"/>
-          </a:xfrm>
-          <a:prstGeom prst="rect">
-            <a:avLst/>
-          </a:prstGeom>
-          <a:noFill/>
-        </p:spPr>
-        <p:txBody>
-          <a:bodyPr wrap="square" anchor="ctr"/>
-          <a:lstStyle/>
-          <a:p>
-            <a:pPr algn="ctr"/>
-            <a:r>
-              <a:rPr sz="1600" b="1" i="0">
-                <a:solidFill>
-                  <a:srgbClr val="FFFFFF"/>
-                </a:solidFill>
-                <a:latin typeface="Calibri"/>
-              </a:rPr>
-              <a:t>3</a:t>
-            </a:r>
-          </a:p>
-        </p:txBody>
-      </p:sp>
-      <p:sp>
-        <p:nvSpPr>
-          <p:cNvPr id="17" name="TextBox 16"/>
-          <p:cNvSpPr txBox="1"/>
-          <p:nvPr/>
-        </p:nvSpPr>
-        <p:spPr>
-          <a:xfrm>
-            <a:off x="1188720" y="4037076"/>
-            <a:ext cx="10271455" cy="886968"/>
-          </a:xfrm>
-          <a:prstGeom prst="rect">
-            <a:avLst/>
-          </a:prstGeom>
-          <a:noFill/>
-        </p:spPr>
-        <p:txBody>
-          <a:bodyPr wrap="square" anchor="ctr"/>
-          <a:lstStyle/>
-          <a:p>
-            <a:r>
-              <a:rPr sz="1500" b="1" i="0">
-                <a:solidFill>
-                  <a:srgbClr val="095292"/>
-                </a:solidFill>
-                <a:latin typeface="Calibri"/>
-              </a:rPr>
-              <a:t>Cinco líneas</a:t>
+              <a:rPr sz="2000" b="0" i="0">
+                <a:solidFill>
+                  <a:srgbClr val="333333"/>
+                </a:solidFill>
+                <a:latin typeface="Calibri"/>
+              </a:rPr>
+              <a:t>–   Los tres se pueden verificar en el informe que acaban de entregar, y esa verificabilidad es el sentido de haber trabajado por proyecto.</a:t>
             </a:r>
           </a:p>
           <a:p>
             <a:pPr>
-              <a:spcBef>
-                <a:spcPts val="200"/>
-              </a:spcBef>
+              <a:spcAft>
+                <a:spcPts val="800"/>
+              </a:spcAft>
             </a:pPr>
             <a:r>
-              <a:rPr sz="1300" b="0" i="0">
-                <a:solidFill>
-                  <a:srgbClr val="333333"/>
-                </a:solidFill>
-                <a:latin typeface="Calibri"/>
-              </a:rPr>
-              <a:t>Problema · decisión · un hallazgo · un número de impacto · siguiente paso.</a:t>
-            </a:r>
-          </a:p>
-        </p:txBody>
-      </p:sp>
-      <p:sp>
-        <p:nvSpPr>
-          <p:cNvPr id="18" name="Rounded Rectangle 17"/>
-          <p:cNvSpPr/>
-          <p:nvPr/>
-        </p:nvSpPr>
-        <p:spPr>
-          <a:xfrm>
-            <a:off x="457200" y="5088636"/>
-            <a:ext cx="11277295" cy="1051560"/>
-          </a:xfrm>
-          <a:prstGeom prst="roundRect">
-            <a:avLst>
-              <a:gd name="adj" fmla="val 12000"/>
-            </a:avLst>
-          </a:prstGeom>
-          <a:solidFill>
-            <a:srgbClr val="E8F4FA"/>
-          </a:solidFill>
-          <a:ln>
-            <a:noFill/>
-          </a:ln>
-        </p:spPr>
-        <p:style>
-          <a:lnRef idx="1">
-            <a:schemeClr val="accent1"/>
-          </a:lnRef>
-          <a:fillRef idx="3">
-            <a:schemeClr val="accent1"/>
-          </a:fillRef>
-          <a:effectRef idx="2">
-            <a:schemeClr val="accent1"/>
-          </a:effectRef>
-          <a:fontRef idx="minor">
-            <a:schemeClr val="lt1"/>
-          </a:fontRef>
-        </p:style>
-        <p:txBody>
-          <a:bodyPr rtlCol="0" anchor="ctr"/>
-          <a:lstStyle/>
-          <a:p>
-            <a:pPr algn="ctr"/>
-          </a:p>
-        </p:txBody>
-      </p:sp>
-      <p:sp>
-        <p:nvSpPr>
-          <p:cNvPr id="19" name="Rounded Rectangle 18"/>
-          <p:cNvSpPr/>
-          <p:nvPr/>
-        </p:nvSpPr>
-        <p:spPr>
-          <a:xfrm>
-            <a:off x="594360" y="5394960"/>
-            <a:ext cx="438912" cy="438912"/>
-          </a:xfrm>
-          <a:prstGeom prst="roundRect">
-            <a:avLst>
-              <a:gd name="adj" fmla="val 12000"/>
-            </a:avLst>
-          </a:prstGeom>
-          <a:solidFill>
-            <a:srgbClr val="095292"/>
-          </a:solidFill>
-          <a:ln>
-            <a:noFill/>
-          </a:ln>
-        </p:spPr>
-        <p:style>
-          <a:lnRef idx="1">
-            <a:schemeClr val="accent1"/>
-          </a:lnRef>
-          <a:fillRef idx="3">
-            <a:schemeClr val="accent1"/>
-          </a:fillRef>
-          <a:effectRef idx="2">
-            <a:schemeClr val="accent1"/>
-          </a:effectRef>
-          <a:fontRef idx="minor">
-            <a:schemeClr val="lt1"/>
-          </a:fontRef>
-        </p:style>
-        <p:txBody>
-          <a:bodyPr rtlCol="0" anchor="ctr"/>
-          <a:lstStyle/>
-          <a:p>
-            <a:pPr algn="ctr"/>
-          </a:p>
-        </p:txBody>
-      </p:sp>
-      <p:sp>
-        <p:nvSpPr>
-          <p:cNvPr id="20" name="TextBox 19"/>
-          <p:cNvSpPr txBox="1"/>
-          <p:nvPr/>
-        </p:nvSpPr>
-        <p:spPr>
-          <a:xfrm>
-            <a:off x="594360" y="5394960"/>
-            <a:ext cx="438912" cy="438912"/>
-          </a:xfrm>
-          <a:prstGeom prst="rect">
-            <a:avLst/>
-          </a:prstGeom>
-          <a:noFill/>
-        </p:spPr>
-        <p:txBody>
-          <a:bodyPr wrap="square" anchor="ctr"/>
-          <a:lstStyle/>
-          <a:p>
-            <a:pPr algn="ctr"/>
-            <a:r>
-              <a:rPr sz="1600" b="1" i="0">
-                <a:solidFill>
-                  <a:srgbClr val="FFFFFF"/>
-                </a:solidFill>
-                <a:latin typeface="Calibri"/>
-              </a:rPr>
-              <a:t>4</a:t>
-            </a:r>
-          </a:p>
-        </p:txBody>
-      </p:sp>
-      <p:sp>
-        <p:nvSpPr>
-          <p:cNvPr id="21" name="TextBox 20"/>
-          <p:cNvSpPr txBox="1"/>
-          <p:nvPr/>
-        </p:nvSpPr>
-        <p:spPr>
-          <a:xfrm>
-            <a:off x="1188720" y="5180076"/>
-            <a:ext cx="10271455" cy="886968"/>
-          </a:xfrm>
-          <a:prstGeom prst="rect">
-            <a:avLst/>
-          </a:prstGeom>
-          <a:noFill/>
-        </p:spPr>
-        <p:txBody>
-          <a:bodyPr wrap="square" anchor="ctr"/>
-          <a:lstStyle/>
-          <a:p>
-            <a:r>
-              <a:rPr sz="1500" b="1" i="0">
-                <a:solidFill>
-                  <a:srgbClr val="095292"/>
-                </a:solidFill>
-                <a:latin typeface="Calibri"/>
-              </a:rPr>
-              <a:t>Recorrido libre</a:t>
+              <a:rPr sz="2000" b="0" i="0">
+                <a:solidFill>
+                  <a:srgbClr val="333333"/>
+                </a:solidFill>
+                <a:latin typeface="Calibri"/>
+              </a:rPr>
+              <a:t>–   La primera: </a:t>
+            </a:r>
+            <a:r>
+              <a:rPr sz="2000" b="1" i="0">
+                <a:solidFill>
+                  <a:srgbClr val="333333"/>
+                </a:solidFill>
+                <a:latin typeface="Calibri"/>
+              </a:rPr>
+              <a:t>lo que se llevan es un método, no un tema.</a:t>
+            </a:r>
+            <a:r>
+              <a:rPr sz="2000" b="0" i="0">
+                <a:solidFill>
+                  <a:srgbClr val="333333"/>
+                </a:solidFill>
+                <a:latin typeface="Calibri"/>
+              </a:rPr>
+              <a:t> Definir un problema con evidencia, revisar qué existe, decidir con criterios</a:t>
             </a:r>
           </a:p>
           <a:p>
             <a:pPr>
-              <a:spcBef>
-                <a:spcPts val="200"/>
-              </a:spcBef>
+              <a:spcAft>
+                <a:spcPts val="800"/>
+              </a:spcAft>
             </a:pPr>
             <a:r>
-              <a:rPr sz="1300" b="0" i="0">
-                <a:solidFill>
-                  <a:srgbClr val="333333"/>
-                </a:solidFill>
-                <a:latin typeface="Calibri"/>
-              </a:rPr>
-              <a:t>Cada estudiante comenta en la columna de otro equipo.</a:t>
-            </a:r>
-          </a:p>
-        </p:txBody>
-      </p:sp>
-      <p:sp>
-        <p:nvSpPr>
-          <p:cNvPr id="22" name="TextBox 21"/>
+              <a:rPr sz="2000" b="0" i="0">
+                <a:solidFill>
+                  <a:srgbClr val="333333"/>
+                </a:solidFill>
+                <a:latin typeface="Calibri"/>
+              </a:rPr>
+              <a:t>–   Probar con personas reales y mirar a quién afecta — eso sirve igual para un trabajo de otra asignatura, para un proyecto de grado y para el primer empleo.</a:t>
+            </a:r>
+          </a:p>
+          <a:p>
+            <a:pPr>
+              <a:spcAft>
+                <a:spcPts val="800"/>
+              </a:spcAft>
+            </a:pPr>
+            <a:r>
+              <a:rPr sz="2000" b="0" i="0">
+                <a:solidFill>
+                  <a:srgbClr val="333333"/>
+                </a:solidFill>
+                <a:latin typeface="Calibri"/>
+              </a:rPr>
+              <a:t>–   La segunda: </a:t>
+            </a:r>
+            <a:r>
+              <a:rPr sz="2000" b="1" i="0">
+                <a:solidFill>
+                  <a:srgbClr val="333333"/>
+                </a:solidFill>
+                <a:latin typeface="Calibri"/>
+              </a:rPr>
+              <a:t>el proyecto queda como evidencia.</a:t>
+            </a:r>
+            <a:r>
+              <a:rPr sz="2000" b="0" i="0">
+                <a:solidFill>
+                  <a:srgbClr val="333333"/>
+                </a:solidFill>
+                <a:latin typeface="Calibri"/>
+              </a:rPr>
+              <a:t> Es un trabajo completo, documentado y con su propio prototipo, hecho en primer semestre; el documento y las capturas quedan en la carpeta y valen para un portafolio.</a:t>
+            </a:r>
+          </a:p>
+          <a:p>
+            <a:pPr>
+              <a:spcAft>
+                <a:spcPts val="800"/>
+              </a:spcAft>
+            </a:pPr>
+            <a:r>
+              <a:rPr sz="2000" b="0" i="0">
+                <a:solidFill>
+                  <a:srgbClr val="333333"/>
+                </a:solidFill>
+                <a:latin typeface="Calibri"/>
+              </a:rPr>
+              <a:t>–   Y una recomendación práctica de despedida, corta: </a:t>
+            </a:r>
+            <a:r>
+              <a:rPr sz="2000" b="1" i="0">
+                <a:solidFill>
+                  <a:srgbClr val="333333"/>
+                </a:solidFill>
+                <a:latin typeface="Calibri"/>
+              </a:rPr>
+              <a:t>el siguiente paso de su proyecto está escrito en la sección 10.</a:t>
+            </a:r>
+            <a:r>
+              <a:rPr sz="2000" b="0" i="0">
+                <a:solidFill>
+                  <a:srgbClr val="333333"/>
+                </a:solidFill>
+                <a:latin typeface="Calibri"/>
+              </a:rPr>
+              <a:t> Si alguno quiere continuarlo, no tiene que empezar por decidir qué hacer; ya lo decidió.</a:t>
+            </a:r>
+          </a:p>
+        </p:txBody>
+      </p:sp>
+      <p:sp>
+        <p:nvSpPr>
+          <p:cNvPr id="6" name="TextBox 5"/>
           <p:cNvSpPr txBox="1"/>
           <p:nvPr/>
         </p:nvSpPr>
@@ -10581,7 +8708,7 @@
         <p:spPr>
           <a:xfrm>
             <a:off x="0" y="0"/>
-            <a:ext cx="12191695" cy="960120"/>
+            <a:ext cx="12191695" cy="1170432"/>
           </a:xfrm>
           <a:prstGeom prst="rect">
             <a:avLst/>
@@ -10623,7 +8750,7 @@
         </p:nvSpPr>
         <p:spPr>
           <a:xfrm>
-            <a:off x="0" y="960120"/>
+            <a:off x="0" y="1170432"/>
             <a:ext cx="12191695" cy="41148"/>
           </a:xfrm>
           <a:prstGeom prst="rect">
@@ -10667,7 +8794,7 @@
         <p:spPr>
           <a:xfrm>
             <a:off x="457200" y="164592"/>
-            <a:ext cx="11277295" cy="502920"/>
+            <a:ext cx="11277295" cy="384048"/>
           </a:xfrm>
           <a:prstGeom prst="rect">
             <a:avLst/>
@@ -10687,7 +8814,7 @@
                 </a:solidFill>
                 <a:latin typeface="Calibri"/>
               </a:rPr>
-              <a:t>Cierre del curso</a:t>
+              <a:t>Taller de hoy: Informe final y autoevaluación</a:t>
             </a:r>
           </a:p>
         </p:txBody>
@@ -10700,8 +8827,8 @@
         </p:nvSpPr>
         <p:spPr>
           <a:xfrm>
-            <a:off x="457200" y="1170432"/>
-            <a:ext cx="11277295" cy="5230368"/>
+            <a:off x="457200" y="566928"/>
+            <a:ext cx="11277295" cy="411480"/>
           </a:xfrm>
           <a:prstGeom prst="rect">
             <a:avLst/>
@@ -10714,191 +8841,1026 @@
           </a:bodyPr>
           <a:lstStyle/>
           <a:p>
-            <a:pPr>
-              <a:spcAft>
-                <a:spcPts val="800"/>
-              </a:spcAft>
-            </a:pPr>
-            <a:r>
-              <a:rPr sz="2000" b="0" i="0">
-                <a:solidFill>
-                  <a:srgbClr val="333333"/>
-                </a:solidFill>
-                <a:latin typeface="Calibri"/>
-              </a:rPr>
-              <a:t>–   </a:t>
-            </a:r>
-            <a:r>
-              <a:rPr sz="2000" b="1" i="0">
-                <a:solidFill>
-                  <a:srgbClr val="333333"/>
-                </a:solidFill>
-                <a:latin typeface="Calibri"/>
-              </a:rPr>
-              <a:t>Lo que queda entregado:</a:t>
-            </a:r>
-            <a:r>
-              <a:rPr sz="2000" b="0" i="0">
-                <a:solidFill>
-                  <a:srgbClr val="333333"/>
-                </a:solidFill>
-                <a:latin typeface="Calibri"/>
-              </a:rPr>
-              <a:t> el </a:t>
-            </a:r>
-            <a:r>
-              <a:rPr sz="2000" b="1" i="0">
-                <a:solidFill>
-                  <a:srgbClr val="333333"/>
-                </a:solidFill>
-                <a:latin typeface="Calibri"/>
-              </a:rPr>
-              <a:t>informe final</a:t>
-            </a:r>
-            <a:r>
-              <a:rPr sz="2000" b="0" i="0">
-                <a:solidFill>
-                  <a:srgbClr val="333333"/>
-                </a:solidFill>
-                <a:latin typeface="Calibri"/>
-              </a:rPr>
-              <a:t> con sus doce secciones (20 %), la </a:t>
-            </a:r>
-            <a:r>
-              <a:rPr sz="2000" b="1" i="0">
-                <a:solidFill>
-                  <a:srgbClr val="333333"/>
-                </a:solidFill>
-                <a:latin typeface="Calibri"/>
-              </a:rPr>
-              <a:t>exposición final</a:t>
-            </a:r>
-            <a:r>
-              <a:rPr sz="2000" b="0" i="0">
-                <a:solidFill>
-                  <a:srgbClr val="333333"/>
-                </a:solidFill>
-                <a:latin typeface="Calibri"/>
-              </a:rPr>
-              <a:t> de la Clase 15 (15 %), el prototipo probado con personas reales y la galería del curso.</a:t>
-            </a:r>
-          </a:p>
-          <a:p>
-            <a:pPr>
-              <a:spcAft>
-                <a:spcPts val="800"/>
-              </a:spcAft>
-            </a:pPr>
-            <a:r>
-              <a:rPr sz="2000" b="0" i="0">
-                <a:solidFill>
-                  <a:srgbClr val="333333"/>
-                </a:solidFill>
-                <a:latin typeface="Calibri"/>
-              </a:rPr>
-              <a:t>–   </a:t>
-            </a:r>
-            <a:r>
-              <a:rPr sz="2000" b="1" i="0">
-                <a:solidFill>
-                  <a:srgbClr val="333333"/>
-                </a:solidFill>
-                <a:latin typeface="Calibri"/>
-              </a:rPr>
-              <a:t>Autoevaluación:</a:t>
-            </a:r>
-            <a:r>
-              <a:rPr sz="2000" b="0" i="0">
-                <a:solidFill>
-                  <a:srgbClr val="333333"/>
-                </a:solidFill>
-                <a:latin typeface="Calibri"/>
-              </a:rPr>
-              <a:t> queda hecha, con evidencia y no con impresiones — junto con la coevaluación del equipo.</a:t>
-            </a:r>
-          </a:p>
-          <a:p>
-            <a:pPr>
-              <a:spcAft>
-                <a:spcPts val="800"/>
-              </a:spcAft>
-            </a:pPr>
-            <a:r>
-              <a:rPr sz="2000" b="0" i="0">
-                <a:solidFill>
-                  <a:srgbClr val="333333"/>
-                </a:solidFill>
-                <a:latin typeface="Calibri"/>
-              </a:rPr>
-              <a:t>–   </a:t>
-            </a:r>
-            <a:r>
-              <a:rPr sz="2000" b="1" i="0">
-                <a:solidFill>
-                  <a:srgbClr val="333333"/>
-                </a:solidFill>
-                <a:latin typeface="Calibri"/>
-              </a:rPr>
-              <a:t>Lo que se llevan es un método, no un tema: definir un problema con evidencia, revisar qué ya existe, decidir con criterios, probar con personas reales y mirar a quién afecta.</a:t>
-            </a:r>
-          </a:p>
-          <a:p>
-            <a:pPr>
-              <a:spcAft>
-                <a:spcPts val="800"/>
-              </a:spcAft>
-            </a:pPr>
-            <a:r>
-              <a:rPr sz="2000" b="0" i="0">
-                <a:solidFill>
-                  <a:srgbClr val="333333"/>
-                </a:solidFill>
-                <a:latin typeface="Calibri"/>
-              </a:rPr>
-              <a:t>–   </a:t>
-            </a:r>
-            <a:r>
-              <a:rPr sz="2000" b="1" i="0">
-                <a:solidFill>
-                  <a:srgbClr val="333333"/>
-                </a:solidFill>
-                <a:latin typeface="Calibri"/>
-              </a:rPr>
-              <a:t>Aviso:</a:t>
-            </a:r>
-            <a:r>
-              <a:rPr sz="2000" b="0" i="0">
-                <a:solidFill>
-                  <a:srgbClr val="333333"/>
-                </a:solidFill>
-                <a:latin typeface="Calibri"/>
-              </a:rPr>
-              <a:t> El informe y las capturas quedan en la carpeta del equipo: es un proyecto completo y documentado, hecho en primer semestre, y sirve para un portafolio. Y </a:t>
-            </a:r>
-            <a:r>
-              <a:rPr sz="2000" b="1" i="0">
-                <a:solidFill>
-                  <a:srgbClr val="333333"/>
-                </a:solidFill>
-                <a:latin typeface="Calibri"/>
-              </a:rPr>
-              <a:t>el siguiente paso de su proyecto está escrito en la sección 10</a:t>
-            </a:r>
-            <a:r>
-              <a:rPr sz="2000" b="0" i="0">
-                <a:solidFill>
-                  <a:srgbClr val="333333"/>
-                </a:solidFill>
-                <a:latin typeface="Calibri"/>
-              </a:rPr>
-              <a:t> — quien quiera continuarlo ya no tiene que decidir por dónde empezar.</a:t>
-            </a:r>
-          </a:p>
-        </p:txBody>
-      </p:sp>
-      <p:sp>
-        <p:nvSpPr>
-          <p:cNvPr id="6" name="TextBox 5"/>
+            <a:r>
+              <a:rPr sz="1400" b="0" i="0">
+                <a:solidFill>
+                  <a:srgbClr val="B8D8EE"/>
+                </a:solidFill>
+                <a:latin typeface="Calibri"/>
+              </a:rPr>
+              <a:t>24 min en equipos · 24 min: pegar, verificar, repartir huecos, resumen y entregar · informe final en PDF + galería en el muro + autoevaluación y coevaluación</a:t>
+            </a:r>
+          </a:p>
+        </p:txBody>
+      </p:sp>
+      <p:sp>
+        <p:nvSpPr>
+          <p:cNvPr id="6" name="Rounded Rectangle 5"/>
+          <p:cNvSpPr/>
+          <p:nvPr/>
+        </p:nvSpPr>
+        <p:spPr>
+          <a:xfrm>
+            <a:off x="457200" y="1472184"/>
+            <a:ext cx="11277295" cy="566928"/>
+          </a:xfrm>
+          <a:prstGeom prst="roundRect">
+            <a:avLst>
+              <a:gd name="adj" fmla="val 12000"/>
+            </a:avLst>
+          </a:prstGeom>
+          <a:solidFill>
+            <a:srgbClr val="F2F2F2"/>
+          </a:solidFill>
+          <a:ln>
+            <a:noFill/>
+          </a:ln>
+        </p:spPr>
+        <p:style>
+          <a:lnRef idx="1">
+            <a:schemeClr val="accent1"/>
+          </a:lnRef>
+          <a:fillRef idx="3">
+            <a:schemeClr val="accent1"/>
+          </a:fillRef>
+          <a:effectRef idx="2">
+            <a:schemeClr val="accent1"/>
+          </a:effectRef>
+          <a:fontRef idx="minor">
+            <a:schemeClr val="lt1"/>
+          </a:fontRef>
+        </p:style>
+        <p:txBody>
+          <a:bodyPr rtlCol="0" anchor="ctr"/>
+          <a:lstStyle/>
+          <a:p>
+            <a:pPr algn="ctr"/>
+          </a:p>
+        </p:txBody>
+      </p:sp>
+      <p:sp>
+        <p:nvSpPr>
+          <p:cNvPr id="7" name="Rectangle 6"/>
+          <p:cNvSpPr/>
+          <p:nvPr/>
+        </p:nvSpPr>
+        <p:spPr>
+          <a:xfrm>
+            <a:off x="640080" y="1618487"/>
+            <a:ext cx="274320" cy="274320"/>
+          </a:xfrm>
+          <a:prstGeom prst="rect">
+            <a:avLst/>
+          </a:prstGeom>
+          <a:solidFill>
+            <a:srgbClr val="FFFFFF"/>
+          </a:solidFill>
+          <a:ln>
+            <a:solidFill>
+              <a:srgbClr val="333333"/>
+            </a:solidFill>
+          </a:ln>
+        </p:spPr>
+        <p:style>
+          <a:lnRef idx="1">
+            <a:schemeClr val="accent1"/>
+          </a:lnRef>
+          <a:fillRef idx="3">
+            <a:schemeClr val="accent1"/>
+          </a:fillRef>
+          <a:effectRef idx="2">
+            <a:schemeClr val="accent1"/>
+          </a:effectRef>
+          <a:fontRef idx="minor">
+            <a:schemeClr val="lt1"/>
+          </a:fontRef>
+        </p:style>
+        <p:txBody>
+          <a:bodyPr rtlCol="0" anchor="ctr"/>
+          <a:lstStyle/>
+          <a:p>
+            <a:pPr algn="ctr"/>
+          </a:p>
+        </p:txBody>
+      </p:sp>
+      <p:sp>
+        <p:nvSpPr>
+          <p:cNvPr id="8" name="Rectangle 7"/>
+          <p:cNvSpPr/>
+          <p:nvPr/>
+        </p:nvSpPr>
+        <p:spPr>
+          <a:xfrm>
+            <a:off x="640080" y="1618487"/>
+            <a:ext cx="73152" cy="274320"/>
+          </a:xfrm>
+          <a:prstGeom prst="rect">
+            <a:avLst/>
+          </a:prstGeom>
+          <a:solidFill>
+            <a:srgbClr val="269CCB"/>
+          </a:solidFill>
+          <a:ln>
+            <a:noFill/>
+          </a:ln>
+        </p:spPr>
+        <p:style>
+          <a:lnRef idx="1">
+            <a:schemeClr val="accent1"/>
+          </a:lnRef>
+          <a:fillRef idx="3">
+            <a:schemeClr val="accent1"/>
+          </a:fillRef>
+          <a:effectRef idx="2">
+            <a:schemeClr val="accent1"/>
+          </a:effectRef>
+          <a:fontRef idx="minor">
+            <a:schemeClr val="lt1"/>
+          </a:fontRef>
+        </p:style>
+        <p:txBody>
+          <a:bodyPr rtlCol="0" anchor="ctr"/>
+          <a:lstStyle/>
+          <a:p>
+            <a:pPr algn="ctr"/>
+          </a:p>
+        </p:txBody>
+      </p:sp>
+      <p:sp>
+        <p:nvSpPr>
+          <p:cNvPr id="9" name="TextBox 8"/>
+          <p:cNvSpPr txBox="1"/>
+          <p:nvPr/>
+        </p:nvSpPr>
+        <p:spPr>
+          <a:xfrm>
+            <a:off x="1097280" y="1563624"/>
+            <a:ext cx="10362895" cy="402336"/>
+          </a:xfrm>
+          <a:prstGeom prst="rect">
+            <a:avLst/>
+          </a:prstGeom>
+          <a:noFill/>
+        </p:spPr>
+        <p:txBody>
+          <a:bodyPr wrap="square" anchor="ctr"/>
+          <a:lstStyle/>
+          <a:p>
+            <a:r>
+              <a:rPr sz="1500" b="1" i="0">
+                <a:solidFill>
+                  <a:srgbClr val="333333"/>
+                </a:solidFill>
+                <a:latin typeface="Calibri"/>
+              </a:rPr>
+              <a:t>LA LISTA DE VERIFICACIÓN DEL INFORME</a:t>
+            </a:r>
+            <a:r>
+              <a:rPr sz="1500" b="0" i="0">
+                <a:solidFill>
+                  <a:srgbClr val="333333"/>
+                </a:solidFill>
+                <a:latin typeface="Calibri"/>
+              </a:rPr>
+              <a:t> — Las </a:t>
+            </a:r>
+            <a:r>
+              <a:rPr sz="1500" b="1" i="0">
+                <a:solidFill>
+                  <a:srgbClr val="333333"/>
+                </a:solidFill>
+                <a:latin typeface="Calibri"/>
+              </a:rPr>
+              <a:t>doce secciones</a:t>
+            </a:r>
+            <a:r>
+              <a:rPr sz="1500" b="0" i="0">
+                <a:solidFill>
+                  <a:srgbClr val="333333"/>
+                </a:solidFill>
+                <a:latin typeface="Calibri"/>
+              </a:rPr>
+              <a:t> en un solo documento, cada una con lo que ya estaba escrito desde su sesión, y con el largo de la tabla.</a:t>
+            </a:r>
+          </a:p>
+        </p:txBody>
+      </p:sp>
+      <p:sp>
+        <p:nvSpPr>
+          <p:cNvPr id="10" name="Rounded Rectangle 9"/>
+          <p:cNvSpPr/>
+          <p:nvPr/>
+        </p:nvSpPr>
+        <p:spPr>
+          <a:xfrm>
+            <a:off x="457200" y="2148839"/>
+            <a:ext cx="11277295" cy="566928"/>
+          </a:xfrm>
+          <a:prstGeom prst="roundRect">
+            <a:avLst>
+              <a:gd name="adj" fmla="val 12000"/>
+            </a:avLst>
+          </a:prstGeom>
+          <a:solidFill>
+            <a:srgbClr val="F2F2F2"/>
+          </a:solidFill>
+          <a:ln>
+            <a:noFill/>
+          </a:ln>
+        </p:spPr>
+        <p:style>
+          <a:lnRef idx="1">
+            <a:schemeClr val="accent1"/>
+          </a:lnRef>
+          <a:fillRef idx="3">
+            <a:schemeClr val="accent1"/>
+          </a:fillRef>
+          <a:effectRef idx="2">
+            <a:schemeClr val="accent1"/>
+          </a:effectRef>
+          <a:fontRef idx="minor">
+            <a:schemeClr val="lt1"/>
+          </a:fontRef>
+        </p:style>
+        <p:txBody>
+          <a:bodyPr rtlCol="0" anchor="ctr"/>
+          <a:lstStyle/>
+          <a:p>
+            <a:pPr algn="ctr"/>
+          </a:p>
+        </p:txBody>
+      </p:sp>
+      <p:sp>
+        <p:nvSpPr>
+          <p:cNvPr id="11" name="Rectangle 10"/>
+          <p:cNvSpPr/>
+          <p:nvPr/>
+        </p:nvSpPr>
+        <p:spPr>
+          <a:xfrm>
+            <a:off x="640080" y="2295144"/>
+            <a:ext cx="274320" cy="274320"/>
+          </a:xfrm>
+          <a:prstGeom prst="rect">
+            <a:avLst/>
+          </a:prstGeom>
+          <a:solidFill>
+            <a:srgbClr val="FFFFFF"/>
+          </a:solidFill>
+          <a:ln>
+            <a:solidFill>
+              <a:srgbClr val="333333"/>
+            </a:solidFill>
+          </a:ln>
+        </p:spPr>
+        <p:style>
+          <a:lnRef idx="1">
+            <a:schemeClr val="accent1"/>
+          </a:lnRef>
+          <a:fillRef idx="3">
+            <a:schemeClr val="accent1"/>
+          </a:fillRef>
+          <a:effectRef idx="2">
+            <a:schemeClr val="accent1"/>
+          </a:effectRef>
+          <a:fontRef idx="minor">
+            <a:schemeClr val="lt1"/>
+          </a:fontRef>
+        </p:style>
+        <p:txBody>
+          <a:bodyPr rtlCol="0" anchor="ctr"/>
+          <a:lstStyle/>
+          <a:p>
+            <a:pPr algn="ctr"/>
+          </a:p>
+        </p:txBody>
+      </p:sp>
+      <p:sp>
+        <p:nvSpPr>
+          <p:cNvPr id="12" name="Rectangle 11"/>
+          <p:cNvSpPr/>
+          <p:nvPr/>
+        </p:nvSpPr>
+        <p:spPr>
+          <a:xfrm>
+            <a:off x="640080" y="2295144"/>
+            <a:ext cx="73152" cy="274320"/>
+          </a:xfrm>
+          <a:prstGeom prst="rect">
+            <a:avLst/>
+          </a:prstGeom>
+          <a:solidFill>
+            <a:srgbClr val="269CCB"/>
+          </a:solidFill>
+          <a:ln>
+            <a:noFill/>
+          </a:ln>
+        </p:spPr>
+        <p:style>
+          <a:lnRef idx="1">
+            <a:schemeClr val="accent1"/>
+          </a:lnRef>
+          <a:fillRef idx="3">
+            <a:schemeClr val="accent1"/>
+          </a:fillRef>
+          <a:effectRef idx="2">
+            <a:schemeClr val="accent1"/>
+          </a:effectRef>
+          <a:fontRef idx="minor">
+            <a:schemeClr val="lt1"/>
+          </a:fontRef>
+        </p:style>
+        <p:txBody>
+          <a:bodyPr rtlCol="0" anchor="ctr"/>
+          <a:lstStyle/>
+          <a:p>
+            <a:pPr algn="ctr"/>
+          </a:p>
+        </p:txBody>
+      </p:sp>
+      <p:sp>
+        <p:nvSpPr>
+          <p:cNvPr id="13" name="TextBox 12"/>
+          <p:cNvSpPr txBox="1"/>
+          <p:nvPr/>
+        </p:nvSpPr>
+        <p:spPr>
+          <a:xfrm>
+            <a:off x="1097280" y="2240279"/>
+            <a:ext cx="10362895" cy="402336"/>
+          </a:xfrm>
+          <a:prstGeom prst="rect">
+            <a:avLst/>
+          </a:prstGeom>
+          <a:noFill/>
+        </p:spPr>
+        <p:txBody>
+          <a:bodyPr wrap="square" anchor="ctr"/>
+          <a:lstStyle/>
+          <a:p>
+            <a:r>
+              <a:rPr sz="1500" b="1" i="0">
+                <a:solidFill>
+                  <a:srgbClr val="333333"/>
+                </a:solidFill>
+                <a:latin typeface="Calibri"/>
+              </a:rPr>
+              <a:t>LO QUE FALTABA Y SE COMPLETÓ HOY</a:t>
+            </a:r>
+            <a:r>
+              <a:rPr sz="1500" b="0" i="0">
+                <a:solidFill>
+                  <a:srgbClr val="333333"/>
+                </a:solidFill>
+                <a:latin typeface="Calibri"/>
+              </a:rPr>
+              <a:t> — Los huecos que se marcaron en rojo, </a:t>
+            </a:r>
+            <a:r>
+              <a:rPr sz="1500" b="1" i="0">
+                <a:solidFill>
+                  <a:srgbClr val="333333"/>
+                </a:solidFill>
+                <a:latin typeface="Calibri"/>
+              </a:rPr>
+              <a:t>quién tomó cada uno</a:t>
+            </a:r>
+            <a:r>
+              <a:rPr sz="1500" b="0" i="0">
+                <a:solidFill>
+                  <a:srgbClr val="333333"/>
+                </a:solidFill>
+                <a:latin typeface="Calibri"/>
+              </a:rPr>
+              <a:t> y qué se escribió. Incluido el </a:t>
+            </a:r>
+            <a:r>
+              <a:rPr sz="1500" b="1" i="0">
+                <a:solidFill>
+                  <a:srgbClr val="333333"/>
+                </a:solidFill>
+                <a:latin typeface="Calibri"/>
+              </a:rPr>
+              <a:t>resumen</a:t>
+            </a:r>
+            <a:r>
+              <a:rPr sz="1500" b="0" i="0">
+                <a:solidFill>
+                  <a:srgbClr val="333333"/>
+                </a:solidFill>
+                <a:latin typeface="Calibri"/>
+              </a:rPr>
+              <a:t>, que es lo único nuevo.</a:t>
+            </a:r>
+          </a:p>
+        </p:txBody>
+      </p:sp>
+      <p:sp>
+        <p:nvSpPr>
+          <p:cNvPr id="14" name="Rounded Rectangle 13"/>
+          <p:cNvSpPr/>
+          <p:nvPr/>
+        </p:nvSpPr>
+        <p:spPr>
+          <a:xfrm>
+            <a:off x="457200" y="2825496"/>
+            <a:ext cx="11277295" cy="566928"/>
+          </a:xfrm>
+          <a:prstGeom prst="roundRect">
+            <a:avLst>
+              <a:gd name="adj" fmla="val 12000"/>
+            </a:avLst>
+          </a:prstGeom>
+          <a:solidFill>
+            <a:srgbClr val="F2F2F2"/>
+          </a:solidFill>
+          <a:ln>
+            <a:noFill/>
+          </a:ln>
+        </p:spPr>
+        <p:style>
+          <a:lnRef idx="1">
+            <a:schemeClr val="accent1"/>
+          </a:lnRef>
+          <a:fillRef idx="3">
+            <a:schemeClr val="accent1"/>
+          </a:fillRef>
+          <a:effectRef idx="2">
+            <a:schemeClr val="accent1"/>
+          </a:effectRef>
+          <a:fontRef idx="minor">
+            <a:schemeClr val="lt1"/>
+          </a:fontRef>
+        </p:style>
+        <p:txBody>
+          <a:bodyPr rtlCol="0" anchor="ctr"/>
+          <a:lstStyle/>
+          <a:p>
+            <a:pPr algn="ctr"/>
+          </a:p>
+        </p:txBody>
+      </p:sp>
+      <p:sp>
+        <p:nvSpPr>
+          <p:cNvPr id="15" name="Rectangle 14"/>
+          <p:cNvSpPr/>
+          <p:nvPr/>
+        </p:nvSpPr>
+        <p:spPr>
+          <a:xfrm>
+            <a:off x="640080" y="2971800"/>
+            <a:ext cx="274320" cy="274320"/>
+          </a:xfrm>
+          <a:prstGeom prst="rect">
+            <a:avLst/>
+          </a:prstGeom>
+          <a:solidFill>
+            <a:srgbClr val="FFFFFF"/>
+          </a:solidFill>
+          <a:ln>
+            <a:solidFill>
+              <a:srgbClr val="333333"/>
+            </a:solidFill>
+          </a:ln>
+        </p:spPr>
+        <p:style>
+          <a:lnRef idx="1">
+            <a:schemeClr val="accent1"/>
+          </a:lnRef>
+          <a:fillRef idx="3">
+            <a:schemeClr val="accent1"/>
+          </a:fillRef>
+          <a:effectRef idx="2">
+            <a:schemeClr val="accent1"/>
+          </a:effectRef>
+          <a:fontRef idx="minor">
+            <a:schemeClr val="lt1"/>
+          </a:fontRef>
+        </p:style>
+        <p:txBody>
+          <a:bodyPr rtlCol="0" anchor="ctr"/>
+          <a:lstStyle/>
+          <a:p>
+            <a:pPr algn="ctr"/>
+          </a:p>
+        </p:txBody>
+      </p:sp>
+      <p:sp>
+        <p:nvSpPr>
+          <p:cNvPr id="16" name="Rectangle 15"/>
+          <p:cNvSpPr/>
+          <p:nvPr/>
+        </p:nvSpPr>
+        <p:spPr>
+          <a:xfrm>
+            <a:off x="640080" y="2971800"/>
+            <a:ext cx="73152" cy="274320"/>
+          </a:xfrm>
+          <a:prstGeom prst="rect">
+            <a:avLst/>
+          </a:prstGeom>
+          <a:solidFill>
+            <a:srgbClr val="269CCB"/>
+          </a:solidFill>
+          <a:ln>
+            <a:noFill/>
+          </a:ln>
+        </p:spPr>
+        <p:style>
+          <a:lnRef idx="1">
+            <a:schemeClr val="accent1"/>
+          </a:lnRef>
+          <a:fillRef idx="3">
+            <a:schemeClr val="accent1"/>
+          </a:fillRef>
+          <a:effectRef idx="2">
+            <a:schemeClr val="accent1"/>
+          </a:effectRef>
+          <a:fontRef idx="minor">
+            <a:schemeClr val="lt1"/>
+          </a:fontRef>
+        </p:style>
+        <p:txBody>
+          <a:bodyPr rtlCol="0" anchor="ctr"/>
+          <a:lstStyle/>
+          <a:p>
+            <a:pPr algn="ctr"/>
+          </a:p>
+        </p:txBody>
+      </p:sp>
+      <p:sp>
+        <p:nvSpPr>
+          <p:cNvPr id="17" name="TextBox 16"/>
+          <p:cNvSpPr txBox="1"/>
+          <p:nvPr/>
+        </p:nvSpPr>
+        <p:spPr>
+          <a:xfrm>
+            <a:off x="1097280" y="2916936"/>
+            <a:ext cx="10362895" cy="402336"/>
+          </a:xfrm>
+          <a:prstGeom prst="rect">
+            <a:avLst/>
+          </a:prstGeom>
+          <a:noFill/>
+        </p:spPr>
+        <p:txBody>
+          <a:bodyPr wrap="square" anchor="ctr"/>
+          <a:lstStyle/>
+          <a:p>
+            <a:r>
+              <a:rPr sz="1500" b="1" i="0">
+                <a:solidFill>
+                  <a:srgbClr val="333333"/>
+                </a:solidFill>
+                <a:latin typeface="Calibri"/>
+              </a:rPr>
+              <a:t>LA DECLARACIÓN DEL USO DE IA</a:t>
+            </a:r>
+            <a:r>
+              <a:rPr sz="1500" b="0" i="0">
+                <a:solidFill>
+                  <a:srgbClr val="333333"/>
+                </a:solidFill>
+                <a:latin typeface="Calibri"/>
+              </a:rPr>
+              <a:t> — Qué se le pidió al asistente, </a:t>
+            </a:r>
+            <a:r>
+              <a:rPr sz="1500" b="1" i="0">
+                <a:solidFill>
+                  <a:srgbClr val="333333"/>
+                </a:solidFill>
+                <a:latin typeface="Calibri"/>
+              </a:rPr>
+              <a:t>qué se corrigió a mano</a:t>
+            </a:r>
+            <a:r>
+              <a:rPr sz="1500" b="0" i="0">
+                <a:solidFill>
+                  <a:srgbClr val="333333"/>
+                </a:solidFill>
+                <a:latin typeface="Calibri"/>
+              </a:rPr>
+              <a:t> y </a:t>
+            </a:r>
+            <a:r>
+              <a:rPr sz="1500" b="1" i="0">
+                <a:solidFill>
+                  <a:srgbClr val="333333"/>
+                </a:solidFill>
+                <a:latin typeface="Calibri"/>
+              </a:rPr>
+              <a:t>qué no se le entregó</a:t>
+            </a:r>
+            <a:r>
+              <a:rPr sz="1500" b="0" i="0">
+                <a:solidFill>
+                  <a:srgbClr val="333333"/>
+                </a:solidFill>
+                <a:latin typeface="Calibri"/>
+              </a:rPr>
+              <a:t>. Si no se usó, se dice que no se usó.</a:t>
+            </a:r>
+          </a:p>
+        </p:txBody>
+      </p:sp>
+      <p:sp>
+        <p:nvSpPr>
+          <p:cNvPr id="18" name="Rounded Rectangle 17"/>
+          <p:cNvSpPr/>
+          <p:nvPr/>
+        </p:nvSpPr>
+        <p:spPr>
+          <a:xfrm>
+            <a:off x="457200" y="3502152"/>
+            <a:ext cx="11277295" cy="566928"/>
+          </a:xfrm>
+          <a:prstGeom prst="roundRect">
+            <a:avLst>
+              <a:gd name="adj" fmla="val 12000"/>
+            </a:avLst>
+          </a:prstGeom>
+          <a:solidFill>
+            <a:srgbClr val="F2F2F2"/>
+          </a:solidFill>
+          <a:ln>
+            <a:noFill/>
+          </a:ln>
+        </p:spPr>
+        <p:style>
+          <a:lnRef idx="1">
+            <a:schemeClr val="accent1"/>
+          </a:lnRef>
+          <a:fillRef idx="3">
+            <a:schemeClr val="accent1"/>
+          </a:fillRef>
+          <a:effectRef idx="2">
+            <a:schemeClr val="accent1"/>
+          </a:effectRef>
+          <a:fontRef idx="minor">
+            <a:schemeClr val="lt1"/>
+          </a:fontRef>
+        </p:style>
+        <p:txBody>
+          <a:bodyPr rtlCol="0" anchor="ctr"/>
+          <a:lstStyle/>
+          <a:p>
+            <a:pPr algn="ctr"/>
+          </a:p>
+        </p:txBody>
+      </p:sp>
+      <p:sp>
+        <p:nvSpPr>
+          <p:cNvPr id="19" name="Rectangle 18"/>
+          <p:cNvSpPr/>
+          <p:nvPr/>
+        </p:nvSpPr>
+        <p:spPr>
+          <a:xfrm>
+            <a:off x="640080" y="3648456"/>
+            <a:ext cx="274320" cy="274320"/>
+          </a:xfrm>
+          <a:prstGeom prst="rect">
+            <a:avLst/>
+          </a:prstGeom>
+          <a:solidFill>
+            <a:srgbClr val="FFFFFF"/>
+          </a:solidFill>
+          <a:ln>
+            <a:solidFill>
+              <a:srgbClr val="333333"/>
+            </a:solidFill>
+          </a:ln>
+        </p:spPr>
+        <p:style>
+          <a:lnRef idx="1">
+            <a:schemeClr val="accent1"/>
+          </a:lnRef>
+          <a:fillRef idx="3">
+            <a:schemeClr val="accent1"/>
+          </a:fillRef>
+          <a:effectRef idx="2">
+            <a:schemeClr val="accent1"/>
+          </a:effectRef>
+          <a:fontRef idx="minor">
+            <a:schemeClr val="lt1"/>
+          </a:fontRef>
+        </p:style>
+        <p:txBody>
+          <a:bodyPr rtlCol="0" anchor="ctr"/>
+          <a:lstStyle/>
+          <a:p>
+            <a:pPr algn="ctr"/>
+          </a:p>
+        </p:txBody>
+      </p:sp>
+      <p:sp>
+        <p:nvSpPr>
+          <p:cNvPr id="20" name="Rectangle 19"/>
+          <p:cNvSpPr/>
+          <p:nvPr/>
+        </p:nvSpPr>
+        <p:spPr>
+          <a:xfrm>
+            <a:off x="640080" y="3648456"/>
+            <a:ext cx="73152" cy="274320"/>
+          </a:xfrm>
+          <a:prstGeom prst="rect">
+            <a:avLst/>
+          </a:prstGeom>
+          <a:solidFill>
+            <a:srgbClr val="269CCB"/>
+          </a:solidFill>
+          <a:ln>
+            <a:noFill/>
+          </a:ln>
+        </p:spPr>
+        <p:style>
+          <a:lnRef idx="1">
+            <a:schemeClr val="accent1"/>
+          </a:lnRef>
+          <a:fillRef idx="3">
+            <a:schemeClr val="accent1"/>
+          </a:fillRef>
+          <a:effectRef idx="2">
+            <a:schemeClr val="accent1"/>
+          </a:effectRef>
+          <a:fontRef idx="minor">
+            <a:schemeClr val="lt1"/>
+          </a:fontRef>
+        </p:style>
+        <p:txBody>
+          <a:bodyPr rtlCol="0" anchor="ctr"/>
+          <a:lstStyle/>
+          <a:p>
+            <a:pPr algn="ctr"/>
+          </a:p>
+        </p:txBody>
+      </p:sp>
+      <p:sp>
+        <p:nvSpPr>
+          <p:cNvPr id="21" name="TextBox 20"/>
+          <p:cNvSpPr txBox="1"/>
+          <p:nvPr/>
+        </p:nvSpPr>
+        <p:spPr>
+          <a:xfrm>
+            <a:off x="1097280" y="3593592"/>
+            <a:ext cx="10362895" cy="402336"/>
+          </a:xfrm>
+          <a:prstGeom prst="rect">
+            <a:avLst/>
+          </a:prstGeom>
+          <a:noFill/>
+        </p:spPr>
+        <p:txBody>
+          <a:bodyPr wrap="square" anchor="ctr"/>
+          <a:lstStyle/>
+          <a:p>
+            <a:r>
+              <a:rPr sz="1500" b="1" i="0">
+                <a:solidFill>
+                  <a:srgbClr val="333333"/>
+                </a:solidFill>
+                <a:latin typeface="Calibri"/>
+              </a:rPr>
+              <a:t>LA AUTOEVALUACIÓN INDIVIDUAL</a:t>
+            </a:r>
+            <a:r>
+              <a:rPr sz="1500" b="0" i="0">
+                <a:solidFill>
+                  <a:srgbClr val="333333"/>
+                </a:solidFill>
+                <a:latin typeface="Calibri"/>
+              </a:rPr>
+              <a:t> — Cuatro respuestas </a:t>
+            </a:r>
+            <a:r>
+              <a:rPr sz="1500" b="1" i="0">
+                <a:solidFill>
+                  <a:srgbClr val="333333"/>
+                </a:solidFill>
+                <a:latin typeface="Calibri"/>
+              </a:rPr>
+              <a:t>con evidencia</a:t>
+            </a:r>
+            <a:r>
+              <a:rPr sz="1500" b="0" i="0">
+                <a:solidFill>
+                  <a:srgbClr val="333333"/>
+                </a:solidFill>
+                <a:latin typeface="Calibri"/>
+              </a:rPr>
+              <a:t>: qué hice yo · qué aprendí a hacer que no sabía · en qué fallé · qué haría distinto. </a:t>
+            </a:r>
+            <a:r>
+              <a:rPr sz="1500" b="1" i="0">
+                <a:solidFill>
+                  <a:srgbClr val="333333"/>
+                </a:solidFill>
+                <a:latin typeface="Calibri"/>
+              </a:rPr>
+              <a:t>Solo para el docente.</a:t>
+            </a:r>
+          </a:p>
+        </p:txBody>
+      </p:sp>
+      <p:sp>
+        <p:nvSpPr>
+          <p:cNvPr id="22" name="Rounded Rectangle 21"/>
+          <p:cNvSpPr/>
+          <p:nvPr/>
+        </p:nvSpPr>
+        <p:spPr>
+          <a:xfrm>
+            <a:off x="457200" y="4178808"/>
+            <a:ext cx="11277295" cy="566928"/>
+          </a:xfrm>
+          <a:prstGeom prst="roundRect">
+            <a:avLst>
+              <a:gd name="adj" fmla="val 12000"/>
+            </a:avLst>
+          </a:prstGeom>
+          <a:solidFill>
+            <a:srgbClr val="F2F2F2"/>
+          </a:solidFill>
+          <a:ln>
+            <a:noFill/>
+          </a:ln>
+        </p:spPr>
+        <p:style>
+          <a:lnRef idx="1">
+            <a:schemeClr val="accent1"/>
+          </a:lnRef>
+          <a:fillRef idx="3">
+            <a:schemeClr val="accent1"/>
+          </a:fillRef>
+          <a:effectRef idx="2">
+            <a:schemeClr val="accent1"/>
+          </a:effectRef>
+          <a:fontRef idx="minor">
+            <a:schemeClr val="lt1"/>
+          </a:fontRef>
+        </p:style>
+        <p:txBody>
+          <a:bodyPr rtlCol="0" anchor="ctr"/>
+          <a:lstStyle/>
+          <a:p>
+            <a:pPr algn="ctr"/>
+          </a:p>
+        </p:txBody>
+      </p:sp>
+      <p:sp>
+        <p:nvSpPr>
+          <p:cNvPr id="23" name="Rectangle 22"/>
+          <p:cNvSpPr/>
+          <p:nvPr/>
+        </p:nvSpPr>
+        <p:spPr>
+          <a:xfrm>
+            <a:off x="640080" y="4325112"/>
+            <a:ext cx="274320" cy="274320"/>
+          </a:xfrm>
+          <a:prstGeom prst="rect">
+            <a:avLst/>
+          </a:prstGeom>
+          <a:solidFill>
+            <a:srgbClr val="FFFFFF"/>
+          </a:solidFill>
+          <a:ln>
+            <a:solidFill>
+              <a:srgbClr val="333333"/>
+            </a:solidFill>
+          </a:ln>
+        </p:spPr>
+        <p:style>
+          <a:lnRef idx="1">
+            <a:schemeClr val="accent1"/>
+          </a:lnRef>
+          <a:fillRef idx="3">
+            <a:schemeClr val="accent1"/>
+          </a:fillRef>
+          <a:effectRef idx="2">
+            <a:schemeClr val="accent1"/>
+          </a:effectRef>
+          <a:fontRef idx="minor">
+            <a:schemeClr val="lt1"/>
+          </a:fontRef>
+        </p:style>
+        <p:txBody>
+          <a:bodyPr rtlCol="0" anchor="ctr"/>
+          <a:lstStyle/>
+          <a:p>
+            <a:pPr algn="ctr"/>
+          </a:p>
+        </p:txBody>
+      </p:sp>
+      <p:sp>
+        <p:nvSpPr>
+          <p:cNvPr id="24" name="Rectangle 23"/>
+          <p:cNvSpPr/>
+          <p:nvPr/>
+        </p:nvSpPr>
+        <p:spPr>
+          <a:xfrm>
+            <a:off x="640080" y="4325112"/>
+            <a:ext cx="73152" cy="274320"/>
+          </a:xfrm>
+          <a:prstGeom prst="rect">
+            <a:avLst/>
+          </a:prstGeom>
+          <a:solidFill>
+            <a:srgbClr val="269CCB"/>
+          </a:solidFill>
+          <a:ln>
+            <a:noFill/>
+          </a:ln>
+        </p:spPr>
+        <p:style>
+          <a:lnRef idx="1">
+            <a:schemeClr val="accent1"/>
+          </a:lnRef>
+          <a:fillRef idx="3">
+            <a:schemeClr val="accent1"/>
+          </a:fillRef>
+          <a:effectRef idx="2">
+            <a:schemeClr val="accent1"/>
+          </a:effectRef>
+          <a:fontRef idx="minor">
+            <a:schemeClr val="lt1"/>
+          </a:fontRef>
+        </p:style>
+        <p:txBody>
+          <a:bodyPr rtlCol="0" anchor="ctr"/>
+          <a:lstStyle/>
+          <a:p>
+            <a:pPr algn="ctr"/>
+          </a:p>
+        </p:txBody>
+      </p:sp>
+      <p:sp>
+        <p:nvSpPr>
+          <p:cNvPr id="25" name="TextBox 24"/>
+          <p:cNvSpPr txBox="1"/>
+          <p:nvPr/>
+        </p:nvSpPr>
+        <p:spPr>
+          <a:xfrm>
+            <a:off x="1097280" y="4270248"/>
+            <a:ext cx="10362895" cy="402336"/>
+          </a:xfrm>
+          <a:prstGeom prst="rect">
+            <a:avLst/>
+          </a:prstGeom>
+          <a:noFill/>
+        </p:spPr>
+        <p:txBody>
+          <a:bodyPr wrap="square" anchor="ctr"/>
+          <a:lstStyle/>
+          <a:p>
+            <a:r>
+              <a:rPr sz="1500" b="1" i="0">
+                <a:solidFill>
+                  <a:srgbClr val="333333"/>
+                </a:solidFill>
+                <a:latin typeface="Calibri"/>
+              </a:rPr>
+              <a:t>LA COEVALUACIÓN DEL EQUIPO</a:t>
+            </a:r>
+            <a:r>
+              <a:rPr sz="1500" b="0" i="0">
+                <a:solidFill>
+                  <a:srgbClr val="333333"/>
+                </a:solidFill>
+                <a:latin typeface="Calibri"/>
+              </a:rPr>
+              <a:t> — Cumplimiento de acuerdos, aporte al proyecto y disposición para ayudar, con </a:t>
+            </a:r>
+            <a:r>
+              <a:rPr sz="1500" b="1" i="0">
+                <a:solidFill>
+                  <a:srgbClr val="333333"/>
+                </a:solidFill>
+                <a:latin typeface="Calibri"/>
+              </a:rPr>
+              <a:t>observaciones y no adjetivos</a:t>
+            </a:r>
+            <a:r>
+              <a:rPr sz="1500" b="0" i="0">
+                <a:solidFill>
+                  <a:srgbClr val="333333"/>
+                </a:solidFill>
+                <a:latin typeface="Calibri"/>
+              </a:rPr>
+              <a:t>.</a:t>
+            </a:r>
+          </a:p>
+        </p:txBody>
+      </p:sp>
+      <p:sp>
+        <p:nvSpPr>
+          <p:cNvPr id="26" name="TextBox 25"/>
           <p:cNvSpPr txBox="1"/>
           <p:nvPr/>
         </p:nvSpPr>
@@ -10940,6 +9902,1290 @@
 </file>
 
 <file path=ppt/slides/slide23.xml><?xml version="1.0" encoding="utf-8"?>
+<p:sld xmlns:a="http://schemas.openxmlformats.org/drawingml/2006/main" xmlns:p="http://schemas.openxmlformats.org/presentationml/2006/main" xmlns:r="http://schemas.openxmlformats.org/officeDocument/2006/relationships">
+  <p:cSld>
+    <p:bg>
+      <p:bgPr>
+        <a:solidFill>
+          <a:srgbClr val="FFFFFF"/>
+        </a:solidFill>
+        <a:effectLst/>
+      </p:bgPr>
+    </p:bg>
+    <p:spTree>
+      <p:nvGrpSpPr>
+        <p:cNvPr id="1" name=""/>
+        <p:cNvGrpSpPr/>
+        <p:nvPr/>
+      </p:nvGrpSpPr>
+      <p:grpSpPr/>
+      <p:sp>
+        <p:nvSpPr>
+          <p:cNvPr id="2" name="Rectangle 1"/>
+          <p:cNvSpPr/>
+          <p:nvPr/>
+        </p:nvSpPr>
+        <p:spPr>
+          <a:xfrm>
+            <a:off x="0" y="0"/>
+            <a:ext cx="12191695" cy="1170432"/>
+          </a:xfrm>
+          <a:prstGeom prst="rect">
+            <a:avLst/>
+          </a:prstGeom>
+          <a:solidFill>
+            <a:srgbClr val="095292"/>
+          </a:solidFill>
+          <a:ln>
+            <a:noFill/>
+          </a:ln>
+        </p:spPr>
+        <p:style>
+          <a:lnRef idx="1">
+            <a:schemeClr val="accent1"/>
+          </a:lnRef>
+          <a:fillRef idx="3">
+            <a:schemeClr val="accent1"/>
+          </a:fillRef>
+          <a:effectRef idx="2">
+            <a:schemeClr val="accent1"/>
+          </a:effectRef>
+          <a:fontRef idx="minor">
+            <a:schemeClr val="lt1"/>
+          </a:fontRef>
+        </p:style>
+        <p:txBody>
+          <a:bodyPr rtlCol="0" anchor="ctr"/>
+          <a:lstStyle/>
+          <a:p>
+            <a:pPr algn="ctr"/>
+          </a:p>
+        </p:txBody>
+      </p:sp>
+      <p:sp>
+        <p:nvSpPr>
+          <p:cNvPr id="3" name="Rectangle 2"/>
+          <p:cNvSpPr/>
+          <p:nvPr/>
+        </p:nvSpPr>
+        <p:spPr>
+          <a:xfrm>
+            <a:off x="0" y="1170432"/>
+            <a:ext cx="12191695" cy="41148"/>
+          </a:xfrm>
+          <a:prstGeom prst="rect">
+            <a:avLst/>
+          </a:prstGeom>
+          <a:solidFill>
+            <a:srgbClr val="FFD000"/>
+          </a:solidFill>
+          <a:ln>
+            <a:noFill/>
+          </a:ln>
+        </p:spPr>
+        <p:style>
+          <a:lnRef idx="1">
+            <a:schemeClr val="accent1"/>
+          </a:lnRef>
+          <a:fillRef idx="3">
+            <a:schemeClr val="accent1"/>
+          </a:fillRef>
+          <a:effectRef idx="2">
+            <a:schemeClr val="accent1"/>
+          </a:effectRef>
+          <a:fontRef idx="minor">
+            <a:schemeClr val="lt1"/>
+          </a:fontRef>
+        </p:style>
+        <p:txBody>
+          <a:bodyPr rtlCol="0" anchor="ctr"/>
+          <a:lstStyle/>
+          <a:p>
+            <a:pPr algn="ctr"/>
+          </a:p>
+        </p:txBody>
+      </p:sp>
+      <p:sp>
+        <p:nvSpPr>
+          <p:cNvPr id="4" name="TextBox 3"/>
+          <p:cNvSpPr txBox="1"/>
+          <p:nvPr/>
+        </p:nvSpPr>
+        <p:spPr>
+          <a:xfrm>
+            <a:off x="457200" y="164592"/>
+            <a:ext cx="11277295" cy="384048"/>
+          </a:xfrm>
+          <a:prstGeom prst="rect">
+            <a:avLst/>
+          </a:prstGeom>
+          <a:noFill/>
+        </p:spPr>
+        <p:txBody>
+          <a:bodyPr wrap="square">
+            <a:spAutoFit/>
+          </a:bodyPr>
+          <a:lstStyle/>
+          <a:p>
+            <a:r>
+              <a:rPr sz="2600" b="1" i="0">
+                <a:solidFill>
+                  <a:srgbClr val="FFFFFF"/>
+                </a:solidFill>
+                <a:latin typeface="Calibri"/>
+              </a:rPr>
+              <a:t>Cómo se expone en 3 minutos</a:t>
+            </a:r>
+          </a:p>
+        </p:txBody>
+      </p:sp>
+      <p:sp>
+        <p:nvSpPr>
+          <p:cNvPr id="5" name="TextBox 4"/>
+          <p:cNvSpPr txBox="1"/>
+          <p:nvPr/>
+        </p:nvSpPr>
+        <p:spPr>
+          <a:xfrm>
+            <a:off x="457200" y="566928"/>
+            <a:ext cx="11277295" cy="411480"/>
+          </a:xfrm>
+          <a:prstGeom prst="rect">
+            <a:avLst/>
+          </a:prstGeom>
+          <a:noFill/>
+        </p:spPr>
+        <p:txBody>
+          <a:bodyPr wrap="square">
+            <a:spAutoFit/>
+          </a:bodyPr>
+          <a:lstStyle/>
+          <a:p>
+            <a:r>
+              <a:rPr sz="1400" b="0" i="0">
+                <a:solidFill>
+                  <a:srgbClr val="B8D8EE"/>
+                </a:solidFill>
+                <a:latin typeface="Calibri"/>
+              </a:rPr>
+              <a:t>Habla el vocero con la pantalla ya compartida · cronómetro en pantalla · se corta al llegar a cero</a:t>
+            </a:r>
+          </a:p>
+        </p:txBody>
+      </p:sp>
+      <p:sp>
+        <p:nvSpPr>
+          <p:cNvPr id="6" name="Rounded Rectangle 5"/>
+          <p:cNvSpPr/>
+          <p:nvPr/>
+        </p:nvSpPr>
+        <p:spPr>
+          <a:xfrm>
+            <a:off x="457200" y="1659636"/>
+            <a:ext cx="11277295" cy="1051560"/>
+          </a:xfrm>
+          <a:prstGeom prst="roundRect">
+            <a:avLst>
+              <a:gd name="adj" fmla="val 12000"/>
+            </a:avLst>
+          </a:prstGeom>
+          <a:solidFill>
+            <a:srgbClr val="F2F2F2"/>
+          </a:solidFill>
+          <a:ln>
+            <a:noFill/>
+          </a:ln>
+        </p:spPr>
+        <p:style>
+          <a:lnRef idx="1">
+            <a:schemeClr val="accent1"/>
+          </a:lnRef>
+          <a:fillRef idx="3">
+            <a:schemeClr val="accent1"/>
+          </a:fillRef>
+          <a:effectRef idx="2">
+            <a:schemeClr val="accent1"/>
+          </a:effectRef>
+          <a:fontRef idx="minor">
+            <a:schemeClr val="lt1"/>
+          </a:fontRef>
+        </p:style>
+        <p:txBody>
+          <a:bodyPr rtlCol="0" anchor="ctr"/>
+          <a:lstStyle/>
+          <a:p>
+            <a:pPr algn="ctr"/>
+          </a:p>
+        </p:txBody>
+      </p:sp>
+      <p:sp>
+        <p:nvSpPr>
+          <p:cNvPr id="7" name="Rounded Rectangle 6"/>
+          <p:cNvSpPr/>
+          <p:nvPr/>
+        </p:nvSpPr>
+        <p:spPr>
+          <a:xfrm>
+            <a:off x="594360" y="1965960"/>
+            <a:ext cx="438912" cy="438912"/>
+          </a:xfrm>
+          <a:prstGeom prst="roundRect">
+            <a:avLst>
+              <a:gd name="adj" fmla="val 12000"/>
+            </a:avLst>
+          </a:prstGeom>
+          <a:solidFill>
+            <a:srgbClr val="095292"/>
+          </a:solidFill>
+          <a:ln>
+            <a:noFill/>
+          </a:ln>
+        </p:spPr>
+        <p:style>
+          <a:lnRef idx="1">
+            <a:schemeClr val="accent1"/>
+          </a:lnRef>
+          <a:fillRef idx="3">
+            <a:schemeClr val="accent1"/>
+          </a:fillRef>
+          <a:effectRef idx="2">
+            <a:schemeClr val="accent1"/>
+          </a:effectRef>
+          <a:fontRef idx="minor">
+            <a:schemeClr val="lt1"/>
+          </a:fontRef>
+        </p:style>
+        <p:txBody>
+          <a:bodyPr rtlCol="0" anchor="ctr"/>
+          <a:lstStyle/>
+          <a:p>
+            <a:pPr algn="ctr"/>
+          </a:p>
+        </p:txBody>
+      </p:sp>
+      <p:sp>
+        <p:nvSpPr>
+          <p:cNvPr id="8" name="TextBox 7"/>
+          <p:cNvSpPr txBox="1"/>
+          <p:nvPr/>
+        </p:nvSpPr>
+        <p:spPr>
+          <a:xfrm>
+            <a:off x="594360" y="1965960"/>
+            <a:ext cx="438912" cy="438912"/>
+          </a:xfrm>
+          <a:prstGeom prst="rect">
+            <a:avLst/>
+          </a:prstGeom>
+          <a:noFill/>
+        </p:spPr>
+        <p:txBody>
+          <a:bodyPr wrap="square" anchor="ctr"/>
+          <a:lstStyle/>
+          <a:p>
+            <a:pPr algn="ctr"/>
+            <a:r>
+              <a:rPr sz="1600" b="1" i="0">
+                <a:solidFill>
+                  <a:srgbClr val="FFFFFF"/>
+                </a:solidFill>
+                <a:latin typeface="Calibri"/>
+              </a:rPr>
+              <a:t>1</a:t>
+            </a:r>
+          </a:p>
+        </p:txBody>
+      </p:sp>
+      <p:sp>
+        <p:nvSpPr>
+          <p:cNvPr id="9" name="TextBox 8"/>
+          <p:cNvSpPr txBox="1"/>
+          <p:nvPr/>
+        </p:nvSpPr>
+        <p:spPr>
+          <a:xfrm>
+            <a:off x="1188720" y="1751076"/>
+            <a:ext cx="10271455" cy="886968"/>
+          </a:xfrm>
+          <a:prstGeom prst="rect">
+            <a:avLst/>
+          </a:prstGeom>
+          <a:noFill/>
+        </p:spPr>
+        <p:txBody>
+          <a:bodyPr wrap="square" anchor="ctr"/>
+          <a:lstStyle/>
+          <a:p>
+            <a:r>
+              <a:rPr sz="1500" b="1" i="0">
+                <a:solidFill>
+                  <a:srgbClr val="095292"/>
+                </a:solidFill>
+                <a:latin typeface="Calibri"/>
+              </a:rPr>
+              <a:t>Imagen 1</a:t>
+            </a:r>
+          </a:p>
+          <a:p>
+            <a:pPr>
+              <a:spcBef>
+                <a:spcPts val="200"/>
+              </a:spcBef>
+            </a:pPr>
+            <a:r>
+              <a:rPr sz="1300" b="0" i="0">
+                <a:solidFill>
+                  <a:srgbClr val="333333"/>
+                </a:solidFill>
+                <a:latin typeface="Calibri"/>
+              </a:rPr>
+              <a:t>Una pantalla del prototipo funcionando.</a:t>
+            </a:r>
+          </a:p>
+        </p:txBody>
+      </p:sp>
+      <p:sp>
+        <p:nvSpPr>
+          <p:cNvPr id="10" name="Rounded Rectangle 9"/>
+          <p:cNvSpPr/>
+          <p:nvPr/>
+        </p:nvSpPr>
+        <p:spPr>
+          <a:xfrm>
+            <a:off x="457200" y="2802636"/>
+            <a:ext cx="11277295" cy="1051560"/>
+          </a:xfrm>
+          <a:prstGeom prst="roundRect">
+            <a:avLst>
+              <a:gd name="adj" fmla="val 12000"/>
+            </a:avLst>
+          </a:prstGeom>
+          <a:solidFill>
+            <a:srgbClr val="E8F4FA"/>
+          </a:solidFill>
+          <a:ln>
+            <a:noFill/>
+          </a:ln>
+        </p:spPr>
+        <p:style>
+          <a:lnRef idx="1">
+            <a:schemeClr val="accent1"/>
+          </a:lnRef>
+          <a:fillRef idx="3">
+            <a:schemeClr val="accent1"/>
+          </a:fillRef>
+          <a:effectRef idx="2">
+            <a:schemeClr val="accent1"/>
+          </a:effectRef>
+          <a:fontRef idx="minor">
+            <a:schemeClr val="lt1"/>
+          </a:fontRef>
+        </p:style>
+        <p:txBody>
+          <a:bodyPr rtlCol="0" anchor="ctr"/>
+          <a:lstStyle/>
+          <a:p>
+            <a:pPr algn="ctr"/>
+          </a:p>
+        </p:txBody>
+      </p:sp>
+      <p:sp>
+        <p:nvSpPr>
+          <p:cNvPr id="11" name="Rounded Rectangle 10"/>
+          <p:cNvSpPr/>
+          <p:nvPr/>
+        </p:nvSpPr>
+        <p:spPr>
+          <a:xfrm>
+            <a:off x="594360" y="3108960"/>
+            <a:ext cx="438912" cy="438912"/>
+          </a:xfrm>
+          <a:prstGeom prst="roundRect">
+            <a:avLst>
+              <a:gd name="adj" fmla="val 12000"/>
+            </a:avLst>
+          </a:prstGeom>
+          <a:solidFill>
+            <a:srgbClr val="095292"/>
+          </a:solidFill>
+          <a:ln>
+            <a:noFill/>
+          </a:ln>
+        </p:spPr>
+        <p:style>
+          <a:lnRef idx="1">
+            <a:schemeClr val="accent1"/>
+          </a:lnRef>
+          <a:fillRef idx="3">
+            <a:schemeClr val="accent1"/>
+          </a:fillRef>
+          <a:effectRef idx="2">
+            <a:schemeClr val="accent1"/>
+          </a:effectRef>
+          <a:fontRef idx="minor">
+            <a:schemeClr val="lt1"/>
+          </a:fontRef>
+        </p:style>
+        <p:txBody>
+          <a:bodyPr rtlCol="0" anchor="ctr"/>
+          <a:lstStyle/>
+          <a:p>
+            <a:pPr algn="ctr"/>
+          </a:p>
+        </p:txBody>
+      </p:sp>
+      <p:sp>
+        <p:nvSpPr>
+          <p:cNvPr id="12" name="TextBox 11"/>
+          <p:cNvSpPr txBox="1"/>
+          <p:nvPr/>
+        </p:nvSpPr>
+        <p:spPr>
+          <a:xfrm>
+            <a:off x="594360" y="3108960"/>
+            <a:ext cx="438912" cy="438912"/>
+          </a:xfrm>
+          <a:prstGeom prst="rect">
+            <a:avLst/>
+          </a:prstGeom>
+          <a:noFill/>
+        </p:spPr>
+        <p:txBody>
+          <a:bodyPr wrap="square" anchor="ctr"/>
+          <a:lstStyle/>
+          <a:p>
+            <a:pPr algn="ctr"/>
+            <a:r>
+              <a:rPr sz="1600" b="1" i="0">
+                <a:solidFill>
+                  <a:srgbClr val="FFFFFF"/>
+                </a:solidFill>
+                <a:latin typeface="Calibri"/>
+              </a:rPr>
+              <a:t>2</a:t>
+            </a:r>
+          </a:p>
+        </p:txBody>
+      </p:sp>
+      <p:sp>
+        <p:nvSpPr>
+          <p:cNvPr id="13" name="TextBox 12"/>
+          <p:cNvSpPr txBox="1"/>
+          <p:nvPr/>
+        </p:nvSpPr>
+        <p:spPr>
+          <a:xfrm>
+            <a:off x="1188720" y="2894076"/>
+            <a:ext cx="10271455" cy="886968"/>
+          </a:xfrm>
+          <a:prstGeom prst="rect">
+            <a:avLst/>
+          </a:prstGeom>
+          <a:noFill/>
+        </p:spPr>
+        <p:txBody>
+          <a:bodyPr wrap="square" anchor="ctr"/>
+          <a:lstStyle/>
+          <a:p>
+            <a:r>
+              <a:rPr sz="1500" b="1" i="0">
+                <a:solidFill>
+                  <a:srgbClr val="095292"/>
+                </a:solidFill>
+                <a:latin typeface="Calibri"/>
+              </a:rPr>
+              <a:t>Imagen 2</a:t>
+            </a:r>
+          </a:p>
+          <a:p>
+            <a:pPr>
+              <a:spcBef>
+                <a:spcPts val="200"/>
+              </a:spcBef>
+            </a:pPr>
+            <a:r>
+              <a:rPr sz="1300" b="0" i="0">
+                <a:solidFill>
+                  <a:srgbClr val="333333"/>
+                </a:solidFill>
+                <a:latin typeface="Calibri"/>
+              </a:rPr>
+              <a:t>La matriz de impacto, o la diapositiva del problema con su cifra.</a:t>
+            </a:r>
+          </a:p>
+        </p:txBody>
+      </p:sp>
+      <p:sp>
+        <p:nvSpPr>
+          <p:cNvPr id="14" name="Rounded Rectangle 13"/>
+          <p:cNvSpPr/>
+          <p:nvPr/>
+        </p:nvSpPr>
+        <p:spPr>
+          <a:xfrm>
+            <a:off x="457200" y="3945636"/>
+            <a:ext cx="11277295" cy="1051560"/>
+          </a:xfrm>
+          <a:prstGeom prst="roundRect">
+            <a:avLst>
+              <a:gd name="adj" fmla="val 12000"/>
+            </a:avLst>
+          </a:prstGeom>
+          <a:solidFill>
+            <a:srgbClr val="F2F2F2"/>
+          </a:solidFill>
+          <a:ln>
+            <a:noFill/>
+          </a:ln>
+        </p:spPr>
+        <p:style>
+          <a:lnRef idx="1">
+            <a:schemeClr val="accent1"/>
+          </a:lnRef>
+          <a:fillRef idx="3">
+            <a:schemeClr val="accent1"/>
+          </a:fillRef>
+          <a:effectRef idx="2">
+            <a:schemeClr val="accent1"/>
+          </a:effectRef>
+          <a:fontRef idx="minor">
+            <a:schemeClr val="lt1"/>
+          </a:fontRef>
+        </p:style>
+        <p:txBody>
+          <a:bodyPr rtlCol="0" anchor="ctr"/>
+          <a:lstStyle/>
+          <a:p>
+            <a:pPr algn="ctr"/>
+          </a:p>
+        </p:txBody>
+      </p:sp>
+      <p:sp>
+        <p:nvSpPr>
+          <p:cNvPr id="15" name="Rounded Rectangle 14"/>
+          <p:cNvSpPr/>
+          <p:nvPr/>
+        </p:nvSpPr>
+        <p:spPr>
+          <a:xfrm>
+            <a:off x="594360" y="4251960"/>
+            <a:ext cx="438912" cy="438912"/>
+          </a:xfrm>
+          <a:prstGeom prst="roundRect">
+            <a:avLst>
+              <a:gd name="adj" fmla="val 12000"/>
+            </a:avLst>
+          </a:prstGeom>
+          <a:solidFill>
+            <a:srgbClr val="095292"/>
+          </a:solidFill>
+          <a:ln>
+            <a:noFill/>
+          </a:ln>
+        </p:spPr>
+        <p:style>
+          <a:lnRef idx="1">
+            <a:schemeClr val="accent1"/>
+          </a:lnRef>
+          <a:fillRef idx="3">
+            <a:schemeClr val="accent1"/>
+          </a:fillRef>
+          <a:effectRef idx="2">
+            <a:schemeClr val="accent1"/>
+          </a:effectRef>
+          <a:fontRef idx="minor">
+            <a:schemeClr val="lt1"/>
+          </a:fontRef>
+        </p:style>
+        <p:txBody>
+          <a:bodyPr rtlCol="0" anchor="ctr"/>
+          <a:lstStyle/>
+          <a:p>
+            <a:pPr algn="ctr"/>
+          </a:p>
+        </p:txBody>
+      </p:sp>
+      <p:sp>
+        <p:nvSpPr>
+          <p:cNvPr id="16" name="TextBox 15"/>
+          <p:cNvSpPr txBox="1"/>
+          <p:nvPr/>
+        </p:nvSpPr>
+        <p:spPr>
+          <a:xfrm>
+            <a:off x="594360" y="4251960"/>
+            <a:ext cx="438912" cy="438912"/>
+          </a:xfrm>
+          <a:prstGeom prst="rect">
+            <a:avLst/>
+          </a:prstGeom>
+          <a:noFill/>
+        </p:spPr>
+        <p:txBody>
+          <a:bodyPr wrap="square" anchor="ctr"/>
+          <a:lstStyle/>
+          <a:p>
+            <a:pPr algn="ctr"/>
+            <a:r>
+              <a:rPr sz="1600" b="1" i="0">
+                <a:solidFill>
+                  <a:srgbClr val="FFFFFF"/>
+                </a:solidFill>
+                <a:latin typeface="Calibri"/>
+              </a:rPr>
+              <a:t>3</a:t>
+            </a:r>
+          </a:p>
+        </p:txBody>
+      </p:sp>
+      <p:sp>
+        <p:nvSpPr>
+          <p:cNvPr id="17" name="TextBox 16"/>
+          <p:cNvSpPr txBox="1"/>
+          <p:nvPr/>
+        </p:nvSpPr>
+        <p:spPr>
+          <a:xfrm>
+            <a:off x="1188720" y="4037076"/>
+            <a:ext cx="10271455" cy="886968"/>
+          </a:xfrm>
+          <a:prstGeom prst="rect">
+            <a:avLst/>
+          </a:prstGeom>
+          <a:noFill/>
+        </p:spPr>
+        <p:txBody>
+          <a:bodyPr wrap="square" anchor="ctr"/>
+          <a:lstStyle/>
+          <a:p>
+            <a:r>
+              <a:rPr sz="1500" b="1" i="0">
+                <a:solidFill>
+                  <a:srgbClr val="095292"/>
+                </a:solidFill>
+                <a:latin typeface="Calibri"/>
+              </a:rPr>
+              <a:t>Cinco líneas</a:t>
+            </a:r>
+          </a:p>
+          <a:p>
+            <a:pPr>
+              <a:spcBef>
+                <a:spcPts val="200"/>
+              </a:spcBef>
+            </a:pPr>
+            <a:r>
+              <a:rPr sz="1300" b="0" i="0">
+                <a:solidFill>
+                  <a:srgbClr val="333333"/>
+                </a:solidFill>
+                <a:latin typeface="Calibri"/>
+              </a:rPr>
+              <a:t>Problema · decisión · un hallazgo · un número de impacto · siguiente paso.</a:t>
+            </a:r>
+          </a:p>
+        </p:txBody>
+      </p:sp>
+      <p:sp>
+        <p:nvSpPr>
+          <p:cNvPr id="18" name="Rounded Rectangle 17"/>
+          <p:cNvSpPr/>
+          <p:nvPr/>
+        </p:nvSpPr>
+        <p:spPr>
+          <a:xfrm>
+            <a:off x="457200" y="5088636"/>
+            <a:ext cx="11277295" cy="1051560"/>
+          </a:xfrm>
+          <a:prstGeom prst="roundRect">
+            <a:avLst>
+              <a:gd name="adj" fmla="val 12000"/>
+            </a:avLst>
+          </a:prstGeom>
+          <a:solidFill>
+            <a:srgbClr val="E8F4FA"/>
+          </a:solidFill>
+          <a:ln>
+            <a:noFill/>
+          </a:ln>
+        </p:spPr>
+        <p:style>
+          <a:lnRef idx="1">
+            <a:schemeClr val="accent1"/>
+          </a:lnRef>
+          <a:fillRef idx="3">
+            <a:schemeClr val="accent1"/>
+          </a:fillRef>
+          <a:effectRef idx="2">
+            <a:schemeClr val="accent1"/>
+          </a:effectRef>
+          <a:fontRef idx="minor">
+            <a:schemeClr val="lt1"/>
+          </a:fontRef>
+        </p:style>
+        <p:txBody>
+          <a:bodyPr rtlCol="0" anchor="ctr"/>
+          <a:lstStyle/>
+          <a:p>
+            <a:pPr algn="ctr"/>
+          </a:p>
+        </p:txBody>
+      </p:sp>
+      <p:sp>
+        <p:nvSpPr>
+          <p:cNvPr id="19" name="Rounded Rectangle 18"/>
+          <p:cNvSpPr/>
+          <p:nvPr/>
+        </p:nvSpPr>
+        <p:spPr>
+          <a:xfrm>
+            <a:off x="594360" y="5394960"/>
+            <a:ext cx="438912" cy="438912"/>
+          </a:xfrm>
+          <a:prstGeom prst="roundRect">
+            <a:avLst>
+              <a:gd name="adj" fmla="val 12000"/>
+            </a:avLst>
+          </a:prstGeom>
+          <a:solidFill>
+            <a:srgbClr val="095292"/>
+          </a:solidFill>
+          <a:ln>
+            <a:noFill/>
+          </a:ln>
+        </p:spPr>
+        <p:style>
+          <a:lnRef idx="1">
+            <a:schemeClr val="accent1"/>
+          </a:lnRef>
+          <a:fillRef idx="3">
+            <a:schemeClr val="accent1"/>
+          </a:fillRef>
+          <a:effectRef idx="2">
+            <a:schemeClr val="accent1"/>
+          </a:effectRef>
+          <a:fontRef idx="minor">
+            <a:schemeClr val="lt1"/>
+          </a:fontRef>
+        </p:style>
+        <p:txBody>
+          <a:bodyPr rtlCol="0" anchor="ctr"/>
+          <a:lstStyle/>
+          <a:p>
+            <a:pPr algn="ctr"/>
+          </a:p>
+        </p:txBody>
+      </p:sp>
+      <p:sp>
+        <p:nvSpPr>
+          <p:cNvPr id="20" name="TextBox 19"/>
+          <p:cNvSpPr txBox="1"/>
+          <p:nvPr/>
+        </p:nvSpPr>
+        <p:spPr>
+          <a:xfrm>
+            <a:off x="594360" y="5394960"/>
+            <a:ext cx="438912" cy="438912"/>
+          </a:xfrm>
+          <a:prstGeom prst="rect">
+            <a:avLst/>
+          </a:prstGeom>
+          <a:noFill/>
+        </p:spPr>
+        <p:txBody>
+          <a:bodyPr wrap="square" anchor="ctr"/>
+          <a:lstStyle/>
+          <a:p>
+            <a:pPr algn="ctr"/>
+            <a:r>
+              <a:rPr sz="1600" b="1" i="0">
+                <a:solidFill>
+                  <a:srgbClr val="FFFFFF"/>
+                </a:solidFill>
+                <a:latin typeface="Calibri"/>
+              </a:rPr>
+              <a:t>4</a:t>
+            </a:r>
+          </a:p>
+        </p:txBody>
+      </p:sp>
+      <p:sp>
+        <p:nvSpPr>
+          <p:cNvPr id="21" name="TextBox 20"/>
+          <p:cNvSpPr txBox="1"/>
+          <p:nvPr/>
+        </p:nvSpPr>
+        <p:spPr>
+          <a:xfrm>
+            <a:off x="1188720" y="5180076"/>
+            <a:ext cx="10271455" cy="886968"/>
+          </a:xfrm>
+          <a:prstGeom prst="rect">
+            <a:avLst/>
+          </a:prstGeom>
+          <a:noFill/>
+        </p:spPr>
+        <p:txBody>
+          <a:bodyPr wrap="square" anchor="ctr"/>
+          <a:lstStyle/>
+          <a:p>
+            <a:r>
+              <a:rPr sz="1500" b="1" i="0">
+                <a:solidFill>
+                  <a:srgbClr val="095292"/>
+                </a:solidFill>
+                <a:latin typeface="Calibri"/>
+              </a:rPr>
+              <a:t>Recorrido libre</a:t>
+            </a:r>
+          </a:p>
+          <a:p>
+            <a:pPr>
+              <a:spcBef>
+                <a:spcPts val="200"/>
+              </a:spcBef>
+            </a:pPr>
+            <a:r>
+              <a:rPr sz="1300" b="0" i="0">
+                <a:solidFill>
+                  <a:srgbClr val="333333"/>
+                </a:solidFill>
+                <a:latin typeface="Calibri"/>
+              </a:rPr>
+              <a:t>Cada estudiante comenta en la columna de otro equipo.</a:t>
+            </a:r>
+          </a:p>
+        </p:txBody>
+      </p:sp>
+      <p:sp>
+        <p:nvSpPr>
+          <p:cNvPr id="22" name="TextBox 21"/>
+          <p:cNvSpPr txBox="1"/>
+          <p:nvPr/>
+        </p:nvSpPr>
+        <p:spPr>
+          <a:xfrm>
+            <a:off x="11185855" y="6473952"/>
+            <a:ext cx="640080" cy="274320"/>
+          </a:xfrm>
+          <a:prstGeom prst="rect">
+            <a:avLst/>
+          </a:prstGeom>
+          <a:noFill/>
+        </p:spPr>
+        <p:txBody>
+          <a:bodyPr wrap="square">
+            <a:spAutoFit/>
+          </a:bodyPr>
+          <a:lstStyle/>
+          <a:p>
+            <a:pPr algn="r"/>
+            <a:r>
+              <a:rPr sz="1100" b="0" i="0">
+                <a:solidFill>
+                  <a:srgbClr val="666666"/>
+                </a:solidFill>
+                <a:latin typeface="Calibri"/>
+              </a:rPr>
+              <a:t>23</a:t>
+            </a:r>
+          </a:p>
+        </p:txBody>
+      </p:sp>
+    </p:spTree>
+  </p:cSld>
+  <p:clrMapOvr>
+    <a:masterClrMapping/>
+  </p:clrMapOvr>
+</p:sld>
+</file>
+
+<file path=ppt/slides/slide24.xml><?xml version="1.0" encoding="utf-8"?>
+<p:sld xmlns:a="http://schemas.openxmlformats.org/drawingml/2006/main" xmlns:p="http://schemas.openxmlformats.org/presentationml/2006/main" xmlns:r="http://schemas.openxmlformats.org/officeDocument/2006/relationships">
+  <p:cSld>
+    <p:bg>
+      <p:bgPr>
+        <a:solidFill>
+          <a:srgbClr val="FFFFFF"/>
+        </a:solidFill>
+        <a:effectLst/>
+      </p:bgPr>
+    </p:bg>
+    <p:spTree>
+      <p:nvGrpSpPr>
+        <p:cNvPr id="1" name=""/>
+        <p:cNvGrpSpPr/>
+        <p:nvPr/>
+      </p:nvGrpSpPr>
+      <p:grpSpPr/>
+      <p:sp>
+        <p:nvSpPr>
+          <p:cNvPr id="2" name="Rectangle 1"/>
+          <p:cNvSpPr/>
+          <p:nvPr/>
+        </p:nvSpPr>
+        <p:spPr>
+          <a:xfrm>
+            <a:off x="0" y="0"/>
+            <a:ext cx="12191695" cy="960120"/>
+          </a:xfrm>
+          <a:prstGeom prst="rect">
+            <a:avLst/>
+          </a:prstGeom>
+          <a:solidFill>
+            <a:srgbClr val="095292"/>
+          </a:solidFill>
+          <a:ln>
+            <a:noFill/>
+          </a:ln>
+        </p:spPr>
+        <p:style>
+          <a:lnRef idx="1">
+            <a:schemeClr val="accent1"/>
+          </a:lnRef>
+          <a:fillRef idx="3">
+            <a:schemeClr val="accent1"/>
+          </a:fillRef>
+          <a:effectRef idx="2">
+            <a:schemeClr val="accent1"/>
+          </a:effectRef>
+          <a:fontRef idx="minor">
+            <a:schemeClr val="lt1"/>
+          </a:fontRef>
+        </p:style>
+        <p:txBody>
+          <a:bodyPr rtlCol="0" anchor="ctr"/>
+          <a:lstStyle/>
+          <a:p>
+            <a:pPr algn="ctr"/>
+          </a:p>
+        </p:txBody>
+      </p:sp>
+      <p:sp>
+        <p:nvSpPr>
+          <p:cNvPr id="3" name="Rectangle 2"/>
+          <p:cNvSpPr/>
+          <p:nvPr/>
+        </p:nvSpPr>
+        <p:spPr>
+          <a:xfrm>
+            <a:off x="0" y="960120"/>
+            <a:ext cx="12191695" cy="41148"/>
+          </a:xfrm>
+          <a:prstGeom prst="rect">
+            <a:avLst/>
+          </a:prstGeom>
+          <a:solidFill>
+            <a:srgbClr val="FFD000"/>
+          </a:solidFill>
+          <a:ln>
+            <a:noFill/>
+          </a:ln>
+        </p:spPr>
+        <p:style>
+          <a:lnRef idx="1">
+            <a:schemeClr val="accent1"/>
+          </a:lnRef>
+          <a:fillRef idx="3">
+            <a:schemeClr val="accent1"/>
+          </a:fillRef>
+          <a:effectRef idx="2">
+            <a:schemeClr val="accent1"/>
+          </a:effectRef>
+          <a:fontRef idx="minor">
+            <a:schemeClr val="lt1"/>
+          </a:fontRef>
+        </p:style>
+        <p:txBody>
+          <a:bodyPr rtlCol="0" anchor="ctr"/>
+          <a:lstStyle/>
+          <a:p>
+            <a:pPr algn="ctr"/>
+          </a:p>
+        </p:txBody>
+      </p:sp>
+      <p:sp>
+        <p:nvSpPr>
+          <p:cNvPr id="4" name="TextBox 3"/>
+          <p:cNvSpPr txBox="1"/>
+          <p:nvPr/>
+        </p:nvSpPr>
+        <p:spPr>
+          <a:xfrm>
+            <a:off x="457200" y="164592"/>
+            <a:ext cx="11277295" cy="502920"/>
+          </a:xfrm>
+          <a:prstGeom prst="rect">
+            <a:avLst/>
+          </a:prstGeom>
+          <a:noFill/>
+        </p:spPr>
+        <p:txBody>
+          <a:bodyPr wrap="square">
+            <a:spAutoFit/>
+          </a:bodyPr>
+          <a:lstStyle/>
+          <a:p>
+            <a:r>
+              <a:rPr sz="2600" b="1" i="0">
+                <a:solidFill>
+                  <a:srgbClr val="FFFFFF"/>
+                </a:solidFill>
+                <a:latin typeface="Calibri"/>
+              </a:rPr>
+              <a:t>Cierre del curso</a:t>
+            </a:r>
+          </a:p>
+        </p:txBody>
+      </p:sp>
+      <p:sp>
+        <p:nvSpPr>
+          <p:cNvPr id="5" name="TextBox 4"/>
+          <p:cNvSpPr txBox="1"/>
+          <p:nvPr/>
+        </p:nvSpPr>
+        <p:spPr>
+          <a:xfrm>
+            <a:off x="457200" y="1170432"/>
+            <a:ext cx="11277295" cy="5230368"/>
+          </a:xfrm>
+          <a:prstGeom prst="rect">
+            <a:avLst/>
+          </a:prstGeom>
+          <a:noFill/>
+        </p:spPr>
+        <p:txBody>
+          <a:bodyPr wrap="square">
+            <a:spAutoFit/>
+          </a:bodyPr>
+          <a:lstStyle/>
+          <a:p>
+            <a:pPr>
+              <a:spcAft>
+                <a:spcPts val="800"/>
+              </a:spcAft>
+            </a:pPr>
+            <a:r>
+              <a:rPr sz="2000" b="0" i="0">
+                <a:solidFill>
+                  <a:srgbClr val="333333"/>
+                </a:solidFill>
+                <a:latin typeface="Calibri"/>
+              </a:rPr>
+              <a:t>–   </a:t>
+            </a:r>
+            <a:r>
+              <a:rPr sz="2000" b="1" i="0">
+                <a:solidFill>
+                  <a:srgbClr val="333333"/>
+                </a:solidFill>
+                <a:latin typeface="Calibri"/>
+              </a:rPr>
+              <a:t>Lo que queda entregado:</a:t>
+            </a:r>
+            <a:r>
+              <a:rPr sz="2000" b="0" i="0">
+                <a:solidFill>
+                  <a:srgbClr val="333333"/>
+                </a:solidFill>
+                <a:latin typeface="Calibri"/>
+              </a:rPr>
+              <a:t> el </a:t>
+            </a:r>
+            <a:r>
+              <a:rPr sz="2000" b="1" i="0">
+                <a:solidFill>
+                  <a:srgbClr val="333333"/>
+                </a:solidFill>
+                <a:latin typeface="Calibri"/>
+              </a:rPr>
+              <a:t>informe final</a:t>
+            </a:r>
+            <a:r>
+              <a:rPr sz="2000" b="0" i="0">
+                <a:solidFill>
+                  <a:srgbClr val="333333"/>
+                </a:solidFill>
+                <a:latin typeface="Calibri"/>
+              </a:rPr>
+              <a:t> con sus doce secciones (20 %), la </a:t>
+            </a:r>
+            <a:r>
+              <a:rPr sz="2000" b="1" i="0">
+                <a:solidFill>
+                  <a:srgbClr val="333333"/>
+                </a:solidFill>
+                <a:latin typeface="Calibri"/>
+              </a:rPr>
+              <a:t>exposición final</a:t>
+            </a:r>
+            <a:r>
+              <a:rPr sz="2000" b="0" i="0">
+                <a:solidFill>
+                  <a:srgbClr val="333333"/>
+                </a:solidFill>
+                <a:latin typeface="Calibri"/>
+              </a:rPr>
+              <a:t> de la Clase 15 (15 %), el prototipo probado con personas reales y la galería del curso.</a:t>
+            </a:r>
+          </a:p>
+          <a:p>
+            <a:pPr>
+              <a:spcAft>
+                <a:spcPts val="800"/>
+              </a:spcAft>
+            </a:pPr>
+            <a:r>
+              <a:rPr sz="2000" b="0" i="0">
+                <a:solidFill>
+                  <a:srgbClr val="333333"/>
+                </a:solidFill>
+                <a:latin typeface="Calibri"/>
+              </a:rPr>
+              <a:t>–   </a:t>
+            </a:r>
+            <a:r>
+              <a:rPr sz="2000" b="1" i="0">
+                <a:solidFill>
+                  <a:srgbClr val="333333"/>
+                </a:solidFill>
+                <a:latin typeface="Calibri"/>
+              </a:rPr>
+              <a:t>Autoevaluación:</a:t>
+            </a:r>
+            <a:r>
+              <a:rPr sz="2000" b="0" i="0">
+                <a:solidFill>
+                  <a:srgbClr val="333333"/>
+                </a:solidFill>
+                <a:latin typeface="Calibri"/>
+              </a:rPr>
+              <a:t> queda hecha, con evidencia y no con impresiones — junto con la coevaluación del equipo.</a:t>
+            </a:r>
+          </a:p>
+          <a:p>
+            <a:pPr>
+              <a:spcAft>
+                <a:spcPts val="800"/>
+              </a:spcAft>
+            </a:pPr>
+            <a:r>
+              <a:rPr sz="2000" b="0" i="0">
+                <a:solidFill>
+                  <a:srgbClr val="333333"/>
+                </a:solidFill>
+                <a:latin typeface="Calibri"/>
+              </a:rPr>
+              <a:t>–   </a:t>
+            </a:r>
+            <a:r>
+              <a:rPr sz="2000" b="1" i="0">
+                <a:solidFill>
+                  <a:srgbClr val="333333"/>
+                </a:solidFill>
+                <a:latin typeface="Calibri"/>
+              </a:rPr>
+              <a:t>Lo que se llevan es un método, no un tema: definir un problema con evidencia, revisar qué ya existe, decidir con criterios, probar con personas reales y mirar a quién afecta.</a:t>
+            </a:r>
+          </a:p>
+          <a:p>
+            <a:pPr>
+              <a:spcAft>
+                <a:spcPts val="800"/>
+              </a:spcAft>
+            </a:pPr>
+            <a:r>
+              <a:rPr sz="2000" b="0" i="0">
+                <a:solidFill>
+                  <a:srgbClr val="333333"/>
+                </a:solidFill>
+                <a:latin typeface="Calibri"/>
+              </a:rPr>
+              <a:t>–   </a:t>
+            </a:r>
+            <a:r>
+              <a:rPr sz="2000" b="1" i="0">
+                <a:solidFill>
+                  <a:srgbClr val="333333"/>
+                </a:solidFill>
+                <a:latin typeface="Calibri"/>
+              </a:rPr>
+              <a:t>Aviso:</a:t>
+            </a:r>
+            <a:r>
+              <a:rPr sz="2000" b="0" i="0">
+                <a:solidFill>
+                  <a:srgbClr val="333333"/>
+                </a:solidFill>
+                <a:latin typeface="Calibri"/>
+              </a:rPr>
+              <a:t> El informe y las capturas quedan en la carpeta del equipo: es un proyecto completo y documentado, hecho en primer semestre, y sirve para un portafolio. Y </a:t>
+            </a:r>
+            <a:r>
+              <a:rPr sz="2000" b="1" i="0">
+                <a:solidFill>
+                  <a:srgbClr val="333333"/>
+                </a:solidFill>
+                <a:latin typeface="Calibri"/>
+              </a:rPr>
+              <a:t>el siguiente paso de su proyecto está escrito en la sección 10</a:t>
+            </a:r>
+            <a:r>
+              <a:rPr sz="2000" b="0" i="0">
+                <a:solidFill>
+                  <a:srgbClr val="333333"/>
+                </a:solidFill>
+                <a:latin typeface="Calibri"/>
+              </a:rPr>
+              <a:t> — quien quiera continuarlo ya no tiene que decidir por dónde empezar.</a:t>
+            </a:r>
+          </a:p>
+        </p:txBody>
+      </p:sp>
+      <p:sp>
+        <p:nvSpPr>
+          <p:cNvPr id="6" name="TextBox 5"/>
+          <p:cNvSpPr txBox="1"/>
+          <p:nvPr/>
+        </p:nvSpPr>
+        <p:spPr>
+          <a:xfrm>
+            <a:off x="11185855" y="6473952"/>
+            <a:ext cx="640080" cy="274320"/>
+          </a:xfrm>
+          <a:prstGeom prst="rect">
+            <a:avLst/>
+          </a:prstGeom>
+          <a:noFill/>
+        </p:spPr>
+        <p:txBody>
+          <a:bodyPr wrap="square">
+            <a:spAutoFit/>
+          </a:bodyPr>
+          <a:lstStyle/>
+          <a:p>
+            <a:pPr algn="r"/>
+            <a:r>
+              <a:rPr sz="1100" b="0" i="0">
+                <a:solidFill>
+                  <a:srgbClr val="666666"/>
+                </a:solidFill>
+                <a:latin typeface="Calibri"/>
+              </a:rPr>
+              <a:t>24</a:t>
+            </a:r>
+          </a:p>
+        </p:txBody>
+      </p:sp>
+    </p:spTree>
+  </p:cSld>
+  <p:clrMapOvr>
+    <a:masterClrMapping/>
+  </p:clrMapOvr>
+</p:sld>
+</file>
+
+<file path=ppt/slides/slide25.xml><?xml version="1.0" encoding="utf-8"?>
 <p:sld xmlns:a="http://schemas.openxmlformats.org/drawingml/2006/main" xmlns:p="http://schemas.openxmlformats.org/presentationml/2006/main" xmlns:r="http://schemas.openxmlformats.org/officeDocument/2006/relationships">
   <p:cSld>
     <p:bg>

--- a/Introduccion a la Ingenieria/Clases/Clase 16 - Socializacion y evaluacion final del curso/Presentacion.pptx
+++ b/Introduccion a la Ingenieria/Clases/Clase 16 - Socializacion y evaluacion final del curso/Presentacion.pptx
@@ -30,6 +30,8 @@
     <p:sldId id="278" r:id="rId29"/>
     <p:sldId id="279" r:id="rId30"/>
     <p:sldId id="280" r:id="rId31"/>
+    <p:sldId id="281" r:id="rId32"/>
+    <p:sldId id="282" r:id="rId33"/>
   </p:sldIdLst>
   <p:sldSz cx="12191695" cy="6858000" type="screen4x3"/>
   <p:notesSz cx="6858000" cy="9144000"/>
@@ -8708,7 +8710,7 @@
         <p:spPr>
           <a:xfrm>
             <a:off x="0" y="0"/>
-            <a:ext cx="12191695" cy="1170432"/>
+            <a:ext cx="12191695" cy="960120"/>
           </a:xfrm>
           <a:prstGeom prst="rect">
             <a:avLst/>
@@ -8750,7 +8752,7 @@
         </p:nvSpPr>
         <p:spPr>
           <a:xfrm>
-            <a:off x="0" y="1170432"/>
+            <a:off x="0" y="960120"/>
             <a:ext cx="12191695" cy="41148"/>
           </a:xfrm>
           <a:prstGeom prst="rect">
@@ -8794,7 +8796,7 @@
         <p:spPr>
           <a:xfrm>
             <a:off x="457200" y="164592"/>
-            <a:ext cx="11277295" cy="384048"/>
+            <a:ext cx="11277295" cy="502920"/>
           </a:xfrm>
           <a:prstGeom prst="rect">
             <a:avLst/>
@@ -8814,55 +8816,21 @@
                 </a:solidFill>
                 <a:latin typeface="Calibri"/>
               </a:rPr>
-              <a:t>Taller de hoy: Informe final y autoevaluación</a:t>
-            </a:r>
-          </a:p>
-        </p:txBody>
-      </p:sp>
-      <p:sp>
-        <p:nvSpPr>
-          <p:cNvPr id="5" name="TextBox 4"/>
-          <p:cNvSpPr txBox="1"/>
-          <p:nvPr/>
-        </p:nvSpPr>
-        <p:spPr>
-          <a:xfrm>
-            <a:off x="457200" y="566928"/>
-            <a:ext cx="11277295" cy="411480"/>
-          </a:xfrm>
-          <a:prstGeom prst="rect">
-            <a:avLst/>
-          </a:prstGeom>
-          <a:noFill/>
-        </p:spPr>
-        <p:txBody>
-          <a:bodyPr wrap="square">
-            <a:spAutoFit/>
-          </a:bodyPr>
-          <a:lstStyle/>
-          <a:p>
-            <a:r>
-              <a:rPr sz="1400" b="0" i="0">
-                <a:solidFill>
-                  <a:srgbClr val="B8D8EE"/>
-                </a:solidFill>
-                <a:latin typeface="Calibri"/>
-              </a:rPr>
-              <a:t>24 min en equipos · 24 min: pegar, verificar, repartir huecos, resumen y entregar · informe final en PDF + galería en el muro + autoevaluación y coevaluación</a:t>
-            </a:r>
-          </a:p>
-        </p:txBody>
-      </p:sp>
-      <p:sp>
-        <p:nvSpPr>
-          <p:cNvPr id="6" name="Rounded Rectangle 5"/>
+              <a:t>Plantilla del entregable: los 5 bloques</a:t>
+            </a:r>
+          </a:p>
+        </p:txBody>
+      </p:sp>
+      <p:sp>
+        <p:nvSpPr>
+          <p:cNvPr id="5" name="Rounded Rectangle 4"/>
           <p:cNvSpPr/>
           <p:nvPr/>
         </p:nvSpPr>
         <p:spPr>
           <a:xfrm>
-            <a:off x="457200" y="1472184"/>
-            <a:ext cx="11277295" cy="566928"/>
+            <a:off x="457200" y="1261872"/>
+            <a:ext cx="11277295" cy="5093208"/>
           </a:xfrm>
           <a:prstGeom prst="roundRect">
             <a:avLst>
@@ -8870,7 +8838,7 @@
             </a:avLst>
           </a:prstGeom>
           <a:solidFill>
-            <a:srgbClr val="F2F2F2"/>
+            <a:srgbClr val="1E2A38"/>
           </a:solidFill>
           <a:ln>
             <a:noFill/>
@@ -8900,25 +8868,23 @@
       </p:sp>
       <p:sp>
         <p:nvSpPr>
-          <p:cNvPr id="7" name="Rectangle 6"/>
+          <p:cNvPr id="6" name="Rectangle 5"/>
           <p:cNvSpPr/>
           <p:nvPr/>
         </p:nvSpPr>
         <p:spPr>
           <a:xfrm>
-            <a:off x="640080" y="1618487"/>
-            <a:ext cx="274320" cy="274320"/>
+            <a:off x="457200" y="1261872"/>
+            <a:ext cx="11277295" cy="320040"/>
           </a:xfrm>
           <a:prstGeom prst="rect">
             <a:avLst/>
           </a:prstGeom>
           <a:solidFill>
-            <a:srgbClr val="FFFFFF"/>
+            <a:srgbClr val="095292"/>
           </a:solidFill>
           <a:ln>
-            <a:solidFill>
-              <a:srgbClr val="333333"/>
-            </a:solidFill>
+            <a:noFill/>
           </a:ln>
         </p:spPr>
         <p:style>
@@ -8945,922 +8911,222 @@
       </p:sp>
       <p:sp>
         <p:nvSpPr>
-          <p:cNvPr id="8" name="Rectangle 7"/>
-          <p:cNvSpPr/>
-          <p:nvPr/>
-        </p:nvSpPr>
-        <p:spPr>
-          <a:xfrm>
-            <a:off x="640080" y="1618487"/>
-            <a:ext cx="73152" cy="274320"/>
-          </a:xfrm>
-          <a:prstGeom prst="rect">
-            <a:avLst/>
-          </a:prstGeom>
-          <a:solidFill>
-            <a:srgbClr val="269CCB"/>
-          </a:solidFill>
-          <a:ln>
-            <a:noFill/>
-          </a:ln>
-        </p:spPr>
-        <p:style>
-          <a:lnRef idx="1">
-            <a:schemeClr val="accent1"/>
-          </a:lnRef>
-          <a:fillRef idx="3">
-            <a:schemeClr val="accent1"/>
-          </a:fillRef>
-          <a:effectRef idx="2">
-            <a:schemeClr val="accent1"/>
-          </a:effectRef>
-          <a:fontRef idx="minor">
-            <a:schemeClr val="lt1"/>
-          </a:fontRef>
-        </p:style>
-        <p:txBody>
-          <a:bodyPr rtlCol="0" anchor="ctr"/>
-          <a:lstStyle/>
-          <a:p>
-            <a:pPr algn="ctr"/>
+          <p:cNvPr id="7" name="TextBox 6"/>
+          <p:cNvSpPr txBox="1"/>
+          <p:nvPr/>
+        </p:nvSpPr>
+        <p:spPr>
+          <a:xfrm>
+            <a:off x="685800" y="1307592"/>
+            <a:ext cx="10820095" cy="256032"/>
+          </a:xfrm>
+          <a:prstGeom prst="rect">
+            <a:avLst/>
+          </a:prstGeom>
+          <a:noFill/>
+        </p:spPr>
+        <p:txBody>
+          <a:bodyPr wrap="square" anchor="ctr"/>
+          <a:lstStyle/>
+          <a:p>
+            <a:r>
+              <a:rPr sz="1000" b="1" i="0">
+                <a:solidFill>
+                  <a:srgbClr val="269CCB"/>
+                </a:solidFill>
+                <a:latin typeface="Calibri"/>
+              </a:rPr>
+              <a:t>● ● ●</a:t>
+            </a:r>
+          </a:p>
+        </p:txBody>
+      </p:sp>
+      <p:sp>
+        <p:nvSpPr>
+          <p:cNvPr id="8" name="TextBox 7"/>
+          <p:cNvSpPr txBox="1"/>
+          <p:nvPr/>
+        </p:nvSpPr>
+        <p:spPr>
+          <a:xfrm>
+            <a:off x="777240" y="1719072"/>
+            <a:ext cx="10637215" cy="4453128"/>
+          </a:xfrm>
+          <a:prstGeom prst="rect">
+            <a:avLst/>
+          </a:prstGeom>
+          <a:noFill/>
+        </p:spPr>
+        <p:txBody>
+          <a:bodyPr wrap="square">
+            <a:spAutoFit/>
+          </a:bodyPr>
+          <a:lstStyle/>
+          <a:p>
+            <a:pPr>
+              <a:spcAft>
+                <a:spcPts val="400"/>
+              </a:spcAft>
+            </a:pPr>
+            <a:r>
+              <a:rPr sz="1400" b="0" i="0">
+                <a:solidFill>
+                  <a:srgbClr val="FFFFFF"/>
+                </a:solidFill>
+                <a:latin typeface="Calibri"/>
+              </a:rPr>
+              <a:t># Informe final y autoevaluación</a:t>
+            </a:r>
+          </a:p>
+          <a:p>
+            <a:pPr>
+              <a:spcAft>
+                <a:spcPts val="400"/>
+              </a:spcAft>
+            </a:pPr>
+            <a:r>
+              <a:rPr sz="1400" b="0" i="0">
+                <a:solidFill>
+                  <a:srgbClr val="FFFFFF"/>
+                </a:solidFill>
+                <a:latin typeface="Calibri"/>
+              </a:rPr>
+              <a:t># Documento del equipo · un bloque por titulo, sin cambiar los nombres</a:t>
+            </a:r>
+          </a:p>
+          <a:p>
+            <a:pPr>
+              <a:spcAft>
+                <a:spcPts val="400"/>
+              </a:spcAft>
+            </a:pPr>
+            <a:r>
+              <a:rPr sz="1400" b="0" i="0">
+                <a:solidFill>
+                  <a:srgbClr val="FFFFFF"/>
+                </a:solidFill>
+                <a:latin typeface="Calibri"/>
+              </a:rPr>
+              <a:t/>
+            </a:r>
+          </a:p>
+          <a:p>
+            <a:pPr>
+              <a:spcAft>
+                <a:spcPts val="400"/>
+              </a:spcAft>
+            </a:pPr>
+            <a:r>
+              <a:rPr sz="1400" b="0" i="0">
+                <a:solidFill>
+                  <a:srgbClr val="FFFFFF"/>
+                </a:solidFill>
+                <a:latin typeface="Calibri"/>
+              </a:rPr>
+              <a:t>## 1. LA LISTA DE VERIFICACIÓN DEL INFORME</a:t>
+            </a:r>
+          </a:p>
+          <a:p>
+            <a:pPr>
+              <a:spcAft>
+                <a:spcPts val="400"/>
+              </a:spcAft>
+            </a:pPr>
+            <a:r>
+              <a:rPr sz="1400" b="0" i="0">
+                <a:solidFill>
+                  <a:srgbClr val="FFFFFF"/>
+                </a:solidFill>
+                <a:latin typeface="Calibri"/>
+              </a:rPr>
+              <a:t>## 2. LO QUE FALTABA Y SE COMPLETÓ HOY</a:t>
+            </a:r>
+          </a:p>
+          <a:p>
+            <a:pPr>
+              <a:spcAft>
+                <a:spcPts val="400"/>
+              </a:spcAft>
+            </a:pPr>
+            <a:r>
+              <a:rPr sz="1400" b="0" i="0">
+                <a:solidFill>
+                  <a:srgbClr val="FFFFFF"/>
+                </a:solidFill>
+                <a:latin typeface="Calibri"/>
+              </a:rPr>
+              <a:t>## 3. LA DECLARACIÓN DEL USO DE IA</a:t>
+            </a:r>
+          </a:p>
+          <a:p>
+            <a:pPr>
+              <a:spcAft>
+                <a:spcPts val="400"/>
+              </a:spcAft>
+            </a:pPr>
+            <a:r>
+              <a:rPr sz="1400" b="0" i="0">
+                <a:solidFill>
+                  <a:srgbClr val="FFFFFF"/>
+                </a:solidFill>
+                <a:latin typeface="Calibri"/>
+              </a:rPr>
+              <a:t>## 4. LA AUTOEVALUACIÓN INDIVIDUAL</a:t>
+            </a:r>
+          </a:p>
+          <a:p>
+            <a:pPr>
+              <a:spcAft>
+                <a:spcPts val="400"/>
+              </a:spcAft>
+            </a:pPr>
+            <a:r>
+              <a:rPr sz="1400" b="0" i="0">
+                <a:solidFill>
+                  <a:srgbClr val="FFFFFF"/>
+                </a:solidFill>
+                <a:latin typeface="Calibri"/>
+              </a:rPr>
+              <a:t>## 5. LA COEVALUACIÓN DEL EQUIPO</a:t>
+            </a:r>
+          </a:p>
+          <a:p>
+            <a:pPr>
+              <a:spcAft>
+                <a:spcPts val="400"/>
+              </a:spcAft>
+            </a:pPr>
+            <a:r>
+              <a:rPr sz="1400" b="0" i="0">
+                <a:solidFill>
+                  <a:srgbClr val="FFFFFF"/>
+                </a:solidFill>
+                <a:latin typeface="Calibri"/>
+              </a:rPr>
+              <a:t/>
+            </a:r>
+          </a:p>
+          <a:p>
+            <a:pPr>
+              <a:spcAft>
+                <a:spcPts val="400"/>
+              </a:spcAft>
+            </a:pPr>
+            <a:r>
+              <a:rPr sz="1400" b="0" i="0">
+                <a:solidFill>
+                  <a:srgbClr val="FFFFFF"/>
+                </a:solidFill>
+                <a:latin typeface="Calibri"/>
+              </a:rPr>
+              <a:t># Los titulos van TAL CUAL: son con los que se califica.</a:t>
+            </a:r>
           </a:p>
         </p:txBody>
       </p:sp>
       <p:sp>
         <p:nvSpPr>
           <p:cNvPr id="9" name="TextBox 8"/>
-          <p:cNvSpPr txBox="1"/>
-          <p:nvPr/>
-        </p:nvSpPr>
-        <p:spPr>
-          <a:xfrm>
-            <a:off x="1097280" y="1563624"/>
-            <a:ext cx="10362895" cy="402336"/>
-          </a:xfrm>
-          <a:prstGeom prst="rect">
-            <a:avLst/>
-          </a:prstGeom>
-          <a:noFill/>
-        </p:spPr>
-        <p:txBody>
-          <a:bodyPr wrap="square" anchor="ctr"/>
-          <a:lstStyle/>
-          <a:p>
-            <a:r>
-              <a:rPr sz="1500" b="1" i="0">
-                <a:solidFill>
-                  <a:srgbClr val="333333"/>
-                </a:solidFill>
-                <a:latin typeface="Calibri"/>
-              </a:rPr>
-              <a:t>LA LISTA DE VERIFICACIÓN DEL INFORME</a:t>
-            </a:r>
-            <a:r>
-              <a:rPr sz="1500" b="0" i="0">
-                <a:solidFill>
-                  <a:srgbClr val="333333"/>
-                </a:solidFill>
-                <a:latin typeface="Calibri"/>
-              </a:rPr>
-              <a:t> — Las </a:t>
-            </a:r>
-            <a:r>
-              <a:rPr sz="1500" b="1" i="0">
-                <a:solidFill>
-                  <a:srgbClr val="333333"/>
-                </a:solidFill>
-                <a:latin typeface="Calibri"/>
-              </a:rPr>
-              <a:t>doce secciones</a:t>
-            </a:r>
-            <a:r>
-              <a:rPr sz="1500" b="0" i="0">
-                <a:solidFill>
-                  <a:srgbClr val="333333"/>
-                </a:solidFill>
-                <a:latin typeface="Calibri"/>
-              </a:rPr>
-              <a:t> en un solo documento, cada una con lo que ya estaba escrito desde su sesión, y con el largo de la tabla.</a:t>
-            </a:r>
-          </a:p>
-        </p:txBody>
-      </p:sp>
-      <p:sp>
-        <p:nvSpPr>
-          <p:cNvPr id="10" name="Rounded Rectangle 9"/>
-          <p:cNvSpPr/>
-          <p:nvPr/>
-        </p:nvSpPr>
-        <p:spPr>
-          <a:xfrm>
-            <a:off x="457200" y="2148839"/>
-            <a:ext cx="11277295" cy="566928"/>
-          </a:xfrm>
-          <a:prstGeom prst="roundRect">
-            <a:avLst>
-              <a:gd name="adj" fmla="val 12000"/>
-            </a:avLst>
-          </a:prstGeom>
-          <a:solidFill>
-            <a:srgbClr val="F2F2F2"/>
-          </a:solidFill>
-          <a:ln>
-            <a:noFill/>
-          </a:ln>
-        </p:spPr>
-        <p:style>
-          <a:lnRef idx="1">
-            <a:schemeClr val="accent1"/>
-          </a:lnRef>
-          <a:fillRef idx="3">
-            <a:schemeClr val="accent1"/>
-          </a:fillRef>
-          <a:effectRef idx="2">
-            <a:schemeClr val="accent1"/>
-          </a:effectRef>
-          <a:fontRef idx="minor">
-            <a:schemeClr val="lt1"/>
-          </a:fontRef>
-        </p:style>
-        <p:txBody>
-          <a:bodyPr rtlCol="0" anchor="ctr"/>
-          <a:lstStyle/>
-          <a:p>
-            <a:pPr algn="ctr"/>
-          </a:p>
-        </p:txBody>
-      </p:sp>
-      <p:sp>
-        <p:nvSpPr>
-          <p:cNvPr id="11" name="Rectangle 10"/>
-          <p:cNvSpPr/>
-          <p:nvPr/>
-        </p:nvSpPr>
-        <p:spPr>
-          <a:xfrm>
-            <a:off x="640080" y="2295144"/>
-            <a:ext cx="274320" cy="274320"/>
-          </a:xfrm>
-          <a:prstGeom prst="rect">
-            <a:avLst/>
-          </a:prstGeom>
-          <a:solidFill>
-            <a:srgbClr val="FFFFFF"/>
-          </a:solidFill>
-          <a:ln>
-            <a:solidFill>
-              <a:srgbClr val="333333"/>
-            </a:solidFill>
-          </a:ln>
-        </p:spPr>
-        <p:style>
-          <a:lnRef idx="1">
-            <a:schemeClr val="accent1"/>
-          </a:lnRef>
-          <a:fillRef idx="3">
-            <a:schemeClr val="accent1"/>
-          </a:fillRef>
-          <a:effectRef idx="2">
-            <a:schemeClr val="accent1"/>
-          </a:effectRef>
-          <a:fontRef idx="minor">
-            <a:schemeClr val="lt1"/>
-          </a:fontRef>
-        </p:style>
-        <p:txBody>
-          <a:bodyPr rtlCol="0" anchor="ctr"/>
-          <a:lstStyle/>
-          <a:p>
-            <a:pPr algn="ctr"/>
-          </a:p>
-        </p:txBody>
-      </p:sp>
-      <p:sp>
-        <p:nvSpPr>
-          <p:cNvPr id="12" name="Rectangle 11"/>
-          <p:cNvSpPr/>
-          <p:nvPr/>
-        </p:nvSpPr>
-        <p:spPr>
-          <a:xfrm>
-            <a:off x="640080" y="2295144"/>
-            <a:ext cx="73152" cy="274320"/>
-          </a:xfrm>
-          <a:prstGeom prst="rect">
-            <a:avLst/>
-          </a:prstGeom>
-          <a:solidFill>
-            <a:srgbClr val="269CCB"/>
-          </a:solidFill>
-          <a:ln>
-            <a:noFill/>
-          </a:ln>
-        </p:spPr>
-        <p:style>
-          <a:lnRef idx="1">
-            <a:schemeClr val="accent1"/>
-          </a:lnRef>
-          <a:fillRef idx="3">
-            <a:schemeClr val="accent1"/>
-          </a:fillRef>
-          <a:effectRef idx="2">
-            <a:schemeClr val="accent1"/>
-          </a:effectRef>
-          <a:fontRef idx="minor">
-            <a:schemeClr val="lt1"/>
-          </a:fontRef>
-        </p:style>
-        <p:txBody>
-          <a:bodyPr rtlCol="0" anchor="ctr"/>
-          <a:lstStyle/>
-          <a:p>
-            <a:pPr algn="ctr"/>
-          </a:p>
-        </p:txBody>
-      </p:sp>
-      <p:sp>
-        <p:nvSpPr>
-          <p:cNvPr id="13" name="TextBox 12"/>
-          <p:cNvSpPr txBox="1"/>
-          <p:nvPr/>
-        </p:nvSpPr>
-        <p:spPr>
-          <a:xfrm>
-            <a:off x="1097280" y="2240279"/>
-            <a:ext cx="10362895" cy="402336"/>
-          </a:xfrm>
-          <a:prstGeom prst="rect">
-            <a:avLst/>
-          </a:prstGeom>
-          <a:noFill/>
-        </p:spPr>
-        <p:txBody>
-          <a:bodyPr wrap="square" anchor="ctr"/>
-          <a:lstStyle/>
-          <a:p>
-            <a:r>
-              <a:rPr sz="1500" b="1" i="0">
-                <a:solidFill>
-                  <a:srgbClr val="333333"/>
-                </a:solidFill>
-                <a:latin typeface="Calibri"/>
-              </a:rPr>
-              <a:t>LO QUE FALTABA Y SE COMPLETÓ HOY</a:t>
-            </a:r>
-            <a:r>
-              <a:rPr sz="1500" b="0" i="0">
-                <a:solidFill>
-                  <a:srgbClr val="333333"/>
-                </a:solidFill>
-                <a:latin typeface="Calibri"/>
-              </a:rPr>
-              <a:t> — Los huecos que se marcaron en rojo, </a:t>
-            </a:r>
-            <a:r>
-              <a:rPr sz="1500" b="1" i="0">
-                <a:solidFill>
-                  <a:srgbClr val="333333"/>
-                </a:solidFill>
-                <a:latin typeface="Calibri"/>
-              </a:rPr>
-              <a:t>quién tomó cada uno</a:t>
-            </a:r>
-            <a:r>
-              <a:rPr sz="1500" b="0" i="0">
-                <a:solidFill>
-                  <a:srgbClr val="333333"/>
-                </a:solidFill>
-                <a:latin typeface="Calibri"/>
-              </a:rPr>
-              <a:t> y qué se escribió. Incluido el </a:t>
-            </a:r>
-            <a:r>
-              <a:rPr sz="1500" b="1" i="0">
-                <a:solidFill>
-                  <a:srgbClr val="333333"/>
-                </a:solidFill>
-                <a:latin typeface="Calibri"/>
-              </a:rPr>
-              <a:t>resumen</a:t>
-            </a:r>
-            <a:r>
-              <a:rPr sz="1500" b="0" i="0">
-                <a:solidFill>
-                  <a:srgbClr val="333333"/>
-                </a:solidFill>
-                <a:latin typeface="Calibri"/>
-              </a:rPr>
-              <a:t>, que es lo único nuevo.</a:t>
-            </a:r>
-          </a:p>
-        </p:txBody>
-      </p:sp>
-      <p:sp>
-        <p:nvSpPr>
-          <p:cNvPr id="14" name="Rounded Rectangle 13"/>
-          <p:cNvSpPr/>
-          <p:nvPr/>
-        </p:nvSpPr>
-        <p:spPr>
-          <a:xfrm>
-            <a:off x="457200" y="2825496"/>
-            <a:ext cx="11277295" cy="566928"/>
-          </a:xfrm>
-          <a:prstGeom prst="roundRect">
-            <a:avLst>
-              <a:gd name="adj" fmla="val 12000"/>
-            </a:avLst>
-          </a:prstGeom>
-          <a:solidFill>
-            <a:srgbClr val="F2F2F2"/>
-          </a:solidFill>
-          <a:ln>
-            <a:noFill/>
-          </a:ln>
-        </p:spPr>
-        <p:style>
-          <a:lnRef idx="1">
-            <a:schemeClr val="accent1"/>
-          </a:lnRef>
-          <a:fillRef idx="3">
-            <a:schemeClr val="accent1"/>
-          </a:fillRef>
-          <a:effectRef idx="2">
-            <a:schemeClr val="accent1"/>
-          </a:effectRef>
-          <a:fontRef idx="minor">
-            <a:schemeClr val="lt1"/>
-          </a:fontRef>
-        </p:style>
-        <p:txBody>
-          <a:bodyPr rtlCol="0" anchor="ctr"/>
-          <a:lstStyle/>
-          <a:p>
-            <a:pPr algn="ctr"/>
-          </a:p>
-        </p:txBody>
-      </p:sp>
-      <p:sp>
-        <p:nvSpPr>
-          <p:cNvPr id="15" name="Rectangle 14"/>
-          <p:cNvSpPr/>
-          <p:nvPr/>
-        </p:nvSpPr>
-        <p:spPr>
-          <a:xfrm>
-            <a:off x="640080" y="2971800"/>
-            <a:ext cx="274320" cy="274320"/>
-          </a:xfrm>
-          <a:prstGeom prst="rect">
-            <a:avLst/>
-          </a:prstGeom>
-          <a:solidFill>
-            <a:srgbClr val="FFFFFF"/>
-          </a:solidFill>
-          <a:ln>
-            <a:solidFill>
-              <a:srgbClr val="333333"/>
-            </a:solidFill>
-          </a:ln>
-        </p:spPr>
-        <p:style>
-          <a:lnRef idx="1">
-            <a:schemeClr val="accent1"/>
-          </a:lnRef>
-          <a:fillRef idx="3">
-            <a:schemeClr val="accent1"/>
-          </a:fillRef>
-          <a:effectRef idx="2">
-            <a:schemeClr val="accent1"/>
-          </a:effectRef>
-          <a:fontRef idx="minor">
-            <a:schemeClr val="lt1"/>
-          </a:fontRef>
-        </p:style>
-        <p:txBody>
-          <a:bodyPr rtlCol="0" anchor="ctr"/>
-          <a:lstStyle/>
-          <a:p>
-            <a:pPr algn="ctr"/>
-          </a:p>
-        </p:txBody>
-      </p:sp>
-      <p:sp>
-        <p:nvSpPr>
-          <p:cNvPr id="16" name="Rectangle 15"/>
-          <p:cNvSpPr/>
-          <p:nvPr/>
-        </p:nvSpPr>
-        <p:spPr>
-          <a:xfrm>
-            <a:off x="640080" y="2971800"/>
-            <a:ext cx="73152" cy="274320"/>
-          </a:xfrm>
-          <a:prstGeom prst="rect">
-            <a:avLst/>
-          </a:prstGeom>
-          <a:solidFill>
-            <a:srgbClr val="269CCB"/>
-          </a:solidFill>
-          <a:ln>
-            <a:noFill/>
-          </a:ln>
-        </p:spPr>
-        <p:style>
-          <a:lnRef idx="1">
-            <a:schemeClr val="accent1"/>
-          </a:lnRef>
-          <a:fillRef idx="3">
-            <a:schemeClr val="accent1"/>
-          </a:fillRef>
-          <a:effectRef idx="2">
-            <a:schemeClr val="accent1"/>
-          </a:effectRef>
-          <a:fontRef idx="minor">
-            <a:schemeClr val="lt1"/>
-          </a:fontRef>
-        </p:style>
-        <p:txBody>
-          <a:bodyPr rtlCol="0" anchor="ctr"/>
-          <a:lstStyle/>
-          <a:p>
-            <a:pPr algn="ctr"/>
-          </a:p>
-        </p:txBody>
-      </p:sp>
-      <p:sp>
-        <p:nvSpPr>
-          <p:cNvPr id="17" name="TextBox 16"/>
-          <p:cNvSpPr txBox="1"/>
-          <p:nvPr/>
-        </p:nvSpPr>
-        <p:spPr>
-          <a:xfrm>
-            <a:off x="1097280" y="2916936"/>
-            <a:ext cx="10362895" cy="402336"/>
-          </a:xfrm>
-          <a:prstGeom prst="rect">
-            <a:avLst/>
-          </a:prstGeom>
-          <a:noFill/>
-        </p:spPr>
-        <p:txBody>
-          <a:bodyPr wrap="square" anchor="ctr"/>
-          <a:lstStyle/>
-          <a:p>
-            <a:r>
-              <a:rPr sz="1500" b="1" i="0">
-                <a:solidFill>
-                  <a:srgbClr val="333333"/>
-                </a:solidFill>
-                <a:latin typeface="Calibri"/>
-              </a:rPr>
-              <a:t>LA DECLARACIÓN DEL USO DE IA</a:t>
-            </a:r>
-            <a:r>
-              <a:rPr sz="1500" b="0" i="0">
-                <a:solidFill>
-                  <a:srgbClr val="333333"/>
-                </a:solidFill>
-                <a:latin typeface="Calibri"/>
-              </a:rPr>
-              <a:t> — Qué se le pidió al asistente, </a:t>
-            </a:r>
-            <a:r>
-              <a:rPr sz="1500" b="1" i="0">
-                <a:solidFill>
-                  <a:srgbClr val="333333"/>
-                </a:solidFill>
-                <a:latin typeface="Calibri"/>
-              </a:rPr>
-              <a:t>qué se corrigió a mano</a:t>
-            </a:r>
-            <a:r>
-              <a:rPr sz="1500" b="0" i="0">
-                <a:solidFill>
-                  <a:srgbClr val="333333"/>
-                </a:solidFill>
-                <a:latin typeface="Calibri"/>
-              </a:rPr>
-              <a:t> y </a:t>
-            </a:r>
-            <a:r>
-              <a:rPr sz="1500" b="1" i="0">
-                <a:solidFill>
-                  <a:srgbClr val="333333"/>
-                </a:solidFill>
-                <a:latin typeface="Calibri"/>
-              </a:rPr>
-              <a:t>qué no se le entregó</a:t>
-            </a:r>
-            <a:r>
-              <a:rPr sz="1500" b="0" i="0">
-                <a:solidFill>
-                  <a:srgbClr val="333333"/>
-                </a:solidFill>
-                <a:latin typeface="Calibri"/>
-              </a:rPr>
-              <a:t>. Si no se usó, se dice que no se usó.</a:t>
-            </a:r>
-          </a:p>
-        </p:txBody>
-      </p:sp>
-      <p:sp>
-        <p:nvSpPr>
-          <p:cNvPr id="18" name="Rounded Rectangle 17"/>
-          <p:cNvSpPr/>
-          <p:nvPr/>
-        </p:nvSpPr>
-        <p:spPr>
-          <a:xfrm>
-            <a:off x="457200" y="3502152"/>
-            <a:ext cx="11277295" cy="566928"/>
-          </a:xfrm>
-          <a:prstGeom prst="roundRect">
-            <a:avLst>
-              <a:gd name="adj" fmla="val 12000"/>
-            </a:avLst>
-          </a:prstGeom>
-          <a:solidFill>
-            <a:srgbClr val="F2F2F2"/>
-          </a:solidFill>
-          <a:ln>
-            <a:noFill/>
-          </a:ln>
-        </p:spPr>
-        <p:style>
-          <a:lnRef idx="1">
-            <a:schemeClr val="accent1"/>
-          </a:lnRef>
-          <a:fillRef idx="3">
-            <a:schemeClr val="accent1"/>
-          </a:fillRef>
-          <a:effectRef idx="2">
-            <a:schemeClr val="accent1"/>
-          </a:effectRef>
-          <a:fontRef idx="minor">
-            <a:schemeClr val="lt1"/>
-          </a:fontRef>
-        </p:style>
-        <p:txBody>
-          <a:bodyPr rtlCol="0" anchor="ctr"/>
-          <a:lstStyle/>
-          <a:p>
-            <a:pPr algn="ctr"/>
-          </a:p>
-        </p:txBody>
-      </p:sp>
-      <p:sp>
-        <p:nvSpPr>
-          <p:cNvPr id="19" name="Rectangle 18"/>
-          <p:cNvSpPr/>
-          <p:nvPr/>
-        </p:nvSpPr>
-        <p:spPr>
-          <a:xfrm>
-            <a:off x="640080" y="3648456"/>
-            <a:ext cx="274320" cy="274320"/>
-          </a:xfrm>
-          <a:prstGeom prst="rect">
-            <a:avLst/>
-          </a:prstGeom>
-          <a:solidFill>
-            <a:srgbClr val="FFFFFF"/>
-          </a:solidFill>
-          <a:ln>
-            <a:solidFill>
-              <a:srgbClr val="333333"/>
-            </a:solidFill>
-          </a:ln>
-        </p:spPr>
-        <p:style>
-          <a:lnRef idx="1">
-            <a:schemeClr val="accent1"/>
-          </a:lnRef>
-          <a:fillRef idx="3">
-            <a:schemeClr val="accent1"/>
-          </a:fillRef>
-          <a:effectRef idx="2">
-            <a:schemeClr val="accent1"/>
-          </a:effectRef>
-          <a:fontRef idx="minor">
-            <a:schemeClr val="lt1"/>
-          </a:fontRef>
-        </p:style>
-        <p:txBody>
-          <a:bodyPr rtlCol="0" anchor="ctr"/>
-          <a:lstStyle/>
-          <a:p>
-            <a:pPr algn="ctr"/>
-          </a:p>
-        </p:txBody>
-      </p:sp>
-      <p:sp>
-        <p:nvSpPr>
-          <p:cNvPr id="20" name="Rectangle 19"/>
-          <p:cNvSpPr/>
-          <p:nvPr/>
-        </p:nvSpPr>
-        <p:spPr>
-          <a:xfrm>
-            <a:off x="640080" y="3648456"/>
-            <a:ext cx="73152" cy="274320"/>
-          </a:xfrm>
-          <a:prstGeom prst="rect">
-            <a:avLst/>
-          </a:prstGeom>
-          <a:solidFill>
-            <a:srgbClr val="269CCB"/>
-          </a:solidFill>
-          <a:ln>
-            <a:noFill/>
-          </a:ln>
-        </p:spPr>
-        <p:style>
-          <a:lnRef idx="1">
-            <a:schemeClr val="accent1"/>
-          </a:lnRef>
-          <a:fillRef idx="3">
-            <a:schemeClr val="accent1"/>
-          </a:fillRef>
-          <a:effectRef idx="2">
-            <a:schemeClr val="accent1"/>
-          </a:effectRef>
-          <a:fontRef idx="minor">
-            <a:schemeClr val="lt1"/>
-          </a:fontRef>
-        </p:style>
-        <p:txBody>
-          <a:bodyPr rtlCol="0" anchor="ctr"/>
-          <a:lstStyle/>
-          <a:p>
-            <a:pPr algn="ctr"/>
-          </a:p>
-        </p:txBody>
-      </p:sp>
-      <p:sp>
-        <p:nvSpPr>
-          <p:cNvPr id="21" name="TextBox 20"/>
-          <p:cNvSpPr txBox="1"/>
-          <p:nvPr/>
-        </p:nvSpPr>
-        <p:spPr>
-          <a:xfrm>
-            <a:off x="1097280" y="3593592"/>
-            <a:ext cx="10362895" cy="402336"/>
-          </a:xfrm>
-          <a:prstGeom prst="rect">
-            <a:avLst/>
-          </a:prstGeom>
-          <a:noFill/>
-        </p:spPr>
-        <p:txBody>
-          <a:bodyPr wrap="square" anchor="ctr"/>
-          <a:lstStyle/>
-          <a:p>
-            <a:r>
-              <a:rPr sz="1500" b="1" i="0">
-                <a:solidFill>
-                  <a:srgbClr val="333333"/>
-                </a:solidFill>
-                <a:latin typeface="Calibri"/>
-              </a:rPr>
-              <a:t>LA AUTOEVALUACIÓN INDIVIDUAL</a:t>
-            </a:r>
-            <a:r>
-              <a:rPr sz="1500" b="0" i="0">
-                <a:solidFill>
-                  <a:srgbClr val="333333"/>
-                </a:solidFill>
-                <a:latin typeface="Calibri"/>
-              </a:rPr>
-              <a:t> — Cuatro respuestas </a:t>
-            </a:r>
-            <a:r>
-              <a:rPr sz="1500" b="1" i="0">
-                <a:solidFill>
-                  <a:srgbClr val="333333"/>
-                </a:solidFill>
-                <a:latin typeface="Calibri"/>
-              </a:rPr>
-              <a:t>con evidencia</a:t>
-            </a:r>
-            <a:r>
-              <a:rPr sz="1500" b="0" i="0">
-                <a:solidFill>
-                  <a:srgbClr val="333333"/>
-                </a:solidFill>
-                <a:latin typeface="Calibri"/>
-              </a:rPr>
-              <a:t>: qué hice yo · qué aprendí a hacer que no sabía · en qué fallé · qué haría distinto. </a:t>
-            </a:r>
-            <a:r>
-              <a:rPr sz="1500" b="1" i="0">
-                <a:solidFill>
-                  <a:srgbClr val="333333"/>
-                </a:solidFill>
-                <a:latin typeface="Calibri"/>
-              </a:rPr>
-              <a:t>Solo para el docente.</a:t>
-            </a:r>
-          </a:p>
-        </p:txBody>
-      </p:sp>
-      <p:sp>
-        <p:nvSpPr>
-          <p:cNvPr id="22" name="Rounded Rectangle 21"/>
-          <p:cNvSpPr/>
-          <p:nvPr/>
-        </p:nvSpPr>
-        <p:spPr>
-          <a:xfrm>
-            <a:off x="457200" y="4178808"/>
-            <a:ext cx="11277295" cy="566928"/>
-          </a:xfrm>
-          <a:prstGeom prst="roundRect">
-            <a:avLst>
-              <a:gd name="adj" fmla="val 12000"/>
-            </a:avLst>
-          </a:prstGeom>
-          <a:solidFill>
-            <a:srgbClr val="F2F2F2"/>
-          </a:solidFill>
-          <a:ln>
-            <a:noFill/>
-          </a:ln>
-        </p:spPr>
-        <p:style>
-          <a:lnRef idx="1">
-            <a:schemeClr val="accent1"/>
-          </a:lnRef>
-          <a:fillRef idx="3">
-            <a:schemeClr val="accent1"/>
-          </a:fillRef>
-          <a:effectRef idx="2">
-            <a:schemeClr val="accent1"/>
-          </a:effectRef>
-          <a:fontRef idx="minor">
-            <a:schemeClr val="lt1"/>
-          </a:fontRef>
-        </p:style>
-        <p:txBody>
-          <a:bodyPr rtlCol="0" anchor="ctr"/>
-          <a:lstStyle/>
-          <a:p>
-            <a:pPr algn="ctr"/>
-          </a:p>
-        </p:txBody>
-      </p:sp>
-      <p:sp>
-        <p:nvSpPr>
-          <p:cNvPr id="23" name="Rectangle 22"/>
-          <p:cNvSpPr/>
-          <p:nvPr/>
-        </p:nvSpPr>
-        <p:spPr>
-          <a:xfrm>
-            <a:off x="640080" y="4325112"/>
-            <a:ext cx="274320" cy="274320"/>
-          </a:xfrm>
-          <a:prstGeom prst="rect">
-            <a:avLst/>
-          </a:prstGeom>
-          <a:solidFill>
-            <a:srgbClr val="FFFFFF"/>
-          </a:solidFill>
-          <a:ln>
-            <a:solidFill>
-              <a:srgbClr val="333333"/>
-            </a:solidFill>
-          </a:ln>
-        </p:spPr>
-        <p:style>
-          <a:lnRef idx="1">
-            <a:schemeClr val="accent1"/>
-          </a:lnRef>
-          <a:fillRef idx="3">
-            <a:schemeClr val="accent1"/>
-          </a:fillRef>
-          <a:effectRef idx="2">
-            <a:schemeClr val="accent1"/>
-          </a:effectRef>
-          <a:fontRef idx="minor">
-            <a:schemeClr val="lt1"/>
-          </a:fontRef>
-        </p:style>
-        <p:txBody>
-          <a:bodyPr rtlCol="0" anchor="ctr"/>
-          <a:lstStyle/>
-          <a:p>
-            <a:pPr algn="ctr"/>
-          </a:p>
-        </p:txBody>
-      </p:sp>
-      <p:sp>
-        <p:nvSpPr>
-          <p:cNvPr id="24" name="Rectangle 23"/>
-          <p:cNvSpPr/>
-          <p:nvPr/>
-        </p:nvSpPr>
-        <p:spPr>
-          <a:xfrm>
-            <a:off x="640080" y="4325112"/>
-            <a:ext cx="73152" cy="274320"/>
-          </a:xfrm>
-          <a:prstGeom prst="rect">
-            <a:avLst/>
-          </a:prstGeom>
-          <a:solidFill>
-            <a:srgbClr val="269CCB"/>
-          </a:solidFill>
-          <a:ln>
-            <a:noFill/>
-          </a:ln>
-        </p:spPr>
-        <p:style>
-          <a:lnRef idx="1">
-            <a:schemeClr val="accent1"/>
-          </a:lnRef>
-          <a:fillRef idx="3">
-            <a:schemeClr val="accent1"/>
-          </a:fillRef>
-          <a:effectRef idx="2">
-            <a:schemeClr val="accent1"/>
-          </a:effectRef>
-          <a:fontRef idx="minor">
-            <a:schemeClr val="lt1"/>
-          </a:fontRef>
-        </p:style>
-        <p:txBody>
-          <a:bodyPr rtlCol="0" anchor="ctr"/>
-          <a:lstStyle/>
-          <a:p>
-            <a:pPr algn="ctr"/>
-          </a:p>
-        </p:txBody>
-      </p:sp>
-      <p:sp>
-        <p:nvSpPr>
-          <p:cNvPr id="25" name="TextBox 24"/>
-          <p:cNvSpPr txBox="1"/>
-          <p:nvPr/>
-        </p:nvSpPr>
-        <p:spPr>
-          <a:xfrm>
-            <a:off x="1097280" y="4270248"/>
-            <a:ext cx="10362895" cy="402336"/>
-          </a:xfrm>
-          <a:prstGeom prst="rect">
-            <a:avLst/>
-          </a:prstGeom>
-          <a:noFill/>
-        </p:spPr>
-        <p:txBody>
-          <a:bodyPr wrap="square" anchor="ctr"/>
-          <a:lstStyle/>
-          <a:p>
-            <a:r>
-              <a:rPr sz="1500" b="1" i="0">
-                <a:solidFill>
-                  <a:srgbClr val="333333"/>
-                </a:solidFill>
-                <a:latin typeface="Calibri"/>
-              </a:rPr>
-              <a:t>LA COEVALUACIÓN DEL EQUIPO</a:t>
-            </a:r>
-            <a:r>
-              <a:rPr sz="1500" b="0" i="0">
-                <a:solidFill>
-                  <a:srgbClr val="333333"/>
-                </a:solidFill>
-                <a:latin typeface="Calibri"/>
-              </a:rPr>
-              <a:t> — Cumplimiento de acuerdos, aporte al proyecto y disposición para ayudar, con </a:t>
-            </a:r>
-            <a:r>
-              <a:rPr sz="1500" b="1" i="0">
-                <a:solidFill>
-                  <a:srgbClr val="333333"/>
-                </a:solidFill>
-                <a:latin typeface="Calibri"/>
-              </a:rPr>
-              <a:t>observaciones y no adjetivos</a:t>
-            </a:r>
-            <a:r>
-              <a:rPr sz="1500" b="0" i="0">
-                <a:solidFill>
-                  <a:srgbClr val="333333"/>
-                </a:solidFill>
-                <a:latin typeface="Calibri"/>
-              </a:rPr>
-              <a:t>.</a:t>
-            </a:r>
-          </a:p>
-        </p:txBody>
-      </p:sp>
-      <p:sp>
-        <p:nvSpPr>
-          <p:cNvPr id="26" name="TextBox 25"/>
           <p:cNvSpPr txBox="1"/>
           <p:nvPr/>
         </p:nvSpPr>
@@ -9928,7 +9194,7 @@
         <p:spPr>
           <a:xfrm>
             <a:off x="0" y="0"/>
-            <a:ext cx="12191695" cy="1170432"/>
+            <a:ext cx="12191695" cy="960120"/>
           </a:xfrm>
           <a:prstGeom prst="rect">
             <a:avLst/>
@@ -9970,7 +9236,7 @@
         </p:nvSpPr>
         <p:spPr>
           <a:xfrm>
-            <a:off x="0" y="1170432"/>
+            <a:off x="0" y="960120"/>
             <a:ext cx="12191695" cy="41148"/>
           </a:xfrm>
           <a:prstGeom prst="rect">
@@ -10014,7 +9280,7 @@
         <p:spPr>
           <a:xfrm>
             <a:off x="457200" y="164592"/>
-            <a:ext cx="11277295" cy="384048"/>
+            <a:ext cx="11277295" cy="502920"/>
           </a:xfrm>
           <a:prstGeom prst="rect">
             <a:avLst/>
@@ -10034,55 +9300,21 @@
                 </a:solidFill>
                 <a:latin typeface="Calibri"/>
               </a:rPr>
-              <a:t>Cómo se expone en 3 minutos</a:t>
-            </a:r>
-          </a:p>
-        </p:txBody>
-      </p:sp>
-      <p:sp>
-        <p:nvSpPr>
-          <p:cNvPr id="5" name="TextBox 4"/>
-          <p:cNvSpPr txBox="1"/>
-          <p:nvPr/>
-        </p:nvSpPr>
-        <p:spPr>
-          <a:xfrm>
-            <a:off x="457200" y="566928"/>
-            <a:ext cx="11277295" cy="411480"/>
-          </a:xfrm>
-          <a:prstGeom prst="rect">
-            <a:avLst/>
-          </a:prstGeom>
-          <a:noFill/>
-        </p:spPr>
-        <p:txBody>
-          <a:bodyPr wrap="square">
-            <a:spAutoFit/>
-          </a:bodyPr>
-          <a:lstStyle/>
-          <a:p>
-            <a:r>
-              <a:rPr sz="1400" b="0" i="0">
-                <a:solidFill>
-                  <a:srgbClr val="B8D8EE"/>
-                </a:solidFill>
-                <a:latin typeface="Calibri"/>
-              </a:rPr>
-              <a:t>Habla el vocero con la pantalla ya compartida · cronómetro en pantalla · se corta al llegar a cero</a:t>
-            </a:r>
-          </a:p>
-        </p:txBody>
-      </p:sp>
-      <p:sp>
-        <p:nvSpPr>
-          <p:cNvPr id="6" name="Rounded Rectangle 5"/>
+              <a:t>Guion de la exposicion, con tiempos</a:t>
+            </a:r>
+          </a:p>
+        </p:txBody>
+      </p:sp>
+      <p:sp>
+        <p:nvSpPr>
+          <p:cNvPr id="5" name="Rounded Rectangle 4"/>
           <p:cNvSpPr/>
           <p:nvPr/>
         </p:nvSpPr>
         <p:spPr>
           <a:xfrm>
-            <a:off x="457200" y="1659636"/>
-            <a:ext cx="11277295" cy="1051560"/>
+            <a:off x="457200" y="1261872"/>
+            <a:ext cx="11277295" cy="5093208"/>
           </a:xfrm>
           <a:prstGeom prst="roundRect">
             <a:avLst>
@@ -10090,7 +9322,7 @@
             </a:avLst>
           </a:prstGeom>
           <a:solidFill>
-            <a:srgbClr val="F2F2F2"/>
+            <a:srgbClr val="1E2A38"/>
           </a:solidFill>
           <a:ln>
             <a:noFill/>
@@ -10120,19 +9352,17 @@
       </p:sp>
       <p:sp>
         <p:nvSpPr>
-          <p:cNvPr id="7" name="Rounded Rectangle 6"/>
+          <p:cNvPr id="6" name="Rectangle 5"/>
           <p:cNvSpPr/>
           <p:nvPr/>
         </p:nvSpPr>
         <p:spPr>
           <a:xfrm>
-            <a:off x="594360" y="1965960"/>
-            <a:ext cx="438912" cy="438912"/>
-          </a:xfrm>
-          <a:prstGeom prst="roundRect">
-            <a:avLst>
-              <a:gd name="adj" fmla="val 12000"/>
-            </a:avLst>
+            <a:off x="457200" y="1261872"/>
+            <a:ext cx="11277295" cy="320040"/>
+          </a:xfrm>
+          <a:prstGeom prst="rect">
+            <a:avLst/>
           </a:prstGeom>
           <a:solidFill>
             <a:srgbClr val="095292"/>
@@ -10165,14 +9395,46 @@
       </p:sp>
       <p:sp>
         <p:nvSpPr>
+          <p:cNvPr id="7" name="TextBox 6"/>
+          <p:cNvSpPr txBox="1"/>
+          <p:nvPr/>
+        </p:nvSpPr>
+        <p:spPr>
+          <a:xfrm>
+            <a:off x="685800" y="1307592"/>
+            <a:ext cx="10820095" cy="256032"/>
+          </a:xfrm>
+          <a:prstGeom prst="rect">
+            <a:avLst/>
+          </a:prstGeom>
+          <a:noFill/>
+        </p:spPr>
+        <p:txBody>
+          <a:bodyPr wrap="square" anchor="ctr"/>
+          <a:lstStyle/>
+          <a:p>
+            <a:r>
+              <a:rPr sz="1000" b="1" i="0">
+                <a:solidFill>
+                  <a:srgbClr val="269CCB"/>
+                </a:solidFill>
+                <a:latin typeface="Calibri"/>
+              </a:rPr>
+              <a:t>● ● ●</a:t>
+            </a:r>
+          </a:p>
+        </p:txBody>
+      </p:sp>
+      <p:sp>
+        <p:nvSpPr>
           <p:cNvPr id="8" name="TextBox 7"/>
           <p:cNvSpPr txBox="1"/>
           <p:nvPr/>
         </p:nvSpPr>
         <p:spPr>
           <a:xfrm>
-            <a:off x="594360" y="1965960"/>
-            <a:ext cx="438912" cy="438912"/>
+            <a:off x="777240" y="1719072"/>
+            <a:ext cx="10637215" cy="4453128"/>
           </a:xfrm>
           <a:prstGeom prst="rect">
             <a:avLst/>
@@ -10180,18 +9442,152 @@
           <a:noFill/>
         </p:spPr>
         <p:txBody>
-          <a:bodyPr wrap="square" anchor="ctr"/>
-          <a:lstStyle/>
-          <a:p>
-            <a:pPr algn="ctr"/>
-            <a:r>
-              <a:rPr sz="1600" b="1" i="0">
+          <a:bodyPr wrap="square">
+            <a:spAutoFit/>
+          </a:bodyPr>
+          <a:lstStyle/>
+          <a:p>
+            <a:pPr>
+              <a:spcAft>
+                <a:spcPts val="400"/>
+              </a:spcAft>
+            </a:pPr>
+            <a:r>
+              <a:rPr sz="1400" b="0" i="0">
                 <a:solidFill>
                   <a:srgbClr val="FFFFFF"/>
                 </a:solidFill>
                 <a:latin typeface="Calibri"/>
               </a:rPr>
-              <a:t>1</a:t>
+              <a:t># Exposicion de hoy · lo que se califica es el reparto, no el total</a:t>
+            </a:r>
+          </a:p>
+          <a:p>
+            <a:pPr>
+              <a:spcAft>
+                <a:spcPts val="400"/>
+              </a:spcAft>
+            </a:pPr>
+            <a:r>
+              <a:rPr sz="1400" b="0" i="0">
+                <a:solidFill>
+                  <a:srgbClr val="FFFFFF"/>
+                </a:solidFill>
+                <a:latin typeface="Calibri"/>
+              </a:rPr>
+              <a:t/>
+            </a:r>
+          </a:p>
+          <a:p>
+            <a:pPr>
+              <a:spcAft>
+                <a:spcPts val="400"/>
+              </a:spcAft>
+            </a:pPr>
+            <a:r>
+              <a:rPr sz="1400" b="0" i="0">
+                <a:solidFill>
+                  <a:srgbClr val="FFFFFF"/>
+                </a:solidFill>
+                <a:latin typeface="Calibri"/>
+              </a:rPr>
+              <a:t>Imagen 1                           Una pantalla del prototipo funcionando.</a:t>
+            </a:r>
+          </a:p>
+          <a:p>
+            <a:pPr>
+              <a:spcAft>
+                <a:spcPts val="400"/>
+              </a:spcAft>
+            </a:pPr>
+            <a:r>
+              <a:rPr sz="1400" b="0" i="0">
+                <a:solidFill>
+                  <a:srgbClr val="FFFFFF"/>
+                </a:solidFill>
+                <a:latin typeface="Calibri"/>
+              </a:rPr>
+              <a:t>Imagen 2                           La matriz de impacto, o la diapositiva del p</a:t>
+            </a:r>
+          </a:p>
+          <a:p>
+            <a:pPr>
+              <a:spcAft>
+                <a:spcPts val="400"/>
+              </a:spcAft>
+            </a:pPr>
+            <a:r>
+              <a:rPr sz="1400" b="0" i="0">
+                <a:solidFill>
+                  <a:srgbClr val="FFFFFF"/>
+                </a:solidFill>
+                <a:latin typeface="Calibri"/>
+              </a:rPr>
+              <a:t>Cinco líneas                       Problema · decisión · un hallazgo · un númer</a:t>
+            </a:r>
+          </a:p>
+          <a:p>
+            <a:pPr>
+              <a:spcAft>
+                <a:spcPts val="400"/>
+              </a:spcAft>
+            </a:pPr>
+            <a:r>
+              <a:rPr sz="1400" b="0" i="0">
+                <a:solidFill>
+                  <a:srgbClr val="FFFFFF"/>
+                </a:solidFill>
+                <a:latin typeface="Calibri"/>
+              </a:rPr>
+              <a:t>Recorrido libre                    Cada estudiante comenta en la columna de otr</a:t>
+            </a:r>
+          </a:p>
+          <a:p>
+            <a:pPr>
+              <a:spcAft>
+                <a:spcPts val="400"/>
+              </a:spcAft>
+            </a:pPr>
+            <a:r>
+              <a:rPr sz="1400" b="0" i="0">
+                <a:solidFill>
+                  <a:srgbClr val="FFFFFF"/>
+                </a:solidFill>
+                <a:latin typeface="Calibri"/>
+              </a:rPr>
+              <a:t/>
+            </a:r>
+          </a:p>
+          <a:p>
+            <a:pPr>
+              <a:spcAft>
+                <a:spcPts val="400"/>
+              </a:spcAft>
+            </a:pPr>
+            <a:r>
+              <a:rPr sz="1400" b="0" i="0">
+                <a:solidFill>
+                  <a:srgbClr val="FFFFFF"/>
+                </a:solidFill>
+                <a:latin typeface="Calibri"/>
+              </a:rPr>
+              <a:t># El tramo marcado como obligatorio es el que el jurado califica:</a:t>
+            </a:r>
+          </a:p>
+          <a:p>
+            <a:pPr>
+              <a:spcAft>
+                <a:spcPts val="400"/>
+              </a:spcAft>
+            </a:pPr>
+            <a:r>
+              <a:rPr sz="1400" b="0" i="0">
+                <a:solidFill>
+                  <a:srgbClr val="FFFFFF"/>
+                </a:solidFill>
+                <a:latin typeface="Calibri"/>
+              </a:rPr>
+              <a:t># si el guion no esta cronometrado, es el que se queda sin tiempo.</a:t>
             </a:r>
           </a:p>
         </p:txBody>
@@ -10199,567 +9595,6 @@
       <p:sp>
         <p:nvSpPr>
           <p:cNvPr id="9" name="TextBox 8"/>
-          <p:cNvSpPr txBox="1"/>
-          <p:nvPr/>
-        </p:nvSpPr>
-        <p:spPr>
-          <a:xfrm>
-            <a:off x="1188720" y="1751076"/>
-            <a:ext cx="10271455" cy="886968"/>
-          </a:xfrm>
-          <a:prstGeom prst="rect">
-            <a:avLst/>
-          </a:prstGeom>
-          <a:noFill/>
-        </p:spPr>
-        <p:txBody>
-          <a:bodyPr wrap="square" anchor="ctr"/>
-          <a:lstStyle/>
-          <a:p>
-            <a:r>
-              <a:rPr sz="1500" b="1" i="0">
-                <a:solidFill>
-                  <a:srgbClr val="095292"/>
-                </a:solidFill>
-                <a:latin typeface="Calibri"/>
-              </a:rPr>
-              <a:t>Imagen 1</a:t>
-            </a:r>
-          </a:p>
-          <a:p>
-            <a:pPr>
-              <a:spcBef>
-                <a:spcPts val="200"/>
-              </a:spcBef>
-            </a:pPr>
-            <a:r>
-              <a:rPr sz="1300" b="0" i="0">
-                <a:solidFill>
-                  <a:srgbClr val="333333"/>
-                </a:solidFill>
-                <a:latin typeface="Calibri"/>
-              </a:rPr>
-              <a:t>Una pantalla del prototipo funcionando.</a:t>
-            </a:r>
-          </a:p>
-        </p:txBody>
-      </p:sp>
-      <p:sp>
-        <p:nvSpPr>
-          <p:cNvPr id="10" name="Rounded Rectangle 9"/>
-          <p:cNvSpPr/>
-          <p:nvPr/>
-        </p:nvSpPr>
-        <p:spPr>
-          <a:xfrm>
-            <a:off x="457200" y="2802636"/>
-            <a:ext cx="11277295" cy="1051560"/>
-          </a:xfrm>
-          <a:prstGeom prst="roundRect">
-            <a:avLst>
-              <a:gd name="adj" fmla="val 12000"/>
-            </a:avLst>
-          </a:prstGeom>
-          <a:solidFill>
-            <a:srgbClr val="E8F4FA"/>
-          </a:solidFill>
-          <a:ln>
-            <a:noFill/>
-          </a:ln>
-        </p:spPr>
-        <p:style>
-          <a:lnRef idx="1">
-            <a:schemeClr val="accent1"/>
-          </a:lnRef>
-          <a:fillRef idx="3">
-            <a:schemeClr val="accent1"/>
-          </a:fillRef>
-          <a:effectRef idx="2">
-            <a:schemeClr val="accent1"/>
-          </a:effectRef>
-          <a:fontRef idx="minor">
-            <a:schemeClr val="lt1"/>
-          </a:fontRef>
-        </p:style>
-        <p:txBody>
-          <a:bodyPr rtlCol="0" anchor="ctr"/>
-          <a:lstStyle/>
-          <a:p>
-            <a:pPr algn="ctr"/>
-          </a:p>
-        </p:txBody>
-      </p:sp>
-      <p:sp>
-        <p:nvSpPr>
-          <p:cNvPr id="11" name="Rounded Rectangle 10"/>
-          <p:cNvSpPr/>
-          <p:nvPr/>
-        </p:nvSpPr>
-        <p:spPr>
-          <a:xfrm>
-            <a:off x="594360" y="3108960"/>
-            <a:ext cx="438912" cy="438912"/>
-          </a:xfrm>
-          <a:prstGeom prst="roundRect">
-            <a:avLst>
-              <a:gd name="adj" fmla="val 12000"/>
-            </a:avLst>
-          </a:prstGeom>
-          <a:solidFill>
-            <a:srgbClr val="095292"/>
-          </a:solidFill>
-          <a:ln>
-            <a:noFill/>
-          </a:ln>
-        </p:spPr>
-        <p:style>
-          <a:lnRef idx="1">
-            <a:schemeClr val="accent1"/>
-          </a:lnRef>
-          <a:fillRef idx="3">
-            <a:schemeClr val="accent1"/>
-          </a:fillRef>
-          <a:effectRef idx="2">
-            <a:schemeClr val="accent1"/>
-          </a:effectRef>
-          <a:fontRef idx="minor">
-            <a:schemeClr val="lt1"/>
-          </a:fontRef>
-        </p:style>
-        <p:txBody>
-          <a:bodyPr rtlCol="0" anchor="ctr"/>
-          <a:lstStyle/>
-          <a:p>
-            <a:pPr algn="ctr"/>
-          </a:p>
-        </p:txBody>
-      </p:sp>
-      <p:sp>
-        <p:nvSpPr>
-          <p:cNvPr id="12" name="TextBox 11"/>
-          <p:cNvSpPr txBox="1"/>
-          <p:nvPr/>
-        </p:nvSpPr>
-        <p:spPr>
-          <a:xfrm>
-            <a:off x="594360" y="3108960"/>
-            <a:ext cx="438912" cy="438912"/>
-          </a:xfrm>
-          <a:prstGeom prst="rect">
-            <a:avLst/>
-          </a:prstGeom>
-          <a:noFill/>
-        </p:spPr>
-        <p:txBody>
-          <a:bodyPr wrap="square" anchor="ctr"/>
-          <a:lstStyle/>
-          <a:p>
-            <a:pPr algn="ctr"/>
-            <a:r>
-              <a:rPr sz="1600" b="1" i="0">
-                <a:solidFill>
-                  <a:srgbClr val="FFFFFF"/>
-                </a:solidFill>
-                <a:latin typeface="Calibri"/>
-              </a:rPr>
-              <a:t>2</a:t>
-            </a:r>
-          </a:p>
-        </p:txBody>
-      </p:sp>
-      <p:sp>
-        <p:nvSpPr>
-          <p:cNvPr id="13" name="TextBox 12"/>
-          <p:cNvSpPr txBox="1"/>
-          <p:nvPr/>
-        </p:nvSpPr>
-        <p:spPr>
-          <a:xfrm>
-            <a:off x="1188720" y="2894076"/>
-            <a:ext cx="10271455" cy="886968"/>
-          </a:xfrm>
-          <a:prstGeom prst="rect">
-            <a:avLst/>
-          </a:prstGeom>
-          <a:noFill/>
-        </p:spPr>
-        <p:txBody>
-          <a:bodyPr wrap="square" anchor="ctr"/>
-          <a:lstStyle/>
-          <a:p>
-            <a:r>
-              <a:rPr sz="1500" b="1" i="0">
-                <a:solidFill>
-                  <a:srgbClr val="095292"/>
-                </a:solidFill>
-                <a:latin typeface="Calibri"/>
-              </a:rPr>
-              <a:t>Imagen 2</a:t>
-            </a:r>
-          </a:p>
-          <a:p>
-            <a:pPr>
-              <a:spcBef>
-                <a:spcPts val="200"/>
-              </a:spcBef>
-            </a:pPr>
-            <a:r>
-              <a:rPr sz="1300" b="0" i="0">
-                <a:solidFill>
-                  <a:srgbClr val="333333"/>
-                </a:solidFill>
-                <a:latin typeface="Calibri"/>
-              </a:rPr>
-              <a:t>La matriz de impacto, o la diapositiva del problema con su cifra.</a:t>
-            </a:r>
-          </a:p>
-        </p:txBody>
-      </p:sp>
-      <p:sp>
-        <p:nvSpPr>
-          <p:cNvPr id="14" name="Rounded Rectangle 13"/>
-          <p:cNvSpPr/>
-          <p:nvPr/>
-        </p:nvSpPr>
-        <p:spPr>
-          <a:xfrm>
-            <a:off x="457200" y="3945636"/>
-            <a:ext cx="11277295" cy="1051560"/>
-          </a:xfrm>
-          <a:prstGeom prst="roundRect">
-            <a:avLst>
-              <a:gd name="adj" fmla="val 12000"/>
-            </a:avLst>
-          </a:prstGeom>
-          <a:solidFill>
-            <a:srgbClr val="F2F2F2"/>
-          </a:solidFill>
-          <a:ln>
-            <a:noFill/>
-          </a:ln>
-        </p:spPr>
-        <p:style>
-          <a:lnRef idx="1">
-            <a:schemeClr val="accent1"/>
-          </a:lnRef>
-          <a:fillRef idx="3">
-            <a:schemeClr val="accent1"/>
-          </a:fillRef>
-          <a:effectRef idx="2">
-            <a:schemeClr val="accent1"/>
-          </a:effectRef>
-          <a:fontRef idx="minor">
-            <a:schemeClr val="lt1"/>
-          </a:fontRef>
-        </p:style>
-        <p:txBody>
-          <a:bodyPr rtlCol="0" anchor="ctr"/>
-          <a:lstStyle/>
-          <a:p>
-            <a:pPr algn="ctr"/>
-          </a:p>
-        </p:txBody>
-      </p:sp>
-      <p:sp>
-        <p:nvSpPr>
-          <p:cNvPr id="15" name="Rounded Rectangle 14"/>
-          <p:cNvSpPr/>
-          <p:nvPr/>
-        </p:nvSpPr>
-        <p:spPr>
-          <a:xfrm>
-            <a:off x="594360" y="4251960"/>
-            <a:ext cx="438912" cy="438912"/>
-          </a:xfrm>
-          <a:prstGeom prst="roundRect">
-            <a:avLst>
-              <a:gd name="adj" fmla="val 12000"/>
-            </a:avLst>
-          </a:prstGeom>
-          <a:solidFill>
-            <a:srgbClr val="095292"/>
-          </a:solidFill>
-          <a:ln>
-            <a:noFill/>
-          </a:ln>
-        </p:spPr>
-        <p:style>
-          <a:lnRef idx="1">
-            <a:schemeClr val="accent1"/>
-          </a:lnRef>
-          <a:fillRef idx="3">
-            <a:schemeClr val="accent1"/>
-          </a:fillRef>
-          <a:effectRef idx="2">
-            <a:schemeClr val="accent1"/>
-          </a:effectRef>
-          <a:fontRef idx="minor">
-            <a:schemeClr val="lt1"/>
-          </a:fontRef>
-        </p:style>
-        <p:txBody>
-          <a:bodyPr rtlCol="0" anchor="ctr"/>
-          <a:lstStyle/>
-          <a:p>
-            <a:pPr algn="ctr"/>
-          </a:p>
-        </p:txBody>
-      </p:sp>
-      <p:sp>
-        <p:nvSpPr>
-          <p:cNvPr id="16" name="TextBox 15"/>
-          <p:cNvSpPr txBox="1"/>
-          <p:nvPr/>
-        </p:nvSpPr>
-        <p:spPr>
-          <a:xfrm>
-            <a:off x="594360" y="4251960"/>
-            <a:ext cx="438912" cy="438912"/>
-          </a:xfrm>
-          <a:prstGeom prst="rect">
-            <a:avLst/>
-          </a:prstGeom>
-          <a:noFill/>
-        </p:spPr>
-        <p:txBody>
-          <a:bodyPr wrap="square" anchor="ctr"/>
-          <a:lstStyle/>
-          <a:p>
-            <a:pPr algn="ctr"/>
-            <a:r>
-              <a:rPr sz="1600" b="1" i="0">
-                <a:solidFill>
-                  <a:srgbClr val="FFFFFF"/>
-                </a:solidFill>
-                <a:latin typeface="Calibri"/>
-              </a:rPr>
-              <a:t>3</a:t>
-            </a:r>
-          </a:p>
-        </p:txBody>
-      </p:sp>
-      <p:sp>
-        <p:nvSpPr>
-          <p:cNvPr id="17" name="TextBox 16"/>
-          <p:cNvSpPr txBox="1"/>
-          <p:nvPr/>
-        </p:nvSpPr>
-        <p:spPr>
-          <a:xfrm>
-            <a:off x="1188720" y="4037076"/>
-            <a:ext cx="10271455" cy="886968"/>
-          </a:xfrm>
-          <a:prstGeom prst="rect">
-            <a:avLst/>
-          </a:prstGeom>
-          <a:noFill/>
-        </p:spPr>
-        <p:txBody>
-          <a:bodyPr wrap="square" anchor="ctr"/>
-          <a:lstStyle/>
-          <a:p>
-            <a:r>
-              <a:rPr sz="1500" b="1" i="0">
-                <a:solidFill>
-                  <a:srgbClr val="095292"/>
-                </a:solidFill>
-                <a:latin typeface="Calibri"/>
-              </a:rPr>
-              <a:t>Cinco líneas</a:t>
-            </a:r>
-          </a:p>
-          <a:p>
-            <a:pPr>
-              <a:spcBef>
-                <a:spcPts val="200"/>
-              </a:spcBef>
-            </a:pPr>
-            <a:r>
-              <a:rPr sz="1300" b="0" i="0">
-                <a:solidFill>
-                  <a:srgbClr val="333333"/>
-                </a:solidFill>
-                <a:latin typeface="Calibri"/>
-              </a:rPr>
-              <a:t>Problema · decisión · un hallazgo · un número de impacto · siguiente paso.</a:t>
-            </a:r>
-          </a:p>
-        </p:txBody>
-      </p:sp>
-      <p:sp>
-        <p:nvSpPr>
-          <p:cNvPr id="18" name="Rounded Rectangle 17"/>
-          <p:cNvSpPr/>
-          <p:nvPr/>
-        </p:nvSpPr>
-        <p:spPr>
-          <a:xfrm>
-            <a:off x="457200" y="5088636"/>
-            <a:ext cx="11277295" cy="1051560"/>
-          </a:xfrm>
-          <a:prstGeom prst="roundRect">
-            <a:avLst>
-              <a:gd name="adj" fmla="val 12000"/>
-            </a:avLst>
-          </a:prstGeom>
-          <a:solidFill>
-            <a:srgbClr val="E8F4FA"/>
-          </a:solidFill>
-          <a:ln>
-            <a:noFill/>
-          </a:ln>
-        </p:spPr>
-        <p:style>
-          <a:lnRef idx="1">
-            <a:schemeClr val="accent1"/>
-          </a:lnRef>
-          <a:fillRef idx="3">
-            <a:schemeClr val="accent1"/>
-          </a:fillRef>
-          <a:effectRef idx="2">
-            <a:schemeClr val="accent1"/>
-          </a:effectRef>
-          <a:fontRef idx="minor">
-            <a:schemeClr val="lt1"/>
-          </a:fontRef>
-        </p:style>
-        <p:txBody>
-          <a:bodyPr rtlCol="0" anchor="ctr"/>
-          <a:lstStyle/>
-          <a:p>
-            <a:pPr algn="ctr"/>
-          </a:p>
-        </p:txBody>
-      </p:sp>
-      <p:sp>
-        <p:nvSpPr>
-          <p:cNvPr id="19" name="Rounded Rectangle 18"/>
-          <p:cNvSpPr/>
-          <p:nvPr/>
-        </p:nvSpPr>
-        <p:spPr>
-          <a:xfrm>
-            <a:off x="594360" y="5394960"/>
-            <a:ext cx="438912" cy="438912"/>
-          </a:xfrm>
-          <a:prstGeom prst="roundRect">
-            <a:avLst>
-              <a:gd name="adj" fmla="val 12000"/>
-            </a:avLst>
-          </a:prstGeom>
-          <a:solidFill>
-            <a:srgbClr val="095292"/>
-          </a:solidFill>
-          <a:ln>
-            <a:noFill/>
-          </a:ln>
-        </p:spPr>
-        <p:style>
-          <a:lnRef idx="1">
-            <a:schemeClr val="accent1"/>
-          </a:lnRef>
-          <a:fillRef idx="3">
-            <a:schemeClr val="accent1"/>
-          </a:fillRef>
-          <a:effectRef idx="2">
-            <a:schemeClr val="accent1"/>
-          </a:effectRef>
-          <a:fontRef idx="minor">
-            <a:schemeClr val="lt1"/>
-          </a:fontRef>
-        </p:style>
-        <p:txBody>
-          <a:bodyPr rtlCol="0" anchor="ctr"/>
-          <a:lstStyle/>
-          <a:p>
-            <a:pPr algn="ctr"/>
-          </a:p>
-        </p:txBody>
-      </p:sp>
-      <p:sp>
-        <p:nvSpPr>
-          <p:cNvPr id="20" name="TextBox 19"/>
-          <p:cNvSpPr txBox="1"/>
-          <p:nvPr/>
-        </p:nvSpPr>
-        <p:spPr>
-          <a:xfrm>
-            <a:off x="594360" y="5394960"/>
-            <a:ext cx="438912" cy="438912"/>
-          </a:xfrm>
-          <a:prstGeom prst="rect">
-            <a:avLst/>
-          </a:prstGeom>
-          <a:noFill/>
-        </p:spPr>
-        <p:txBody>
-          <a:bodyPr wrap="square" anchor="ctr"/>
-          <a:lstStyle/>
-          <a:p>
-            <a:pPr algn="ctr"/>
-            <a:r>
-              <a:rPr sz="1600" b="1" i="0">
-                <a:solidFill>
-                  <a:srgbClr val="FFFFFF"/>
-                </a:solidFill>
-                <a:latin typeface="Calibri"/>
-              </a:rPr>
-              <a:t>4</a:t>
-            </a:r>
-          </a:p>
-        </p:txBody>
-      </p:sp>
-      <p:sp>
-        <p:nvSpPr>
-          <p:cNvPr id="21" name="TextBox 20"/>
-          <p:cNvSpPr txBox="1"/>
-          <p:nvPr/>
-        </p:nvSpPr>
-        <p:spPr>
-          <a:xfrm>
-            <a:off x="1188720" y="5180076"/>
-            <a:ext cx="10271455" cy="886968"/>
-          </a:xfrm>
-          <a:prstGeom prst="rect">
-            <a:avLst/>
-          </a:prstGeom>
-          <a:noFill/>
-        </p:spPr>
-        <p:txBody>
-          <a:bodyPr wrap="square" anchor="ctr"/>
-          <a:lstStyle/>
-          <a:p>
-            <a:r>
-              <a:rPr sz="1500" b="1" i="0">
-                <a:solidFill>
-                  <a:srgbClr val="095292"/>
-                </a:solidFill>
-                <a:latin typeface="Calibri"/>
-              </a:rPr>
-              <a:t>Recorrido libre</a:t>
-            </a:r>
-          </a:p>
-          <a:p>
-            <a:pPr>
-              <a:spcBef>
-                <a:spcPts val="200"/>
-              </a:spcBef>
-            </a:pPr>
-            <a:r>
-              <a:rPr sz="1300" b="0" i="0">
-                <a:solidFill>
-                  <a:srgbClr val="333333"/>
-                </a:solidFill>
-                <a:latin typeface="Calibri"/>
-              </a:rPr>
-              <a:t>Cada estudiante comenta en la columna de otro equipo.</a:t>
-            </a:r>
-          </a:p>
-        </p:txBody>
-      </p:sp>
-      <p:sp>
-        <p:nvSpPr>
-          <p:cNvPr id="22" name="TextBox 21"/>
           <p:cNvSpPr txBox="1"/>
           <p:nvPr/>
         </p:nvSpPr>
@@ -10827,7 +9662,7 @@
         <p:spPr>
           <a:xfrm>
             <a:off x="0" y="0"/>
-            <a:ext cx="12191695" cy="960120"/>
+            <a:ext cx="12191695" cy="1170432"/>
           </a:xfrm>
           <a:prstGeom prst="rect">
             <a:avLst/>
@@ -10869,7 +9704,7 @@
         </p:nvSpPr>
         <p:spPr>
           <a:xfrm>
-            <a:off x="0" y="960120"/>
+            <a:off x="0" y="1170432"/>
             <a:ext cx="12191695" cy="41148"/>
           </a:xfrm>
           <a:prstGeom prst="rect">
@@ -10913,7 +9748,7 @@
         <p:spPr>
           <a:xfrm>
             <a:off x="457200" y="164592"/>
-            <a:ext cx="11277295" cy="502920"/>
+            <a:ext cx="11277295" cy="384048"/>
           </a:xfrm>
           <a:prstGeom prst="rect">
             <a:avLst/>
@@ -10933,7 +9768,7 @@
                 </a:solidFill>
                 <a:latin typeface="Calibri"/>
               </a:rPr>
-              <a:t>Cierre del curso</a:t>
+              <a:t>Taller de hoy: Informe final y autoevaluación</a:t>
             </a:r>
           </a:p>
         </p:txBody>
@@ -10946,8 +9781,8 @@
         </p:nvSpPr>
         <p:spPr>
           <a:xfrm>
-            <a:off x="457200" y="1170432"/>
-            <a:ext cx="11277295" cy="5230368"/>
+            <a:off x="457200" y="566928"/>
+            <a:ext cx="11277295" cy="411480"/>
           </a:xfrm>
           <a:prstGeom prst="rect">
             <a:avLst/>
@@ -10960,191 +9795,1026 @@
           </a:bodyPr>
           <a:lstStyle/>
           <a:p>
-            <a:pPr>
-              <a:spcAft>
-                <a:spcPts val="800"/>
-              </a:spcAft>
-            </a:pPr>
-            <a:r>
-              <a:rPr sz="2000" b="0" i="0">
-                <a:solidFill>
-                  <a:srgbClr val="333333"/>
-                </a:solidFill>
-                <a:latin typeface="Calibri"/>
-              </a:rPr>
-              <a:t>–   </a:t>
-            </a:r>
-            <a:r>
-              <a:rPr sz="2000" b="1" i="0">
-                <a:solidFill>
-                  <a:srgbClr val="333333"/>
-                </a:solidFill>
-                <a:latin typeface="Calibri"/>
-              </a:rPr>
-              <a:t>Lo que queda entregado:</a:t>
-            </a:r>
-            <a:r>
-              <a:rPr sz="2000" b="0" i="0">
-                <a:solidFill>
-                  <a:srgbClr val="333333"/>
-                </a:solidFill>
-                <a:latin typeface="Calibri"/>
-              </a:rPr>
-              <a:t> el </a:t>
-            </a:r>
-            <a:r>
-              <a:rPr sz="2000" b="1" i="0">
-                <a:solidFill>
-                  <a:srgbClr val="333333"/>
-                </a:solidFill>
-                <a:latin typeface="Calibri"/>
-              </a:rPr>
-              <a:t>informe final</a:t>
-            </a:r>
-            <a:r>
-              <a:rPr sz="2000" b="0" i="0">
-                <a:solidFill>
-                  <a:srgbClr val="333333"/>
-                </a:solidFill>
-                <a:latin typeface="Calibri"/>
-              </a:rPr>
-              <a:t> con sus doce secciones (20 %), la </a:t>
-            </a:r>
-            <a:r>
-              <a:rPr sz="2000" b="1" i="0">
-                <a:solidFill>
-                  <a:srgbClr val="333333"/>
-                </a:solidFill>
-                <a:latin typeface="Calibri"/>
-              </a:rPr>
-              <a:t>exposición final</a:t>
-            </a:r>
-            <a:r>
-              <a:rPr sz="2000" b="0" i="0">
-                <a:solidFill>
-                  <a:srgbClr val="333333"/>
-                </a:solidFill>
-                <a:latin typeface="Calibri"/>
-              </a:rPr>
-              <a:t> de la Clase 15 (15 %), el prototipo probado con personas reales y la galería del curso.</a:t>
-            </a:r>
-          </a:p>
-          <a:p>
-            <a:pPr>
-              <a:spcAft>
-                <a:spcPts val="800"/>
-              </a:spcAft>
-            </a:pPr>
-            <a:r>
-              <a:rPr sz="2000" b="0" i="0">
-                <a:solidFill>
-                  <a:srgbClr val="333333"/>
-                </a:solidFill>
-                <a:latin typeface="Calibri"/>
-              </a:rPr>
-              <a:t>–   </a:t>
-            </a:r>
-            <a:r>
-              <a:rPr sz="2000" b="1" i="0">
-                <a:solidFill>
-                  <a:srgbClr val="333333"/>
-                </a:solidFill>
-                <a:latin typeface="Calibri"/>
-              </a:rPr>
-              <a:t>Autoevaluación:</a:t>
-            </a:r>
-            <a:r>
-              <a:rPr sz="2000" b="0" i="0">
-                <a:solidFill>
-                  <a:srgbClr val="333333"/>
-                </a:solidFill>
-                <a:latin typeface="Calibri"/>
-              </a:rPr>
-              <a:t> queda hecha, con evidencia y no con impresiones — junto con la coevaluación del equipo.</a:t>
-            </a:r>
-          </a:p>
-          <a:p>
-            <a:pPr>
-              <a:spcAft>
-                <a:spcPts val="800"/>
-              </a:spcAft>
-            </a:pPr>
-            <a:r>
-              <a:rPr sz="2000" b="0" i="0">
-                <a:solidFill>
-                  <a:srgbClr val="333333"/>
-                </a:solidFill>
-                <a:latin typeface="Calibri"/>
-              </a:rPr>
-              <a:t>–   </a:t>
-            </a:r>
-            <a:r>
-              <a:rPr sz="2000" b="1" i="0">
-                <a:solidFill>
-                  <a:srgbClr val="333333"/>
-                </a:solidFill>
-                <a:latin typeface="Calibri"/>
-              </a:rPr>
-              <a:t>Lo que se llevan es un método, no un tema: definir un problema con evidencia, revisar qué ya existe, decidir con criterios, probar con personas reales y mirar a quién afecta.</a:t>
-            </a:r>
-          </a:p>
-          <a:p>
-            <a:pPr>
-              <a:spcAft>
-                <a:spcPts val="800"/>
-              </a:spcAft>
-            </a:pPr>
-            <a:r>
-              <a:rPr sz="2000" b="0" i="0">
-                <a:solidFill>
-                  <a:srgbClr val="333333"/>
-                </a:solidFill>
-                <a:latin typeface="Calibri"/>
-              </a:rPr>
-              <a:t>–   </a:t>
-            </a:r>
-            <a:r>
-              <a:rPr sz="2000" b="1" i="0">
-                <a:solidFill>
-                  <a:srgbClr val="333333"/>
-                </a:solidFill>
-                <a:latin typeface="Calibri"/>
-              </a:rPr>
-              <a:t>Aviso:</a:t>
-            </a:r>
-            <a:r>
-              <a:rPr sz="2000" b="0" i="0">
-                <a:solidFill>
-                  <a:srgbClr val="333333"/>
-                </a:solidFill>
-                <a:latin typeface="Calibri"/>
-              </a:rPr>
-              <a:t> El informe y las capturas quedan en la carpeta del equipo: es un proyecto completo y documentado, hecho en primer semestre, y sirve para un portafolio. Y </a:t>
-            </a:r>
-            <a:r>
-              <a:rPr sz="2000" b="1" i="0">
-                <a:solidFill>
-                  <a:srgbClr val="333333"/>
-                </a:solidFill>
-                <a:latin typeface="Calibri"/>
-              </a:rPr>
-              <a:t>el siguiente paso de su proyecto está escrito en la sección 10</a:t>
-            </a:r>
-            <a:r>
-              <a:rPr sz="2000" b="0" i="0">
-                <a:solidFill>
-                  <a:srgbClr val="333333"/>
-                </a:solidFill>
-                <a:latin typeface="Calibri"/>
-              </a:rPr>
-              <a:t> — quien quiera continuarlo ya no tiene que decidir por dónde empezar.</a:t>
-            </a:r>
-          </a:p>
-        </p:txBody>
-      </p:sp>
-      <p:sp>
-        <p:nvSpPr>
-          <p:cNvPr id="6" name="TextBox 5"/>
+            <a:r>
+              <a:rPr sz="1400" b="0" i="0">
+                <a:solidFill>
+                  <a:srgbClr val="B8D8EE"/>
+                </a:solidFill>
+                <a:latin typeface="Calibri"/>
+              </a:rPr>
+              <a:t>24 min en equipos · 24 min: pegar, verificar, repartir huecos, resumen y entregar · informe final en PDF + galería en el muro + autoevaluación y coevaluación</a:t>
+            </a:r>
+          </a:p>
+        </p:txBody>
+      </p:sp>
+      <p:sp>
+        <p:nvSpPr>
+          <p:cNvPr id="6" name="Rounded Rectangle 5"/>
+          <p:cNvSpPr/>
+          <p:nvPr/>
+        </p:nvSpPr>
+        <p:spPr>
+          <a:xfrm>
+            <a:off x="457200" y="1472184"/>
+            <a:ext cx="11277295" cy="566928"/>
+          </a:xfrm>
+          <a:prstGeom prst="roundRect">
+            <a:avLst>
+              <a:gd name="adj" fmla="val 12000"/>
+            </a:avLst>
+          </a:prstGeom>
+          <a:solidFill>
+            <a:srgbClr val="F2F2F2"/>
+          </a:solidFill>
+          <a:ln>
+            <a:noFill/>
+          </a:ln>
+        </p:spPr>
+        <p:style>
+          <a:lnRef idx="1">
+            <a:schemeClr val="accent1"/>
+          </a:lnRef>
+          <a:fillRef idx="3">
+            <a:schemeClr val="accent1"/>
+          </a:fillRef>
+          <a:effectRef idx="2">
+            <a:schemeClr val="accent1"/>
+          </a:effectRef>
+          <a:fontRef idx="minor">
+            <a:schemeClr val="lt1"/>
+          </a:fontRef>
+        </p:style>
+        <p:txBody>
+          <a:bodyPr rtlCol="0" anchor="ctr"/>
+          <a:lstStyle/>
+          <a:p>
+            <a:pPr algn="ctr"/>
+          </a:p>
+        </p:txBody>
+      </p:sp>
+      <p:sp>
+        <p:nvSpPr>
+          <p:cNvPr id="7" name="Rectangle 6"/>
+          <p:cNvSpPr/>
+          <p:nvPr/>
+        </p:nvSpPr>
+        <p:spPr>
+          <a:xfrm>
+            <a:off x="640080" y="1618487"/>
+            <a:ext cx="274320" cy="274320"/>
+          </a:xfrm>
+          <a:prstGeom prst="rect">
+            <a:avLst/>
+          </a:prstGeom>
+          <a:solidFill>
+            <a:srgbClr val="FFFFFF"/>
+          </a:solidFill>
+          <a:ln>
+            <a:solidFill>
+              <a:srgbClr val="333333"/>
+            </a:solidFill>
+          </a:ln>
+        </p:spPr>
+        <p:style>
+          <a:lnRef idx="1">
+            <a:schemeClr val="accent1"/>
+          </a:lnRef>
+          <a:fillRef idx="3">
+            <a:schemeClr val="accent1"/>
+          </a:fillRef>
+          <a:effectRef idx="2">
+            <a:schemeClr val="accent1"/>
+          </a:effectRef>
+          <a:fontRef idx="minor">
+            <a:schemeClr val="lt1"/>
+          </a:fontRef>
+        </p:style>
+        <p:txBody>
+          <a:bodyPr rtlCol="0" anchor="ctr"/>
+          <a:lstStyle/>
+          <a:p>
+            <a:pPr algn="ctr"/>
+          </a:p>
+        </p:txBody>
+      </p:sp>
+      <p:sp>
+        <p:nvSpPr>
+          <p:cNvPr id="8" name="Rectangle 7"/>
+          <p:cNvSpPr/>
+          <p:nvPr/>
+        </p:nvSpPr>
+        <p:spPr>
+          <a:xfrm>
+            <a:off x="640080" y="1618487"/>
+            <a:ext cx="73152" cy="274320"/>
+          </a:xfrm>
+          <a:prstGeom prst="rect">
+            <a:avLst/>
+          </a:prstGeom>
+          <a:solidFill>
+            <a:srgbClr val="269CCB"/>
+          </a:solidFill>
+          <a:ln>
+            <a:noFill/>
+          </a:ln>
+        </p:spPr>
+        <p:style>
+          <a:lnRef idx="1">
+            <a:schemeClr val="accent1"/>
+          </a:lnRef>
+          <a:fillRef idx="3">
+            <a:schemeClr val="accent1"/>
+          </a:fillRef>
+          <a:effectRef idx="2">
+            <a:schemeClr val="accent1"/>
+          </a:effectRef>
+          <a:fontRef idx="minor">
+            <a:schemeClr val="lt1"/>
+          </a:fontRef>
+        </p:style>
+        <p:txBody>
+          <a:bodyPr rtlCol="0" anchor="ctr"/>
+          <a:lstStyle/>
+          <a:p>
+            <a:pPr algn="ctr"/>
+          </a:p>
+        </p:txBody>
+      </p:sp>
+      <p:sp>
+        <p:nvSpPr>
+          <p:cNvPr id="9" name="TextBox 8"/>
+          <p:cNvSpPr txBox="1"/>
+          <p:nvPr/>
+        </p:nvSpPr>
+        <p:spPr>
+          <a:xfrm>
+            <a:off x="1097280" y="1563624"/>
+            <a:ext cx="10362895" cy="402336"/>
+          </a:xfrm>
+          <a:prstGeom prst="rect">
+            <a:avLst/>
+          </a:prstGeom>
+          <a:noFill/>
+        </p:spPr>
+        <p:txBody>
+          <a:bodyPr wrap="square" anchor="ctr"/>
+          <a:lstStyle/>
+          <a:p>
+            <a:r>
+              <a:rPr sz="1500" b="1" i="0">
+                <a:solidFill>
+                  <a:srgbClr val="333333"/>
+                </a:solidFill>
+                <a:latin typeface="Calibri"/>
+              </a:rPr>
+              <a:t>LA LISTA DE VERIFICACIÓN DEL INFORME</a:t>
+            </a:r>
+            <a:r>
+              <a:rPr sz="1500" b="0" i="0">
+                <a:solidFill>
+                  <a:srgbClr val="333333"/>
+                </a:solidFill>
+                <a:latin typeface="Calibri"/>
+              </a:rPr>
+              <a:t> — Las </a:t>
+            </a:r>
+            <a:r>
+              <a:rPr sz="1500" b="1" i="0">
+                <a:solidFill>
+                  <a:srgbClr val="333333"/>
+                </a:solidFill>
+                <a:latin typeface="Calibri"/>
+              </a:rPr>
+              <a:t>doce secciones</a:t>
+            </a:r>
+            <a:r>
+              <a:rPr sz="1500" b="0" i="0">
+                <a:solidFill>
+                  <a:srgbClr val="333333"/>
+                </a:solidFill>
+                <a:latin typeface="Calibri"/>
+              </a:rPr>
+              <a:t> en un solo documento, cada una con lo que ya estaba escrito desde su sesión, y con el largo de la tabla.</a:t>
+            </a:r>
+          </a:p>
+        </p:txBody>
+      </p:sp>
+      <p:sp>
+        <p:nvSpPr>
+          <p:cNvPr id="10" name="Rounded Rectangle 9"/>
+          <p:cNvSpPr/>
+          <p:nvPr/>
+        </p:nvSpPr>
+        <p:spPr>
+          <a:xfrm>
+            <a:off x="457200" y="2148839"/>
+            <a:ext cx="11277295" cy="566928"/>
+          </a:xfrm>
+          <a:prstGeom prst="roundRect">
+            <a:avLst>
+              <a:gd name="adj" fmla="val 12000"/>
+            </a:avLst>
+          </a:prstGeom>
+          <a:solidFill>
+            <a:srgbClr val="F2F2F2"/>
+          </a:solidFill>
+          <a:ln>
+            <a:noFill/>
+          </a:ln>
+        </p:spPr>
+        <p:style>
+          <a:lnRef idx="1">
+            <a:schemeClr val="accent1"/>
+          </a:lnRef>
+          <a:fillRef idx="3">
+            <a:schemeClr val="accent1"/>
+          </a:fillRef>
+          <a:effectRef idx="2">
+            <a:schemeClr val="accent1"/>
+          </a:effectRef>
+          <a:fontRef idx="minor">
+            <a:schemeClr val="lt1"/>
+          </a:fontRef>
+        </p:style>
+        <p:txBody>
+          <a:bodyPr rtlCol="0" anchor="ctr"/>
+          <a:lstStyle/>
+          <a:p>
+            <a:pPr algn="ctr"/>
+          </a:p>
+        </p:txBody>
+      </p:sp>
+      <p:sp>
+        <p:nvSpPr>
+          <p:cNvPr id="11" name="Rectangle 10"/>
+          <p:cNvSpPr/>
+          <p:nvPr/>
+        </p:nvSpPr>
+        <p:spPr>
+          <a:xfrm>
+            <a:off x="640080" y="2295144"/>
+            <a:ext cx="274320" cy="274320"/>
+          </a:xfrm>
+          <a:prstGeom prst="rect">
+            <a:avLst/>
+          </a:prstGeom>
+          <a:solidFill>
+            <a:srgbClr val="FFFFFF"/>
+          </a:solidFill>
+          <a:ln>
+            <a:solidFill>
+              <a:srgbClr val="333333"/>
+            </a:solidFill>
+          </a:ln>
+        </p:spPr>
+        <p:style>
+          <a:lnRef idx="1">
+            <a:schemeClr val="accent1"/>
+          </a:lnRef>
+          <a:fillRef idx="3">
+            <a:schemeClr val="accent1"/>
+          </a:fillRef>
+          <a:effectRef idx="2">
+            <a:schemeClr val="accent1"/>
+          </a:effectRef>
+          <a:fontRef idx="minor">
+            <a:schemeClr val="lt1"/>
+          </a:fontRef>
+        </p:style>
+        <p:txBody>
+          <a:bodyPr rtlCol="0" anchor="ctr"/>
+          <a:lstStyle/>
+          <a:p>
+            <a:pPr algn="ctr"/>
+          </a:p>
+        </p:txBody>
+      </p:sp>
+      <p:sp>
+        <p:nvSpPr>
+          <p:cNvPr id="12" name="Rectangle 11"/>
+          <p:cNvSpPr/>
+          <p:nvPr/>
+        </p:nvSpPr>
+        <p:spPr>
+          <a:xfrm>
+            <a:off x="640080" y="2295144"/>
+            <a:ext cx="73152" cy="274320"/>
+          </a:xfrm>
+          <a:prstGeom prst="rect">
+            <a:avLst/>
+          </a:prstGeom>
+          <a:solidFill>
+            <a:srgbClr val="269CCB"/>
+          </a:solidFill>
+          <a:ln>
+            <a:noFill/>
+          </a:ln>
+        </p:spPr>
+        <p:style>
+          <a:lnRef idx="1">
+            <a:schemeClr val="accent1"/>
+          </a:lnRef>
+          <a:fillRef idx="3">
+            <a:schemeClr val="accent1"/>
+          </a:fillRef>
+          <a:effectRef idx="2">
+            <a:schemeClr val="accent1"/>
+          </a:effectRef>
+          <a:fontRef idx="minor">
+            <a:schemeClr val="lt1"/>
+          </a:fontRef>
+        </p:style>
+        <p:txBody>
+          <a:bodyPr rtlCol="0" anchor="ctr"/>
+          <a:lstStyle/>
+          <a:p>
+            <a:pPr algn="ctr"/>
+          </a:p>
+        </p:txBody>
+      </p:sp>
+      <p:sp>
+        <p:nvSpPr>
+          <p:cNvPr id="13" name="TextBox 12"/>
+          <p:cNvSpPr txBox="1"/>
+          <p:nvPr/>
+        </p:nvSpPr>
+        <p:spPr>
+          <a:xfrm>
+            <a:off x="1097280" y="2240279"/>
+            <a:ext cx="10362895" cy="402336"/>
+          </a:xfrm>
+          <a:prstGeom prst="rect">
+            <a:avLst/>
+          </a:prstGeom>
+          <a:noFill/>
+        </p:spPr>
+        <p:txBody>
+          <a:bodyPr wrap="square" anchor="ctr"/>
+          <a:lstStyle/>
+          <a:p>
+            <a:r>
+              <a:rPr sz="1500" b="1" i="0">
+                <a:solidFill>
+                  <a:srgbClr val="333333"/>
+                </a:solidFill>
+                <a:latin typeface="Calibri"/>
+              </a:rPr>
+              <a:t>LO QUE FALTABA Y SE COMPLETÓ HOY</a:t>
+            </a:r>
+            <a:r>
+              <a:rPr sz="1500" b="0" i="0">
+                <a:solidFill>
+                  <a:srgbClr val="333333"/>
+                </a:solidFill>
+                <a:latin typeface="Calibri"/>
+              </a:rPr>
+              <a:t> — Los huecos que se marcaron en rojo, </a:t>
+            </a:r>
+            <a:r>
+              <a:rPr sz="1500" b="1" i="0">
+                <a:solidFill>
+                  <a:srgbClr val="333333"/>
+                </a:solidFill>
+                <a:latin typeface="Calibri"/>
+              </a:rPr>
+              <a:t>quién tomó cada uno</a:t>
+            </a:r>
+            <a:r>
+              <a:rPr sz="1500" b="0" i="0">
+                <a:solidFill>
+                  <a:srgbClr val="333333"/>
+                </a:solidFill>
+                <a:latin typeface="Calibri"/>
+              </a:rPr>
+              <a:t> y qué se escribió. Incluido el </a:t>
+            </a:r>
+            <a:r>
+              <a:rPr sz="1500" b="1" i="0">
+                <a:solidFill>
+                  <a:srgbClr val="333333"/>
+                </a:solidFill>
+                <a:latin typeface="Calibri"/>
+              </a:rPr>
+              <a:t>resumen</a:t>
+            </a:r>
+            <a:r>
+              <a:rPr sz="1500" b="0" i="0">
+                <a:solidFill>
+                  <a:srgbClr val="333333"/>
+                </a:solidFill>
+                <a:latin typeface="Calibri"/>
+              </a:rPr>
+              <a:t>, que es lo único nuevo.</a:t>
+            </a:r>
+          </a:p>
+        </p:txBody>
+      </p:sp>
+      <p:sp>
+        <p:nvSpPr>
+          <p:cNvPr id="14" name="Rounded Rectangle 13"/>
+          <p:cNvSpPr/>
+          <p:nvPr/>
+        </p:nvSpPr>
+        <p:spPr>
+          <a:xfrm>
+            <a:off x="457200" y="2825496"/>
+            <a:ext cx="11277295" cy="566928"/>
+          </a:xfrm>
+          <a:prstGeom prst="roundRect">
+            <a:avLst>
+              <a:gd name="adj" fmla="val 12000"/>
+            </a:avLst>
+          </a:prstGeom>
+          <a:solidFill>
+            <a:srgbClr val="F2F2F2"/>
+          </a:solidFill>
+          <a:ln>
+            <a:noFill/>
+          </a:ln>
+        </p:spPr>
+        <p:style>
+          <a:lnRef idx="1">
+            <a:schemeClr val="accent1"/>
+          </a:lnRef>
+          <a:fillRef idx="3">
+            <a:schemeClr val="accent1"/>
+          </a:fillRef>
+          <a:effectRef idx="2">
+            <a:schemeClr val="accent1"/>
+          </a:effectRef>
+          <a:fontRef idx="minor">
+            <a:schemeClr val="lt1"/>
+          </a:fontRef>
+        </p:style>
+        <p:txBody>
+          <a:bodyPr rtlCol="0" anchor="ctr"/>
+          <a:lstStyle/>
+          <a:p>
+            <a:pPr algn="ctr"/>
+          </a:p>
+        </p:txBody>
+      </p:sp>
+      <p:sp>
+        <p:nvSpPr>
+          <p:cNvPr id="15" name="Rectangle 14"/>
+          <p:cNvSpPr/>
+          <p:nvPr/>
+        </p:nvSpPr>
+        <p:spPr>
+          <a:xfrm>
+            <a:off x="640080" y="2971800"/>
+            <a:ext cx="274320" cy="274320"/>
+          </a:xfrm>
+          <a:prstGeom prst="rect">
+            <a:avLst/>
+          </a:prstGeom>
+          <a:solidFill>
+            <a:srgbClr val="FFFFFF"/>
+          </a:solidFill>
+          <a:ln>
+            <a:solidFill>
+              <a:srgbClr val="333333"/>
+            </a:solidFill>
+          </a:ln>
+        </p:spPr>
+        <p:style>
+          <a:lnRef idx="1">
+            <a:schemeClr val="accent1"/>
+          </a:lnRef>
+          <a:fillRef idx="3">
+            <a:schemeClr val="accent1"/>
+          </a:fillRef>
+          <a:effectRef idx="2">
+            <a:schemeClr val="accent1"/>
+          </a:effectRef>
+          <a:fontRef idx="minor">
+            <a:schemeClr val="lt1"/>
+          </a:fontRef>
+        </p:style>
+        <p:txBody>
+          <a:bodyPr rtlCol="0" anchor="ctr"/>
+          <a:lstStyle/>
+          <a:p>
+            <a:pPr algn="ctr"/>
+          </a:p>
+        </p:txBody>
+      </p:sp>
+      <p:sp>
+        <p:nvSpPr>
+          <p:cNvPr id="16" name="Rectangle 15"/>
+          <p:cNvSpPr/>
+          <p:nvPr/>
+        </p:nvSpPr>
+        <p:spPr>
+          <a:xfrm>
+            <a:off x="640080" y="2971800"/>
+            <a:ext cx="73152" cy="274320"/>
+          </a:xfrm>
+          <a:prstGeom prst="rect">
+            <a:avLst/>
+          </a:prstGeom>
+          <a:solidFill>
+            <a:srgbClr val="269CCB"/>
+          </a:solidFill>
+          <a:ln>
+            <a:noFill/>
+          </a:ln>
+        </p:spPr>
+        <p:style>
+          <a:lnRef idx="1">
+            <a:schemeClr val="accent1"/>
+          </a:lnRef>
+          <a:fillRef idx="3">
+            <a:schemeClr val="accent1"/>
+          </a:fillRef>
+          <a:effectRef idx="2">
+            <a:schemeClr val="accent1"/>
+          </a:effectRef>
+          <a:fontRef idx="minor">
+            <a:schemeClr val="lt1"/>
+          </a:fontRef>
+        </p:style>
+        <p:txBody>
+          <a:bodyPr rtlCol="0" anchor="ctr"/>
+          <a:lstStyle/>
+          <a:p>
+            <a:pPr algn="ctr"/>
+          </a:p>
+        </p:txBody>
+      </p:sp>
+      <p:sp>
+        <p:nvSpPr>
+          <p:cNvPr id="17" name="TextBox 16"/>
+          <p:cNvSpPr txBox="1"/>
+          <p:nvPr/>
+        </p:nvSpPr>
+        <p:spPr>
+          <a:xfrm>
+            <a:off x="1097280" y="2916936"/>
+            <a:ext cx="10362895" cy="402336"/>
+          </a:xfrm>
+          <a:prstGeom prst="rect">
+            <a:avLst/>
+          </a:prstGeom>
+          <a:noFill/>
+        </p:spPr>
+        <p:txBody>
+          <a:bodyPr wrap="square" anchor="ctr"/>
+          <a:lstStyle/>
+          <a:p>
+            <a:r>
+              <a:rPr sz="1500" b="1" i="0">
+                <a:solidFill>
+                  <a:srgbClr val="333333"/>
+                </a:solidFill>
+                <a:latin typeface="Calibri"/>
+              </a:rPr>
+              <a:t>LA DECLARACIÓN DEL USO DE IA</a:t>
+            </a:r>
+            <a:r>
+              <a:rPr sz="1500" b="0" i="0">
+                <a:solidFill>
+                  <a:srgbClr val="333333"/>
+                </a:solidFill>
+                <a:latin typeface="Calibri"/>
+              </a:rPr>
+              <a:t> — Qué se le pidió al asistente, </a:t>
+            </a:r>
+            <a:r>
+              <a:rPr sz="1500" b="1" i="0">
+                <a:solidFill>
+                  <a:srgbClr val="333333"/>
+                </a:solidFill>
+                <a:latin typeface="Calibri"/>
+              </a:rPr>
+              <a:t>qué se corrigió a mano</a:t>
+            </a:r>
+            <a:r>
+              <a:rPr sz="1500" b="0" i="0">
+                <a:solidFill>
+                  <a:srgbClr val="333333"/>
+                </a:solidFill>
+                <a:latin typeface="Calibri"/>
+              </a:rPr>
+              <a:t> y </a:t>
+            </a:r>
+            <a:r>
+              <a:rPr sz="1500" b="1" i="0">
+                <a:solidFill>
+                  <a:srgbClr val="333333"/>
+                </a:solidFill>
+                <a:latin typeface="Calibri"/>
+              </a:rPr>
+              <a:t>qué no se le entregó</a:t>
+            </a:r>
+            <a:r>
+              <a:rPr sz="1500" b="0" i="0">
+                <a:solidFill>
+                  <a:srgbClr val="333333"/>
+                </a:solidFill>
+                <a:latin typeface="Calibri"/>
+              </a:rPr>
+              <a:t>. Si no se usó, se dice que no se usó.</a:t>
+            </a:r>
+          </a:p>
+        </p:txBody>
+      </p:sp>
+      <p:sp>
+        <p:nvSpPr>
+          <p:cNvPr id="18" name="Rounded Rectangle 17"/>
+          <p:cNvSpPr/>
+          <p:nvPr/>
+        </p:nvSpPr>
+        <p:spPr>
+          <a:xfrm>
+            <a:off x="457200" y="3502152"/>
+            <a:ext cx="11277295" cy="566928"/>
+          </a:xfrm>
+          <a:prstGeom prst="roundRect">
+            <a:avLst>
+              <a:gd name="adj" fmla="val 12000"/>
+            </a:avLst>
+          </a:prstGeom>
+          <a:solidFill>
+            <a:srgbClr val="F2F2F2"/>
+          </a:solidFill>
+          <a:ln>
+            <a:noFill/>
+          </a:ln>
+        </p:spPr>
+        <p:style>
+          <a:lnRef idx="1">
+            <a:schemeClr val="accent1"/>
+          </a:lnRef>
+          <a:fillRef idx="3">
+            <a:schemeClr val="accent1"/>
+          </a:fillRef>
+          <a:effectRef idx="2">
+            <a:schemeClr val="accent1"/>
+          </a:effectRef>
+          <a:fontRef idx="minor">
+            <a:schemeClr val="lt1"/>
+          </a:fontRef>
+        </p:style>
+        <p:txBody>
+          <a:bodyPr rtlCol="0" anchor="ctr"/>
+          <a:lstStyle/>
+          <a:p>
+            <a:pPr algn="ctr"/>
+          </a:p>
+        </p:txBody>
+      </p:sp>
+      <p:sp>
+        <p:nvSpPr>
+          <p:cNvPr id="19" name="Rectangle 18"/>
+          <p:cNvSpPr/>
+          <p:nvPr/>
+        </p:nvSpPr>
+        <p:spPr>
+          <a:xfrm>
+            <a:off x="640080" y="3648456"/>
+            <a:ext cx="274320" cy="274320"/>
+          </a:xfrm>
+          <a:prstGeom prst="rect">
+            <a:avLst/>
+          </a:prstGeom>
+          <a:solidFill>
+            <a:srgbClr val="FFFFFF"/>
+          </a:solidFill>
+          <a:ln>
+            <a:solidFill>
+              <a:srgbClr val="333333"/>
+            </a:solidFill>
+          </a:ln>
+        </p:spPr>
+        <p:style>
+          <a:lnRef idx="1">
+            <a:schemeClr val="accent1"/>
+          </a:lnRef>
+          <a:fillRef idx="3">
+            <a:schemeClr val="accent1"/>
+          </a:fillRef>
+          <a:effectRef idx="2">
+            <a:schemeClr val="accent1"/>
+          </a:effectRef>
+          <a:fontRef idx="minor">
+            <a:schemeClr val="lt1"/>
+          </a:fontRef>
+        </p:style>
+        <p:txBody>
+          <a:bodyPr rtlCol="0" anchor="ctr"/>
+          <a:lstStyle/>
+          <a:p>
+            <a:pPr algn="ctr"/>
+          </a:p>
+        </p:txBody>
+      </p:sp>
+      <p:sp>
+        <p:nvSpPr>
+          <p:cNvPr id="20" name="Rectangle 19"/>
+          <p:cNvSpPr/>
+          <p:nvPr/>
+        </p:nvSpPr>
+        <p:spPr>
+          <a:xfrm>
+            <a:off x="640080" y="3648456"/>
+            <a:ext cx="73152" cy="274320"/>
+          </a:xfrm>
+          <a:prstGeom prst="rect">
+            <a:avLst/>
+          </a:prstGeom>
+          <a:solidFill>
+            <a:srgbClr val="269CCB"/>
+          </a:solidFill>
+          <a:ln>
+            <a:noFill/>
+          </a:ln>
+        </p:spPr>
+        <p:style>
+          <a:lnRef idx="1">
+            <a:schemeClr val="accent1"/>
+          </a:lnRef>
+          <a:fillRef idx="3">
+            <a:schemeClr val="accent1"/>
+          </a:fillRef>
+          <a:effectRef idx="2">
+            <a:schemeClr val="accent1"/>
+          </a:effectRef>
+          <a:fontRef idx="minor">
+            <a:schemeClr val="lt1"/>
+          </a:fontRef>
+        </p:style>
+        <p:txBody>
+          <a:bodyPr rtlCol="0" anchor="ctr"/>
+          <a:lstStyle/>
+          <a:p>
+            <a:pPr algn="ctr"/>
+          </a:p>
+        </p:txBody>
+      </p:sp>
+      <p:sp>
+        <p:nvSpPr>
+          <p:cNvPr id="21" name="TextBox 20"/>
+          <p:cNvSpPr txBox="1"/>
+          <p:nvPr/>
+        </p:nvSpPr>
+        <p:spPr>
+          <a:xfrm>
+            <a:off x="1097280" y="3593592"/>
+            <a:ext cx="10362895" cy="402336"/>
+          </a:xfrm>
+          <a:prstGeom prst="rect">
+            <a:avLst/>
+          </a:prstGeom>
+          <a:noFill/>
+        </p:spPr>
+        <p:txBody>
+          <a:bodyPr wrap="square" anchor="ctr"/>
+          <a:lstStyle/>
+          <a:p>
+            <a:r>
+              <a:rPr sz="1500" b="1" i="0">
+                <a:solidFill>
+                  <a:srgbClr val="333333"/>
+                </a:solidFill>
+                <a:latin typeface="Calibri"/>
+              </a:rPr>
+              <a:t>LA AUTOEVALUACIÓN INDIVIDUAL</a:t>
+            </a:r>
+            <a:r>
+              <a:rPr sz="1500" b="0" i="0">
+                <a:solidFill>
+                  <a:srgbClr val="333333"/>
+                </a:solidFill>
+                <a:latin typeface="Calibri"/>
+              </a:rPr>
+              <a:t> — Cuatro respuestas </a:t>
+            </a:r>
+            <a:r>
+              <a:rPr sz="1500" b="1" i="0">
+                <a:solidFill>
+                  <a:srgbClr val="333333"/>
+                </a:solidFill>
+                <a:latin typeface="Calibri"/>
+              </a:rPr>
+              <a:t>con evidencia</a:t>
+            </a:r>
+            <a:r>
+              <a:rPr sz="1500" b="0" i="0">
+                <a:solidFill>
+                  <a:srgbClr val="333333"/>
+                </a:solidFill>
+                <a:latin typeface="Calibri"/>
+              </a:rPr>
+              <a:t>: qué hice yo · qué aprendí a hacer que no sabía · en qué fallé · qué haría distinto. </a:t>
+            </a:r>
+            <a:r>
+              <a:rPr sz="1500" b="1" i="0">
+                <a:solidFill>
+                  <a:srgbClr val="333333"/>
+                </a:solidFill>
+                <a:latin typeface="Calibri"/>
+              </a:rPr>
+              <a:t>Solo para el docente.</a:t>
+            </a:r>
+          </a:p>
+        </p:txBody>
+      </p:sp>
+      <p:sp>
+        <p:nvSpPr>
+          <p:cNvPr id="22" name="Rounded Rectangle 21"/>
+          <p:cNvSpPr/>
+          <p:nvPr/>
+        </p:nvSpPr>
+        <p:spPr>
+          <a:xfrm>
+            <a:off x="457200" y="4178808"/>
+            <a:ext cx="11277295" cy="566928"/>
+          </a:xfrm>
+          <a:prstGeom prst="roundRect">
+            <a:avLst>
+              <a:gd name="adj" fmla="val 12000"/>
+            </a:avLst>
+          </a:prstGeom>
+          <a:solidFill>
+            <a:srgbClr val="F2F2F2"/>
+          </a:solidFill>
+          <a:ln>
+            <a:noFill/>
+          </a:ln>
+        </p:spPr>
+        <p:style>
+          <a:lnRef idx="1">
+            <a:schemeClr val="accent1"/>
+          </a:lnRef>
+          <a:fillRef idx="3">
+            <a:schemeClr val="accent1"/>
+          </a:fillRef>
+          <a:effectRef idx="2">
+            <a:schemeClr val="accent1"/>
+          </a:effectRef>
+          <a:fontRef idx="minor">
+            <a:schemeClr val="lt1"/>
+          </a:fontRef>
+        </p:style>
+        <p:txBody>
+          <a:bodyPr rtlCol="0" anchor="ctr"/>
+          <a:lstStyle/>
+          <a:p>
+            <a:pPr algn="ctr"/>
+          </a:p>
+        </p:txBody>
+      </p:sp>
+      <p:sp>
+        <p:nvSpPr>
+          <p:cNvPr id="23" name="Rectangle 22"/>
+          <p:cNvSpPr/>
+          <p:nvPr/>
+        </p:nvSpPr>
+        <p:spPr>
+          <a:xfrm>
+            <a:off x="640080" y="4325112"/>
+            <a:ext cx="274320" cy="274320"/>
+          </a:xfrm>
+          <a:prstGeom prst="rect">
+            <a:avLst/>
+          </a:prstGeom>
+          <a:solidFill>
+            <a:srgbClr val="FFFFFF"/>
+          </a:solidFill>
+          <a:ln>
+            <a:solidFill>
+              <a:srgbClr val="333333"/>
+            </a:solidFill>
+          </a:ln>
+        </p:spPr>
+        <p:style>
+          <a:lnRef idx="1">
+            <a:schemeClr val="accent1"/>
+          </a:lnRef>
+          <a:fillRef idx="3">
+            <a:schemeClr val="accent1"/>
+          </a:fillRef>
+          <a:effectRef idx="2">
+            <a:schemeClr val="accent1"/>
+          </a:effectRef>
+          <a:fontRef idx="minor">
+            <a:schemeClr val="lt1"/>
+          </a:fontRef>
+        </p:style>
+        <p:txBody>
+          <a:bodyPr rtlCol="0" anchor="ctr"/>
+          <a:lstStyle/>
+          <a:p>
+            <a:pPr algn="ctr"/>
+          </a:p>
+        </p:txBody>
+      </p:sp>
+      <p:sp>
+        <p:nvSpPr>
+          <p:cNvPr id="24" name="Rectangle 23"/>
+          <p:cNvSpPr/>
+          <p:nvPr/>
+        </p:nvSpPr>
+        <p:spPr>
+          <a:xfrm>
+            <a:off x="640080" y="4325112"/>
+            <a:ext cx="73152" cy="274320"/>
+          </a:xfrm>
+          <a:prstGeom prst="rect">
+            <a:avLst/>
+          </a:prstGeom>
+          <a:solidFill>
+            <a:srgbClr val="269CCB"/>
+          </a:solidFill>
+          <a:ln>
+            <a:noFill/>
+          </a:ln>
+        </p:spPr>
+        <p:style>
+          <a:lnRef idx="1">
+            <a:schemeClr val="accent1"/>
+          </a:lnRef>
+          <a:fillRef idx="3">
+            <a:schemeClr val="accent1"/>
+          </a:fillRef>
+          <a:effectRef idx="2">
+            <a:schemeClr val="accent1"/>
+          </a:effectRef>
+          <a:fontRef idx="minor">
+            <a:schemeClr val="lt1"/>
+          </a:fontRef>
+        </p:style>
+        <p:txBody>
+          <a:bodyPr rtlCol="0" anchor="ctr"/>
+          <a:lstStyle/>
+          <a:p>
+            <a:pPr algn="ctr"/>
+          </a:p>
+        </p:txBody>
+      </p:sp>
+      <p:sp>
+        <p:nvSpPr>
+          <p:cNvPr id="25" name="TextBox 24"/>
+          <p:cNvSpPr txBox="1"/>
+          <p:nvPr/>
+        </p:nvSpPr>
+        <p:spPr>
+          <a:xfrm>
+            <a:off x="1097280" y="4270248"/>
+            <a:ext cx="10362895" cy="402336"/>
+          </a:xfrm>
+          <a:prstGeom prst="rect">
+            <a:avLst/>
+          </a:prstGeom>
+          <a:noFill/>
+        </p:spPr>
+        <p:txBody>
+          <a:bodyPr wrap="square" anchor="ctr"/>
+          <a:lstStyle/>
+          <a:p>
+            <a:r>
+              <a:rPr sz="1500" b="1" i="0">
+                <a:solidFill>
+                  <a:srgbClr val="333333"/>
+                </a:solidFill>
+                <a:latin typeface="Calibri"/>
+              </a:rPr>
+              <a:t>LA COEVALUACIÓN DEL EQUIPO</a:t>
+            </a:r>
+            <a:r>
+              <a:rPr sz="1500" b="0" i="0">
+                <a:solidFill>
+                  <a:srgbClr val="333333"/>
+                </a:solidFill>
+                <a:latin typeface="Calibri"/>
+              </a:rPr>
+              <a:t> — Cumplimiento de acuerdos, aporte al proyecto y disposición para ayudar, con </a:t>
+            </a:r>
+            <a:r>
+              <a:rPr sz="1500" b="1" i="0">
+                <a:solidFill>
+                  <a:srgbClr val="333333"/>
+                </a:solidFill>
+                <a:latin typeface="Calibri"/>
+              </a:rPr>
+              <a:t>observaciones y no adjetivos</a:t>
+            </a:r>
+            <a:r>
+              <a:rPr sz="1500" b="0" i="0">
+                <a:solidFill>
+                  <a:srgbClr val="333333"/>
+                </a:solidFill>
+                <a:latin typeface="Calibri"/>
+              </a:rPr>
+              <a:t>.</a:t>
+            </a:r>
+          </a:p>
+        </p:txBody>
+      </p:sp>
+      <p:sp>
+        <p:nvSpPr>
+          <p:cNvPr id="26" name="TextBox 25"/>
           <p:cNvSpPr txBox="1"/>
           <p:nvPr/>
         </p:nvSpPr>
@@ -11186,6 +10856,1290 @@
 </file>
 
 <file path=ppt/slides/slide25.xml><?xml version="1.0" encoding="utf-8"?>
+<p:sld xmlns:a="http://schemas.openxmlformats.org/drawingml/2006/main" xmlns:p="http://schemas.openxmlformats.org/presentationml/2006/main" xmlns:r="http://schemas.openxmlformats.org/officeDocument/2006/relationships">
+  <p:cSld>
+    <p:bg>
+      <p:bgPr>
+        <a:solidFill>
+          <a:srgbClr val="FFFFFF"/>
+        </a:solidFill>
+        <a:effectLst/>
+      </p:bgPr>
+    </p:bg>
+    <p:spTree>
+      <p:nvGrpSpPr>
+        <p:cNvPr id="1" name=""/>
+        <p:cNvGrpSpPr/>
+        <p:nvPr/>
+      </p:nvGrpSpPr>
+      <p:grpSpPr/>
+      <p:sp>
+        <p:nvSpPr>
+          <p:cNvPr id="2" name="Rectangle 1"/>
+          <p:cNvSpPr/>
+          <p:nvPr/>
+        </p:nvSpPr>
+        <p:spPr>
+          <a:xfrm>
+            <a:off x="0" y="0"/>
+            <a:ext cx="12191695" cy="1170432"/>
+          </a:xfrm>
+          <a:prstGeom prst="rect">
+            <a:avLst/>
+          </a:prstGeom>
+          <a:solidFill>
+            <a:srgbClr val="095292"/>
+          </a:solidFill>
+          <a:ln>
+            <a:noFill/>
+          </a:ln>
+        </p:spPr>
+        <p:style>
+          <a:lnRef idx="1">
+            <a:schemeClr val="accent1"/>
+          </a:lnRef>
+          <a:fillRef idx="3">
+            <a:schemeClr val="accent1"/>
+          </a:fillRef>
+          <a:effectRef idx="2">
+            <a:schemeClr val="accent1"/>
+          </a:effectRef>
+          <a:fontRef idx="minor">
+            <a:schemeClr val="lt1"/>
+          </a:fontRef>
+        </p:style>
+        <p:txBody>
+          <a:bodyPr rtlCol="0" anchor="ctr"/>
+          <a:lstStyle/>
+          <a:p>
+            <a:pPr algn="ctr"/>
+          </a:p>
+        </p:txBody>
+      </p:sp>
+      <p:sp>
+        <p:nvSpPr>
+          <p:cNvPr id="3" name="Rectangle 2"/>
+          <p:cNvSpPr/>
+          <p:nvPr/>
+        </p:nvSpPr>
+        <p:spPr>
+          <a:xfrm>
+            <a:off x="0" y="1170432"/>
+            <a:ext cx="12191695" cy="41148"/>
+          </a:xfrm>
+          <a:prstGeom prst="rect">
+            <a:avLst/>
+          </a:prstGeom>
+          <a:solidFill>
+            <a:srgbClr val="FFD000"/>
+          </a:solidFill>
+          <a:ln>
+            <a:noFill/>
+          </a:ln>
+        </p:spPr>
+        <p:style>
+          <a:lnRef idx="1">
+            <a:schemeClr val="accent1"/>
+          </a:lnRef>
+          <a:fillRef idx="3">
+            <a:schemeClr val="accent1"/>
+          </a:fillRef>
+          <a:effectRef idx="2">
+            <a:schemeClr val="accent1"/>
+          </a:effectRef>
+          <a:fontRef idx="minor">
+            <a:schemeClr val="lt1"/>
+          </a:fontRef>
+        </p:style>
+        <p:txBody>
+          <a:bodyPr rtlCol="0" anchor="ctr"/>
+          <a:lstStyle/>
+          <a:p>
+            <a:pPr algn="ctr"/>
+          </a:p>
+        </p:txBody>
+      </p:sp>
+      <p:sp>
+        <p:nvSpPr>
+          <p:cNvPr id="4" name="TextBox 3"/>
+          <p:cNvSpPr txBox="1"/>
+          <p:nvPr/>
+        </p:nvSpPr>
+        <p:spPr>
+          <a:xfrm>
+            <a:off x="457200" y="164592"/>
+            <a:ext cx="11277295" cy="384048"/>
+          </a:xfrm>
+          <a:prstGeom prst="rect">
+            <a:avLst/>
+          </a:prstGeom>
+          <a:noFill/>
+        </p:spPr>
+        <p:txBody>
+          <a:bodyPr wrap="square">
+            <a:spAutoFit/>
+          </a:bodyPr>
+          <a:lstStyle/>
+          <a:p>
+            <a:r>
+              <a:rPr sz="2600" b="1" i="0">
+                <a:solidFill>
+                  <a:srgbClr val="FFFFFF"/>
+                </a:solidFill>
+                <a:latin typeface="Calibri"/>
+              </a:rPr>
+              <a:t>Cómo se expone en 3 minutos</a:t>
+            </a:r>
+          </a:p>
+        </p:txBody>
+      </p:sp>
+      <p:sp>
+        <p:nvSpPr>
+          <p:cNvPr id="5" name="TextBox 4"/>
+          <p:cNvSpPr txBox="1"/>
+          <p:nvPr/>
+        </p:nvSpPr>
+        <p:spPr>
+          <a:xfrm>
+            <a:off x="457200" y="566928"/>
+            <a:ext cx="11277295" cy="411480"/>
+          </a:xfrm>
+          <a:prstGeom prst="rect">
+            <a:avLst/>
+          </a:prstGeom>
+          <a:noFill/>
+        </p:spPr>
+        <p:txBody>
+          <a:bodyPr wrap="square">
+            <a:spAutoFit/>
+          </a:bodyPr>
+          <a:lstStyle/>
+          <a:p>
+            <a:r>
+              <a:rPr sz="1400" b="0" i="0">
+                <a:solidFill>
+                  <a:srgbClr val="B8D8EE"/>
+                </a:solidFill>
+                <a:latin typeface="Calibri"/>
+              </a:rPr>
+              <a:t>Habla el vocero con la pantalla ya compartida · cronómetro en pantalla · se corta al llegar a cero</a:t>
+            </a:r>
+          </a:p>
+        </p:txBody>
+      </p:sp>
+      <p:sp>
+        <p:nvSpPr>
+          <p:cNvPr id="6" name="Rounded Rectangle 5"/>
+          <p:cNvSpPr/>
+          <p:nvPr/>
+        </p:nvSpPr>
+        <p:spPr>
+          <a:xfrm>
+            <a:off x="457200" y="1659636"/>
+            <a:ext cx="11277295" cy="1051560"/>
+          </a:xfrm>
+          <a:prstGeom prst="roundRect">
+            <a:avLst>
+              <a:gd name="adj" fmla="val 12000"/>
+            </a:avLst>
+          </a:prstGeom>
+          <a:solidFill>
+            <a:srgbClr val="F2F2F2"/>
+          </a:solidFill>
+          <a:ln>
+            <a:noFill/>
+          </a:ln>
+        </p:spPr>
+        <p:style>
+          <a:lnRef idx="1">
+            <a:schemeClr val="accent1"/>
+          </a:lnRef>
+          <a:fillRef idx="3">
+            <a:schemeClr val="accent1"/>
+          </a:fillRef>
+          <a:effectRef idx="2">
+            <a:schemeClr val="accent1"/>
+          </a:effectRef>
+          <a:fontRef idx="minor">
+            <a:schemeClr val="lt1"/>
+          </a:fontRef>
+        </p:style>
+        <p:txBody>
+          <a:bodyPr rtlCol="0" anchor="ctr"/>
+          <a:lstStyle/>
+          <a:p>
+            <a:pPr algn="ctr"/>
+          </a:p>
+        </p:txBody>
+      </p:sp>
+      <p:sp>
+        <p:nvSpPr>
+          <p:cNvPr id="7" name="Rounded Rectangle 6"/>
+          <p:cNvSpPr/>
+          <p:nvPr/>
+        </p:nvSpPr>
+        <p:spPr>
+          <a:xfrm>
+            <a:off x="594360" y="1965960"/>
+            <a:ext cx="438912" cy="438912"/>
+          </a:xfrm>
+          <a:prstGeom prst="roundRect">
+            <a:avLst>
+              <a:gd name="adj" fmla="val 12000"/>
+            </a:avLst>
+          </a:prstGeom>
+          <a:solidFill>
+            <a:srgbClr val="095292"/>
+          </a:solidFill>
+          <a:ln>
+            <a:noFill/>
+          </a:ln>
+        </p:spPr>
+        <p:style>
+          <a:lnRef idx="1">
+            <a:schemeClr val="accent1"/>
+          </a:lnRef>
+          <a:fillRef idx="3">
+            <a:schemeClr val="accent1"/>
+          </a:fillRef>
+          <a:effectRef idx="2">
+            <a:schemeClr val="accent1"/>
+          </a:effectRef>
+          <a:fontRef idx="minor">
+            <a:schemeClr val="lt1"/>
+          </a:fontRef>
+        </p:style>
+        <p:txBody>
+          <a:bodyPr rtlCol="0" anchor="ctr"/>
+          <a:lstStyle/>
+          <a:p>
+            <a:pPr algn="ctr"/>
+          </a:p>
+        </p:txBody>
+      </p:sp>
+      <p:sp>
+        <p:nvSpPr>
+          <p:cNvPr id="8" name="TextBox 7"/>
+          <p:cNvSpPr txBox="1"/>
+          <p:nvPr/>
+        </p:nvSpPr>
+        <p:spPr>
+          <a:xfrm>
+            <a:off x="594360" y="1965960"/>
+            <a:ext cx="438912" cy="438912"/>
+          </a:xfrm>
+          <a:prstGeom prst="rect">
+            <a:avLst/>
+          </a:prstGeom>
+          <a:noFill/>
+        </p:spPr>
+        <p:txBody>
+          <a:bodyPr wrap="square" anchor="ctr"/>
+          <a:lstStyle/>
+          <a:p>
+            <a:pPr algn="ctr"/>
+            <a:r>
+              <a:rPr sz="1600" b="1" i="0">
+                <a:solidFill>
+                  <a:srgbClr val="FFFFFF"/>
+                </a:solidFill>
+                <a:latin typeface="Calibri"/>
+              </a:rPr>
+              <a:t>1</a:t>
+            </a:r>
+          </a:p>
+        </p:txBody>
+      </p:sp>
+      <p:sp>
+        <p:nvSpPr>
+          <p:cNvPr id="9" name="TextBox 8"/>
+          <p:cNvSpPr txBox="1"/>
+          <p:nvPr/>
+        </p:nvSpPr>
+        <p:spPr>
+          <a:xfrm>
+            <a:off x="1188720" y="1751076"/>
+            <a:ext cx="10271455" cy="886968"/>
+          </a:xfrm>
+          <a:prstGeom prst="rect">
+            <a:avLst/>
+          </a:prstGeom>
+          <a:noFill/>
+        </p:spPr>
+        <p:txBody>
+          <a:bodyPr wrap="square" anchor="ctr"/>
+          <a:lstStyle/>
+          <a:p>
+            <a:r>
+              <a:rPr sz="1500" b="1" i="0">
+                <a:solidFill>
+                  <a:srgbClr val="095292"/>
+                </a:solidFill>
+                <a:latin typeface="Calibri"/>
+              </a:rPr>
+              <a:t>Imagen 1</a:t>
+            </a:r>
+          </a:p>
+          <a:p>
+            <a:pPr>
+              <a:spcBef>
+                <a:spcPts val="200"/>
+              </a:spcBef>
+            </a:pPr>
+            <a:r>
+              <a:rPr sz="1300" b="0" i="0">
+                <a:solidFill>
+                  <a:srgbClr val="333333"/>
+                </a:solidFill>
+                <a:latin typeface="Calibri"/>
+              </a:rPr>
+              <a:t>Una pantalla del prototipo funcionando.</a:t>
+            </a:r>
+          </a:p>
+        </p:txBody>
+      </p:sp>
+      <p:sp>
+        <p:nvSpPr>
+          <p:cNvPr id="10" name="Rounded Rectangle 9"/>
+          <p:cNvSpPr/>
+          <p:nvPr/>
+        </p:nvSpPr>
+        <p:spPr>
+          <a:xfrm>
+            <a:off x="457200" y="2802636"/>
+            <a:ext cx="11277295" cy="1051560"/>
+          </a:xfrm>
+          <a:prstGeom prst="roundRect">
+            <a:avLst>
+              <a:gd name="adj" fmla="val 12000"/>
+            </a:avLst>
+          </a:prstGeom>
+          <a:solidFill>
+            <a:srgbClr val="E8F4FA"/>
+          </a:solidFill>
+          <a:ln>
+            <a:noFill/>
+          </a:ln>
+        </p:spPr>
+        <p:style>
+          <a:lnRef idx="1">
+            <a:schemeClr val="accent1"/>
+          </a:lnRef>
+          <a:fillRef idx="3">
+            <a:schemeClr val="accent1"/>
+          </a:fillRef>
+          <a:effectRef idx="2">
+            <a:schemeClr val="accent1"/>
+          </a:effectRef>
+          <a:fontRef idx="minor">
+            <a:schemeClr val="lt1"/>
+          </a:fontRef>
+        </p:style>
+        <p:txBody>
+          <a:bodyPr rtlCol="0" anchor="ctr"/>
+          <a:lstStyle/>
+          <a:p>
+            <a:pPr algn="ctr"/>
+          </a:p>
+        </p:txBody>
+      </p:sp>
+      <p:sp>
+        <p:nvSpPr>
+          <p:cNvPr id="11" name="Rounded Rectangle 10"/>
+          <p:cNvSpPr/>
+          <p:nvPr/>
+        </p:nvSpPr>
+        <p:spPr>
+          <a:xfrm>
+            <a:off x="594360" y="3108960"/>
+            <a:ext cx="438912" cy="438912"/>
+          </a:xfrm>
+          <a:prstGeom prst="roundRect">
+            <a:avLst>
+              <a:gd name="adj" fmla="val 12000"/>
+            </a:avLst>
+          </a:prstGeom>
+          <a:solidFill>
+            <a:srgbClr val="095292"/>
+          </a:solidFill>
+          <a:ln>
+            <a:noFill/>
+          </a:ln>
+        </p:spPr>
+        <p:style>
+          <a:lnRef idx="1">
+            <a:schemeClr val="accent1"/>
+          </a:lnRef>
+          <a:fillRef idx="3">
+            <a:schemeClr val="accent1"/>
+          </a:fillRef>
+          <a:effectRef idx="2">
+            <a:schemeClr val="accent1"/>
+          </a:effectRef>
+          <a:fontRef idx="minor">
+            <a:schemeClr val="lt1"/>
+          </a:fontRef>
+        </p:style>
+        <p:txBody>
+          <a:bodyPr rtlCol="0" anchor="ctr"/>
+          <a:lstStyle/>
+          <a:p>
+            <a:pPr algn="ctr"/>
+          </a:p>
+        </p:txBody>
+      </p:sp>
+      <p:sp>
+        <p:nvSpPr>
+          <p:cNvPr id="12" name="TextBox 11"/>
+          <p:cNvSpPr txBox="1"/>
+          <p:nvPr/>
+        </p:nvSpPr>
+        <p:spPr>
+          <a:xfrm>
+            <a:off x="594360" y="3108960"/>
+            <a:ext cx="438912" cy="438912"/>
+          </a:xfrm>
+          <a:prstGeom prst="rect">
+            <a:avLst/>
+          </a:prstGeom>
+          <a:noFill/>
+        </p:spPr>
+        <p:txBody>
+          <a:bodyPr wrap="square" anchor="ctr"/>
+          <a:lstStyle/>
+          <a:p>
+            <a:pPr algn="ctr"/>
+            <a:r>
+              <a:rPr sz="1600" b="1" i="0">
+                <a:solidFill>
+                  <a:srgbClr val="FFFFFF"/>
+                </a:solidFill>
+                <a:latin typeface="Calibri"/>
+              </a:rPr>
+              <a:t>2</a:t>
+            </a:r>
+          </a:p>
+        </p:txBody>
+      </p:sp>
+      <p:sp>
+        <p:nvSpPr>
+          <p:cNvPr id="13" name="TextBox 12"/>
+          <p:cNvSpPr txBox="1"/>
+          <p:nvPr/>
+        </p:nvSpPr>
+        <p:spPr>
+          <a:xfrm>
+            <a:off x="1188720" y="2894076"/>
+            <a:ext cx="10271455" cy="886968"/>
+          </a:xfrm>
+          <a:prstGeom prst="rect">
+            <a:avLst/>
+          </a:prstGeom>
+          <a:noFill/>
+        </p:spPr>
+        <p:txBody>
+          <a:bodyPr wrap="square" anchor="ctr"/>
+          <a:lstStyle/>
+          <a:p>
+            <a:r>
+              <a:rPr sz="1500" b="1" i="0">
+                <a:solidFill>
+                  <a:srgbClr val="095292"/>
+                </a:solidFill>
+                <a:latin typeface="Calibri"/>
+              </a:rPr>
+              <a:t>Imagen 2</a:t>
+            </a:r>
+          </a:p>
+          <a:p>
+            <a:pPr>
+              <a:spcBef>
+                <a:spcPts val="200"/>
+              </a:spcBef>
+            </a:pPr>
+            <a:r>
+              <a:rPr sz="1300" b="0" i="0">
+                <a:solidFill>
+                  <a:srgbClr val="333333"/>
+                </a:solidFill>
+                <a:latin typeface="Calibri"/>
+              </a:rPr>
+              <a:t>La matriz de impacto, o la diapositiva del problema con su cifra.</a:t>
+            </a:r>
+          </a:p>
+        </p:txBody>
+      </p:sp>
+      <p:sp>
+        <p:nvSpPr>
+          <p:cNvPr id="14" name="Rounded Rectangle 13"/>
+          <p:cNvSpPr/>
+          <p:nvPr/>
+        </p:nvSpPr>
+        <p:spPr>
+          <a:xfrm>
+            <a:off x="457200" y="3945636"/>
+            <a:ext cx="11277295" cy="1051560"/>
+          </a:xfrm>
+          <a:prstGeom prst="roundRect">
+            <a:avLst>
+              <a:gd name="adj" fmla="val 12000"/>
+            </a:avLst>
+          </a:prstGeom>
+          <a:solidFill>
+            <a:srgbClr val="F2F2F2"/>
+          </a:solidFill>
+          <a:ln>
+            <a:noFill/>
+          </a:ln>
+        </p:spPr>
+        <p:style>
+          <a:lnRef idx="1">
+            <a:schemeClr val="accent1"/>
+          </a:lnRef>
+          <a:fillRef idx="3">
+            <a:schemeClr val="accent1"/>
+          </a:fillRef>
+          <a:effectRef idx="2">
+            <a:schemeClr val="accent1"/>
+          </a:effectRef>
+          <a:fontRef idx="minor">
+            <a:schemeClr val="lt1"/>
+          </a:fontRef>
+        </p:style>
+        <p:txBody>
+          <a:bodyPr rtlCol="0" anchor="ctr"/>
+          <a:lstStyle/>
+          <a:p>
+            <a:pPr algn="ctr"/>
+          </a:p>
+        </p:txBody>
+      </p:sp>
+      <p:sp>
+        <p:nvSpPr>
+          <p:cNvPr id="15" name="Rounded Rectangle 14"/>
+          <p:cNvSpPr/>
+          <p:nvPr/>
+        </p:nvSpPr>
+        <p:spPr>
+          <a:xfrm>
+            <a:off x="594360" y="4251960"/>
+            <a:ext cx="438912" cy="438912"/>
+          </a:xfrm>
+          <a:prstGeom prst="roundRect">
+            <a:avLst>
+              <a:gd name="adj" fmla="val 12000"/>
+            </a:avLst>
+          </a:prstGeom>
+          <a:solidFill>
+            <a:srgbClr val="095292"/>
+          </a:solidFill>
+          <a:ln>
+            <a:noFill/>
+          </a:ln>
+        </p:spPr>
+        <p:style>
+          <a:lnRef idx="1">
+            <a:schemeClr val="accent1"/>
+          </a:lnRef>
+          <a:fillRef idx="3">
+            <a:schemeClr val="accent1"/>
+          </a:fillRef>
+          <a:effectRef idx="2">
+            <a:schemeClr val="accent1"/>
+          </a:effectRef>
+          <a:fontRef idx="minor">
+            <a:schemeClr val="lt1"/>
+          </a:fontRef>
+        </p:style>
+        <p:txBody>
+          <a:bodyPr rtlCol="0" anchor="ctr"/>
+          <a:lstStyle/>
+          <a:p>
+            <a:pPr algn="ctr"/>
+          </a:p>
+        </p:txBody>
+      </p:sp>
+      <p:sp>
+        <p:nvSpPr>
+          <p:cNvPr id="16" name="TextBox 15"/>
+          <p:cNvSpPr txBox="1"/>
+          <p:nvPr/>
+        </p:nvSpPr>
+        <p:spPr>
+          <a:xfrm>
+            <a:off x="594360" y="4251960"/>
+            <a:ext cx="438912" cy="438912"/>
+          </a:xfrm>
+          <a:prstGeom prst="rect">
+            <a:avLst/>
+          </a:prstGeom>
+          <a:noFill/>
+        </p:spPr>
+        <p:txBody>
+          <a:bodyPr wrap="square" anchor="ctr"/>
+          <a:lstStyle/>
+          <a:p>
+            <a:pPr algn="ctr"/>
+            <a:r>
+              <a:rPr sz="1600" b="1" i="0">
+                <a:solidFill>
+                  <a:srgbClr val="FFFFFF"/>
+                </a:solidFill>
+                <a:latin typeface="Calibri"/>
+              </a:rPr>
+              <a:t>3</a:t>
+            </a:r>
+          </a:p>
+        </p:txBody>
+      </p:sp>
+      <p:sp>
+        <p:nvSpPr>
+          <p:cNvPr id="17" name="TextBox 16"/>
+          <p:cNvSpPr txBox="1"/>
+          <p:nvPr/>
+        </p:nvSpPr>
+        <p:spPr>
+          <a:xfrm>
+            <a:off x="1188720" y="4037076"/>
+            <a:ext cx="10271455" cy="886968"/>
+          </a:xfrm>
+          <a:prstGeom prst="rect">
+            <a:avLst/>
+          </a:prstGeom>
+          <a:noFill/>
+        </p:spPr>
+        <p:txBody>
+          <a:bodyPr wrap="square" anchor="ctr"/>
+          <a:lstStyle/>
+          <a:p>
+            <a:r>
+              <a:rPr sz="1500" b="1" i="0">
+                <a:solidFill>
+                  <a:srgbClr val="095292"/>
+                </a:solidFill>
+                <a:latin typeface="Calibri"/>
+              </a:rPr>
+              <a:t>Cinco líneas</a:t>
+            </a:r>
+          </a:p>
+          <a:p>
+            <a:pPr>
+              <a:spcBef>
+                <a:spcPts val="200"/>
+              </a:spcBef>
+            </a:pPr>
+            <a:r>
+              <a:rPr sz="1300" b="0" i="0">
+                <a:solidFill>
+                  <a:srgbClr val="333333"/>
+                </a:solidFill>
+                <a:latin typeface="Calibri"/>
+              </a:rPr>
+              <a:t>Problema · decisión · un hallazgo · un número de impacto · siguiente paso.</a:t>
+            </a:r>
+          </a:p>
+        </p:txBody>
+      </p:sp>
+      <p:sp>
+        <p:nvSpPr>
+          <p:cNvPr id="18" name="Rounded Rectangle 17"/>
+          <p:cNvSpPr/>
+          <p:nvPr/>
+        </p:nvSpPr>
+        <p:spPr>
+          <a:xfrm>
+            <a:off x="457200" y="5088636"/>
+            <a:ext cx="11277295" cy="1051560"/>
+          </a:xfrm>
+          <a:prstGeom prst="roundRect">
+            <a:avLst>
+              <a:gd name="adj" fmla="val 12000"/>
+            </a:avLst>
+          </a:prstGeom>
+          <a:solidFill>
+            <a:srgbClr val="E8F4FA"/>
+          </a:solidFill>
+          <a:ln>
+            <a:noFill/>
+          </a:ln>
+        </p:spPr>
+        <p:style>
+          <a:lnRef idx="1">
+            <a:schemeClr val="accent1"/>
+          </a:lnRef>
+          <a:fillRef idx="3">
+            <a:schemeClr val="accent1"/>
+          </a:fillRef>
+          <a:effectRef idx="2">
+            <a:schemeClr val="accent1"/>
+          </a:effectRef>
+          <a:fontRef idx="minor">
+            <a:schemeClr val="lt1"/>
+          </a:fontRef>
+        </p:style>
+        <p:txBody>
+          <a:bodyPr rtlCol="0" anchor="ctr"/>
+          <a:lstStyle/>
+          <a:p>
+            <a:pPr algn="ctr"/>
+          </a:p>
+        </p:txBody>
+      </p:sp>
+      <p:sp>
+        <p:nvSpPr>
+          <p:cNvPr id="19" name="Rounded Rectangle 18"/>
+          <p:cNvSpPr/>
+          <p:nvPr/>
+        </p:nvSpPr>
+        <p:spPr>
+          <a:xfrm>
+            <a:off x="594360" y="5394960"/>
+            <a:ext cx="438912" cy="438912"/>
+          </a:xfrm>
+          <a:prstGeom prst="roundRect">
+            <a:avLst>
+              <a:gd name="adj" fmla="val 12000"/>
+            </a:avLst>
+          </a:prstGeom>
+          <a:solidFill>
+            <a:srgbClr val="095292"/>
+          </a:solidFill>
+          <a:ln>
+            <a:noFill/>
+          </a:ln>
+        </p:spPr>
+        <p:style>
+          <a:lnRef idx="1">
+            <a:schemeClr val="accent1"/>
+          </a:lnRef>
+          <a:fillRef idx="3">
+            <a:schemeClr val="accent1"/>
+          </a:fillRef>
+          <a:effectRef idx="2">
+            <a:schemeClr val="accent1"/>
+          </a:effectRef>
+          <a:fontRef idx="minor">
+            <a:schemeClr val="lt1"/>
+          </a:fontRef>
+        </p:style>
+        <p:txBody>
+          <a:bodyPr rtlCol="0" anchor="ctr"/>
+          <a:lstStyle/>
+          <a:p>
+            <a:pPr algn="ctr"/>
+          </a:p>
+        </p:txBody>
+      </p:sp>
+      <p:sp>
+        <p:nvSpPr>
+          <p:cNvPr id="20" name="TextBox 19"/>
+          <p:cNvSpPr txBox="1"/>
+          <p:nvPr/>
+        </p:nvSpPr>
+        <p:spPr>
+          <a:xfrm>
+            <a:off x="594360" y="5394960"/>
+            <a:ext cx="438912" cy="438912"/>
+          </a:xfrm>
+          <a:prstGeom prst="rect">
+            <a:avLst/>
+          </a:prstGeom>
+          <a:noFill/>
+        </p:spPr>
+        <p:txBody>
+          <a:bodyPr wrap="square" anchor="ctr"/>
+          <a:lstStyle/>
+          <a:p>
+            <a:pPr algn="ctr"/>
+            <a:r>
+              <a:rPr sz="1600" b="1" i="0">
+                <a:solidFill>
+                  <a:srgbClr val="FFFFFF"/>
+                </a:solidFill>
+                <a:latin typeface="Calibri"/>
+              </a:rPr>
+              <a:t>4</a:t>
+            </a:r>
+          </a:p>
+        </p:txBody>
+      </p:sp>
+      <p:sp>
+        <p:nvSpPr>
+          <p:cNvPr id="21" name="TextBox 20"/>
+          <p:cNvSpPr txBox="1"/>
+          <p:nvPr/>
+        </p:nvSpPr>
+        <p:spPr>
+          <a:xfrm>
+            <a:off x="1188720" y="5180076"/>
+            <a:ext cx="10271455" cy="886968"/>
+          </a:xfrm>
+          <a:prstGeom prst="rect">
+            <a:avLst/>
+          </a:prstGeom>
+          <a:noFill/>
+        </p:spPr>
+        <p:txBody>
+          <a:bodyPr wrap="square" anchor="ctr"/>
+          <a:lstStyle/>
+          <a:p>
+            <a:r>
+              <a:rPr sz="1500" b="1" i="0">
+                <a:solidFill>
+                  <a:srgbClr val="095292"/>
+                </a:solidFill>
+                <a:latin typeface="Calibri"/>
+              </a:rPr>
+              <a:t>Recorrido libre</a:t>
+            </a:r>
+          </a:p>
+          <a:p>
+            <a:pPr>
+              <a:spcBef>
+                <a:spcPts val="200"/>
+              </a:spcBef>
+            </a:pPr>
+            <a:r>
+              <a:rPr sz="1300" b="0" i="0">
+                <a:solidFill>
+                  <a:srgbClr val="333333"/>
+                </a:solidFill>
+                <a:latin typeface="Calibri"/>
+              </a:rPr>
+              <a:t>Cada estudiante comenta en la columna de otro equipo.</a:t>
+            </a:r>
+          </a:p>
+        </p:txBody>
+      </p:sp>
+      <p:sp>
+        <p:nvSpPr>
+          <p:cNvPr id="22" name="TextBox 21"/>
+          <p:cNvSpPr txBox="1"/>
+          <p:nvPr/>
+        </p:nvSpPr>
+        <p:spPr>
+          <a:xfrm>
+            <a:off x="11185855" y="6473952"/>
+            <a:ext cx="640080" cy="274320"/>
+          </a:xfrm>
+          <a:prstGeom prst="rect">
+            <a:avLst/>
+          </a:prstGeom>
+          <a:noFill/>
+        </p:spPr>
+        <p:txBody>
+          <a:bodyPr wrap="square">
+            <a:spAutoFit/>
+          </a:bodyPr>
+          <a:lstStyle/>
+          <a:p>
+            <a:pPr algn="r"/>
+            <a:r>
+              <a:rPr sz="1100" b="0" i="0">
+                <a:solidFill>
+                  <a:srgbClr val="666666"/>
+                </a:solidFill>
+                <a:latin typeface="Calibri"/>
+              </a:rPr>
+              <a:t>25</a:t>
+            </a:r>
+          </a:p>
+        </p:txBody>
+      </p:sp>
+    </p:spTree>
+  </p:cSld>
+  <p:clrMapOvr>
+    <a:masterClrMapping/>
+  </p:clrMapOvr>
+</p:sld>
+</file>
+
+<file path=ppt/slides/slide26.xml><?xml version="1.0" encoding="utf-8"?>
+<p:sld xmlns:a="http://schemas.openxmlformats.org/drawingml/2006/main" xmlns:p="http://schemas.openxmlformats.org/presentationml/2006/main" xmlns:r="http://schemas.openxmlformats.org/officeDocument/2006/relationships">
+  <p:cSld>
+    <p:bg>
+      <p:bgPr>
+        <a:solidFill>
+          <a:srgbClr val="FFFFFF"/>
+        </a:solidFill>
+        <a:effectLst/>
+      </p:bgPr>
+    </p:bg>
+    <p:spTree>
+      <p:nvGrpSpPr>
+        <p:cNvPr id="1" name=""/>
+        <p:cNvGrpSpPr/>
+        <p:nvPr/>
+      </p:nvGrpSpPr>
+      <p:grpSpPr/>
+      <p:sp>
+        <p:nvSpPr>
+          <p:cNvPr id="2" name="Rectangle 1"/>
+          <p:cNvSpPr/>
+          <p:nvPr/>
+        </p:nvSpPr>
+        <p:spPr>
+          <a:xfrm>
+            <a:off x="0" y="0"/>
+            <a:ext cx="12191695" cy="960120"/>
+          </a:xfrm>
+          <a:prstGeom prst="rect">
+            <a:avLst/>
+          </a:prstGeom>
+          <a:solidFill>
+            <a:srgbClr val="095292"/>
+          </a:solidFill>
+          <a:ln>
+            <a:noFill/>
+          </a:ln>
+        </p:spPr>
+        <p:style>
+          <a:lnRef idx="1">
+            <a:schemeClr val="accent1"/>
+          </a:lnRef>
+          <a:fillRef idx="3">
+            <a:schemeClr val="accent1"/>
+          </a:fillRef>
+          <a:effectRef idx="2">
+            <a:schemeClr val="accent1"/>
+          </a:effectRef>
+          <a:fontRef idx="minor">
+            <a:schemeClr val="lt1"/>
+          </a:fontRef>
+        </p:style>
+        <p:txBody>
+          <a:bodyPr rtlCol="0" anchor="ctr"/>
+          <a:lstStyle/>
+          <a:p>
+            <a:pPr algn="ctr"/>
+          </a:p>
+        </p:txBody>
+      </p:sp>
+      <p:sp>
+        <p:nvSpPr>
+          <p:cNvPr id="3" name="Rectangle 2"/>
+          <p:cNvSpPr/>
+          <p:nvPr/>
+        </p:nvSpPr>
+        <p:spPr>
+          <a:xfrm>
+            <a:off x="0" y="960120"/>
+            <a:ext cx="12191695" cy="41148"/>
+          </a:xfrm>
+          <a:prstGeom prst="rect">
+            <a:avLst/>
+          </a:prstGeom>
+          <a:solidFill>
+            <a:srgbClr val="FFD000"/>
+          </a:solidFill>
+          <a:ln>
+            <a:noFill/>
+          </a:ln>
+        </p:spPr>
+        <p:style>
+          <a:lnRef idx="1">
+            <a:schemeClr val="accent1"/>
+          </a:lnRef>
+          <a:fillRef idx="3">
+            <a:schemeClr val="accent1"/>
+          </a:fillRef>
+          <a:effectRef idx="2">
+            <a:schemeClr val="accent1"/>
+          </a:effectRef>
+          <a:fontRef idx="minor">
+            <a:schemeClr val="lt1"/>
+          </a:fontRef>
+        </p:style>
+        <p:txBody>
+          <a:bodyPr rtlCol="0" anchor="ctr"/>
+          <a:lstStyle/>
+          <a:p>
+            <a:pPr algn="ctr"/>
+          </a:p>
+        </p:txBody>
+      </p:sp>
+      <p:sp>
+        <p:nvSpPr>
+          <p:cNvPr id="4" name="TextBox 3"/>
+          <p:cNvSpPr txBox="1"/>
+          <p:nvPr/>
+        </p:nvSpPr>
+        <p:spPr>
+          <a:xfrm>
+            <a:off x="457200" y="164592"/>
+            <a:ext cx="11277295" cy="502920"/>
+          </a:xfrm>
+          <a:prstGeom prst="rect">
+            <a:avLst/>
+          </a:prstGeom>
+          <a:noFill/>
+        </p:spPr>
+        <p:txBody>
+          <a:bodyPr wrap="square">
+            <a:spAutoFit/>
+          </a:bodyPr>
+          <a:lstStyle/>
+          <a:p>
+            <a:r>
+              <a:rPr sz="2600" b="1" i="0">
+                <a:solidFill>
+                  <a:srgbClr val="FFFFFF"/>
+                </a:solidFill>
+                <a:latin typeface="Calibri"/>
+              </a:rPr>
+              <a:t>Cierre del curso</a:t>
+            </a:r>
+          </a:p>
+        </p:txBody>
+      </p:sp>
+      <p:sp>
+        <p:nvSpPr>
+          <p:cNvPr id="5" name="TextBox 4"/>
+          <p:cNvSpPr txBox="1"/>
+          <p:nvPr/>
+        </p:nvSpPr>
+        <p:spPr>
+          <a:xfrm>
+            <a:off x="457200" y="1170432"/>
+            <a:ext cx="11277295" cy="5230368"/>
+          </a:xfrm>
+          <a:prstGeom prst="rect">
+            <a:avLst/>
+          </a:prstGeom>
+          <a:noFill/>
+        </p:spPr>
+        <p:txBody>
+          <a:bodyPr wrap="square">
+            <a:spAutoFit/>
+          </a:bodyPr>
+          <a:lstStyle/>
+          <a:p>
+            <a:pPr>
+              <a:spcAft>
+                <a:spcPts val="800"/>
+              </a:spcAft>
+            </a:pPr>
+            <a:r>
+              <a:rPr sz="2000" b="0" i="0">
+                <a:solidFill>
+                  <a:srgbClr val="333333"/>
+                </a:solidFill>
+                <a:latin typeface="Calibri"/>
+              </a:rPr>
+              <a:t>–   </a:t>
+            </a:r>
+            <a:r>
+              <a:rPr sz="2000" b="1" i="0">
+                <a:solidFill>
+                  <a:srgbClr val="333333"/>
+                </a:solidFill>
+                <a:latin typeface="Calibri"/>
+              </a:rPr>
+              <a:t>Lo que queda entregado:</a:t>
+            </a:r>
+            <a:r>
+              <a:rPr sz="2000" b="0" i="0">
+                <a:solidFill>
+                  <a:srgbClr val="333333"/>
+                </a:solidFill>
+                <a:latin typeface="Calibri"/>
+              </a:rPr>
+              <a:t> el </a:t>
+            </a:r>
+            <a:r>
+              <a:rPr sz="2000" b="1" i="0">
+                <a:solidFill>
+                  <a:srgbClr val="333333"/>
+                </a:solidFill>
+                <a:latin typeface="Calibri"/>
+              </a:rPr>
+              <a:t>informe final</a:t>
+            </a:r>
+            <a:r>
+              <a:rPr sz="2000" b="0" i="0">
+                <a:solidFill>
+                  <a:srgbClr val="333333"/>
+                </a:solidFill>
+                <a:latin typeface="Calibri"/>
+              </a:rPr>
+              <a:t> con sus doce secciones (20 %), la </a:t>
+            </a:r>
+            <a:r>
+              <a:rPr sz="2000" b="1" i="0">
+                <a:solidFill>
+                  <a:srgbClr val="333333"/>
+                </a:solidFill>
+                <a:latin typeface="Calibri"/>
+              </a:rPr>
+              <a:t>exposición final</a:t>
+            </a:r>
+            <a:r>
+              <a:rPr sz="2000" b="0" i="0">
+                <a:solidFill>
+                  <a:srgbClr val="333333"/>
+                </a:solidFill>
+                <a:latin typeface="Calibri"/>
+              </a:rPr>
+              <a:t> de la Clase 15 (15 %), el prototipo probado con personas reales y la galería del curso.</a:t>
+            </a:r>
+          </a:p>
+          <a:p>
+            <a:pPr>
+              <a:spcAft>
+                <a:spcPts val="800"/>
+              </a:spcAft>
+            </a:pPr>
+            <a:r>
+              <a:rPr sz="2000" b="0" i="0">
+                <a:solidFill>
+                  <a:srgbClr val="333333"/>
+                </a:solidFill>
+                <a:latin typeface="Calibri"/>
+              </a:rPr>
+              <a:t>–   </a:t>
+            </a:r>
+            <a:r>
+              <a:rPr sz="2000" b="1" i="0">
+                <a:solidFill>
+                  <a:srgbClr val="333333"/>
+                </a:solidFill>
+                <a:latin typeface="Calibri"/>
+              </a:rPr>
+              <a:t>Autoevaluación:</a:t>
+            </a:r>
+            <a:r>
+              <a:rPr sz="2000" b="0" i="0">
+                <a:solidFill>
+                  <a:srgbClr val="333333"/>
+                </a:solidFill>
+                <a:latin typeface="Calibri"/>
+              </a:rPr>
+              <a:t> queda hecha, con evidencia y no con impresiones — junto con la coevaluación del equipo.</a:t>
+            </a:r>
+          </a:p>
+          <a:p>
+            <a:pPr>
+              <a:spcAft>
+                <a:spcPts val="800"/>
+              </a:spcAft>
+            </a:pPr>
+            <a:r>
+              <a:rPr sz="2000" b="0" i="0">
+                <a:solidFill>
+                  <a:srgbClr val="333333"/>
+                </a:solidFill>
+                <a:latin typeface="Calibri"/>
+              </a:rPr>
+              <a:t>–   </a:t>
+            </a:r>
+            <a:r>
+              <a:rPr sz="2000" b="1" i="0">
+                <a:solidFill>
+                  <a:srgbClr val="333333"/>
+                </a:solidFill>
+                <a:latin typeface="Calibri"/>
+              </a:rPr>
+              <a:t>Lo que se llevan es un método, no un tema: definir un problema con evidencia, revisar qué ya existe, decidir con criterios, probar con personas reales y mirar a quién afecta.</a:t>
+            </a:r>
+          </a:p>
+          <a:p>
+            <a:pPr>
+              <a:spcAft>
+                <a:spcPts val="800"/>
+              </a:spcAft>
+            </a:pPr>
+            <a:r>
+              <a:rPr sz="2000" b="0" i="0">
+                <a:solidFill>
+                  <a:srgbClr val="333333"/>
+                </a:solidFill>
+                <a:latin typeface="Calibri"/>
+              </a:rPr>
+              <a:t>–   </a:t>
+            </a:r>
+            <a:r>
+              <a:rPr sz="2000" b="1" i="0">
+                <a:solidFill>
+                  <a:srgbClr val="333333"/>
+                </a:solidFill>
+                <a:latin typeface="Calibri"/>
+              </a:rPr>
+              <a:t>Aviso:</a:t>
+            </a:r>
+            <a:r>
+              <a:rPr sz="2000" b="0" i="0">
+                <a:solidFill>
+                  <a:srgbClr val="333333"/>
+                </a:solidFill>
+                <a:latin typeface="Calibri"/>
+              </a:rPr>
+              <a:t> El informe y las capturas quedan en la carpeta del equipo: es un proyecto completo y documentado, hecho en primer semestre, y sirve para un portafolio. Y </a:t>
+            </a:r>
+            <a:r>
+              <a:rPr sz="2000" b="1" i="0">
+                <a:solidFill>
+                  <a:srgbClr val="333333"/>
+                </a:solidFill>
+                <a:latin typeface="Calibri"/>
+              </a:rPr>
+              <a:t>el siguiente paso de su proyecto está escrito en la sección 10</a:t>
+            </a:r>
+            <a:r>
+              <a:rPr sz="2000" b="0" i="0">
+                <a:solidFill>
+                  <a:srgbClr val="333333"/>
+                </a:solidFill>
+                <a:latin typeface="Calibri"/>
+              </a:rPr>
+              <a:t> — quien quiera continuarlo ya no tiene que decidir por dónde empezar.</a:t>
+            </a:r>
+          </a:p>
+        </p:txBody>
+      </p:sp>
+      <p:sp>
+        <p:nvSpPr>
+          <p:cNvPr id="6" name="TextBox 5"/>
+          <p:cNvSpPr txBox="1"/>
+          <p:nvPr/>
+        </p:nvSpPr>
+        <p:spPr>
+          <a:xfrm>
+            <a:off x="11185855" y="6473952"/>
+            <a:ext cx="640080" cy="274320"/>
+          </a:xfrm>
+          <a:prstGeom prst="rect">
+            <a:avLst/>
+          </a:prstGeom>
+          <a:noFill/>
+        </p:spPr>
+        <p:txBody>
+          <a:bodyPr wrap="square">
+            <a:spAutoFit/>
+          </a:bodyPr>
+          <a:lstStyle/>
+          <a:p>
+            <a:pPr algn="r"/>
+            <a:r>
+              <a:rPr sz="1100" b="0" i="0">
+                <a:solidFill>
+                  <a:srgbClr val="666666"/>
+                </a:solidFill>
+                <a:latin typeface="Calibri"/>
+              </a:rPr>
+              <a:t>26</a:t>
+            </a:r>
+          </a:p>
+        </p:txBody>
+      </p:sp>
+    </p:spTree>
+  </p:cSld>
+  <p:clrMapOvr>
+    <a:masterClrMapping/>
+  </p:clrMapOvr>
+</p:sld>
+</file>
+
+<file path=ppt/slides/slide27.xml><?xml version="1.0" encoding="utf-8"?>
 <p:sld xmlns:a="http://schemas.openxmlformats.org/drawingml/2006/main" xmlns:p="http://schemas.openxmlformats.org/presentationml/2006/main" xmlns:r="http://schemas.openxmlformats.org/officeDocument/2006/relationships">
   <p:cSld>
     <p:bg>

--- a/Introduccion a la Ingenieria/Clases/Clase 16 - Socializacion y evaluacion final del curso/Presentacion.pptx
+++ b/Introduccion a la Ingenieria/Clases/Clase 16 - Socializacion y evaluacion final del curso/Presentacion.pptx
@@ -17,9 +17,6 @@
     <p:sldId id="265" r:id="rId17"/>
     <p:sldId id="266" r:id="rId18"/>
     <p:sldId id="267" r:id="rId19"/>
-    <p:sldId id="268" r:id="rId20"/>
-    <p:sldId id="269" r:id="rId21"/>
-    <p:sldId id="270" r:id="rId22"/>
   </p:sldIdLst>
   <p:sldSz cx="12191695" cy="6858000" type="screen4x3"/>
   <p:notesSz cx="6858000" cy="9144000"/>
@@ -6097,2510 +6094,6 @@
 </file>
 
 <file path=ppt/slides/slide12.xml><?xml version="1.0" encoding="utf-8"?>
-<p:sld xmlns:a="http://schemas.openxmlformats.org/drawingml/2006/main" xmlns:p="http://schemas.openxmlformats.org/presentationml/2006/main" xmlns:r="http://schemas.openxmlformats.org/officeDocument/2006/relationships">
-  <p:cSld>
-    <p:bg>
-      <p:bgPr>
-        <a:solidFill>
-          <a:srgbClr val="FFFFFF"/>
-        </a:solidFill>
-        <a:effectLst/>
-      </p:bgPr>
-    </p:bg>
-    <p:spTree>
-      <p:nvGrpSpPr>
-        <p:cNvPr id="1" name=""/>
-        <p:cNvGrpSpPr/>
-        <p:nvPr/>
-      </p:nvGrpSpPr>
-      <p:grpSpPr/>
-      <p:sp>
-        <p:nvSpPr>
-          <p:cNvPr id="2" name="Rectangle 1"/>
-          <p:cNvSpPr/>
-          <p:nvPr/>
-        </p:nvSpPr>
-        <p:spPr>
-          <a:xfrm>
-            <a:off x="0" y="0"/>
-            <a:ext cx="12191695" cy="1170432"/>
-          </a:xfrm>
-          <a:prstGeom prst="rect">
-            <a:avLst/>
-          </a:prstGeom>
-          <a:solidFill>
-            <a:srgbClr val="095292"/>
-          </a:solidFill>
-          <a:ln>
-            <a:noFill/>
-          </a:ln>
-        </p:spPr>
-        <p:style>
-          <a:lnRef idx="1">
-            <a:schemeClr val="accent1"/>
-          </a:lnRef>
-          <a:fillRef idx="3">
-            <a:schemeClr val="accent1"/>
-          </a:fillRef>
-          <a:effectRef idx="2">
-            <a:schemeClr val="accent1"/>
-          </a:effectRef>
-          <a:fontRef idx="minor">
-            <a:schemeClr val="lt1"/>
-          </a:fontRef>
-        </p:style>
-        <p:txBody>
-          <a:bodyPr rtlCol="0" anchor="ctr"/>
-          <a:lstStyle/>
-          <a:p>
-            <a:pPr algn="ctr"/>
-          </a:p>
-        </p:txBody>
-      </p:sp>
-      <p:sp>
-        <p:nvSpPr>
-          <p:cNvPr id="3" name="Rectangle 2"/>
-          <p:cNvSpPr/>
-          <p:nvPr/>
-        </p:nvSpPr>
-        <p:spPr>
-          <a:xfrm>
-            <a:off x="0" y="1170432"/>
-            <a:ext cx="12191695" cy="41148"/>
-          </a:xfrm>
-          <a:prstGeom prst="rect">
-            <a:avLst/>
-          </a:prstGeom>
-          <a:solidFill>
-            <a:srgbClr val="FFD000"/>
-          </a:solidFill>
-          <a:ln>
-            <a:noFill/>
-          </a:ln>
-        </p:spPr>
-        <p:style>
-          <a:lnRef idx="1">
-            <a:schemeClr val="accent1"/>
-          </a:lnRef>
-          <a:fillRef idx="3">
-            <a:schemeClr val="accent1"/>
-          </a:fillRef>
-          <a:effectRef idx="2">
-            <a:schemeClr val="accent1"/>
-          </a:effectRef>
-          <a:fontRef idx="minor">
-            <a:schemeClr val="lt1"/>
-          </a:fontRef>
-        </p:style>
-        <p:txBody>
-          <a:bodyPr rtlCol="0" anchor="ctr"/>
-          <a:lstStyle/>
-          <a:p>
-            <a:pPr algn="ctr"/>
-          </a:p>
-        </p:txBody>
-      </p:sp>
-      <p:sp>
-        <p:nvSpPr>
-          <p:cNvPr id="4" name="TextBox 3"/>
-          <p:cNvSpPr txBox="1"/>
-          <p:nvPr/>
-        </p:nvSpPr>
-        <p:spPr>
-          <a:xfrm>
-            <a:off x="457200" y="164592"/>
-            <a:ext cx="11277295" cy="384048"/>
-          </a:xfrm>
-          <a:prstGeom prst="rect">
-            <a:avLst/>
-          </a:prstGeom>
-          <a:noFill/>
-        </p:spPr>
-        <p:txBody>
-          <a:bodyPr wrap="square">
-            <a:spAutoFit/>
-          </a:bodyPr>
-          <a:lstStyle/>
-          <a:p>
-            <a:r>
-              <a:rPr sz="2600" b="1" i="0">
-                <a:solidFill>
-                  <a:srgbClr val="FFFFFF"/>
-                </a:solidFill>
-                <a:latin typeface="Calibri"/>
-              </a:rPr>
-              <a:t>Taller de hoy: Informe final y autoevaluación</a:t>
-            </a:r>
-          </a:p>
-        </p:txBody>
-      </p:sp>
-      <p:sp>
-        <p:nvSpPr>
-          <p:cNvPr id="5" name="TextBox 4"/>
-          <p:cNvSpPr txBox="1"/>
-          <p:nvPr/>
-        </p:nvSpPr>
-        <p:spPr>
-          <a:xfrm>
-            <a:off x="457200" y="566928"/>
-            <a:ext cx="11277295" cy="411480"/>
-          </a:xfrm>
-          <a:prstGeom prst="rect">
-            <a:avLst/>
-          </a:prstGeom>
-          <a:noFill/>
-        </p:spPr>
-        <p:txBody>
-          <a:bodyPr wrap="square">
-            <a:spAutoFit/>
-          </a:bodyPr>
-          <a:lstStyle/>
-          <a:p>
-            <a:r>
-              <a:rPr sz="1400" b="0" i="0">
-                <a:solidFill>
-                  <a:srgbClr val="B8D8EE"/>
-                </a:solidFill>
-                <a:latin typeface="Calibri"/>
-              </a:rPr>
-              <a:t>24 min en equipos · 24 min: pegar, verificar, repartir huecos, resumen y entregar · informe final en PDF + galería en el muro + autoevaluación y coevaluación</a:t>
-            </a:r>
-          </a:p>
-        </p:txBody>
-      </p:sp>
-      <p:sp>
-        <p:nvSpPr>
-          <p:cNvPr id="6" name="Rounded Rectangle 5"/>
-          <p:cNvSpPr/>
-          <p:nvPr/>
-        </p:nvSpPr>
-        <p:spPr>
-          <a:xfrm>
-            <a:off x="457200" y="1472184"/>
-            <a:ext cx="11277295" cy="566928"/>
-          </a:xfrm>
-          <a:prstGeom prst="roundRect">
-            <a:avLst>
-              <a:gd name="adj" fmla="val 12000"/>
-            </a:avLst>
-          </a:prstGeom>
-          <a:solidFill>
-            <a:srgbClr val="F2F2F2"/>
-          </a:solidFill>
-          <a:ln>
-            <a:noFill/>
-          </a:ln>
-        </p:spPr>
-        <p:style>
-          <a:lnRef idx="1">
-            <a:schemeClr val="accent1"/>
-          </a:lnRef>
-          <a:fillRef idx="3">
-            <a:schemeClr val="accent1"/>
-          </a:fillRef>
-          <a:effectRef idx="2">
-            <a:schemeClr val="accent1"/>
-          </a:effectRef>
-          <a:fontRef idx="minor">
-            <a:schemeClr val="lt1"/>
-          </a:fontRef>
-        </p:style>
-        <p:txBody>
-          <a:bodyPr rtlCol="0" anchor="ctr"/>
-          <a:lstStyle/>
-          <a:p>
-            <a:pPr algn="ctr"/>
-          </a:p>
-        </p:txBody>
-      </p:sp>
-      <p:sp>
-        <p:nvSpPr>
-          <p:cNvPr id="7" name="Rectangle 6"/>
-          <p:cNvSpPr/>
-          <p:nvPr/>
-        </p:nvSpPr>
-        <p:spPr>
-          <a:xfrm>
-            <a:off x="640080" y="1618487"/>
-            <a:ext cx="274320" cy="274320"/>
-          </a:xfrm>
-          <a:prstGeom prst="rect">
-            <a:avLst/>
-          </a:prstGeom>
-          <a:solidFill>
-            <a:srgbClr val="FFFFFF"/>
-          </a:solidFill>
-          <a:ln>
-            <a:solidFill>
-              <a:srgbClr val="333333"/>
-            </a:solidFill>
-          </a:ln>
-        </p:spPr>
-        <p:style>
-          <a:lnRef idx="1">
-            <a:schemeClr val="accent1"/>
-          </a:lnRef>
-          <a:fillRef idx="3">
-            <a:schemeClr val="accent1"/>
-          </a:fillRef>
-          <a:effectRef idx="2">
-            <a:schemeClr val="accent1"/>
-          </a:effectRef>
-          <a:fontRef idx="minor">
-            <a:schemeClr val="lt1"/>
-          </a:fontRef>
-        </p:style>
-        <p:txBody>
-          <a:bodyPr rtlCol="0" anchor="ctr"/>
-          <a:lstStyle/>
-          <a:p>
-            <a:pPr algn="ctr"/>
-          </a:p>
-        </p:txBody>
-      </p:sp>
-      <p:sp>
-        <p:nvSpPr>
-          <p:cNvPr id="8" name="Rectangle 7"/>
-          <p:cNvSpPr/>
-          <p:nvPr/>
-        </p:nvSpPr>
-        <p:spPr>
-          <a:xfrm>
-            <a:off x="640080" y="1618487"/>
-            <a:ext cx="73152" cy="274320"/>
-          </a:xfrm>
-          <a:prstGeom prst="rect">
-            <a:avLst/>
-          </a:prstGeom>
-          <a:solidFill>
-            <a:srgbClr val="269CCB"/>
-          </a:solidFill>
-          <a:ln>
-            <a:noFill/>
-          </a:ln>
-        </p:spPr>
-        <p:style>
-          <a:lnRef idx="1">
-            <a:schemeClr val="accent1"/>
-          </a:lnRef>
-          <a:fillRef idx="3">
-            <a:schemeClr val="accent1"/>
-          </a:fillRef>
-          <a:effectRef idx="2">
-            <a:schemeClr val="accent1"/>
-          </a:effectRef>
-          <a:fontRef idx="minor">
-            <a:schemeClr val="lt1"/>
-          </a:fontRef>
-        </p:style>
-        <p:txBody>
-          <a:bodyPr rtlCol="0" anchor="ctr"/>
-          <a:lstStyle/>
-          <a:p>
-            <a:pPr algn="ctr"/>
-          </a:p>
-        </p:txBody>
-      </p:sp>
-      <p:sp>
-        <p:nvSpPr>
-          <p:cNvPr id="9" name="TextBox 8"/>
-          <p:cNvSpPr txBox="1"/>
-          <p:nvPr/>
-        </p:nvSpPr>
-        <p:spPr>
-          <a:xfrm>
-            <a:off x="1097280" y="1563624"/>
-            <a:ext cx="10362895" cy="402336"/>
-          </a:xfrm>
-          <a:prstGeom prst="rect">
-            <a:avLst/>
-          </a:prstGeom>
-          <a:noFill/>
-        </p:spPr>
-        <p:txBody>
-          <a:bodyPr wrap="square" anchor="ctr"/>
-          <a:lstStyle/>
-          <a:p>
-            <a:r>
-              <a:rPr sz="1500" b="1" i="0">
-                <a:solidFill>
-                  <a:srgbClr val="333333"/>
-                </a:solidFill>
-                <a:latin typeface="Calibri"/>
-              </a:rPr>
-              <a:t>LA LISTA DE VERIFICACIÓN DEL INFORME</a:t>
-            </a:r>
-            <a:r>
-              <a:rPr sz="1500" b="0" i="0">
-                <a:solidFill>
-                  <a:srgbClr val="333333"/>
-                </a:solidFill>
-                <a:latin typeface="Calibri"/>
-              </a:rPr>
-              <a:t> — Las </a:t>
-            </a:r>
-            <a:r>
-              <a:rPr sz="1500" b="1" i="0">
-                <a:solidFill>
-                  <a:srgbClr val="333333"/>
-                </a:solidFill>
-                <a:latin typeface="Calibri"/>
-              </a:rPr>
-              <a:t>doce secciones</a:t>
-            </a:r>
-            <a:r>
-              <a:rPr sz="1500" b="0" i="0">
-                <a:solidFill>
-                  <a:srgbClr val="333333"/>
-                </a:solidFill>
-                <a:latin typeface="Calibri"/>
-              </a:rPr>
-              <a:t> en un solo documento, cada una con lo que ya estaba escrito desde su sesión, y con el largo de la tabla.</a:t>
-            </a:r>
-          </a:p>
-        </p:txBody>
-      </p:sp>
-      <p:sp>
-        <p:nvSpPr>
-          <p:cNvPr id="10" name="Rounded Rectangle 9"/>
-          <p:cNvSpPr/>
-          <p:nvPr/>
-        </p:nvSpPr>
-        <p:spPr>
-          <a:xfrm>
-            <a:off x="457200" y="2148839"/>
-            <a:ext cx="11277295" cy="566928"/>
-          </a:xfrm>
-          <a:prstGeom prst="roundRect">
-            <a:avLst>
-              <a:gd name="adj" fmla="val 12000"/>
-            </a:avLst>
-          </a:prstGeom>
-          <a:solidFill>
-            <a:srgbClr val="F2F2F2"/>
-          </a:solidFill>
-          <a:ln>
-            <a:noFill/>
-          </a:ln>
-        </p:spPr>
-        <p:style>
-          <a:lnRef idx="1">
-            <a:schemeClr val="accent1"/>
-          </a:lnRef>
-          <a:fillRef idx="3">
-            <a:schemeClr val="accent1"/>
-          </a:fillRef>
-          <a:effectRef idx="2">
-            <a:schemeClr val="accent1"/>
-          </a:effectRef>
-          <a:fontRef idx="minor">
-            <a:schemeClr val="lt1"/>
-          </a:fontRef>
-        </p:style>
-        <p:txBody>
-          <a:bodyPr rtlCol="0" anchor="ctr"/>
-          <a:lstStyle/>
-          <a:p>
-            <a:pPr algn="ctr"/>
-          </a:p>
-        </p:txBody>
-      </p:sp>
-      <p:sp>
-        <p:nvSpPr>
-          <p:cNvPr id="11" name="Rectangle 10"/>
-          <p:cNvSpPr/>
-          <p:nvPr/>
-        </p:nvSpPr>
-        <p:spPr>
-          <a:xfrm>
-            <a:off x="640080" y="2295144"/>
-            <a:ext cx="274320" cy="274320"/>
-          </a:xfrm>
-          <a:prstGeom prst="rect">
-            <a:avLst/>
-          </a:prstGeom>
-          <a:solidFill>
-            <a:srgbClr val="FFFFFF"/>
-          </a:solidFill>
-          <a:ln>
-            <a:solidFill>
-              <a:srgbClr val="333333"/>
-            </a:solidFill>
-          </a:ln>
-        </p:spPr>
-        <p:style>
-          <a:lnRef idx="1">
-            <a:schemeClr val="accent1"/>
-          </a:lnRef>
-          <a:fillRef idx="3">
-            <a:schemeClr val="accent1"/>
-          </a:fillRef>
-          <a:effectRef idx="2">
-            <a:schemeClr val="accent1"/>
-          </a:effectRef>
-          <a:fontRef idx="minor">
-            <a:schemeClr val="lt1"/>
-          </a:fontRef>
-        </p:style>
-        <p:txBody>
-          <a:bodyPr rtlCol="0" anchor="ctr"/>
-          <a:lstStyle/>
-          <a:p>
-            <a:pPr algn="ctr"/>
-          </a:p>
-        </p:txBody>
-      </p:sp>
-      <p:sp>
-        <p:nvSpPr>
-          <p:cNvPr id="12" name="Rectangle 11"/>
-          <p:cNvSpPr/>
-          <p:nvPr/>
-        </p:nvSpPr>
-        <p:spPr>
-          <a:xfrm>
-            <a:off x="640080" y="2295144"/>
-            <a:ext cx="73152" cy="274320"/>
-          </a:xfrm>
-          <a:prstGeom prst="rect">
-            <a:avLst/>
-          </a:prstGeom>
-          <a:solidFill>
-            <a:srgbClr val="269CCB"/>
-          </a:solidFill>
-          <a:ln>
-            <a:noFill/>
-          </a:ln>
-        </p:spPr>
-        <p:style>
-          <a:lnRef idx="1">
-            <a:schemeClr val="accent1"/>
-          </a:lnRef>
-          <a:fillRef idx="3">
-            <a:schemeClr val="accent1"/>
-          </a:fillRef>
-          <a:effectRef idx="2">
-            <a:schemeClr val="accent1"/>
-          </a:effectRef>
-          <a:fontRef idx="minor">
-            <a:schemeClr val="lt1"/>
-          </a:fontRef>
-        </p:style>
-        <p:txBody>
-          <a:bodyPr rtlCol="0" anchor="ctr"/>
-          <a:lstStyle/>
-          <a:p>
-            <a:pPr algn="ctr"/>
-          </a:p>
-        </p:txBody>
-      </p:sp>
-      <p:sp>
-        <p:nvSpPr>
-          <p:cNvPr id="13" name="TextBox 12"/>
-          <p:cNvSpPr txBox="1"/>
-          <p:nvPr/>
-        </p:nvSpPr>
-        <p:spPr>
-          <a:xfrm>
-            <a:off x="1097280" y="2240279"/>
-            <a:ext cx="10362895" cy="402336"/>
-          </a:xfrm>
-          <a:prstGeom prst="rect">
-            <a:avLst/>
-          </a:prstGeom>
-          <a:noFill/>
-        </p:spPr>
-        <p:txBody>
-          <a:bodyPr wrap="square" anchor="ctr"/>
-          <a:lstStyle/>
-          <a:p>
-            <a:r>
-              <a:rPr sz="1500" b="1" i="0">
-                <a:solidFill>
-                  <a:srgbClr val="333333"/>
-                </a:solidFill>
-                <a:latin typeface="Calibri"/>
-              </a:rPr>
-              <a:t>LO QUE FALTABA Y SE COMPLETÓ HOY</a:t>
-            </a:r>
-            <a:r>
-              <a:rPr sz="1500" b="0" i="0">
-                <a:solidFill>
-                  <a:srgbClr val="333333"/>
-                </a:solidFill>
-                <a:latin typeface="Calibri"/>
-              </a:rPr>
-              <a:t> — Los huecos que se marcaron en rojo, </a:t>
-            </a:r>
-            <a:r>
-              <a:rPr sz="1500" b="1" i="0">
-                <a:solidFill>
-                  <a:srgbClr val="333333"/>
-                </a:solidFill>
-                <a:latin typeface="Calibri"/>
-              </a:rPr>
-              <a:t>quién tomó cada uno</a:t>
-            </a:r>
-            <a:r>
-              <a:rPr sz="1500" b="0" i="0">
-                <a:solidFill>
-                  <a:srgbClr val="333333"/>
-                </a:solidFill>
-                <a:latin typeface="Calibri"/>
-              </a:rPr>
-              <a:t> y qué se escribió. Incluido el </a:t>
-            </a:r>
-            <a:r>
-              <a:rPr sz="1500" b="1" i="0">
-                <a:solidFill>
-                  <a:srgbClr val="333333"/>
-                </a:solidFill>
-                <a:latin typeface="Calibri"/>
-              </a:rPr>
-              <a:t>resumen</a:t>
-            </a:r>
-            <a:r>
-              <a:rPr sz="1500" b="0" i="0">
-                <a:solidFill>
-                  <a:srgbClr val="333333"/>
-                </a:solidFill>
-                <a:latin typeface="Calibri"/>
-              </a:rPr>
-              <a:t>, que es lo único nuevo.</a:t>
-            </a:r>
-          </a:p>
-        </p:txBody>
-      </p:sp>
-      <p:sp>
-        <p:nvSpPr>
-          <p:cNvPr id="14" name="Rounded Rectangle 13"/>
-          <p:cNvSpPr/>
-          <p:nvPr/>
-        </p:nvSpPr>
-        <p:spPr>
-          <a:xfrm>
-            <a:off x="457200" y="2825496"/>
-            <a:ext cx="11277295" cy="566928"/>
-          </a:xfrm>
-          <a:prstGeom prst="roundRect">
-            <a:avLst>
-              <a:gd name="adj" fmla="val 12000"/>
-            </a:avLst>
-          </a:prstGeom>
-          <a:solidFill>
-            <a:srgbClr val="F2F2F2"/>
-          </a:solidFill>
-          <a:ln>
-            <a:noFill/>
-          </a:ln>
-        </p:spPr>
-        <p:style>
-          <a:lnRef idx="1">
-            <a:schemeClr val="accent1"/>
-          </a:lnRef>
-          <a:fillRef idx="3">
-            <a:schemeClr val="accent1"/>
-          </a:fillRef>
-          <a:effectRef idx="2">
-            <a:schemeClr val="accent1"/>
-          </a:effectRef>
-          <a:fontRef idx="minor">
-            <a:schemeClr val="lt1"/>
-          </a:fontRef>
-        </p:style>
-        <p:txBody>
-          <a:bodyPr rtlCol="0" anchor="ctr"/>
-          <a:lstStyle/>
-          <a:p>
-            <a:pPr algn="ctr"/>
-          </a:p>
-        </p:txBody>
-      </p:sp>
-      <p:sp>
-        <p:nvSpPr>
-          <p:cNvPr id="15" name="Rectangle 14"/>
-          <p:cNvSpPr/>
-          <p:nvPr/>
-        </p:nvSpPr>
-        <p:spPr>
-          <a:xfrm>
-            <a:off x="640080" y="2971800"/>
-            <a:ext cx="274320" cy="274320"/>
-          </a:xfrm>
-          <a:prstGeom prst="rect">
-            <a:avLst/>
-          </a:prstGeom>
-          <a:solidFill>
-            <a:srgbClr val="FFFFFF"/>
-          </a:solidFill>
-          <a:ln>
-            <a:solidFill>
-              <a:srgbClr val="333333"/>
-            </a:solidFill>
-          </a:ln>
-        </p:spPr>
-        <p:style>
-          <a:lnRef idx="1">
-            <a:schemeClr val="accent1"/>
-          </a:lnRef>
-          <a:fillRef idx="3">
-            <a:schemeClr val="accent1"/>
-          </a:fillRef>
-          <a:effectRef idx="2">
-            <a:schemeClr val="accent1"/>
-          </a:effectRef>
-          <a:fontRef idx="minor">
-            <a:schemeClr val="lt1"/>
-          </a:fontRef>
-        </p:style>
-        <p:txBody>
-          <a:bodyPr rtlCol="0" anchor="ctr"/>
-          <a:lstStyle/>
-          <a:p>
-            <a:pPr algn="ctr"/>
-          </a:p>
-        </p:txBody>
-      </p:sp>
-      <p:sp>
-        <p:nvSpPr>
-          <p:cNvPr id="16" name="Rectangle 15"/>
-          <p:cNvSpPr/>
-          <p:nvPr/>
-        </p:nvSpPr>
-        <p:spPr>
-          <a:xfrm>
-            <a:off x="640080" y="2971800"/>
-            <a:ext cx="73152" cy="274320"/>
-          </a:xfrm>
-          <a:prstGeom prst="rect">
-            <a:avLst/>
-          </a:prstGeom>
-          <a:solidFill>
-            <a:srgbClr val="269CCB"/>
-          </a:solidFill>
-          <a:ln>
-            <a:noFill/>
-          </a:ln>
-        </p:spPr>
-        <p:style>
-          <a:lnRef idx="1">
-            <a:schemeClr val="accent1"/>
-          </a:lnRef>
-          <a:fillRef idx="3">
-            <a:schemeClr val="accent1"/>
-          </a:fillRef>
-          <a:effectRef idx="2">
-            <a:schemeClr val="accent1"/>
-          </a:effectRef>
-          <a:fontRef idx="minor">
-            <a:schemeClr val="lt1"/>
-          </a:fontRef>
-        </p:style>
-        <p:txBody>
-          <a:bodyPr rtlCol="0" anchor="ctr"/>
-          <a:lstStyle/>
-          <a:p>
-            <a:pPr algn="ctr"/>
-          </a:p>
-        </p:txBody>
-      </p:sp>
-      <p:sp>
-        <p:nvSpPr>
-          <p:cNvPr id="17" name="TextBox 16"/>
-          <p:cNvSpPr txBox="1"/>
-          <p:nvPr/>
-        </p:nvSpPr>
-        <p:spPr>
-          <a:xfrm>
-            <a:off x="1097280" y="2916936"/>
-            <a:ext cx="10362895" cy="402336"/>
-          </a:xfrm>
-          <a:prstGeom prst="rect">
-            <a:avLst/>
-          </a:prstGeom>
-          <a:noFill/>
-        </p:spPr>
-        <p:txBody>
-          <a:bodyPr wrap="square" anchor="ctr"/>
-          <a:lstStyle/>
-          <a:p>
-            <a:r>
-              <a:rPr sz="1500" b="1" i="0">
-                <a:solidFill>
-                  <a:srgbClr val="333333"/>
-                </a:solidFill>
-                <a:latin typeface="Calibri"/>
-              </a:rPr>
-              <a:t>LA DECLARACIÓN DEL USO DE IA</a:t>
-            </a:r>
-            <a:r>
-              <a:rPr sz="1500" b="0" i="0">
-                <a:solidFill>
-                  <a:srgbClr val="333333"/>
-                </a:solidFill>
-                <a:latin typeface="Calibri"/>
-              </a:rPr>
-              <a:t> — Qué se le pidió al asistente, </a:t>
-            </a:r>
-            <a:r>
-              <a:rPr sz="1500" b="1" i="0">
-                <a:solidFill>
-                  <a:srgbClr val="333333"/>
-                </a:solidFill>
-                <a:latin typeface="Calibri"/>
-              </a:rPr>
-              <a:t>qué se corrigió a mano</a:t>
-            </a:r>
-            <a:r>
-              <a:rPr sz="1500" b="0" i="0">
-                <a:solidFill>
-                  <a:srgbClr val="333333"/>
-                </a:solidFill>
-                <a:latin typeface="Calibri"/>
-              </a:rPr>
-              <a:t> y </a:t>
-            </a:r>
-            <a:r>
-              <a:rPr sz="1500" b="1" i="0">
-                <a:solidFill>
-                  <a:srgbClr val="333333"/>
-                </a:solidFill>
-                <a:latin typeface="Calibri"/>
-              </a:rPr>
-              <a:t>qué no se le entregó</a:t>
-            </a:r>
-            <a:r>
-              <a:rPr sz="1500" b="0" i="0">
-                <a:solidFill>
-                  <a:srgbClr val="333333"/>
-                </a:solidFill>
-                <a:latin typeface="Calibri"/>
-              </a:rPr>
-              <a:t>. Si no se usó, se dice que no se usó.</a:t>
-            </a:r>
-          </a:p>
-        </p:txBody>
-      </p:sp>
-      <p:sp>
-        <p:nvSpPr>
-          <p:cNvPr id="18" name="Rounded Rectangle 17"/>
-          <p:cNvSpPr/>
-          <p:nvPr/>
-        </p:nvSpPr>
-        <p:spPr>
-          <a:xfrm>
-            <a:off x="457200" y="3502152"/>
-            <a:ext cx="11277295" cy="566928"/>
-          </a:xfrm>
-          <a:prstGeom prst="roundRect">
-            <a:avLst>
-              <a:gd name="adj" fmla="val 12000"/>
-            </a:avLst>
-          </a:prstGeom>
-          <a:solidFill>
-            <a:srgbClr val="F2F2F2"/>
-          </a:solidFill>
-          <a:ln>
-            <a:noFill/>
-          </a:ln>
-        </p:spPr>
-        <p:style>
-          <a:lnRef idx="1">
-            <a:schemeClr val="accent1"/>
-          </a:lnRef>
-          <a:fillRef idx="3">
-            <a:schemeClr val="accent1"/>
-          </a:fillRef>
-          <a:effectRef idx="2">
-            <a:schemeClr val="accent1"/>
-          </a:effectRef>
-          <a:fontRef idx="minor">
-            <a:schemeClr val="lt1"/>
-          </a:fontRef>
-        </p:style>
-        <p:txBody>
-          <a:bodyPr rtlCol="0" anchor="ctr"/>
-          <a:lstStyle/>
-          <a:p>
-            <a:pPr algn="ctr"/>
-          </a:p>
-        </p:txBody>
-      </p:sp>
-      <p:sp>
-        <p:nvSpPr>
-          <p:cNvPr id="19" name="Rectangle 18"/>
-          <p:cNvSpPr/>
-          <p:nvPr/>
-        </p:nvSpPr>
-        <p:spPr>
-          <a:xfrm>
-            <a:off x="640080" y="3648456"/>
-            <a:ext cx="274320" cy="274320"/>
-          </a:xfrm>
-          <a:prstGeom prst="rect">
-            <a:avLst/>
-          </a:prstGeom>
-          <a:solidFill>
-            <a:srgbClr val="FFFFFF"/>
-          </a:solidFill>
-          <a:ln>
-            <a:solidFill>
-              <a:srgbClr val="333333"/>
-            </a:solidFill>
-          </a:ln>
-        </p:spPr>
-        <p:style>
-          <a:lnRef idx="1">
-            <a:schemeClr val="accent1"/>
-          </a:lnRef>
-          <a:fillRef idx="3">
-            <a:schemeClr val="accent1"/>
-          </a:fillRef>
-          <a:effectRef idx="2">
-            <a:schemeClr val="accent1"/>
-          </a:effectRef>
-          <a:fontRef idx="minor">
-            <a:schemeClr val="lt1"/>
-          </a:fontRef>
-        </p:style>
-        <p:txBody>
-          <a:bodyPr rtlCol="0" anchor="ctr"/>
-          <a:lstStyle/>
-          <a:p>
-            <a:pPr algn="ctr"/>
-          </a:p>
-        </p:txBody>
-      </p:sp>
-      <p:sp>
-        <p:nvSpPr>
-          <p:cNvPr id="20" name="Rectangle 19"/>
-          <p:cNvSpPr/>
-          <p:nvPr/>
-        </p:nvSpPr>
-        <p:spPr>
-          <a:xfrm>
-            <a:off x="640080" y="3648456"/>
-            <a:ext cx="73152" cy="274320"/>
-          </a:xfrm>
-          <a:prstGeom prst="rect">
-            <a:avLst/>
-          </a:prstGeom>
-          <a:solidFill>
-            <a:srgbClr val="269CCB"/>
-          </a:solidFill>
-          <a:ln>
-            <a:noFill/>
-          </a:ln>
-        </p:spPr>
-        <p:style>
-          <a:lnRef idx="1">
-            <a:schemeClr val="accent1"/>
-          </a:lnRef>
-          <a:fillRef idx="3">
-            <a:schemeClr val="accent1"/>
-          </a:fillRef>
-          <a:effectRef idx="2">
-            <a:schemeClr val="accent1"/>
-          </a:effectRef>
-          <a:fontRef idx="minor">
-            <a:schemeClr val="lt1"/>
-          </a:fontRef>
-        </p:style>
-        <p:txBody>
-          <a:bodyPr rtlCol="0" anchor="ctr"/>
-          <a:lstStyle/>
-          <a:p>
-            <a:pPr algn="ctr"/>
-          </a:p>
-        </p:txBody>
-      </p:sp>
-      <p:sp>
-        <p:nvSpPr>
-          <p:cNvPr id="21" name="TextBox 20"/>
-          <p:cNvSpPr txBox="1"/>
-          <p:nvPr/>
-        </p:nvSpPr>
-        <p:spPr>
-          <a:xfrm>
-            <a:off x="1097280" y="3593592"/>
-            <a:ext cx="10362895" cy="402336"/>
-          </a:xfrm>
-          <a:prstGeom prst="rect">
-            <a:avLst/>
-          </a:prstGeom>
-          <a:noFill/>
-        </p:spPr>
-        <p:txBody>
-          <a:bodyPr wrap="square" anchor="ctr"/>
-          <a:lstStyle/>
-          <a:p>
-            <a:r>
-              <a:rPr sz="1500" b="1" i="0">
-                <a:solidFill>
-                  <a:srgbClr val="333333"/>
-                </a:solidFill>
-                <a:latin typeface="Calibri"/>
-              </a:rPr>
-              <a:t>LA AUTOEVALUACIÓN INDIVIDUAL</a:t>
-            </a:r>
-            <a:r>
-              <a:rPr sz="1500" b="0" i="0">
-                <a:solidFill>
-                  <a:srgbClr val="333333"/>
-                </a:solidFill>
-                <a:latin typeface="Calibri"/>
-              </a:rPr>
-              <a:t> — Cuatro respuestas </a:t>
-            </a:r>
-            <a:r>
-              <a:rPr sz="1500" b="1" i="0">
-                <a:solidFill>
-                  <a:srgbClr val="333333"/>
-                </a:solidFill>
-                <a:latin typeface="Calibri"/>
-              </a:rPr>
-              <a:t>con evidencia</a:t>
-            </a:r>
-            <a:r>
-              <a:rPr sz="1500" b="0" i="0">
-                <a:solidFill>
-                  <a:srgbClr val="333333"/>
-                </a:solidFill>
-                <a:latin typeface="Calibri"/>
-              </a:rPr>
-              <a:t>: qué hice yo · qué aprendí a hacer que no sabía · en qué fallé · qué haría distinto. </a:t>
-            </a:r>
-            <a:r>
-              <a:rPr sz="1500" b="1" i="0">
-                <a:solidFill>
-                  <a:srgbClr val="333333"/>
-                </a:solidFill>
-                <a:latin typeface="Calibri"/>
-              </a:rPr>
-              <a:t>Solo para el docente.</a:t>
-            </a:r>
-          </a:p>
-        </p:txBody>
-      </p:sp>
-      <p:sp>
-        <p:nvSpPr>
-          <p:cNvPr id="22" name="Rounded Rectangle 21"/>
-          <p:cNvSpPr/>
-          <p:nvPr/>
-        </p:nvSpPr>
-        <p:spPr>
-          <a:xfrm>
-            <a:off x="457200" y="4178808"/>
-            <a:ext cx="11277295" cy="566928"/>
-          </a:xfrm>
-          <a:prstGeom prst="roundRect">
-            <a:avLst>
-              <a:gd name="adj" fmla="val 12000"/>
-            </a:avLst>
-          </a:prstGeom>
-          <a:solidFill>
-            <a:srgbClr val="F2F2F2"/>
-          </a:solidFill>
-          <a:ln>
-            <a:noFill/>
-          </a:ln>
-        </p:spPr>
-        <p:style>
-          <a:lnRef idx="1">
-            <a:schemeClr val="accent1"/>
-          </a:lnRef>
-          <a:fillRef idx="3">
-            <a:schemeClr val="accent1"/>
-          </a:fillRef>
-          <a:effectRef idx="2">
-            <a:schemeClr val="accent1"/>
-          </a:effectRef>
-          <a:fontRef idx="minor">
-            <a:schemeClr val="lt1"/>
-          </a:fontRef>
-        </p:style>
-        <p:txBody>
-          <a:bodyPr rtlCol="0" anchor="ctr"/>
-          <a:lstStyle/>
-          <a:p>
-            <a:pPr algn="ctr"/>
-          </a:p>
-        </p:txBody>
-      </p:sp>
-      <p:sp>
-        <p:nvSpPr>
-          <p:cNvPr id="23" name="Rectangle 22"/>
-          <p:cNvSpPr/>
-          <p:nvPr/>
-        </p:nvSpPr>
-        <p:spPr>
-          <a:xfrm>
-            <a:off x="640080" y="4325112"/>
-            <a:ext cx="274320" cy="274320"/>
-          </a:xfrm>
-          <a:prstGeom prst="rect">
-            <a:avLst/>
-          </a:prstGeom>
-          <a:solidFill>
-            <a:srgbClr val="FFFFFF"/>
-          </a:solidFill>
-          <a:ln>
-            <a:solidFill>
-              <a:srgbClr val="333333"/>
-            </a:solidFill>
-          </a:ln>
-        </p:spPr>
-        <p:style>
-          <a:lnRef idx="1">
-            <a:schemeClr val="accent1"/>
-          </a:lnRef>
-          <a:fillRef idx="3">
-            <a:schemeClr val="accent1"/>
-          </a:fillRef>
-          <a:effectRef idx="2">
-            <a:schemeClr val="accent1"/>
-          </a:effectRef>
-          <a:fontRef idx="minor">
-            <a:schemeClr val="lt1"/>
-          </a:fontRef>
-        </p:style>
-        <p:txBody>
-          <a:bodyPr rtlCol="0" anchor="ctr"/>
-          <a:lstStyle/>
-          <a:p>
-            <a:pPr algn="ctr"/>
-          </a:p>
-        </p:txBody>
-      </p:sp>
-      <p:sp>
-        <p:nvSpPr>
-          <p:cNvPr id="24" name="Rectangle 23"/>
-          <p:cNvSpPr/>
-          <p:nvPr/>
-        </p:nvSpPr>
-        <p:spPr>
-          <a:xfrm>
-            <a:off x="640080" y="4325112"/>
-            <a:ext cx="73152" cy="274320"/>
-          </a:xfrm>
-          <a:prstGeom prst="rect">
-            <a:avLst/>
-          </a:prstGeom>
-          <a:solidFill>
-            <a:srgbClr val="269CCB"/>
-          </a:solidFill>
-          <a:ln>
-            <a:noFill/>
-          </a:ln>
-        </p:spPr>
-        <p:style>
-          <a:lnRef idx="1">
-            <a:schemeClr val="accent1"/>
-          </a:lnRef>
-          <a:fillRef idx="3">
-            <a:schemeClr val="accent1"/>
-          </a:fillRef>
-          <a:effectRef idx="2">
-            <a:schemeClr val="accent1"/>
-          </a:effectRef>
-          <a:fontRef idx="minor">
-            <a:schemeClr val="lt1"/>
-          </a:fontRef>
-        </p:style>
-        <p:txBody>
-          <a:bodyPr rtlCol="0" anchor="ctr"/>
-          <a:lstStyle/>
-          <a:p>
-            <a:pPr algn="ctr"/>
-          </a:p>
-        </p:txBody>
-      </p:sp>
-      <p:sp>
-        <p:nvSpPr>
-          <p:cNvPr id="25" name="TextBox 24"/>
-          <p:cNvSpPr txBox="1"/>
-          <p:nvPr/>
-        </p:nvSpPr>
-        <p:spPr>
-          <a:xfrm>
-            <a:off x="1097280" y="4270248"/>
-            <a:ext cx="10362895" cy="402336"/>
-          </a:xfrm>
-          <a:prstGeom prst="rect">
-            <a:avLst/>
-          </a:prstGeom>
-          <a:noFill/>
-        </p:spPr>
-        <p:txBody>
-          <a:bodyPr wrap="square" anchor="ctr"/>
-          <a:lstStyle/>
-          <a:p>
-            <a:r>
-              <a:rPr sz="1500" b="1" i="0">
-                <a:solidFill>
-                  <a:srgbClr val="333333"/>
-                </a:solidFill>
-                <a:latin typeface="Calibri"/>
-              </a:rPr>
-              <a:t>LA COEVALUACIÓN DEL EQUIPO</a:t>
-            </a:r>
-            <a:r>
-              <a:rPr sz="1500" b="0" i="0">
-                <a:solidFill>
-                  <a:srgbClr val="333333"/>
-                </a:solidFill>
-                <a:latin typeface="Calibri"/>
-              </a:rPr>
-              <a:t> — Cumplimiento de acuerdos, aporte al proyecto y disposición para ayudar, con </a:t>
-            </a:r>
-            <a:r>
-              <a:rPr sz="1500" b="1" i="0">
-                <a:solidFill>
-                  <a:srgbClr val="333333"/>
-                </a:solidFill>
-                <a:latin typeface="Calibri"/>
-              </a:rPr>
-              <a:t>observaciones y no adjetivos</a:t>
-            </a:r>
-            <a:r>
-              <a:rPr sz="1500" b="0" i="0">
-                <a:solidFill>
-                  <a:srgbClr val="333333"/>
-                </a:solidFill>
-                <a:latin typeface="Calibri"/>
-              </a:rPr>
-              <a:t>.</a:t>
-            </a:r>
-          </a:p>
-        </p:txBody>
-      </p:sp>
-      <p:sp>
-        <p:nvSpPr>
-          <p:cNvPr id="26" name="TextBox 25"/>
-          <p:cNvSpPr txBox="1"/>
-          <p:nvPr/>
-        </p:nvSpPr>
-        <p:spPr>
-          <a:xfrm>
-            <a:off x="11185855" y="6473952"/>
-            <a:ext cx="640080" cy="274320"/>
-          </a:xfrm>
-          <a:prstGeom prst="rect">
-            <a:avLst/>
-          </a:prstGeom>
-          <a:noFill/>
-        </p:spPr>
-        <p:txBody>
-          <a:bodyPr wrap="square">
-            <a:spAutoFit/>
-          </a:bodyPr>
-          <a:lstStyle/>
-          <a:p>
-            <a:pPr algn="r"/>
-            <a:r>
-              <a:rPr sz="1100" b="0" i="0">
-                <a:solidFill>
-                  <a:srgbClr val="666666"/>
-                </a:solidFill>
-                <a:latin typeface="Calibri"/>
-              </a:rPr>
-              <a:t>12</a:t>
-            </a:r>
-          </a:p>
-        </p:txBody>
-      </p:sp>
-    </p:spTree>
-  </p:cSld>
-  <p:clrMapOvr>
-    <a:masterClrMapping/>
-  </p:clrMapOvr>
-</p:sld>
-</file>
-
-<file path=ppt/slides/slide13.xml><?xml version="1.0" encoding="utf-8"?>
-<p:sld xmlns:a="http://schemas.openxmlformats.org/drawingml/2006/main" xmlns:p="http://schemas.openxmlformats.org/presentationml/2006/main" xmlns:r="http://schemas.openxmlformats.org/officeDocument/2006/relationships">
-  <p:cSld>
-    <p:bg>
-      <p:bgPr>
-        <a:solidFill>
-          <a:srgbClr val="FFFFFF"/>
-        </a:solidFill>
-        <a:effectLst/>
-      </p:bgPr>
-    </p:bg>
-    <p:spTree>
-      <p:nvGrpSpPr>
-        <p:cNvPr id="1" name=""/>
-        <p:cNvGrpSpPr/>
-        <p:nvPr/>
-      </p:nvGrpSpPr>
-      <p:grpSpPr/>
-      <p:sp>
-        <p:nvSpPr>
-          <p:cNvPr id="2" name="Rectangle 1"/>
-          <p:cNvSpPr/>
-          <p:nvPr/>
-        </p:nvSpPr>
-        <p:spPr>
-          <a:xfrm>
-            <a:off x="0" y="0"/>
-            <a:ext cx="12191695" cy="1170432"/>
-          </a:xfrm>
-          <a:prstGeom prst="rect">
-            <a:avLst/>
-          </a:prstGeom>
-          <a:solidFill>
-            <a:srgbClr val="095292"/>
-          </a:solidFill>
-          <a:ln>
-            <a:noFill/>
-          </a:ln>
-        </p:spPr>
-        <p:style>
-          <a:lnRef idx="1">
-            <a:schemeClr val="accent1"/>
-          </a:lnRef>
-          <a:fillRef idx="3">
-            <a:schemeClr val="accent1"/>
-          </a:fillRef>
-          <a:effectRef idx="2">
-            <a:schemeClr val="accent1"/>
-          </a:effectRef>
-          <a:fontRef idx="minor">
-            <a:schemeClr val="lt1"/>
-          </a:fontRef>
-        </p:style>
-        <p:txBody>
-          <a:bodyPr rtlCol="0" anchor="ctr"/>
-          <a:lstStyle/>
-          <a:p>
-            <a:pPr algn="ctr"/>
-          </a:p>
-        </p:txBody>
-      </p:sp>
-      <p:sp>
-        <p:nvSpPr>
-          <p:cNvPr id="3" name="Rectangle 2"/>
-          <p:cNvSpPr/>
-          <p:nvPr/>
-        </p:nvSpPr>
-        <p:spPr>
-          <a:xfrm>
-            <a:off x="0" y="1170432"/>
-            <a:ext cx="12191695" cy="41148"/>
-          </a:xfrm>
-          <a:prstGeom prst="rect">
-            <a:avLst/>
-          </a:prstGeom>
-          <a:solidFill>
-            <a:srgbClr val="FFD000"/>
-          </a:solidFill>
-          <a:ln>
-            <a:noFill/>
-          </a:ln>
-        </p:spPr>
-        <p:style>
-          <a:lnRef idx="1">
-            <a:schemeClr val="accent1"/>
-          </a:lnRef>
-          <a:fillRef idx="3">
-            <a:schemeClr val="accent1"/>
-          </a:fillRef>
-          <a:effectRef idx="2">
-            <a:schemeClr val="accent1"/>
-          </a:effectRef>
-          <a:fontRef idx="minor">
-            <a:schemeClr val="lt1"/>
-          </a:fontRef>
-        </p:style>
-        <p:txBody>
-          <a:bodyPr rtlCol="0" anchor="ctr"/>
-          <a:lstStyle/>
-          <a:p>
-            <a:pPr algn="ctr"/>
-          </a:p>
-        </p:txBody>
-      </p:sp>
-      <p:sp>
-        <p:nvSpPr>
-          <p:cNvPr id="4" name="TextBox 3"/>
-          <p:cNvSpPr txBox="1"/>
-          <p:nvPr/>
-        </p:nvSpPr>
-        <p:spPr>
-          <a:xfrm>
-            <a:off x="457200" y="164592"/>
-            <a:ext cx="11277295" cy="384048"/>
-          </a:xfrm>
-          <a:prstGeom prst="rect">
-            <a:avLst/>
-          </a:prstGeom>
-          <a:noFill/>
-        </p:spPr>
-        <p:txBody>
-          <a:bodyPr wrap="square">
-            <a:spAutoFit/>
-          </a:bodyPr>
-          <a:lstStyle/>
-          <a:p>
-            <a:r>
-              <a:rPr sz="2600" b="1" i="0">
-                <a:solidFill>
-                  <a:srgbClr val="FFFFFF"/>
-                </a:solidFill>
-                <a:latin typeface="Calibri"/>
-              </a:rPr>
-              <a:t>Cómo se expone en 3 minutos</a:t>
-            </a:r>
-          </a:p>
-        </p:txBody>
-      </p:sp>
-      <p:sp>
-        <p:nvSpPr>
-          <p:cNvPr id="5" name="TextBox 4"/>
-          <p:cNvSpPr txBox="1"/>
-          <p:nvPr/>
-        </p:nvSpPr>
-        <p:spPr>
-          <a:xfrm>
-            <a:off x="457200" y="566928"/>
-            <a:ext cx="11277295" cy="411480"/>
-          </a:xfrm>
-          <a:prstGeom prst="rect">
-            <a:avLst/>
-          </a:prstGeom>
-          <a:noFill/>
-        </p:spPr>
-        <p:txBody>
-          <a:bodyPr wrap="square">
-            <a:spAutoFit/>
-          </a:bodyPr>
-          <a:lstStyle/>
-          <a:p>
-            <a:r>
-              <a:rPr sz="1400" b="0" i="0">
-                <a:solidFill>
-                  <a:srgbClr val="B8D8EE"/>
-                </a:solidFill>
-                <a:latin typeface="Calibri"/>
-              </a:rPr>
-              <a:t>Habla el vocero con la pantalla ya compartida · cronómetro en pantalla · se corta al llegar a cero</a:t>
-            </a:r>
-          </a:p>
-        </p:txBody>
-      </p:sp>
-      <p:sp>
-        <p:nvSpPr>
-          <p:cNvPr id="6" name="Rounded Rectangle 5"/>
-          <p:cNvSpPr/>
-          <p:nvPr/>
-        </p:nvSpPr>
-        <p:spPr>
-          <a:xfrm>
-            <a:off x="457200" y="1659636"/>
-            <a:ext cx="11277295" cy="1051560"/>
-          </a:xfrm>
-          <a:prstGeom prst="roundRect">
-            <a:avLst>
-              <a:gd name="adj" fmla="val 12000"/>
-            </a:avLst>
-          </a:prstGeom>
-          <a:solidFill>
-            <a:srgbClr val="F2F2F2"/>
-          </a:solidFill>
-          <a:ln>
-            <a:noFill/>
-          </a:ln>
-        </p:spPr>
-        <p:style>
-          <a:lnRef idx="1">
-            <a:schemeClr val="accent1"/>
-          </a:lnRef>
-          <a:fillRef idx="3">
-            <a:schemeClr val="accent1"/>
-          </a:fillRef>
-          <a:effectRef idx="2">
-            <a:schemeClr val="accent1"/>
-          </a:effectRef>
-          <a:fontRef idx="minor">
-            <a:schemeClr val="lt1"/>
-          </a:fontRef>
-        </p:style>
-        <p:txBody>
-          <a:bodyPr rtlCol="0" anchor="ctr"/>
-          <a:lstStyle/>
-          <a:p>
-            <a:pPr algn="ctr"/>
-          </a:p>
-        </p:txBody>
-      </p:sp>
-      <p:sp>
-        <p:nvSpPr>
-          <p:cNvPr id="7" name="Rounded Rectangle 6"/>
-          <p:cNvSpPr/>
-          <p:nvPr/>
-        </p:nvSpPr>
-        <p:spPr>
-          <a:xfrm>
-            <a:off x="594360" y="1965960"/>
-            <a:ext cx="438912" cy="438912"/>
-          </a:xfrm>
-          <a:prstGeom prst="roundRect">
-            <a:avLst>
-              <a:gd name="adj" fmla="val 12000"/>
-            </a:avLst>
-          </a:prstGeom>
-          <a:solidFill>
-            <a:srgbClr val="095292"/>
-          </a:solidFill>
-          <a:ln>
-            <a:noFill/>
-          </a:ln>
-        </p:spPr>
-        <p:style>
-          <a:lnRef idx="1">
-            <a:schemeClr val="accent1"/>
-          </a:lnRef>
-          <a:fillRef idx="3">
-            <a:schemeClr val="accent1"/>
-          </a:fillRef>
-          <a:effectRef idx="2">
-            <a:schemeClr val="accent1"/>
-          </a:effectRef>
-          <a:fontRef idx="minor">
-            <a:schemeClr val="lt1"/>
-          </a:fontRef>
-        </p:style>
-        <p:txBody>
-          <a:bodyPr rtlCol="0" anchor="ctr"/>
-          <a:lstStyle/>
-          <a:p>
-            <a:pPr algn="ctr"/>
-          </a:p>
-        </p:txBody>
-      </p:sp>
-      <p:sp>
-        <p:nvSpPr>
-          <p:cNvPr id="8" name="TextBox 7"/>
-          <p:cNvSpPr txBox="1"/>
-          <p:nvPr/>
-        </p:nvSpPr>
-        <p:spPr>
-          <a:xfrm>
-            <a:off x="594360" y="1965960"/>
-            <a:ext cx="438912" cy="438912"/>
-          </a:xfrm>
-          <a:prstGeom prst="rect">
-            <a:avLst/>
-          </a:prstGeom>
-          <a:noFill/>
-        </p:spPr>
-        <p:txBody>
-          <a:bodyPr wrap="square" anchor="ctr"/>
-          <a:lstStyle/>
-          <a:p>
-            <a:pPr algn="ctr"/>
-            <a:r>
-              <a:rPr sz="1600" b="1" i="0">
-                <a:solidFill>
-                  <a:srgbClr val="FFFFFF"/>
-                </a:solidFill>
-                <a:latin typeface="Calibri"/>
-              </a:rPr>
-              <a:t>1</a:t>
-            </a:r>
-          </a:p>
-        </p:txBody>
-      </p:sp>
-      <p:sp>
-        <p:nvSpPr>
-          <p:cNvPr id="9" name="TextBox 8"/>
-          <p:cNvSpPr txBox="1"/>
-          <p:nvPr/>
-        </p:nvSpPr>
-        <p:spPr>
-          <a:xfrm>
-            <a:off x="1188720" y="1751076"/>
-            <a:ext cx="10271455" cy="886968"/>
-          </a:xfrm>
-          <a:prstGeom prst="rect">
-            <a:avLst/>
-          </a:prstGeom>
-          <a:noFill/>
-        </p:spPr>
-        <p:txBody>
-          <a:bodyPr wrap="square" anchor="ctr"/>
-          <a:lstStyle/>
-          <a:p>
-            <a:r>
-              <a:rPr sz="1500" b="1" i="0">
-                <a:solidFill>
-                  <a:srgbClr val="095292"/>
-                </a:solidFill>
-                <a:latin typeface="Calibri"/>
-              </a:rPr>
-              <a:t>Imagen 1</a:t>
-            </a:r>
-          </a:p>
-          <a:p>
-            <a:pPr>
-              <a:spcBef>
-                <a:spcPts val="200"/>
-              </a:spcBef>
-            </a:pPr>
-            <a:r>
-              <a:rPr sz="1300" b="0" i="0">
-                <a:solidFill>
-                  <a:srgbClr val="333333"/>
-                </a:solidFill>
-                <a:latin typeface="Calibri"/>
-              </a:rPr>
-              <a:t>Una pantalla del prototipo funcionando.</a:t>
-            </a:r>
-          </a:p>
-        </p:txBody>
-      </p:sp>
-      <p:sp>
-        <p:nvSpPr>
-          <p:cNvPr id="10" name="Rounded Rectangle 9"/>
-          <p:cNvSpPr/>
-          <p:nvPr/>
-        </p:nvSpPr>
-        <p:spPr>
-          <a:xfrm>
-            <a:off x="457200" y="2802636"/>
-            <a:ext cx="11277295" cy="1051560"/>
-          </a:xfrm>
-          <a:prstGeom prst="roundRect">
-            <a:avLst>
-              <a:gd name="adj" fmla="val 12000"/>
-            </a:avLst>
-          </a:prstGeom>
-          <a:solidFill>
-            <a:srgbClr val="E8F4FA"/>
-          </a:solidFill>
-          <a:ln>
-            <a:noFill/>
-          </a:ln>
-        </p:spPr>
-        <p:style>
-          <a:lnRef idx="1">
-            <a:schemeClr val="accent1"/>
-          </a:lnRef>
-          <a:fillRef idx="3">
-            <a:schemeClr val="accent1"/>
-          </a:fillRef>
-          <a:effectRef idx="2">
-            <a:schemeClr val="accent1"/>
-          </a:effectRef>
-          <a:fontRef idx="minor">
-            <a:schemeClr val="lt1"/>
-          </a:fontRef>
-        </p:style>
-        <p:txBody>
-          <a:bodyPr rtlCol="0" anchor="ctr"/>
-          <a:lstStyle/>
-          <a:p>
-            <a:pPr algn="ctr"/>
-          </a:p>
-        </p:txBody>
-      </p:sp>
-      <p:sp>
-        <p:nvSpPr>
-          <p:cNvPr id="11" name="Rounded Rectangle 10"/>
-          <p:cNvSpPr/>
-          <p:nvPr/>
-        </p:nvSpPr>
-        <p:spPr>
-          <a:xfrm>
-            <a:off x="594360" y="3108960"/>
-            <a:ext cx="438912" cy="438912"/>
-          </a:xfrm>
-          <a:prstGeom prst="roundRect">
-            <a:avLst>
-              <a:gd name="adj" fmla="val 12000"/>
-            </a:avLst>
-          </a:prstGeom>
-          <a:solidFill>
-            <a:srgbClr val="095292"/>
-          </a:solidFill>
-          <a:ln>
-            <a:noFill/>
-          </a:ln>
-        </p:spPr>
-        <p:style>
-          <a:lnRef idx="1">
-            <a:schemeClr val="accent1"/>
-          </a:lnRef>
-          <a:fillRef idx="3">
-            <a:schemeClr val="accent1"/>
-          </a:fillRef>
-          <a:effectRef idx="2">
-            <a:schemeClr val="accent1"/>
-          </a:effectRef>
-          <a:fontRef idx="minor">
-            <a:schemeClr val="lt1"/>
-          </a:fontRef>
-        </p:style>
-        <p:txBody>
-          <a:bodyPr rtlCol="0" anchor="ctr"/>
-          <a:lstStyle/>
-          <a:p>
-            <a:pPr algn="ctr"/>
-          </a:p>
-        </p:txBody>
-      </p:sp>
-      <p:sp>
-        <p:nvSpPr>
-          <p:cNvPr id="12" name="TextBox 11"/>
-          <p:cNvSpPr txBox="1"/>
-          <p:nvPr/>
-        </p:nvSpPr>
-        <p:spPr>
-          <a:xfrm>
-            <a:off x="594360" y="3108960"/>
-            <a:ext cx="438912" cy="438912"/>
-          </a:xfrm>
-          <a:prstGeom prst="rect">
-            <a:avLst/>
-          </a:prstGeom>
-          <a:noFill/>
-        </p:spPr>
-        <p:txBody>
-          <a:bodyPr wrap="square" anchor="ctr"/>
-          <a:lstStyle/>
-          <a:p>
-            <a:pPr algn="ctr"/>
-            <a:r>
-              <a:rPr sz="1600" b="1" i="0">
-                <a:solidFill>
-                  <a:srgbClr val="FFFFFF"/>
-                </a:solidFill>
-                <a:latin typeface="Calibri"/>
-              </a:rPr>
-              <a:t>2</a:t>
-            </a:r>
-          </a:p>
-        </p:txBody>
-      </p:sp>
-      <p:sp>
-        <p:nvSpPr>
-          <p:cNvPr id="13" name="TextBox 12"/>
-          <p:cNvSpPr txBox="1"/>
-          <p:nvPr/>
-        </p:nvSpPr>
-        <p:spPr>
-          <a:xfrm>
-            <a:off x="1188720" y="2894076"/>
-            <a:ext cx="10271455" cy="886968"/>
-          </a:xfrm>
-          <a:prstGeom prst="rect">
-            <a:avLst/>
-          </a:prstGeom>
-          <a:noFill/>
-        </p:spPr>
-        <p:txBody>
-          <a:bodyPr wrap="square" anchor="ctr"/>
-          <a:lstStyle/>
-          <a:p>
-            <a:r>
-              <a:rPr sz="1500" b="1" i="0">
-                <a:solidFill>
-                  <a:srgbClr val="095292"/>
-                </a:solidFill>
-                <a:latin typeface="Calibri"/>
-              </a:rPr>
-              <a:t>Imagen 2</a:t>
-            </a:r>
-          </a:p>
-          <a:p>
-            <a:pPr>
-              <a:spcBef>
-                <a:spcPts val="200"/>
-              </a:spcBef>
-            </a:pPr>
-            <a:r>
-              <a:rPr sz="1300" b="0" i="0">
-                <a:solidFill>
-                  <a:srgbClr val="333333"/>
-                </a:solidFill>
-                <a:latin typeface="Calibri"/>
-              </a:rPr>
-              <a:t>La matriz de impacto, o la diapositiva del problema con su cifra.</a:t>
-            </a:r>
-          </a:p>
-        </p:txBody>
-      </p:sp>
-      <p:sp>
-        <p:nvSpPr>
-          <p:cNvPr id="14" name="Rounded Rectangle 13"/>
-          <p:cNvSpPr/>
-          <p:nvPr/>
-        </p:nvSpPr>
-        <p:spPr>
-          <a:xfrm>
-            <a:off x="457200" y="3945636"/>
-            <a:ext cx="11277295" cy="1051560"/>
-          </a:xfrm>
-          <a:prstGeom prst="roundRect">
-            <a:avLst>
-              <a:gd name="adj" fmla="val 12000"/>
-            </a:avLst>
-          </a:prstGeom>
-          <a:solidFill>
-            <a:srgbClr val="F2F2F2"/>
-          </a:solidFill>
-          <a:ln>
-            <a:noFill/>
-          </a:ln>
-        </p:spPr>
-        <p:style>
-          <a:lnRef idx="1">
-            <a:schemeClr val="accent1"/>
-          </a:lnRef>
-          <a:fillRef idx="3">
-            <a:schemeClr val="accent1"/>
-          </a:fillRef>
-          <a:effectRef idx="2">
-            <a:schemeClr val="accent1"/>
-          </a:effectRef>
-          <a:fontRef idx="minor">
-            <a:schemeClr val="lt1"/>
-          </a:fontRef>
-        </p:style>
-        <p:txBody>
-          <a:bodyPr rtlCol="0" anchor="ctr"/>
-          <a:lstStyle/>
-          <a:p>
-            <a:pPr algn="ctr"/>
-          </a:p>
-        </p:txBody>
-      </p:sp>
-      <p:sp>
-        <p:nvSpPr>
-          <p:cNvPr id="15" name="Rounded Rectangle 14"/>
-          <p:cNvSpPr/>
-          <p:nvPr/>
-        </p:nvSpPr>
-        <p:spPr>
-          <a:xfrm>
-            <a:off x="594360" y="4251960"/>
-            <a:ext cx="438912" cy="438912"/>
-          </a:xfrm>
-          <a:prstGeom prst="roundRect">
-            <a:avLst>
-              <a:gd name="adj" fmla="val 12000"/>
-            </a:avLst>
-          </a:prstGeom>
-          <a:solidFill>
-            <a:srgbClr val="095292"/>
-          </a:solidFill>
-          <a:ln>
-            <a:noFill/>
-          </a:ln>
-        </p:spPr>
-        <p:style>
-          <a:lnRef idx="1">
-            <a:schemeClr val="accent1"/>
-          </a:lnRef>
-          <a:fillRef idx="3">
-            <a:schemeClr val="accent1"/>
-          </a:fillRef>
-          <a:effectRef idx="2">
-            <a:schemeClr val="accent1"/>
-          </a:effectRef>
-          <a:fontRef idx="minor">
-            <a:schemeClr val="lt1"/>
-          </a:fontRef>
-        </p:style>
-        <p:txBody>
-          <a:bodyPr rtlCol="0" anchor="ctr"/>
-          <a:lstStyle/>
-          <a:p>
-            <a:pPr algn="ctr"/>
-          </a:p>
-        </p:txBody>
-      </p:sp>
-      <p:sp>
-        <p:nvSpPr>
-          <p:cNvPr id="16" name="TextBox 15"/>
-          <p:cNvSpPr txBox="1"/>
-          <p:nvPr/>
-        </p:nvSpPr>
-        <p:spPr>
-          <a:xfrm>
-            <a:off x="594360" y="4251960"/>
-            <a:ext cx="438912" cy="438912"/>
-          </a:xfrm>
-          <a:prstGeom prst="rect">
-            <a:avLst/>
-          </a:prstGeom>
-          <a:noFill/>
-        </p:spPr>
-        <p:txBody>
-          <a:bodyPr wrap="square" anchor="ctr"/>
-          <a:lstStyle/>
-          <a:p>
-            <a:pPr algn="ctr"/>
-            <a:r>
-              <a:rPr sz="1600" b="1" i="0">
-                <a:solidFill>
-                  <a:srgbClr val="FFFFFF"/>
-                </a:solidFill>
-                <a:latin typeface="Calibri"/>
-              </a:rPr>
-              <a:t>3</a:t>
-            </a:r>
-          </a:p>
-        </p:txBody>
-      </p:sp>
-      <p:sp>
-        <p:nvSpPr>
-          <p:cNvPr id="17" name="TextBox 16"/>
-          <p:cNvSpPr txBox="1"/>
-          <p:nvPr/>
-        </p:nvSpPr>
-        <p:spPr>
-          <a:xfrm>
-            <a:off x="1188720" y="4037076"/>
-            <a:ext cx="10271455" cy="886968"/>
-          </a:xfrm>
-          <a:prstGeom prst="rect">
-            <a:avLst/>
-          </a:prstGeom>
-          <a:noFill/>
-        </p:spPr>
-        <p:txBody>
-          <a:bodyPr wrap="square" anchor="ctr"/>
-          <a:lstStyle/>
-          <a:p>
-            <a:r>
-              <a:rPr sz="1500" b="1" i="0">
-                <a:solidFill>
-                  <a:srgbClr val="095292"/>
-                </a:solidFill>
-                <a:latin typeface="Calibri"/>
-              </a:rPr>
-              <a:t>Cinco líneas</a:t>
-            </a:r>
-          </a:p>
-          <a:p>
-            <a:pPr>
-              <a:spcBef>
-                <a:spcPts val="200"/>
-              </a:spcBef>
-            </a:pPr>
-            <a:r>
-              <a:rPr sz="1300" b="0" i="0">
-                <a:solidFill>
-                  <a:srgbClr val="333333"/>
-                </a:solidFill>
-                <a:latin typeface="Calibri"/>
-              </a:rPr>
-              <a:t>Problema · decisión · un hallazgo · un número de impacto · siguiente paso.</a:t>
-            </a:r>
-          </a:p>
-        </p:txBody>
-      </p:sp>
-      <p:sp>
-        <p:nvSpPr>
-          <p:cNvPr id="18" name="Rounded Rectangle 17"/>
-          <p:cNvSpPr/>
-          <p:nvPr/>
-        </p:nvSpPr>
-        <p:spPr>
-          <a:xfrm>
-            <a:off x="457200" y="5088636"/>
-            <a:ext cx="11277295" cy="1051560"/>
-          </a:xfrm>
-          <a:prstGeom prst="roundRect">
-            <a:avLst>
-              <a:gd name="adj" fmla="val 12000"/>
-            </a:avLst>
-          </a:prstGeom>
-          <a:solidFill>
-            <a:srgbClr val="E8F4FA"/>
-          </a:solidFill>
-          <a:ln>
-            <a:noFill/>
-          </a:ln>
-        </p:spPr>
-        <p:style>
-          <a:lnRef idx="1">
-            <a:schemeClr val="accent1"/>
-          </a:lnRef>
-          <a:fillRef idx="3">
-            <a:schemeClr val="accent1"/>
-          </a:fillRef>
-          <a:effectRef idx="2">
-            <a:schemeClr val="accent1"/>
-          </a:effectRef>
-          <a:fontRef idx="minor">
-            <a:schemeClr val="lt1"/>
-          </a:fontRef>
-        </p:style>
-        <p:txBody>
-          <a:bodyPr rtlCol="0" anchor="ctr"/>
-          <a:lstStyle/>
-          <a:p>
-            <a:pPr algn="ctr"/>
-          </a:p>
-        </p:txBody>
-      </p:sp>
-      <p:sp>
-        <p:nvSpPr>
-          <p:cNvPr id="19" name="Rounded Rectangle 18"/>
-          <p:cNvSpPr/>
-          <p:nvPr/>
-        </p:nvSpPr>
-        <p:spPr>
-          <a:xfrm>
-            <a:off x="594360" y="5394960"/>
-            <a:ext cx="438912" cy="438912"/>
-          </a:xfrm>
-          <a:prstGeom prst="roundRect">
-            <a:avLst>
-              <a:gd name="adj" fmla="val 12000"/>
-            </a:avLst>
-          </a:prstGeom>
-          <a:solidFill>
-            <a:srgbClr val="095292"/>
-          </a:solidFill>
-          <a:ln>
-            <a:noFill/>
-          </a:ln>
-        </p:spPr>
-        <p:style>
-          <a:lnRef idx="1">
-            <a:schemeClr val="accent1"/>
-          </a:lnRef>
-          <a:fillRef idx="3">
-            <a:schemeClr val="accent1"/>
-          </a:fillRef>
-          <a:effectRef idx="2">
-            <a:schemeClr val="accent1"/>
-          </a:effectRef>
-          <a:fontRef idx="minor">
-            <a:schemeClr val="lt1"/>
-          </a:fontRef>
-        </p:style>
-        <p:txBody>
-          <a:bodyPr rtlCol="0" anchor="ctr"/>
-          <a:lstStyle/>
-          <a:p>
-            <a:pPr algn="ctr"/>
-          </a:p>
-        </p:txBody>
-      </p:sp>
-      <p:sp>
-        <p:nvSpPr>
-          <p:cNvPr id="20" name="TextBox 19"/>
-          <p:cNvSpPr txBox="1"/>
-          <p:nvPr/>
-        </p:nvSpPr>
-        <p:spPr>
-          <a:xfrm>
-            <a:off x="594360" y="5394960"/>
-            <a:ext cx="438912" cy="438912"/>
-          </a:xfrm>
-          <a:prstGeom prst="rect">
-            <a:avLst/>
-          </a:prstGeom>
-          <a:noFill/>
-        </p:spPr>
-        <p:txBody>
-          <a:bodyPr wrap="square" anchor="ctr"/>
-          <a:lstStyle/>
-          <a:p>
-            <a:pPr algn="ctr"/>
-            <a:r>
-              <a:rPr sz="1600" b="1" i="0">
-                <a:solidFill>
-                  <a:srgbClr val="FFFFFF"/>
-                </a:solidFill>
-                <a:latin typeface="Calibri"/>
-              </a:rPr>
-              <a:t>4</a:t>
-            </a:r>
-          </a:p>
-        </p:txBody>
-      </p:sp>
-      <p:sp>
-        <p:nvSpPr>
-          <p:cNvPr id="21" name="TextBox 20"/>
-          <p:cNvSpPr txBox="1"/>
-          <p:nvPr/>
-        </p:nvSpPr>
-        <p:spPr>
-          <a:xfrm>
-            <a:off x="1188720" y="5180076"/>
-            <a:ext cx="10271455" cy="886968"/>
-          </a:xfrm>
-          <a:prstGeom prst="rect">
-            <a:avLst/>
-          </a:prstGeom>
-          <a:noFill/>
-        </p:spPr>
-        <p:txBody>
-          <a:bodyPr wrap="square" anchor="ctr"/>
-          <a:lstStyle/>
-          <a:p>
-            <a:r>
-              <a:rPr sz="1500" b="1" i="0">
-                <a:solidFill>
-                  <a:srgbClr val="095292"/>
-                </a:solidFill>
-                <a:latin typeface="Calibri"/>
-              </a:rPr>
-              <a:t>Recorrido libre</a:t>
-            </a:r>
-          </a:p>
-          <a:p>
-            <a:pPr>
-              <a:spcBef>
-                <a:spcPts val="200"/>
-              </a:spcBef>
-            </a:pPr>
-            <a:r>
-              <a:rPr sz="1300" b="0" i="0">
-                <a:solidFill>
-                  <a:srgbClr val="333333"/>
-                </a:solidFill>
-                <a:latin typeface="Calibri"/>
-              </a:rPr>
-              <a:t>Cada estudiante comenta en la columna de otro equipo.</a:t>
-            </a:r>
-          </a:p>
-        </p:txBody>
-      </p:sp>
-      <p:sp>
-        <p:nvSpPr>
-          <p:cNvPr id="22" name="TextBox 21"/>
-          <p:cNvSpPr txBox="1"/>
-          <p:nvPr/>
-        </p:nvSpPr>
-        <p:spPr>
-          <a:xfrm>
-            <a:off x="11185855" y="6473952"/>
-            <a:ext cx="640080" cy="274320"/>
-          </a:xfrm>
-          <a:prstGeom prst="rect">
-            <a:avLst/>
-          </a:prstGeom>
-          <a:noFill/>
-        </p:spPr>
-        <p:txBody>
-          <a:bodyPr wrap="square">
-            <a:spAutoFit/>
-          </a:bodyPr>
-          <a:lstStyle/>
-          <a:p>
-            <a:pPr algn="r"/>
-            <a:r>
-              <a:rPr sz="1100" b="0" i="0">
-                <a:solidFill>
-                  <a:srgbClr val="666666"/>
-                </a:solidFill>
-                <a:latin typeface="Calibri"/>
-              </a:rPr>
-              <a:t>13</a:t>
-            </a:r>
-          </a:p>
-        </p:txBody>
-      </p:sp>
-    </p:spTree>
-  </p:cSld>
-  <p:clrMapOvr>
-    <a:masterClrMapping/>
-  </p:clrMapOvr>
-</p:sld>
-</file>
-
-<file path=ppt/slides/slide14.xml><?xml version="1.0" encoding="utf-8"?>
-<p:sld xmlns:a="http://schemas.openxmlformats.org/drawingml/2006/main" xmlns:p="http://schemas.openxmlformats.org/presentationml/2006/main" xmlns:r="http://schemas.openxmlformats.org/officeDocument/2006/relationships">
-  <p:cSld>
-    <p:bg>
-      <p:bgPr>
-        <a:solidFill>
-          <a:srgbClr val="FFFFFF"/>
-        </a:solidFill>
-        <a:effectLst/>
-      </p:bgPr>
-    </p:bg>
-    <p:spTree>
-      <p:nvGrpSpPr>
-        <p:cNvPr id="1" name=""/>
-        <p:cNvGrpSpPr/>
-        <p:nvPr/>
-      </p:nvGrpSpPr>
-      <p:grpSpPr/>
-      <p:sp>
-        <p:nvSpPr>
-          <p:cNvPr id="2" name="Rectangle 1"/>
-          <p:cNvSpPr/>
-          <p:nvPr/>
-        </p:nvSpPr>
-        <p:spPr>
-          <a:xfrm>
-            <a:off x="0" y="0"/>
-            <a:ext cx="12191695" cy="960120"/>
-          </a:xfrm>
-          <a:prstGeom prst="rect">
-            <a:avLst/>
-          </a:prstGeom>
-          <a:solidFill>
-            <a:srgbClr val="095292"/>
-          </a:solidFill>
-          <a:ln>
-            <a:noFill/>
-          </a:ln>
-        </p:spPr>
-        <p:style>
-          <a:lnRef idx="1">
-            <a:schemeClr val="accent1"/>
-          </a:lnRef>
-          <a:fillRef idx="3">
-            <a:schemeClr val="accent1"/>
-          </a:fillRef>
-          <a:effectRef idx="2">
-            <a:schemeClr val="accent1"/>
-          </a:effectRef>
-          <a:fontRef idx="minor">
-            <a:schemeClr val="lt1"/>
-          </a:fontRef>
-        </p:style>
-        <p:txBody>
-          <a:bodyPr rtlCol="0" anchor="ctr"/>
-          <a:lstStyle/>
-          <a:p>
-            <a:pPr algn="ctr"/>
-          </a:p>
-        </p:txBody>
-      </p:sp>
-      <p:sp>
-        <p:nvSpPr>
-          <p:cNvPr id="3" name="Rectangle 2"/>
-          <p:cNvSpPr/>
-          <p:nvPr/>
-        </p:nvSpPr>
-        <p:spPr>
-          <a:xfrm>
-            <a:off x="0" y="960120"/>
-            <a:ext cx="12191695" cy="41148"/>
-          </a:xfrm>
-          <a:prstGeom prst="rect">
-            <a:avLst/>
-          </a:prstGeom>
-          <a:solidFill>
-            <a:srgbClr val="FFD000"/>
-          </a:solidFill>
-          <a:ln>
-            <a:noFill/>
-          </a:ln>
-        </p:spPr>
-        <p:style>
-          <a:lnRef idx="1">
-            <a:schemeClr val="accent1"/>
-          </a:lnRef>
-          <a:fillRef idx="3">
-            <a:schemeClr val="accent1"/>
-          </a:fillRef>
-          <a:effectRef idx="2">
-            <a:schemeClr val="accent1"/>
-          </a:effectRef>
-          <a:fontRef idx="minor">
-            <a:schemeClr val="lt1"/>
-          </a:fontRef>
-        </p:style>
-        <p:txBody>
-          <a:bodyPr rtlCol="0" anchor="ctr"/>
-          <a:lstStyle/>
-          <a:p>
-            <a:pPr algn="ctr"/>
-          </a:p>
-        </p:txBody>
-      </p:sp>
-      <p:sp>
-        <p:nvSpPr>
-          <p:cNvPr id="4" name="TextBox 3"/>
-          <p:cNvSpPr txBox="1"/>
-          <p:nvPr/>
-        </p:nvSpPr>
-        <p:spPr>
-          <a:xfrm>
-            <a:off x="457200" y="164592"/>
-            <a:ext cx="11277295" cy="502920"/>
-          </a:xfrm>
-          <a:prstGeom prst="rect">
-            <a:avLst/>
-          </a:prstGeom>
-          <a:noFill/>
-        </p:spPr>
-        <p:txBody>
-          <a:bodyPr wrap="square">
-            <a:spAutoFit/>
-          </a:bodyPr>
-          <a:lstStyle/>
-          <a:p>
-            <a:r>
-              <a:rPr sz="2600" b="1" i="0">
-                <a:solidFill>
-                  <a:srgbClr val="FFFFFF"/>
-                </a:solidFill>
-                <a:latin typeface="Calibri"/>
-              </a:rPr>
-              <a:t>Cierre del curso</a:t>
-            </a:r>
-          </a:p>
-        </p:txBody>
-      </p:sp>
-      <p:sp>
-        <p:nvSpPr>
-          <p:cNvPr id="5" name="TextBox 4"/>
-          <p:cNvSpPr txBox="1"/>
-          <p:nvPr/>
-        </p:nvSpPr>
-        <p:spPr>
-          <a:xfrm>
-            <a:off x="457200" y="1170432"/>
-            <a:ext cx="11277295" cy="5230368"/>
-          </a:xfrm>
-          <a:prstGeom prst="rect">
-            <a:avLst/>
-          </a:prstGeom>
-          <a:noFill/>
-        </p:spPr>
-        <p:txBody>
-          <a:bodyPr wrap="square">
-            <a:spAutoFit/>
-          </a:bodyPr>
-          <a:lstStyle/>
-          <a:p>
-            <a:pPr>
-              <a:spcAft>
-                <a:spcPts val="800"/>
-              </a:spcAft>
-            </a:pPr>
-            <a:r>
-              <a:rPr sz="2000" b="0" i="0">
-                <a:solidFill>
-                  <a:srgbClr val="333333"/>
-                </a:solidFill>
-                <a:latin typeface="Calibri"/>
-              </a:rPr>
-              <a:t>–   </a:t>
-            </a:r>
-            <a:r>
-              <a:rPr sz="2000" b="1" i="0">
-                <a:solidFill>
-                  <a:srgbClr val="333333"/>
-                </a:solidFill>
-                <a:latin typeface="Calibri"/>
-              </a:rPr>
-              <a:t>Lo que queda entregado:</a:t>
-            </a:r>
-            <a:r>
-              <a:rPr sz="2000" b="0" i="0">
-                <a:solidFill>
-                  <a:srgbClr val="333333"/>
-                </a:solidFill>
-                <a:latin typeface="Calibri"/>
-              </a:rPr>
-              <a:t> el </a:t>
-            </a:r>
-            <a:r>
-              <a:rPr sz="2000" b="1" i="0">
-                <a:solidFill>
-                  <a:srgbClr val="333333"/>
-                </a:solidFill>
-                <a:latin typeface="Calibri"/>
-              </a:rPr>
-              <a:t>informe final</a:t>
-            </a:r>
-            <a:r>
-              <a:rPr sz="2000" b="0" i="0">
-                <a:solidFill>
-                  <a:srgbClr val="333333"/>
-                </a:solidFill>
-                <a:latin typeface="Calibri"/>
-              </a:rPr>
-              <a:t> con sus doce secciones (20 %), la </a:t>
-            </a:r>
-            <a:r>
-              <a:rPr sz="2000" b="1" i="0">
-                <a:solidFill>
-                  <a:srgbClr val="333333"/>
-                </a:solidFill>
-                <a:latin typeface="Calibri"/>
-              </a:rPr>
-              <a:t>exposición final</a:t>
-            </a:r>
-            <a:r>
-              <a:rPr sz="2000" b="0" i="0">
-                <a:solidFill>
-                  <a:srgbClr val="333333"/>
-                </a:solidFill>
-                <a:latin typeface="Calibri"/>
-              </a:rPr>
-              <a:t> de la Clase 15 (15 %), el prototipo probado con personas reales y la galería del curso.</a:t>
-            </a:r>
-          </a:p>
-          <a:p>
-            <a:pPr>
-              <a:spcAft>
-                <a:spcPts val="800"/>
-              </a:spcAft>
-            </a:pPr>
-            <a:r>
-              <a:rPr sz="2000" b="0" i="0">
-                <a:solidFill>
-                  <a:srgbClr val="333333"/>
-                </a:solidFill>
-                <a:latin typeface="Calibri"/>
-              </a:rPr>
-              <a:t>–   </a:t>
-            </a:r>
-            <a:r>
-              <a:rPr sz="2000" b="1" i="0">
-                <a:solidFill>
-                  <a:srgbClr val="333333"/>
-                </a:solidFill>
-                <a:latin typeface="Calibri"/>
-              </a:rPr>
-              <a:t>Autoevaluación:</a:t>
-            </a:r>
-            <a:r>
-              <a:rPr sz="2000" b="0" i="0">
-                <a:solidFill>
-                  <a:srgbClr val="333333"/>
-                </a:solidFill>
-                <a:latin typeface="Calibri"/>
-              </a:rPr>
-              <a:t> queda hecha, con evidencia y no con impresiones — junto con la coevaluación del equipo.</a:t>
-            </a:r>
-          </a:p>
-          <a:p>
-            <a:pPr>
-              <a:spcAft>
-                <a:spcPts val="800"/>
-              </a:spcAft>
-            </a:pPr>
-            <a:r>
-              <a:rPr sz="2000" b="0" i="0">
-                <a:solidFill>
-                  <a:srgbClr val="333333"/>
-                </a:solidFill>
-                <a:latin typeface="Calibri"/>
-              </a:rPr>
-              <a:t>–   </a:t>
-            </a:r>
-            <a:r>
-              <a:rPr sz="2000" b="1" i="0">
-                <a:solidFill>
-                  <a:srgbClr val="333333"/>
-                </a:solidFill>
-                <a:latin typeface="Calibri"/>
-              </a:rPr>
-              <a:t>Lo que se llevan es un método, no un tema: definir un problema con evidencia, revisar qué ya existe, decidir con criterios, probar con personas reales y mirar a quién afecta.</a:t>
-            </a:r>
-          </a:p>
-          <a:p>
-            <a:pPr>
-              <a:spcAft>
-                <a:spcPts val="800"/>
-              </a:spcAft>
-            </a:pPr>
-            <a:r>
-              <a:rPr sz="2000" b="0" i="0">
-                <a:solidFill>
-                  <a:srgbClr val="333333"/>
-                </a:solidFill>
-                <a:latin typeface="Calibri"/>
-              </a:rPr>
-              <a:t>–   </a:t>
-            </a:r>
-            <a:r>
-              <a:rPr sz="2000" b="1" i="0">
-                <a:solidFill>
-                  <a:srgbClr val="333333"/>
-                </a:solidFill>
-                <a:latin typeface="Calibri"/>
-              </a:rPr>
-              <a:t>Aviso:</a:t>
-            </a:r>
-            <a:r>
-              <a:rPr sz="2000" b="0" i="0">
-                <a:solidFill>
-                  <a:srgbClr val="333333"/>
-                </a:solidFill>
-                <a:latin typeface="Calibri"/>
-              </a:rPr>
-              <a:t> El informe y las capturas quedan en la carpeta del equipo: es un proyecto completo y documentado, hecho en primer semestre, y sirve para un portafolio. Y </a:t>
-            </a:r>
-            <a:r>
-              <a:rPr sz="2000" b="1" i="0">
-                <a:solidFill>
-                  <a:srgbClr val="333333"/>
-                </a:solidFill>
-                <a:latin typeface="Calibri"/>
-              </a:rPr>
-              <a:t>el siguiente paso de su proyecto está escrito en la sección 10</a:t>
-            </a:r>
-            <a:r>
-              <a:rPr sz="2000" b="0" i="0">
-                <a:solidFill>
-                  <a:srgbClr val="333333"/>
-                </a:solidFill>
-                <a:latin typeface="Calibri"/>
-              </a:rPr>
-              <a:t> — quien quiera continuarlo ya no tiene que decidir por dónde empezar.</a:t>
-            </a:r>
-          </a:p>
-        </p:txBody>
-      </p:sp>
-      <p:sp>
-        <p:nvSpPr>
-          <p:cNvPr id="6" name="TextBox 5"/>
-          <p:cNvSpPr txBox="1"/>
-          <p:nvPr/>
-        </p:nvSpPr>
-        <p:spPr>
-          <a:xfrm>
-            <a:off x="11185855" y="6473952"/>
-            <a:ext cx="640080" cy="274320"/>
-          </a:xfrm>
-          <a:prstGeom prst="rect">
-            <a:avLst/>
-          </a:prstGeom>
-          <a:noFill/>
-        </p:spPr>
-        <p:txBody>
-          <a:bodyPr wrap="square">
-            <a:spAutoFit/>
-          </a:bodyPr>
-          <a:lstStyle/>
-          <a:p>
-            <a:pPr algn="r"/>
-            <a:r>
-              <a:rPr sz="1100" b="0" i="0">
-                <a:solidFill>
-                  <a:srgbClr val="666666"/>
-                </a:solidFill>
-                <a:latin typeface="Calibri"/>
-              </a:rPr>
-              <a:t>14</a:t>
-            </a:r>
-          </a:p>
-        </p:txBody>
-      </p:sp>
-    </p:spTree>
-  </p:cSld>
-  <p:clrMapOvr>
-    <a:masterClrMapping/>
-  </p:clrMapOvr>
-</p:sld>
-</file>
-
-<file path=ppt/slides/slide15.xml><?xml version="1.0" encoding="utf-8"?>
 <p:sld xmlns:a="http://schemas.openxmlformats.org/drawingml/2006/main" xmlns:p="http://schemas.openxmlformats.org/presentationml/2006/main" xmlns:r="http://schemas.openxmlformats.org/officeDocument/2006/relationships">
   <p:cSld>
     <p:bg>

--- a/Introduccion a la Ingenieria/Clases/Clase 16 - Socializacion y evaluacion final del curso/Presentacion.pptx
+++ b/Introduccion a la Ingenieria/Clases/Clase 16 - Socializacion y evaluacion final del curso/Presentacion.pptx
@@ -7129,7 +7129,7 @@
                 </a:solidFill>
                 <a:latin typeface="Calibri"/>
               </a:rPr>
-              <a:t>No hay examen final escrito en este curso.</a:t>
+              <a:t>Sesión de cierre del curso:</a:t>
             </a:r>
             <a:r>
               <a:rPr sz="1200" b="0" i="1">
@@ -7138,43 +7138,7 @@
                 </a:solidFill>
                 <a:latin typeface="Calibri"/>
               </a:rPr>
-              <a:t> El 40 % del corte 3 se reparte en exposición final 15 % (Clase 15) + </a:t>
-            </a:r>
-            <a:r>
-              <a:rPr sz="1200" b="1" i="1">
-                <a:solidFill>
-                  <a:srgbClr val="666666"/>
-                </a:solidFill>
-                <a:latin typeface="Calibri"/>
-              </a:rPr>
-              <a:t>informe final 20 % (hoy)</a:t>
-            </a:r>
-            <a:r>
-              <a:rPr sz="1200" b="0" i="1">
-                <a:solidFill>
-                  <a:srgbClr val="666666"/>
-                </a:solidFill>
-                <a:latin typeface="Calibri"/>
-              </a:rPr>
-              <a:t> + asistencia 5 %. El informe </a:t>
-            </a:r>
-            <a:r>
-              <a:rPr sz="1200" b="1" i="1">
-                <a:solidFill>
-                  <a:srgbClr val="666666"/>
-                </a:solidFill>
-                <a:latin typeface="Calibri"/>
-              </a:rPr>
-              <a:t>se entrega dentro de la clase</a:t>
-            </a:r>
-            <a:r>
-              <a:rPr sz="1200" b="0" i="1">
-                <a:solidFill>
-                  <a:srgbClr val="666666"/>
-                </a:solidFill>
-                <a:latin typeface="Calibri"/>
-              </a:rPr>
-              <a:t>: se arma, se revisa con la lista de verificación y se sube antes de terminar la sesión.</a:t>
+              <a:t> se arma y se revisa el informe final con la lista de verificación, se socializa el trabajo y se hace la autoevaluación.</a:t>
             </a:r>
           </a:p>
         </p:txBody>

--- a/Introduccion a la Ingenieria/Clases/Clase 16 - Socializacion y evaluacion final del curso/Presentacion.pptx
+++ b/Introduccion a la Ingenieria/Clases/Clase 16 - Socializacion y evaluacion final del curso/Presentacion.pptx
@@ -5274,7 +5274,7 @@
                 </a:solidFill>
                 <a:latin typeface="Calibri"/>
               </a:rPr>
-              <a:t>, no al muro y no al equipo. Y ponerse la nota máxima sin evidencia baja el puntaje: lo que se evalúa aquí es </a:t>
+              <a:t>, no al muro y no al equipo. Y darse el máximo sin evidencia es justo lo contrario: lo que importa aquí es </a:t>
             </a:r>
             <a:r>
               <a:rPr sz="1400" b="1" i="0">
@@ -6476,7 +6476,7 @@
                 </a:solidFill>
                 <a:latin typeface="Calibri"/>
               </a:rPr>
-              <a:t>Última sesión. No hay evaluación escrita: lo que se califica hoy es el informe final (20 %) y la autoevaluación</a:t>
+              <a:t>Última sesión: se cierra el informe final, se socializa el proyecto y se hace la autoevaluación</a:t>
             </a:r>
           </a:p>
         </p:txBody>
@@ -7376,25 +7376,7 @@
                 </a:solidFill>
                 <a:latin typeface="Calibri"/>
               </a:rPr>
-              <a:t> con sus doce secciones (</a:t>
-            </a:r>
-            <a:r>
-              <a:rPr sz="2000" b="1" i="0">
-                <a:solidFill>
-                  <a:srgbClr val="333333"/>
-                </a:solidFill>
-                <a:latin typeface="Calibri"/>
-              </a:rPr>
-              <a:t>20 %</a:t>
-            </a:r>
-            <a:r>
-              <a:rPr sz="2000" b="0" i="0">
-                <a:solidFill>
-                  <a:srgbClr val="333333"/>
-                </a:solidFill>
-                <a:latin typeface="Calibri"/>
-              </a:rPr>
-              <a:t>).</a:t>
+              <a:t> con sus doce secciones.</a:t>
             </a:r>
           </a:p>
           <a:p>
@@ -7735,7 +7717,7 @@
                 </a:solidFill>
                 <a:latin typeface="Calibri"/>
               </a:rPr>
-              <a:t>El informe final tiene doce secciones y vale el 20 %. ¿Cuántas de esas doce creen que van a escribir hoy desde cero?</a:t>
+              <a:t>El informe final tiene doce secciones. ¿Cuántas de esas doce creen que van a escribir hoy desde cero?</a:t>
             </a:r>
           </a:p>
         </p:txBody>
@@ -7971,7 +7953,7 @@
                 </a:solidFill>
                 <a:latin typeface="Calibri"/>
               </a:rPr>
-              <a:t>Qué lleva el informe final (20 %) · secciones 1 a 6</a:t>
+              <a:t>Qué lleva el informe final · secciones 1 a 6</a:t>
             </a:r>
           </a:p>
         </p:txBody>
@@ -8772,7 +8754,7 @@
                 </a:solidFill>
                 <a:latin typeface="Calibri"/>
               </a:rPr>
-              <a:t>Qué lleva el informe final (20 %) · secciones 7 a 12</a:t>
+              <a:t>Qué lleva el informe final · secciones 7 a 12</a:t>
             </a:r>
           </a:p>
         </p:txBody>
@@ -10767,7 +10749,7 @@
                 </a:solidFill>
                 <a:latin typeface="Calibri"/>
               </a:rPr>
-              <a:t>Cuatro cosas que bajan la nota del informe</a:t>
+              <a:t>Cuatro errores frecuentes del informe</a:t>
             </a:r>
           </a:p>
         </p:txBody>
@@ -10941,7 +10923,7 @@
                 </a:solidFill>
                 <a:latin typeface="Calibri"/>
               </a:rPr>
-              <a:t> al decidir, es que se reescribió de memoria en vez de tomar la matriz de la sesión 8. Se nota, y cuesta puntos.</a:t>
+              <a:t> al decidir, es que se reescribió de memoria en vez de tomar la matriz de la sesión 8. Se nota, y le resta credibilidad.</a:t>
             </a:r>
           </a:p>
         </p:txBody>
@@ -11747,7 +11729,7 @@
                 </a:solidFill>
                 <a:latin typeface="Calibri"/>
               </a:rPr>
-              <a:t>Sección 10 que baja la nota</a:t>
+              <a:t>Sección 10 vacía</a:t>
             </a:r>
           </a:p>
         </p:txBody>

--- a/Introduccion a la Ingenieria/Clases/Clase 16 - Socializacion y evaluacion final del curso/Presentacion.pptx
+++ b/Introduccion a la Ingenieria/Clases/Clase 16 - Socializacion y evaluacion final del curso/Presentacion.pptx
@@ -6050,9 +6050,57 @@
           </a:p>
         </p:txBody>
       </p:sp>
-      <p:sp>
-        <p:nvSpPr>
-          <p:cNvPr id="14" name="TextBox 13"/>
+      <p:pic>
+        <p:nvPicPr>
+          <p:cNvPr id="14" name="Picture 13" descr="sello_mal.png"/>
+          <p:cNvPicPr>
+            <a:picLocks noChangeAspect="1"/>
+          </p:cNvPicPr>
+          <p:nvPr/>
+        </p:nvPicPr>
+        <p:blipFill>
+          <a:blip r:embed="rId2"/>
+          <a:stretch>
+            <a:fillRect/>
+          </a:stretch>
+        </p:blipFill>
+        <p:spPr>
+          <a:xfrm>
+            <a:off x="566928" y="1527048"/>
+            <a:ext cx="393192" cy="393192"/>
+          </a:xfrm>
+          <a:prstGeom prst="rect">
+            <a:avLst/>
+          </a:prstGeom>
+        </p:spPr>
+      </p:pic>
+      <p:pic>
+        <p:nvPicPr>
+          <p:cNvPr id="15" name="Picture 14" descr="sello_bien.png"/>
+          <p:cNvPicPr>
+            <a:picLocks noChangeAspect="1"/>
+          </p:cNvPicPr>
+          <p:nvPr/>
+        </p:nvPicPr>
+        <p:blipFill>
+          <a:blip r:embed="rId3"/>
+          <a:stretch>
+            <a:fillRect/>
+          </a:stretch>
+        </p:blipFill>
+        <p:spPr>
+          <a:xfrm>
+            <a:off x="6365595" y="1527048"/>
+            <a:ext cx="393192" cy="393192"/>
+          </a:xfrm>
+          <a:prstGeom prst="rect">
+            <a:avLst/>
+          </a:prstGeom>
+        </p:spPr>
+      </p:pic>
+      <p:sp>
+        <p:nvSpPr>
+          <p:cNvPr id="16" name="TextBox 15"/>
           <p:cNvSpPr txBox="1"/>
           <p:nvPr/>
         </p:nvSpPr>
@@ -7326,14 +7374,118 @@
       </p:sp>
       <p:sp>
         <p:nvSpPr>
-          <p:cNvPr id="5" name="TextBox 4"/>
+          <p:cNvPr id="5" name="Rounded Rectangle 4"/>
+          <p:cNvSpPr/>
+          <p:nvPr/>
+        </p:nvSpPr>
+        <p:spPr>
+          <a:xfrm>
+            <a:off x="5797149" y="1573813"/>
+            <a:ext cx="6010497" cy="4057845"/>
+          </a:xfrm>
+          <a:prstGeom prst="roundRect">
+            <a:avLst>
+              <a:gd name="adj" fmla="val 4000"/>
+            </a:avLst>
+          </a:prstGeom>
+          <a:solidFill>
+            <a:srgbClr val="E8EEF4"/>
+          </a:solidFill>
+          <a:ln>
+            <a:noFill/>
+          </a:ln>
+        </p:spPr>
+        <p:style>
+          <a:lnRef idx="1">
+            <a:schemeClr val="accent1"/>
+          </a:lnRef>
+          <a:fillRef idx="3">
+            <a:schemeClr val="accent1"/>
+          </a:fillRef>
+          <a:effectRef idx="2">
+            <a:schemeClr val="accent1"/>
+          </a:effectRef>
+          <a:fontRef idx="minor">
+            <a:schemeClr val="lt1"/>
+          </a:fontRef>
+        </p:style>
+        <p:txBody>
+          <a:bodyPr rtlCol="0" anchor="ctr"/>
+          <a:lstStyle/>
+          <a:p>
+            <a:pPr algn="ctr"/>
+          </a:p>
+        </p:txBody>
+      </p:sp>
+      <p:pic>
+        <p:nvPicPr>
+          <p:cNvPr id="6" name="Picture 5" descr="students-learning-laptops-classroom.jpg"/>
+          <p:cNvPicPr>
+            <a:picLocks noChangeAspect="1"/>
+          </p:cNvPicPr>
+          <p:nvPr/>
+        </p:nvPicPr>
+        <p:blipFill>
+          <a:blip r:embed="rId2"/>
+          <a:stretch>
+            <a:fillRect/>
+          </a:stretch>
+        </p:blipFill>
+        <p:spPr>
+          <a:xfrm>
+            <a:off x="5870301" y="1646965"/>
+            <a:ext cx="5864193" cy="3911541"/>
+          </a:xfrm>
+          <a:prstGeom prst="rect">
+            <a:avLst/>
+          </a:prstGeom>
+        </p:spPr>
+      </p:pic>
+      <p:sp>
+        <p:nvSpPr>
+          <p:cNvPr id="7" name="TextBox 6"/>
           <p:cNvSpPr txBox="1"/>
           <p:nvPr/>
         </p:nvSpPr>
         <p:spPr>
           <a:xfrm>
-            <a:off x="457200" y="1170432"/>
-            <a:ext cx="11277295" cy="5230368"/>
+            <a:off x="5870301" y="5961888"/>
+            <a:ext cx="5864193" cy="320040"/>
+          </a:xfrm>
+          <a:prstGeom prst="rect">
+            <a:avLst/>
+          </a:prstGeom>
+          <a:noFill/>
+        </p:spPr>
+        <p:txBody>
+          <a:bodyPr wrap="square">
+            <a:spAutoFit/>
+          </a:bodyPr>
+          <a:lstStyle/>
+          <a:p>
+            <a:pPr algn="ctr"/>
+            <a:r>
+              <a:rPr sz="1100" b="0" i="1">
+                <a:solidFill>
+                  <a:srgbClr val="666666"/>
+                </a:solidFill>
+                <a:latin typeface="Calibri"/>
+              </a:rPr>
+              <a:t>Foto: Mikhail Nilov · Pexels</a:t>
+            </a:r>
+          </a:p>
+        </p:txBody>
+      </p:sp>
+      <p:sp>
+        <p:nvSpPr>
+          <p:cNvPr id="8" name="TextBox 7"/>
+          <p:cNvSpPr txBox="1"/>
+          <p:nvPr/>
+        </p:nvSpPr>
+        <p:spPr>
+          <a:xfrm>
+            <a:off x="457200" y="1353312"/>
+            <a:ext cx="5093061" cy="5047488"/>
           </a:xfrm>
           <a:prstGeom prst="rect">
             <a:avLst/>
@@ -7485,7 +7637,7 @@
       </p:sp>
       <p:sp>
         <p:nvSpPr>
-          <p:cNvPr id="6" name="TextBox 5"/>
+          <p:cNvPr id="9" name="TextBox 8"/>
           <p:cNvSpPr txBox="1"/>
           <p:nvPr/>
         </p:nvSpPr>
@@ -11981,9 +12133,57 @@
           </a:p>
         </p:txBody>
       </p:sp>
-      <p:sp>
-        <p:nvSpPr>
-          <p:cNvPr id="13" name="TextBox 12"/>
+      <p:pic>
+        <p:nvPicPr>
+          <p:cNvPr id="13" name="Picture 12" descr="sello_mal.png"/>
+          <p:cNvPicPr>
+            <a:picLocks noChangeAspect="1"/>
+          </p:cNvPicPr>
+          <p:nvPr/>
+        </p:nvPicPr>
+        <p:blipFill>
+          <a:blip r:embed="rId2"/>
+          <a:stretch>
+            <a:fillRect/>
+          </a:stretch>
+        </p:blipFill>
+        <p:spPr>
+          <a:xfrm>
+            <a:off x="566928" y="1316736"/>
+            <a:ext cx="393192" cy="393192"/>
+          </a:xfrm>
+          <a:prstGeom prst="rect">
+            <a:avLst/>
+          </a:prstGeom>
+        </p:spPr>
+      </p:pic>
+      <p:pic>
+        <p:nvPicPr>
+          <p:cNvPr id="14" name="Picture 13" descr="sello_bien.png"/>
+          <p:cNvPicPr>
+            <a:picLocks noChangeAspect="1"/>
+          </p:cNvPicPr>
+          <p:nvPr/>
+        </p:nvPicPr>
+        <p:blipFill>
+          <a:blip r:embed="rId3"/>
+          <a:stretch>
+            <a:fillRect/>
+          </a:stretch>
+        </p:blipFill>
+        <p:spPr>
+          <a:xfrm>
+            <a:off x="6365595" y="1316736"/>
+            <a:ext cx="393192" cy="393192"/>
+          </a:xfrm>
+          <a:prstGeom prst="rect">
+            <a:avLst/>
+          </a:prstGeom>
+        </p:spPr>
+      </p:pic>
+      <p:sp>
+        <p:nvSpPr>
+          <p:cNvPr id="15" name="TextBox 14"/>
           <p:cNvSpPr txBox="1"/>
           <p:nvPr/>
         </p:nvSpPr>

--- a/Introduccion a la Ingenieria/Clases/Clase 16 - Socializacion y evaluacion final del curso/Presentacion.pptx
+++ b/Introduccion a la Ingenieria/Clases/Clase 16 - Socializacion y evaluacion final del curso/Presentacion.pptx
@@ -7374,118 +7374,14 @@
       </p:sp>
       <p:sp>
         <p:nvSpPr>
-          <p:cNvPr id="5" name="Rounded Rectangle 4"/>
-          <p:cNvSpPr/>
-          <p:nvPr/>
-        </p:nvSpPr>
-        <p:spPr>
-          <a:xfrm>
-            <a:off x="5797149" y="1573813"/>
-            <a:ext cx="6010497" cy="4057845"/>
-          </a:xfrm>
-          <a:prstGeom prst="roundRect">
-            <a:avLst>
-              <a:gd name="adj" fmla="val 4000"/>
-            </a:avLst>
-          </a:prstGeom>
-          <a:solidFill>
-            <a:srgbClr val="E8EEF4"/>
-          </a:solidFill>
-          <a:ln>
-            <a:noFill/>
-          </a:ln>
-        </p:spPr>
-        <p:style>
-          <a:lnRef idx="1">
-            <a:schemeClr val="accent1"/>
-          </a:lnRef>
-          <a:fillRef idx="3">
-            <a:schemeClr val="accent1"/>
-          </a:fillRef>
-          <a:effectRef idx="2">
-            <a:schemeClr val="accent1"/>
-          </a:effectRef>
-          <a:fontRef idx="minor">
-            <a:schemeClr val="lt1"/>
-          </a:fontRef>
-        </p:style>
-        <p:txBody>
-          <a:bodyPr rtlCol="0" anchor="ctr"/>
-          <a:lstStyle/>
-          <a:p>
-            <a:pPr algn="ctr"/>
-          </a:p>
-        </p:txBody>
-      </p:sp>
-      <p:pic>
-        <p:nvPicPr>
-          <p:cNvPr id="6" name="Picture 5" descr="students-learning-laptops-classroom.jpg"/>
-          <p:cNvPicPr>
-            <a:picLocks noChangeAspect="1"/>
-          </p:cNvPicPr>
-          <p:nvPr/>
-        </p:nvPicPr>
-        <p:blipFill>
-          <a:blip r:embed="rId2"/>
-          <a:stretch>
-            <a:fillRect/>
-          </a:stretch>
-        </p:blipFill>
-        <p:spPr>
-          <a:xfrm>
-            <a:off x="5870301" y="1646965"/>
-            <a:ext cx="5864193" cy="3911541"/>
-          </a:xfrm>
-          <a:prstGeom prst="rect">
-            <a:avLst/>
-          </a:prstGeom>
-        </p:spPr>
-      </p:pic>
-      <p:sp>
-        <p:nvSpPr>
-          <p:cNvPr id="7" name="TextBox 6"/>
+          <p:cNvPr id="5" name="TextBox 4"/>
           <p:cNvSpPr txBox="1"/>
           <p:nvPr/>
         </p:nvSpPr>
         <p:spPr>
           <a:xfrm>
-            <a:off x="5870301" y="5961888"/>
-            <a:ext cx="5864193" cy="320040"/>
-          </a:xfrm>
-          <a:prstGeom prst="rect">
-            <a:avLst/>
-          </a:prstGeom>
-          <a:noFill/>
-        </p:spPr>
-        <p:txBody>
-          <a:bodyPr wrap="square">
-            <a:spAutoFit/>
-          </a:bodyPr>
-          <a:lstStyle/>
-          <a:p>
-            <a:pPr algn="ctr"/>
-            <a:r>
-              <a:rPr sz="1100" b="0" i="1">
-                <a:solidFill>
-                  <a:srgbClr val="666666"/>
-                </a:solidFill>
-                <a:latin typeface="Calibri"/>
-              </a:rPr>
-              <a:t>Foto: Mikhail Nilov · Pexels</a:t>
-            </a:r>
-          </a:p>
-        </p:txBody>
-      </p:sp>
-      <p:sp>
-        <p:nvSpPr>
-          <p:cNvPr id="8" name="TextBox 7"/>
-          <p:cNvSpPr txBox="1"/>
-          <p:nvPr/>
-        </p:nvSpPr>
-        <p:spPr>
-          <a:xfrm>
-            <a:off x="457200" y="1353312"/>
-            <a:ext cx="5093061" cy="5047488"/>
+            <a:off x="457200" y="1170432"/>
+            <a:ext cx="11277295" cy="5230368"/>
           </a:xfrm>
           <a:prstGeom prst="rect">
             <a:avLst/>
@@ -7637,7 +7533,7 @@
       </p:sp>
       <p:sp>
         <p:nvSpPr>
-          <p:cNvPr id="9" name="TextBox 8"/>
+          <p:cNvPr id="6" name="TextBox 5"/>
           <p:cNvSpPr txBox="1"/>
           <p:nvPr/>
         </p:nvSpPr>

--- a/Introduccion a la Ingenieria/Clases/Clase 16 - Socializacion y evaluacion final del curso/Presentacion.pptx
+++ b/Introduccion a la Ingenieria/Clases/Clase 16 - Socializacion y evaluacion final del curso/Presentacion.pptx
@@ -695,7 +695,7 @@
           <a:p/>
           <a:p>
             <a:r>
-              <a:t>El orden de armado importa y es contraintuitivo, así que hay que insistir: pegar primero, revisar después, y el resumen al final. El error que hace que no alcancen los veinticuatro minutos es empezar por el resumen —o peor, por la portada— porque el resumen exige tener todo lo demás decidido. Se escribe último aunque vaya primero. Esta regla es general para cualquier documento técnico y vale la pena nombrarla como tal.</a:t>
+              <a:t>El orden de armado importa y sorprende, así que hay que insistir: pegar primero, revisar después, y el resumen al final. El error que hace que no alcancen los veinticuatro minutos es empezar por el resumen —o peor, por la portada— porque el resumen exige tener todo lo demás decidido. Se escribe último aunque vaya primero. Esta regla es general para cualquier documento técnico y vale la pena nombrarla como tal.</a:t>
             </a:r>
           </a:p>
           <a:p/>
@@ -795,7 +795,7 @@
           <a:p/>
           <a:p>
             <a:r>
-              <a:t>El orden de armado importa y es contraintuitivo, así que hay que insistir: pegar primero, revisar después, y el resumen al final. El error que hace que no alcancen los veinticuatro minutos es empezar por el resumen —o peor, por la portada— porque el resumen exige tener todo lo demás decidido. Se escribe último aunque vaya primero. Esta regla es general para cualquier documento técnico y vale la pena nombrarla como tal.</a:t>
+              <a:t>El orden de armado importa y sorprende, así que hay que insistir: pegar primero, revisar después, y el resumen al final. El error que hace que no alcancen los veinticuatro minutos es empezar por el resumen —o peor, por la portada— porque el resumen exige tener todo lo demás decidido. Se escribe último aunque vaya primero. Esta regla es general para cualquier documento técnico y vale la pena nombrarla como tal.</a:t>
             </a:r>
           </a:p>
           <a:p/>
@@ -895,7 +895,7 @@
           <a:p/>
           <a:p>
             <a:r>
-              <a:t>El orden de armado importa y es contraintuitivo, así que hay que insistir: pegar primero, revisar después, y el resumen al final. El error que hace que no alcancen los veinticuatro minutos es empezar por el resumen —o peor, por la portada— porque el resumen exige tener todo lo demás decidido. Se escribe último aunque vaya primero. Esta regla es general para cualquier documento técnico y vale la pena nombrarla como tal.</a:t>
+              <a:t>El orden de armado importa y sorprende, así que hay que insistir: pegar primero, revisar después, y el resumen al final. El error que hace que no alcancen los veinticuatro minutos es empezar por el resumen —o peor, por la portada— porque el resumen exige tener todo lo demás decidido. Se escribe último aunque vaya primero. Esta regla es general para cualquier documento técnico y vale la pena nombrarla como tal.</a:t>
             </a:r>
           </a:p>
           <a:p/>
